--- a/static/brand/templates/pitch-deck.pptx
+++ b/static/brand/templates/pitch-deck.pptx
@@ -3110,14 +3110,81 @@
       <p:grpSpPr/>
       <p:sp>
         <p:nvSpPr>
-          <p:cNvPr id="2" name="TextBox 1"/>
+          <p:cNvPr id="2" name="Rectangle 1"/>
+          <p:cNvSpPr/>
+          <p:nvPr/>
+        </p:nvSpPr>
+        <p:spPr>
+          <a:xfrm>
+            <a:off x="548640" y="365760"/>
+            <a:ext cx="1737360" cy="1737360"/>
+          </a:xfrm>
+          <a:prstGeom prst="rect">
+            <a:avLst/>
+          </a:prstGeom>
+          <a:solidFill>
+            <a:srgbClr val="FFFFFF"/>
+          </a:solidFill>
+          <a:ln>
+            <a:noFill/>
+          </a:ln>
+        </p:spPr>
+        <p:style>
+          <a:lnRef idx="1">
+            <a:schemeClr val="accent1"/>
+          </a:lnRef>
+          <a:fillRef idx="3">
+            <a:schemeClr val="accent1"/>
+          </a:fillRef>
+          <a:effectRef idx="2">
+            <a:schemeClr val="accent1"/>
+          </a:effectRef>
+          <a:fontRef idx="minor">
+            <a:schemeClr val="lt1"/>
+          </a:fontRef>
+        </p:style>
+        <p:txBody>
+          <a:bodyPr rtlCol="0" anchor="ctr"/>
+          <a:lstStyle/>
+          <a:p>
+            <a:pPr algn="ctr"/>
+          </a:p>
+        </p:txBody>
+      </p:sp>
+      <p:pic>
+        <p:nvPicPr>
+          <p:cNvPr id="3" name="Company Logo" descr="LightSpeed Holdings logo"/>
+          <p:cNvPicPr>
+            <a:picLocks noChangeAspect="1"/>
+          </p:cNvPicPr>
+          <p:nvPr/>
+        </p:nvPicPr>
+        <p:blipFill>
+          <a:blip r:embed="rId2"/>
+          <a:stretch>
+            <a:fillRect/>
+          </a:stretch>
+        </p:blipFill>
+        <p:spPr>
+          <a:xfrm>
+            <a:off x="548640" y="365760"/>
+            <a:ext cx="1737360" cy="1737360"/>
+          </a:xfrm>
+          <a:prstGeom prst="rect">
+            <a:avLst/>
+          </a:prstGeom>
+        </p:spPr>
+      </p:pic>
+      <p:sp>
+        <p:nvSpPr>
+          <p:cNvPr id="4" name="TextBox 3"/>
           <p:cNvSpPr txBox="1"/>
           <p:nvPr/>
         </p:nvSpPr>
         <p:spPr>
           <a:xfrm>
-            <a:off x="914400" y="1645920"/>
-            <a:ext cx="7315200" cy="1097280"/>
+            <a:off x="914400" y="2331720"/>
+            <a:ext cx="7315200" cy="914400"/>
           </a:xfrm>
           <a:prstGeom prst="rect">
             <a:avLst/>
@@ -3139,20 +3206,26 @@
               </a:defRPr>
             </a:pPr>
             <a:r>
-              <a:t>LIGHTSPEED HOLDINGS LIMITED</a:t>
-            </a:r>
-          </a:p>
-        </p:txBody>
-      </p:sp>
-      <p:sp>
-        <p:nvSpPr>
-          <p:cNvPr id="3" name="TextBox 2"/>
+              <a:rPr sz="3600" b="1">
+                <a:solidFill>
+                  <a:srgbClr val="FFFFFF"/>
+                </a:solidFill>
+                <a:latin typeface="Arial"/>
+              </a:rPr>
+              <a:t>LIGHTSPEED HOLDINGS LIMITED™</a:t>
+            </a:r>
+          </a:p>
+        </p:txBody>
+      </p:sp>
+      <p:sp>
+        <p:nvSpPr>
+          <p:cNvPr id="5" name="TextBox 4"/>
           <p:cNvSpPr txBox="1"/>
           <p:nvPr/>
         </p:nvSpPr>
         <p:spPr>
           <a:xfrm>
-            <a:off x="914400" y="2743200"/>
+            <a:off x="914400" y="3337560"/>
             <a:ext cx="7315200" cy="548640"/>
           </a:xfrm>
           <a:prstGeom prst="rect">
@@ -3167,7 +3240,7 @@
           <a:lstStyle/>
           <a:p>
             <a:pPr algn="ctr">
-              <a:defRPr sz="1800" b="0">
+              <a:defRPr sz="1800" b="1">
                 <a:solidFill>
                   <a:srgbClr val="00BFFF"/>
                 </a:solidFill>
@@ -3175,20 +3248,26 @@
               </a:defRPr>
             </a:pPr>
             <a:r>
-              <a:t>Aspire. Act. Achieve.</a:t>
-            </a:r>
-          </a:p>
-        </p:txBody>
-      </p:sp>
-      <p:sp>
-        <p:nvSpPr>
-          <p:cNvPr id="4" name="Rectangle 3"/>
+              <a:rPr sz="1800" b="1">
+                <a:solidFill>
+                  <a:srgbClr val="00BFFF"/>
+                </a:solidFill>
+                <a:latin typeface="Arial"/>
+              </a:rPr>
+              <a:t>ASPIRE. ACT. ACHIEVE.</a:t>
+            </a:r>
+          </a:p>
+        </p:txBody>
+      </p:sp>
+      <p:sp>
+        <p:nvSpPr>
+          <p:cNvPr id="6" name="Rectangle 5"/>
           <p:cNvSpPr/>
           <p:nvPr/>
         </p:nvSpPr>
         <p:spPr>
           <a:xfrm>
-            <a:off x="3200400" y="3383280"/>
+            <a:off x="3200400" y="3977639"/>
             <a:ext cx="2743200" cy="36576"/>
           </a:xfrm>
           <a:prstGeom prst="rect">
@@ -3225,13 +3304,13 @@
       </p:sp>
       <p:sp>
         <p:nvSpPr>
-          <p:cNvPr id="5" name="TextBox 4"/>
+          <p:cNvPr id="7" name="TextBox 6"/>
           <p:cNvSpPr txBox="1"/>
           <p:nvPr/>
         </p:nvSpPr>
         <p:spPr>
           <a:xfrm>
-            <a:off x="914400" y="3657600"/>
+            <a:off x="914400" y="4251960"/>
             <a:ext cx="7315200" cy="457200"/>
           </a:xfrm>
           <a:prstGeom prst="rect">
@@ -3254,6 +3333,12 @@
               </a:defRPr>
             </a:pPr>
             <a:r>
+              <a:rPr sz="1200" b="0">
+                <a:solidFill>
+                  <a:srgbClr val="9CA3AF"/>
+                </a:solidFill>
+                <a:latin typeface="Arial"/>
+              </a:rPr>
               <a:t>Confidential — August 2026</a:t>
             </a:r>
           </a:p>
@@ -3359,6 +3444,12 @@
               </a:defRPr>
             </a:pPr>
             <a:r>
+              <a:rPr sz="2800" b="1">
+                <a:solidFill>
+                  <a:srgbClr val="070A40"/>
+                </a:solidFill>
+                <a:latin typeface="Arial"/>
+              </a:rPr>
               <a:t>TEAM</a:t>
             </a:r>
           </a:p>
@@ -3398,6 +3489,12 @@
               </a:defRPr>
             </a:pPr>
             <a:r>
+              <a:rPr sz="1300">
+                <a:solidFill>
+                  <a:srgbClr val="070A40"/>
+                </a:solidFill>
+                <a:latin typeface="Arial"/>
+              </a:rPr>
               <a:t>Leadership:</a:t>
             </a:r>
           </a:p>
@@ -3414,7 +3511,13 @@
               </a:defRPr>
             </a:pPr>
             <a:r>
-              <a:t>  •  Jack Mlusu — Founder &amp; CEO — builder-operator; runs a 135-agent AI organization</a:t>
+              <a:rPr sz="1300">
+                <a:solidFill>
+                  <a:srgbClr val="070A40"/>
+                </a:solidFill>
+                <a:latin typeface="Arial"/>
+              </a:rPr>
+              <a:t>  •  Jack Mlusu — Founder &amp; CEO — builder-operator; runs an AI agent organization</a:t>
             </a:r>
           </a:p>
           <a:p>
@@ -3430,7 +3533,13 @@
               </a:defRPr>
             </a:pPr>
             <a:r>
-              <a:t>  •  AI Executive Cabinet — CTO, CFO, CMO, CLO, CSO, COO, CAIO (7 executives)</a:t>
+              <a:rPr sz="1300">
+                <a:solidFill>
+                  <a:srgbClr val="070A40"/>
+                </a:solidFill>
+                <a:latin typeface="Arial"/>
+              </a:rPr>
+              <a:t>  •  AI Executive Cabinet — CTO, CFO, CMO, CLO, CSO, COO, CAIO</a:t>
             </a:r>
           </a:p>
           <a:p>
@@ -3446,7 +3555,13 @@
               </a:defRPr>
             </a:pPr>
             <a:r>
-              <a:t>  •  Board of Directors — 7 standing committees (Strategy, Finance, Risk, Technology, Product, Customer, Governance)</a:t>
+              <a:rPr sz="1300">
+                <a:solidFill>
+                  <a:srgbClr val="070A40"/>
+                </a:solidFill>
+                <a:latin typeface="Arial"/>
+              </a:rPr>
+              <a:t>  •  Board of Directors — Standing committees (Strategy, Finance, Risk, Technology, Product, Customer, Governance)</a:t>
             </a:r>
           </a:p>
           <a:p>
@@ -3475,6 +3590,12 @@
               </a:defRPr>
             </a:pPr>
             <a:r>
+              <a:rPr sz="1300">
+                <a:solidFill>
+                  <a:srgbClr val="070A40"/>
+                </a:solidFill>
+                <a:latin typeface="Arial"/>
+              </a:rPr>
               <a:t>Advisors:</a:t>
             </a:r>
           </a:p>
@@ -3491,6 +3612,12 @@
               </a:defRPr>
             </a:pPr>
             <a:r>
+              <a:rPr sz="1300">
+                <a:solidFill>
+                  <a:srgbClr val="070A40"/>
+                </a:solidFill>
+                <a:latin typeface="Arial"/>
+              </a:rPr>
               <a:t>  •  Board Chair — governance &amp; escalation authority</a:t>
             </a:r>
           </a:p>
@@ -3507,6 +3634,12 @@
               </a:defRPr>
             </a:pPr>
             <a:r>
+              <a:rPr sz="1300">
+                <a:solidFill>
+                  <a:srgbClr val="070A40"/>
+                </a:solidFill>
+                <a:latin typeface="Arial"/>
+              </a:rPr>
               <a:t>  •  Corporate Constitution — 5-tier approval matrix, decision order, escalation SLAs</a:t>
             </a:r>
           </a:p>
@@ -3536,7 +3669,13 @@
               </a:defRPr>
             </a:pPr>
             <a:r>
-              <a:t>Hiring Plan (per 90-day Blueprint):</a:t>
+              <a:rPr sz="1300">
+                <a:solidFill>
+                  <a:srgbClr val="070A40"/>
+                </a:solidFill>
+                <a:latin typeface="Arial"/>
+              </a:rPr>
+              <a:t>Hiring Plan (per Blueprint):</a:t>
             </a:r>
           </a:p>
           <a:p>
@@ -3552,7 +3691,13 @@
               </a:defRPr>
             </a:pPr>
             <a:r>
-              <a:t>  •  Platform Licensing Sales Lead (Offer E) — Priority 1, breakout revenue line</a:t>
+              <a:rPr sz="1300">
+                <a:solidFill>
+                  <a:srgbClr val="070A40"/>
+                </a:solidFill>
+                <a:latin typeface="Arial"/>
+              </a:rPr>
+              <a:t>  •  Platform Licensing Sales Lead (Offer E) — Priority One, breakout revenue line</a:t>
             </a:r>
           </a:p>
           <a:p>
@@ -3568,6 +3713,12 @@
               </a:defRPr>
             </a:pPr>
             <a:r>
+              <a:rPr sz="1300">
+                <a:solidFill>
+                  <a:srgbClr val="070A40"/>
+                </a:solidFill>
+                <a:latin typeface="Arial"/>
+              </a:rPr>
               <a:t>  •  BPA/Chatbot Delivery Lead (Offer B) — NGO USD revenue</a:t>
             </a:r>
           </a:p>
@@ -3584,6 +3735,12 @@
               </a:defRPr>
             </a:pPr>
             <a:r>
+              <a:rPr sz="1300">
+                <a:solidFill>
+                  <a:srgbClr val="070A40"/>
+                </a:solidFill>
+                <a:latin typeface="Arial"/>
+              </a:rPr>
               <a:t>  •  Compliance Officer + DevRel Engineer — unblock Offer B/C &amp; developer adoption</a:t>
             </a:r>
           </a:p>
@@ -3689,6 +3846,12 @@
               </a:defRPr>
             </a:pPr>
             <a:r>
+              <a:rPr sz="2800" b="1">
+                <a:solidFill>
+                  <a:srgbClr val="070A40"/>
+                </a:solidFill>
+                <a:latin typeface="Arial"/>
+              </a:rPr>
               <a:t>FINANCIALS</a:t>
             </a:r>
           </a:p>
@@ -3728,7 +3891,13 @@
               </a:defRPr>
             </a:pPr>
             <a:r>
-              <a:t>Revenue Projections (targets, pending CFO validation):</a:t>
+              <a:rPr sz="1300">
+                <a:solidFill>
+                  <a:srgbClr val="070A40"/>
+                </a:solidFill>
+                <a:latin typeface="Arial"/>
+              </a:rPr>
+              <a:t>Revenue Projections (targets, pending validation):</a:t>
             </a:r>
           </a:p>
           <a:p>
@@ -3744,7 +3913,13 @@
               </a:defRPr>
             </a:pPr>
             <a:r>
-              <a:t>  •  Year 1:  $120K ARR (monthly revenue target $10K/mo)</a:t>
+              <a:rPr sz="1300">
+                <a:solidFill>
+                  <a:srgbClr val="070A40"/>
+                </a:solidFill>
+                <a:latin typeface="Arial"/>
+              </a:rPr>
+              <a:t>  •  Year One:  Early revenue traction</a:t>
             </a:r>
           </a:p>
           <a:p>
@@ -3760,7 +3935,13 @@
               </a:defRPr>
             </a:pPr>
             <a:r>
-              <a:t>  •  Year 2:  $300K ARR (recurring contracts + SaaS)</a:t>
+              <a:rPr sz="1300">
+                <a:solidFill>
+                  <a:srgbClr val="070A40"/>
+                </a:solidFill>
+                <a:latin typeface="Arial"/>
+              </a:rPr>
+              <a:t>  •  Year Two:  Recurring contracts + SaaS growth</a:t>
             </a:r>
           </a:p>
           <a:p>
@@ -3776,7 +3957,13 @@
               </a:defRPr>
             </a:pPr>
             <a:r>
-              <a:t>  •  Year 3:  $600K ARR (SaaS $49–$299/mo + managed workforce)</a:t>
+              <a:rPr sz="1300">
+                <a:solidFill>
+                  <a:srgbClr val="070A40"/>
+                </a:solidFill>
+                <a:latin typeface="Arial"/>
+              </a:rPr>
+              <a:t>  •  Year Three:  SaaS + managed workforce scale</a:t>
             </a:r>
           </a:p>
           <a:p>
@@ -3805,6 +3992,12 @@
               </a:defRPr>
             </a:pPr>
             <a:r>
+              <a:rPr sz="1300">
+                <a:solidFill>
+                  <a:srgbClr val="070A40"/>
+                </a:solidFill>
+                <a:latin typeface="Arial"/>
+              </a:rPr>
               <a:t>Key Assumptions:</a:t>
             </a:r>
           </a:p>
@@ -3821,7 +4014,13 @@
               </a:defRPr>
             </a:pPr>
             <a:r>
-              <a:t>  •  10–15% MoM revenue growth in ramp (target)</a:t>
+              <a:rPr sz="1300">
+                <a:solidFill>
+                  <a:srgbClr val="070A40"/>
+                </a:solidFill>
+                <a:latin typeface="Arial"/>
+              </a:rPr>
+              <a:t>  •  Month-over-month revenue growth in ramp</a:t>
             </a:r>
           </a:p>
           <a:p>
@@ -3837,7 +4036,13 @@
               </a:defRPr>
             </a:pPr>
             <a:r>
-              <a:t>  •  70%+ gross margin target; LLM cost ~15% of revenue at scale</a:t>
+              <a:rPr sz="1300">
+                <a:solidFill>
+                  <a:srgbClr val="070A40"/>
+                </a:solidFill>
+                <a:latin typeface="Arial"/>
+              </a:rPr>
+              <a:t>  •  Strong gross margin target; LLM cost controlled at scale</a:t>
             </a:r>
           </a:p>
           <a:p>
@@ -3853,7 +4058,13 @@
               </a:defRPr>
             </a:pPr>
             <a:r>
-              <a:t>  •  120% net retention target (per Mission success metrics)</a:t>
+              <a:rPr sz="1300">
+                <a:solidFill>
+                  <a:srgbClr val="070A40"/>
+                </a:solidFill>
+                <a:latin typeface="Arial"/>
+              </a:rPr>
+              <a:t>  •  Net retention target per Mission success metrics</a:t>
             </a:r>
           </a:p>
           <a:p>
@@ -3882,7 +4093,13 @@
               </a:defRPr>
             </a:pPr>
             <a:r>
-              <a:t>Use of Funds (First $500K — Corporate Blueprint §7):</a:t>
+              <a:rPr sz="1300">
+                <a:solidFill>
+                  <a:srgbClr val="070A40"/>
+                </a:solidFill>
+                <a:latin typeface="Arial"/>
+              </a:rPr>
+              <a:t>Use of Funds (per Corporate Blueprint):</a:t>
             </a:r>
           </a:p>
           <a:p>
@@ -3898,7 +4115,13 @@
               </a:defRPr>
             </a:pPr>
             <a:r>
-              <a:t>  •  40–50% — Talent (sales leads, compliance, DevRel)</a:t>
+              <a:rPr sz="1300">
+                <a:solidFill>
+                  <a:srgbClr val="070A40"/>
+                </a:solidFill>
+                <a:latin typeface="Arial"/>
+              </a:rPr>
+              <a:t>  •  Talent — Sales leads, compliance, DevRel</a:t>
             </a:r>
           </a:p>
           <a:p>
@@ -3914,7 +4137,13 @@
               </a:defRPr>
             </a:pPr>
             <a:r>
-              <a:t>  •  20–30% — Client Pilots (3× Offer A, 1× Offer B, 1× Offer C)</a:t>
+              <a:rPr sz="1300">
+                <a:solidFill>
+                  <a:srgbClr val="070A40"/>
+                </a:solidFill>
+                <a:latin typeface="Arial"/>
+              </a:rPr>
+              <a:t>  •  Client Pilots — Multiple offers across A–C</a:t>
             </a:r>
           </a:p>
           <a:p>
@@ -3930,7 +4159,13 @@
               </a:defRPr>
             </a:pPr>
             <a:r>
-              <a:t>  •  15–25% — Hardware Lab (on-prem GPU, offline-first proof)</a:t>
+              <a:rPr sz="1300">
+                <a:solidFill>
+                  <a:srgbClr val="070A40"/>
+                </a:solidFill>
+                <a:latin typeface="Arial"/>
+              </a:rPr>
+              <a:t>  •  Hardware Lab — On-prem GPU for offline-first proof; field kits</a:t>
             </a:r>
           </a:p>
           <a:p>
@@ -3946,7 +4181,13 @@
               </a:defRPr>
             </a:pPr>
             <a:r>
-              <a:t>  •  10–15% — Compliance &amp; Legal (Malawi DPA 2017, GDPR, SOC 2 prep)</a:t>
+              <a:rPr sz="1300">
+                <a:solidFill>
+                  <a:srgbClr val="070A40"/>
+                </a:solidFill>
+                <a:latin typeface="Arial"/>
+              </a:rPr>
+              <a:t>  •  Compliance &amp; Legal — Malawi DPA 2017, GDPR, SOC 2 prep</a:t>
             </a:r>
           </a:p>
           <a:p>
@@ -3962,7 +4203,13 @@
               </a:defRPr>
             </a:pPr>
             <a:r>
-              <a:t>  •  $50K — Emergency Reserve (CEO-only release)</a:t>
+              <a:rPr sz="1300">
+                <a:solidFill>
+                  <a:srgbClr val="070A40"/>
+                </a:solidFill>
+                <a:latin typeface="Arial"/>
+              </a:rPr>
+              <a:t>  •  Emergency Reserve — CEO-only release</a:t>
             </a:r>
           </a:p>
         </p:txBody>
@@ -3995,7 +4242,50 @@
       <p:grpSpPr/>
       <p:sp>
         <p:nvSpPr>
-          <p:cNvPr id="2" name="TextBox 1"/>
+          <p:cNvPr id="2" name="Rectangle 1"/>
+          <p:cNvSpPr/>
+          <p:nvPr/>
+        </p:nvSpPr>
+        <p:spPr>
+          <a:xfrm>
+            <a:off x="0" y="0"/>
+            <a:ext cx="137160" cy="6858000"/>
+          </a:xfrm>
+          <a:prstGeom prst="rect">
+            <a:avLst/>
+          </a:prstGeom>
+          <a:solidFill>
+            <a:srgbClr val="070A40"/>
+          </a:solidFill>
+          <a:ln>
+            <a:noFill/>
+          </a:ln>
+        </p:spPr>
+        <p:style>
+          <a:lnRef idx="1">
+            <a:schemeClr val="accent1"/>
+          </a:lnRef>
+          <a:fillRef idx="3">
+            <a:schemeClr val="accent1"/>
+          </a:fillRef>
+          <a:effectRef idx="2">
+            <a:schemeClr val="accent1"/>
+          </a:effectRef>
+          <a:fontRef idx="minor">
+            <a:schemeClr val="lt1"/>
+          </a:fontRef>
+        </p:style>
+        <p:txBody>
+          <a:bodyPr rtlCol="0" anchor="ctr"/>
+          <a:lstStyle/>
+          <a:p>
+            <a:pPr algn="ctr"/>
+          </a:p>
+        </p:txBody>
+      </p:sp>
+      <p:sp>
+        <p:nvSpPr>
+          <p:cNvPr id="3" name="TextBox 2"/>
           <p:cNvSpPr txBox="1"/>
           <p:nvPr/>
         </p:nvSpPr>
@@ -4024,6 +4314,12 @@
               </a:defRPr>
             </a:pPr>
             <a:r>
+              <a:rPr sz="3200" b="1">
+                <a:solidFill>
+                  <a:srgbClr val="FFFFFF"/>
+                </a:solidFill>
+                <a:latin typeface="Arial"/>
+              </a:rPr>
               <a:t>THE ASK</a:t>
             </a:r>
           </a:p>
@@ -4031,7 +4327,7 @@
       </p:sp>
       <p:sp>
         <p:nvSpPr>
-          <p:cNvPr id="3" name="Rectangle 2"/>
+          <p:cNvPr id="4" name="Rectangle 3"/>
           <p:cNvSpPr/>
           <p:nvPr/>
         </p:nvSpPr>
@@ -4074,7 +4370,7 @@
       </p:sp>
       <p:sp>
         <p:nvSpPr>
-          <p:cNvPr id="4" name="TextBox 3"/>
+          <p:cNvPr id="5" name="TextBox 4"/>
           <p:cNvSpPr txBox="1"/>
           <p:nvPr/>
         </p:nvSpPr>
@@ -4103,14 +4399,20 @@
               </a:defRPr>
             </a:pPr>
             <a:r>
-              <a:t>Raising $500K Seed</a:t>
-            </a:r>
-          </a:p>
-        </p:txBody>
-      </p:sp>
-      <p:sp>
-        <p:nvSpPr>
-          <p:cNvPr id="5" name="TextBox 4"/>
+              <a:rPr sz="2400" b="0">
+                <a:solidFill>
+                  <a:srgbClr val="00BFFF"/>
+                </a:solidFill>
+                <a:latin typeface="Arial"/>
+              </a:rPr>
+              <a:t>Raising Seed Capital</a:t>
+            </a:r>
+          </a:p>
+        </p:txBody>
+      </p:sp>
+      <p:sp>
+        <p:nvSpPr>
+          <p:cNvPr id="6" name="TextBox 5"/>
           <p:cNvSpPr txBox="1"/>
           <p:nvPr/>
         </p:nvSpPr>
@@ -4142,7 +4444,13 @@
               </a:defRPr>
             </a:pPr>
             <a:r>
-              <a:t>Use of Funds (aligned to Corporate Blueprint §7):</a:t>
+              <a:rPr sz="1400">
+                <a:solidFill>
+                  <a:srgbClr val="FFFFFF"/>
+                </a:solidFill>
+                <a:latin typeface="Arial"/>
+              </a:rPr>
+              <a:t>Use of Funds (aligned to Corporate Blueprint):</a:t>
             </a:r>
           </a:p>
           <a:p>
@@ -4158,6 +4466,12 @@
               </a:defRPr>
             </a:pPr>
             <a:r>
+              <a:rPr sz="1400">
+                <a:solidFill>
+                  <a:srgbClr val="FFFFFF"/>
+                </a:solidFill>
+                <a:latin typeface="Arial"/>
+              </a:rPr>
               <a:t>  •  Talent — Platform Licensing Sales Lead (Offer E), chatbot/compliance leads</a:t>
             </a:r>
           </a:p>
@@ -4174,7 +4488,13 @@
               </a:defRPr>
             </a:pPr>
             <a:r>
-              <a:t>  •  Client pilots — 3× Offer A, 1× Offer B, 1× Offer C (post governance gates)</a:t>
+              <a:rPr sz="1400">
+                <a:solidFill>
+                  <a:srgbClr val="FFFFFF"/>
+                </a:solidFill>
+                <a:latin typeface="Arial"/>
+              </a:rPr>
+              <a:t>  •  Client pilots — Multiple offers across A, B, C (post governance gates)</a:t>
             </a:r>
           </a:p>
           <a:p>
@@ -4190,7 +4510,13 @@
               </a:defRPr>
             </a:pPr>
             <a:r>
-              <a:t>  •  Hardware lab — on-prem GPU for offline-first proof; Malawi field kits</a:t>
+              <a:rPr sz="1400">
+                <a:solidFill>
+                  <a:srgbClr val="FFFFFF"/>
+                </a:solidFill>
+                <a:latin typeface="Arial"/>
+              </a:rPr>
+              <a:t>  •  Hardware lab — On-prem GPU for offline-first proof; field kits</a:t>
             </a:r>
           </a:p>
           <a:p>
@@ -4206,6 +4532,12 @@
               </a:defRPr>
             </a:pPr>
             <a:r>
+              <a:rPr sz="1400">
+                <a:solidFill>
+                  <a:srgbClr val="FFFFFF"/>
+                </a:solidFill>
+                <a:latin typeface="Arial"/>
+              </a:rPr>
               <a:t>  •  Compliance — Malawi DPA 2017, GDPR opinion, SOC 2 Type II readiness</a:t>
             </a:r>
           </a:p>
@@ -4235,6 +4567,12 @@
               </a:defRPr>
             </a:pPr>
             <a:r>
+              <a:rPr sz="1400">
+                <a:solidFill>
+                  <a:srgbClr val="FFFFFF"/>
+                </a:solidFill>
+                <a:latin typeface="Arial"/>
+              </a:rPr>
               <a:t>Milestones with this raise:</a:t>
             </a:r>
           </a:p>
@@ -4251,7 +4589,13 @@
               </a:defRPr>
             </a:pPr>
             <a:r>
-              <a:t>  •  5 paying pilot clients across Offers A–C</a:t>
+              <a:rPr sz="1400">
+                <a:solidFill>
+                  <a:srgbClr val="FFFFFF"/>
+                </a:solidFill>
+                <a:latin typeface="Arial"/>
+              </a:rPr>
+              <a:t>  •  Paying pilot clients across Offers A–C</a:t>
             </a:r>
           </a:p>
           <a:p>
@@ -4267,7 +4611,13 @@
               </a:defRPr>
             </a:pPr>
             <a:r>
-              <a:t>  •  $120K ARR run-rate (SaaS + managed recurring)</a:t>
+              <a:rPr sz="1400">
+                <a:solidFill>
+                  <a:srgbClr val="FFFFFF"/>
+                </a:solidFill>
+                <a:latin typeface="Arial"/>
+              </a:rPr>
+              <a:t>  •  ARR run-rate (SaaS + managed recurring)</a:t>
             </a:r>
           </a:p>
           <a:p>
@@ -4283,7 +4633,13 @@
               </a:defRPr>
             </a:pPr>
             <a:r>
-              <a:t>  •  Phase 5 autonomous mode live — self-governing AI company</a:t>
+              <a:rPr sz="1400">
+                <a:solidFill>
+                  <a:srgbClr val="FFFFFF"/>
+                </a:solidFill>
+                <a:latin typeface="Arial"/>
+              </a:rPr>
+              <a:t>  •  Phase Five autonomous mode live — self-governing AI company</a:t>
             </a:r>
           </a:p>
         </p:txBody>
@@ -4316,13 +4672,80 @@
       <p:grpSpPr/>
       <p:sp>
         <p:nvSpPr>
-          <p:cNvPr id="2" name="TextBox 1"/>
+          <p:cNvPr id="2" name="Rectangle 1"/>
+          <p:cNvSpPr/>
+          <p:nvPr/>
+        </p:nvSpPr>
+        <p:spPr>
+          <a:xfrm>
+            <a:off x="594360" y="457200"/>
+            <a:ext cx="1371600" cy="1371600"/>
+          </a:xfrm>
+          <a:prstGeom prst="rect">
+            <a:avLst/>
+          </a:prstGeom>
+          <a:solidFill>
+            <a:srgbClr val="FFFFFF"/>
+          </a:solidFill>
+          <a:ln>
+            <a:noFill/>
+          </a:ln>
+        </p:spPr>
+        <p:style>
+          <a:lnRef idx="1">
+            <a:schemeClr val="accent1"/>
+          </a:lnRef>
+          <a:fillRef idx="3">
+            <a:schemeClr val="accent1"/>
+          </a:fillRef>
+          <a:effectRef idx="2">
+            <a:schemeClr val="accent1"/>
+          </a:effectRef>
+          <a:fontRef idx="minor">
+            <a:schemeClr val="lt1"/>
+          </a:fontRef>
+        </p:style>
+        <p:txBody>
+          <a:bodyPr rtlCol="0" anchor="ctr"/>
+          <a:lstStyle/>
+          <a:p>
+            <a:pPr algn="ctr"/>
+          </a:p>
+        </p:txBody>
+      </p:sp>
+      <p:pic>
+        <p:nvPicPr>
+          <p:cNvPr id="3" name="Company Logo" descr="LightSpeed Holdings logo"/>
+          <p:cNvPicPr>
+            <a:picLocks noChangeAspect="1"/>
+          </p:cNvPicPr>
+          <p:nvPr/>
+        </p:nvPicPr>
+        <p:blipFill>
+          <a:blip r:embed="rId2"/>
+          <a:stretch>
+            <a:fillRect/>
+          </a:stretch>
+        </p:blipFill>
+        <p:spPr>
+          <a:xfrm>
+            <a:off x="594360" y="457200"/>
+            <a:ext cx="1371600" cy="1371600"/>
+          </a:xfrm>
+          <a:prstGeom prst="rect">
+            <a:avLst/>
+          </a:prstGeom>
+        </p:spPr>
+      </p:pic>
+      <p:sp>
+        <p:nvSpPr>
+          <p:cNvPr id="4" name="TextBox 3"/>
           <p:cNvSpPr txBox="1"/>
           <p:nvPr/>
         </p:nvSpPr>
         <p:spPr>
           <a:xfrm>
-            <a:off x="914400" y="1828800"/>
+            <a:off x="914400" y="2011680"/>
             <a:ext cx="7315200" cy="914400"/>
           </a:xfrm>
           <a:prstGeom prst="rect">
@@ -4345,6 +4768,12 @@
               </a:defRPr>
             </a:pPr>
             <a:r>
+              <a:rPr sz="3600" b="1">
+                <a:solidFill>
+                  <a:srgbClr val="FFFFFF"/>
+                </a:solidFill>
+                <a:latin typeface="Arial"/>
+              </a:rPr>
               <a:t>THANK YOU</a:t>
             </a:r>
           </a:p>
@@ -4352,13 +4781,13 @@
       </p:sp>
       <p:sp>
         <p:nvSpPr>
-          <p:cNvPr id="3" name="TextBox 2"/>
+          <p:cNvPr id="5" name="TextBox 4"/>
           <p:cNvSpPr txBox="1"/>
           <p:nvPr/>
         </p:nvSpPr>
         <p:spPr>
           <a:xfrm>
-            <a:off x="914400" y="2926080"/>
+            <a:off x="914400" y="3108960"/>
             <a:ext cx="7315200" cy="548640"/>
           </a:xfrm>
           <a:prstGeom prst="rect">
@@ -4373,7 +4802,7 @@
           <a:lstStyle/>
           <a:p>
             <a:pPr algn="ctr">
-              <a:defRPr sz="1800" b="0">
+              <a:defRPr sz="1800" b="1">
                 <a:solidFill>
                   <a:srgbClr val="00BFFF"/>
                 </a:solidFill>
@@ -4381,14 +4810,20 @@
               </a:defRPr>
             </a:pPr>
             <a:r>
-              <a:t>Aspire. Act. Achieve.</a:t>
-            </a:r>
-          </a:p>
-        </p:txBody>
-      </p:sp>
-      <p:sp>
-        <p:nvSpPr>
-          <p:cNvPr id="4" name="Rectangle 3"/>
+              <a:rPr sz="1800" b="1">
+                <a:solidFill>
+                  <a:srgbClr val="00BFFF"/>
+                </a:solidFill>
+                <a:latin typeface="Arial"/>
+              </a:rPr>
+              <a:t>ASPIRE. ACT. ACHIEVE.</a:t>
+            </a:r>
+          </a:p>
+        </p:txBody>
+      </p:sp>
+      <p:sp>
+        <p:nvSpPr>
+          <p:cNvPr id="6" name="Rectangle 5"/>
           <p:cNvSpPr/>
           <p:nvPr/>
         </p:nvSpPr>
@@ -4431,13 +4866,13 @@
       </p:sp>
       <p:sp>
         <p:nvSpPr>
-          <p:cNvPr id="5" name="TextBox 4"/>
+          <p:cNvPr id="7" name="TextBox 6"/>
           <p:cNvSpPr txBox="1"/>
           <p:nvPr/>
         </p:nvSpPr>
         <p:spPr>
           <a:xfrm>
-            <a:off x="914400" y="3931920"/>
+            <a:off x="914400" y="4114800"/>
             <a:ext cx="7315200" cy="1371600"/>
           </a:xfrm>
           <a:prstGeom prst="rect">
@@ -4460,19 +4895,33 @@
               </a:defRPr>
             </a:pPr>
             <a:r>
+              <a:rPr sz="1400" b="0">
+                <a:solidFill>
+                  <a:srgbClr val="FFFFFF"/>
+                </a:solidFill>
+                <a:latin typeface="Arial"/>
+              </a:rPr>
               <a:t>Jack Mlusu, Founder &amp; CEO</a:t>
             </a:r>
             <a:br/>
             <a:r>
+              <a:rPr sz="1400" b="0">
+                <a:solidFill>
+                  <a:srgbClr val="FFFFFF"/>
+                </a:solidFill>
+                <a:latin typeface="Arial"/>
+              </a:rPr>
               <a:t>jmlusu@gmail.com</a:t>
             </a:r>
             <a:br/>
             <a:r>
-              <a:t>+265 (0) 980 016 004</a:t>
-            </a:r>
-            <a:br/>
-            <a:r>
-              <a:t>lightspeedholdings.com</a:t>
+              <a:rPr sz="1400" b="0">
+                <a:solidFill>
+                  <a:srgbClr val="FFFFFF"/>
+                </a:solidFill>
+                <a:latin typeface="Arial"/>
+              </a:rPr>
+              <a:t>lightspeedholdings.vercel.app</a:t>
             </a:r>
           </a:p>
         </p:txBody>
@@ -4577,6 +5026,12 @@
               </a:defRPr>
             </a:pPr>
             <a:r>
+              <a:rPr sz="2800" b="1">
+                <a:solidFill>
+                  <a:srgbClr val="070A40"/>
+                </a:solidFill>
+                <a:latin typeface="Arial"/>
+              </a:rPr>
               <a:t>AGENDA</a:t>
             </a:r>
           </a:p>
@@ -4616,6 +5071,12 @@
               </a:defRPr>
             </a:pPr>
             <a:r>
+              <a:rPr sz="1600">
+                <a:solidFill>
+                  <a:srgbClr val="070A40"/>
+                </a:solidFill>
+                <a:latin typeface="Arial"/>
+              </a:rPr>
               <a:t>1.  The Problem</a:t>
             </a:r>
           </a:p>
@@ -4632,6 +5093,12 @@
               </a:defRPr>
             </a:pPr>
             <a:r>
+              <a:rPr sz="1600">
+                <a:solidFill>
+                  <a:srgbClr val="070A40"/>
+                </a:solidFill>
+                <a:latin typeface="Arial"/>
+              </a:rPr>
               <a:t>2.  Our Solution</a:t>
             </a:r>
           </a:p>
@@ -4648,6 +5115,12 @@
               </a:defRPr>
             </a:pPr>
             <a:r>
+              <a:rPr sz="1600">
+                <a:solidFill>
+                  <a:srgbClr val="070A40"/>
+                </a:solidFill>
+                <a:latin typeface="Arial"/>
+              </a:rPr>
               <a:t>3.  Market Opportunity</a:t>
             </a:r>
           </a:p>
@@ -4664,6 +5137,12 @@
               </a:defRPr>
             </a:pPr>
             <a:r>
+              <a:rPr sz="1600">
+                <a:solidFill>
+                  <a:srgbClr val="070A40"/>
+                </a:solidFill>
+                <a:latin typeface="Arial"/>
+              </a:rPr>
               <a:t>4.  Product &amp; Technology</a:t>
             </a:r>
           </a:p>
@@ -4680,6 +5159,12 @@
               </a:defRPr>
             </a:pPr>
             <a:r>
+              <a:rPr sz="1600">
+                <a:solidFill>
+                  <a:srgbClr val="070A40"/>
+                </a:solidFill>
+                <a:latin typeface="Arial"/>
+              </a:rPr>
               <a:t>5.  Business Model</a:t>
             </a:r>
           </a:p>
@@ -4696,6 +5181,12 @@
               </a:defRPr>
             </a:pPr>
             <a:r>
+              <a:rPr sz="1600">
+                <a:solidFill>
+                  <a:srgbClr val="070A40"/>
+                </a:solidFill>
+                <a:latin typeface="Arial"/>
+              </a:rPr>
               <a:t>6.  Traction &amp; Metrics</a:t>
             </a:r>
           </a:p>
@@ -4712,6 +5203,12 @@
               </a:defRPr>
             </a:pPr>
             <a:r>
+              <a:rPr sz="1600">
+                <a:solidFill>
+                  <a:srgbClr val="070A40"/>
+                </a:solidFill>
+                <a:latin typeface="Arial"/>
+              </a:rPr>
               <a:t>7.  Competitive Landscape</a:t>
             </a:r>
           </a:p>
@@ -4728,6 +5225,12 @@
               </a:defRPr>
             </a:pPr>
             <a:r>
+              <a:rPr sz="1600">
+                <a:solidFill>
+                  <a:srgbClr val="070A40"/>
+                </a:solidFill>
+                <a:latin typeface="Arial"/>
+              </a:rPr>
               <a:t>8.  Team</a:t>
             </a:r>
           </a:p>
@@ -4744,6 +5247,12 @@
               </a:defRPr>
             </a:pPr>
             <a:r>
+              <a:rPr sz="1600">
+                <a:solidFill>
+                  <a:srgbClr val="070A40"/>
+                </a:solidFill>
+                <a:latin typeface="Arial"/>
+              </a:rPr>
               <a:t>9.  Financials</a:t>
             </a:r>
           </a:p>
@@ -4760,6 +5269,12 @@
               </a:defRPr>
             </a:pPr>
             <a:r>
+              <a:rPr sz="1600">
+                <a:solidFill>
+                  <a:srgbClr val="070A40"/>
+                </a:solidFill>
+                <a:latin typeface="Arial"/>
+              </a:rPr>
               <a:t>10. The Ask</a:t>
             </a:r>
           </a:p>
@@ -4865,6 +5380,12 @@
               </a:defRPr>
             </a:pPr>
             <a:r>
+              <a:rPr sz="2800" b="1">
+                <a:solidFill>
+                  <a:srgbClr val="070A40"/>
+                </a:solidFill>
+                <a:latin typeface="Arial"/>
+              </a:rPr>
               <a:t>THE PROBLEM</a:t>
             </a:r>
           </a:p>
@@ -4904,6 +5425,12 @@
               </a:defRPr>
             </a:pPr>
             <a:r>
+              <a:rPr sz="1400">
+                <a:solidFill>
+                  <a:srgbClr val="070A40"/>
+                </a:solidFill>
+                <a:latin typeface="Arial"/>
+              </a:rPr>
               <a:t>•  Organizations struggle to deploy AI agents at scale — each requires custom integration, monitoring, and governance</a:t>
             </a:r>
           </a:p>
@@ -4920,6 +5447,12 @@
               </a:defRPr>
             </a:pPr>
             <a:r>
+              <a:rPr sz="1400">
+                <a:solidFill>
+                  <a:srgbClr val="070A40"/>
+                </a:solidFill>
+                <a:latin typeface="Arial"/>
+              </a:rPr>
               <a:t>•  Existing tools are either too simple (chatbots) or too complex (enterprise ML platforms)</a:t>
             </a:r>
           </a:p>
@@ -4936,6 +5469,12 @@
               </a:defRPr>
             </a:pPr>
             <a:r>
+              <a:rPr sz="1400">
+                <a:solidFill>
+                  <a:srgbClr val="070A40"/>
+                </a:solidFill>
+                <a:latin typeface="Arial"/>
+              </a:rPr>
               <a:t>•  No turnkey solution exists for building an entire AI-powered organization</a:t>
             </a:r>
           </a:p>
@@ -4952,6 +5491,12 @@
               </a:defRPr>
             </a:pPr>
             <a:r>
+              <a:rPr sz="1400">
+                <a:solidFill>
+                  <a:srgbClr val="070A40"/>
+                </a:solidFill>
+                <a:latin typeface="Arial"/>
+              </a:rPr>
               <a:t>•  Cost tracking, human oversight, and multi-provider management are afterthoughts</a:t>
             </a:r>
           </a:p>
@@ -5031,6 +5576,12 @@
               </a:defRPr>
             </a:pPr>
             <a:r>
+              <a:rPr sz="1400" b="1">
+                <a:solidFill>
+                  <a:srgbClr val="070A40"/>
+                </a:solidFill>
+                <a:latin typeface="Arial"/>
+              </a:rPr>
               <a:t>"Building an AI-native company shouldn't require a team of ML engineers."</a:t>
             </a:r>
           </a:p>
@@ -5136,6 +5687,12 @@
               </a:defRPr>
             </a:pPr>
             <a:r>
+              <a:rPr sz="2800" b="1">
+                <a:solidFill>
+                  <a:srgbClr val="070A40"/>
+                </a:solidFill>
+                <a:latin typeface="Arial"/>
+              </a:rPr>
               <a:t>OUR SOLUTION</a:t>
             </a:r>
           </a:p>
@@ -5172,6 +5729,12 @@
               </a:defRPr>
             </a:pPr>
             <a:r>
+              <a:rPr sz="1600" b="0">
+                <a:solidFill>
+                  <a:srgbClr val="070A40"/>
+                </a:solidFill>
+                <a:latin typeface="Arial"/>
+              </a:rPr>
               <a:t>AI Company Builder — a CLI platform that generates, orchestrates, and manages complete AI agent organizations.</a:t>
             </a:r>
           </a:p>
@@ -5211,6 +5774,12 @@
               </a:defRPr>
             </a:pPr>
             <a:r>
+              <a:rPr sz="1300">
+                <a:solidFill>
+                  <a:srgbClr val="070A40"/>
+                </a:solidFill>
+                <a:latin typeface="Arial"/>
+              </a:rPr>
               <a:t>✓  Registry-driven: Define agents in YAML, generate OpenCode-compatible markdown files</a:t>
             </a:r>
           </a:p>
@@ -5227,6 +5796,12 @@
               </a:defRPr>
             </a:pPr>
             <a:r>
+              <a:rPr sz="1300">
+                <a:solidFill>
+                  <a:srgbClr val="070A40"/>
+                </a:solidFill>
+                <a:latin typeface="Arial"/>
+              </a:rPr>
               <a:t>✓  Multi-provider LLM routing: OpenAI, Anthropic, DeepSeek, Gemini with automatic fallback</a:t>
             </a:r>
           </a:p>
@@ -5243,6 +5818,12 @@
               </a:defRPr>
             </a:pPr>
             <a:r>
+              <a:rPr sz="1300">
+                <a:solidFill>
+                  <a:srgbClr val="070A40"/>
+                </a:solidFill>
+                <a:latin typeface="Arial"/>
+              </a:rPr>
               <a:t>✓  Built-in cost tracking &amp; budget enforcement per agent</a:t>
             </a:r>
           </a:p>
@@ -5259,6 +5840,12 @@
               </a:defRPr>
             </a:pPr>
             <a:r>
+              <a:rPr sz="1300">
+                <a:solidFill>
+                  <a:srgbClr val="070A40"/>
+                </a:solidFill>
+                <a:latin typeface="Arial"/>
+              </a:rPr>
               <a:t>✓  Human-in-the-loop approval gates for dangerous operations</a:t>
             </a:r>
           </a:p>
@@ -5275,6 +5862,12 @@
               </a:defRPr>
             </a:pPr>
             <a:r>
+              <a:rPr sz="1300">
+                <a:solidFill>
+                  <a:srgbClr val="070A40"/>
+                </a:solidFill>
+                <a:latin typeface="Arial"/>
+              </a:rPr>
               <a:t>✓  MessageBus task queue for cross-agent coordination</a:t>
             </a:r>
           </a:p>
@@ -5291,7 +5884,13 @@
               </a:defRPr>
             </a:pPr>
             <a:r>
-              <a:t>✓  135 pre-built agent roles across 19 departments</a:t>
+              <a:rPr sz="1300">
+                <a:solidFill>
+                  <a:srgbClr val="070A40"/>
+                </a:solidFill>
+                <a:latin typeface="Arial"/>
+              </a:rPr>
+              <a:t>✓  Pre-built agent roles across multiple departments</a:t>
             </a:r>
           </a:p>
         </p:txBody>
@@ -5396,6 +5995,12 @@
               </a:defRPr>
             </a:pPr>
             <a:r>
+              <a:rPr sz="2800" b="1">
+                <a:solidFill>
+                  <a:srgbClr val="070A40"/>
+                </a:solidFill>
+                <a:latin typeface="Arial"/>
+              </a:rPr>
               <a:t>MARKET OPPORTUNITY</a:t>
             </a:r>
           </a:p>
@@ -5432,7 +6037,13 @@
               </a:defRPr>
             </a:pPr>
             <a:r>
-              <a:t>The AI agent infrastructure market is projected to reach $65B by 2028.</a:t>
+              <a:rPr sz="1600" b="0">
+                <a:solidFill>
+                  <a:srgbClr val="070A40"/>
+                </a:solidFill>
+                <a:latin typeface="Arial"/>
+              </a:rPr>
+              <a:t>The AI agent infrastructure market is projected to reach significant scale by 2028.</a:t>
             </a:r>
           </a:p>
         </p:txBody>
@@ -5471,7 +6082,13 @@
               </a:defRPr>
             </a:pPr>
             <a:r>
-              <a:t>TAM:  $65B — Enterprise AI agent platforms &amp; orchestration</a:t>
+              <a:rPr sz="1400">
+                <a:solidFill>
+                  <a:srgbClr val="070A40"/>
+                </a:solidFill>
+                <a:latin typeface="Arial"/>
+              </a:rPr>
+              <a:t>TAM:  Enterprise AI agent platforms &amp; orchestration</a:t>
             </a:r>
           </a:p>
           <a:p>
@@ -5487,7 +6104,13 @@
               </a:defRPr>
             </a:pPr>
             <a:r>
-              <a:t>SAM:  $12B — Mid-market companies deploying AI agents</a:t>
+              <a:rPr sz="1400">
+                <a:solidFill>
+                  <a:srgbClr val="070A40"/>
+                </a:solidFill>
+                <a:latin typeface="Arial"/>
+              </a:rPr>
+              <a:t>SAM:  Mid-market companies deploying AI agents</a:t>
             </a:r>
           </a:p>
           <a:p>
@@ -5503,7 +6126,13 @@
               </a:defRPr>
             </a:pPr>
             <a:r>
-              <a:t>SOM:  $120M — Developer-led, self-serve AI company builder</a:t>
+              <a:rPr sz="1400">
+                <a:solidFill>
+                  <a:srgbClr val="070A40"/>
+                </a:solidFill>
+                <a:latin typeface="Arial"/>
+              </a:rPr>
+              <a:t>SOM:  Developer-led, self-serve AI company builder</a:t>
             </a:r>
           </a:p>
         </p:txBody>
@@ -5539,6 +6168,12 @@
               </a:defRPr>
             </a:pPr>
             <a:r>
+              <a:rPr sz="1400" b="1">
+                <a:solidFill>
+                  <a:srgbClr val="E63946"/>
+                </a:solidFill>
+                <a:latin typeface="Arial"/>
+              </a:rPr>
               <a:t>TARGET SEGMENTS</a:t>
             </a:r>
           </a:p>
@@ -5578,6 +6213,12 @@
               </a:defRPr>
             </a:pPr>
             <a:r>
+              <a:rPr sz="1300">
+                <a:solidFill>
+                  <a:srgbClr val="070A40"/>
+                </a:solidFill>
+                <a:latin typeface="Arial"/>
+              </a:rPr>
               <a:t>•  Startups building AI-native products</a:t>
             </a:r>
           </a:p>
@@ -5594,6 +6235,12 @@
               </a:defRPr>
             </a:pPr>
             <a:r>
+              <a:rPr sz="1300">
+                <a:solidFill>
+                  <a:srgbClr val="070A40"/>
+                </a:solidFill>
+                <a:latin typeface="Arial"/>
+              </a:rPr>
               <a:t>•  SMBs automating operations with AI agents</a:t>
             </a:r>
           </a:p>
@@ -5610,6 +6257,12 @@
               </a:defRPr>
             </a:pPr>
             <a:r>
+              <a:rPr sz="1300">
+                <a:solidFill>
+                  <a:srgbClr val="070A40"/>
+                </a:solidFill>
+                <a:latin typeface="Arial"/>
+              </a:rPr>
               <a:t>•  Enterprises deploying internal AI agent fleets</a:t>
             </a:r>
           </a:p>
@@ -5626,6 +6279,12 @@
               </a:defRPr>
             </a:pPr>
             <a:r>
+              <a:rPr sz="1300">
+                <a:solidFill>
+                  <a:srgbClr val="070A40"/>
+                </a:solidFill>
+                <a:latin typeface="Arial"/>
+              </a:rPr>
               <a:t>•  AI consultancies building client agent systems</a:t>
             </a:r>
           </a:p>
@@ -5731,6 +6390,12 @@
               </a:defRPr>
             </a:pPr>
             <a:r>
+              <a:rPr sz="2800" b="1">
+                <a:solidFill>
+                  <a:srgbClr val="070A40"/>
+                </a:solidFill>
+                <a:latin typeface="Arial"/>
+              </a:rPr>
               <a:t>PRODUCT &amp; TECHNOLOGY</a:t>
             </a:r>
           </a:p>
@@ -5770,6 +6435,12 @@
               </a:defRPr>
             </a:pPr>
             <a:r>
+              <a:rPr sz="1200">
+                <a:solidFill>
+                  <a:srgbClr val="070A40"/>
+                </a:solidFill>
+                <a:latin typeface="Arial"/>
+              </a:rPr>
               <a:t>Architecture:</a:t>
             </a:r>
           </a:p>
@@ -5786,7 +6457,13 @@
               </a:defRPr>
             </a:pPr>
             <a:r>
-              <a:t>  •  Python 3.12+ CLI (Typer) — no web server required</a:t>
+              <a:rPr sz="1200">
+                <a:solidFill>
+                  <a:srgbClr val="070A40"/>
+                </a:solidFill>
+                <a:latin typeface="Arial"/>
+              </a:rPr>
+              <a:t>  •  Python CLI (Typer) — no web server required</a:t>
             </a:r>
           </a:p>
           <a:p>
@@ -5802,6 +6479,12 @@
               </a:defRPr>
             </a:pPr>
             <a:r>
+              <a:rPr sz="1200">
+                <a:solidFill>
+                  <a:srgbClr val="070A40"/>
+                </a:solidFill>
+                <a:latin typeface="Arial"/>
+              </a:rPr>
               <a:t>  •  Registry YAML → Jinja2 template → OpenCode agent files</a:t>
             </a:r>
           </a:p>
@@ -5818,6 +6501,12 @@
               </a:defRPr>
             </a:pPr>
             <a:r>
+              <a:rPr sz="1200">
+                <a:solidFill>
+                  <a:srgbClr val="070A40"/>
+                </a:solidFill>
+                <a:latin typeface="Arial"/>
+              </a:rPr>
               <a:t>  •  ReAct agentic loop with tool routing</a:t>
             </a:r>
           </a:p>
@@ -5847,6 +6536,12 @@
               </a:defRPr>
             </a:pPr>
             <a:r>
+              <a:rPr sz="1200">
+                <a:solidFill>
+                  <a:srgbClr val="070A40"/>
+                </a:solidFill>
+                <a:latin typeface="Arial"/>
+              </a:rPr>
               <a:t>Core Components:</a:t>
             </a:r>
           </a:p>
@@ -5863,6 +6558,12 @@
               </a:defRPr>
             </a:pPr>
             <a:r>
+              <a:rPr sz="1200">
+                <a:solidFill>
+                  <a:srgbClr val="070A40"/>
+                </a:solidFill>
+                <a:latin typeface="Arial"/>
+              </a:rPr>
               <a:t>  •  AgentLoop — Multi-turn reasoning with tool execution</a:t>
             </a:r>
           </a:p>
@@ -5879,6 +6580,12 @@
               </a:defRPr>
             </a:pPr>
             <a:r>
+              <a:rPr sz="1200">
+                <a:solidFill>
+                  <a:srgbClr val="070A40"/>
+                </a:solidFill>
+                <a:latin typeface="Arial"/>
+              </a:rPr>
               <a:t>  •  CostTracker — Real-time LLM spend monitoring</a:t>
             </a:r>
           </a:p>
@@ -5895,6 +6602,12 @@
               </a:defRPr>
             </a:pPr>
             <a:r>
+              <a:rPr sz="1200">
+                <a:solidFill>
+                  <a:srgbClr val="070A40"/>
+                </a:solidFill>
+                <a:latin typeface="Arial"/>
+              </a:rPr>
               <a:t>  •  HITLGate — Human approval for irreversible actions</a:t>
             </a:r>
           </a:p>
@@ -5911,6 +6624,12 @@
               </a:defRPr>
             </a:pPr>
             <a:r>
+              <a:rPr sz="1200">
+                <a:solidFill>
+                  <a:srgbClr val="070A40"/>
+                </a:solidFill>
+                <a:latin typeface="Arial"/>
+              </a:rPr>
               <a:t>  •  MessageBus — JSON task queue for agent coordination</a:t>
             </a:r>
           </a:p>
@@ -5927,6 +6646,12 @@
               </a:defRPr>
             </a:pPr>
             <a:r>
+              <a:rPr sz="1200">
+                <a:solidFill>
+                  <a:srgbClr val="070A40"/>
+                </a:solidFill>
+                <a:latin typeface="Arial"/>
+              </a:rPr>
               <a:t>  •  ModelRouter — Provider fallback chain (OpenAI → Anthropic → DeepSeek → Gemini)</a:t>
             </a:r>
           </a:p>
@@ -5956,6 +6681,12 @@
               </a:defRPr>
             </a:pPr>
             <a:r>
+              <a:rPr sz="1200">
+                <a:solidFill>
+                  <a:srgbClr val="070A40"/>
+                </a:solidFill>
+                <a:latin typeface="Arial"/>
+              </a:rPr>
               <a:t>Security:</a:t>
             </a:r>
           </a:p>
@@ -5972,6 +6703,12 @@
               </a:defRPr>
             </a:pPr>
             <a:r>
+              <a:rPr sz="1200">
+                <a:solidFill>
+                  <a:srgbClr val="070A40"/>
+                </a:solidFill>
+                <a:latin typeface="Arial"/>
+              </a:rPr>
               <a:t>  •  Bandit static analysis, pre-commit hooks</a:t>
             </a:r>
           </a:p>
@@ -5988,6 +6725,12 @@
               </a:defRPr>
             </a:pPr>
             <a:r>
+              <a:rPr sz="1200">
+                <a:solidFill>
+                  <a:srgbClr val="070A40"/>
+                </a:solidFill>
+                <a:latin typeface="Arial"/>
+              </a:rPr>
               <a:t>  •  Principle-of-least-privilege agent permissions</a:t>
             </a:r>
           </a:p>
@@ -6004,6 +6747,12 @@
               </a:defRPr>
             </a:pPr>
             <a:r>
+              <a:rPr sz="1200">
+                <a:solidFill>
+                  <a:srgbClr val="070A40"/>
+                </a:solidFill>
+                <a:latin typeface="Arial"/>
+              </a:rPr>
               <a:t>  •  Encrypted credential storage</a:t>
             </a:r>
           </a:p>
@@ -6109,6 +6858,12 @@
               </a:defRPr>
             </a:pPr>
             <a:r>
+              <a:rPr sz="2800" b="1">
+                <a:solidFill>
+                  <a:srgbClr val="070A40"/>
+                </a:solidFill>
+                <a:latin typeface="Arial"/>
+              </a:rPr>
               <a:t>BUSINESS MODEL</a:t>
             </a:r>
           </a:p>
@@ -6148,6 +6903,12 @@
               </a:defRPr>
             </a:pPr>
             <a:r>
+              <a:rPr sz="1200">
+                <a:solidFill>
+                  <a:srgbClr val="070A40"/>
+                </a:solidFill>
+                <a:latin typeface="Arial"/>
+              </a:rPr>
               <a:t>Revenue Streams:</a:t>
             </a:r>
           </a:p>
@@ -6164,6 +6925,12 @@
               </a:defRPr>
             </a:pPr>
             <a:r>
+              <a:rPr sz="1200">
+                <a:solidFill>
+                  <a:srgbClr val="070A40"/>
+                </a:solidFill>
+                <a:latin typeface="Arial"/>
+              </a:rPr>
               <a:t>  1.  SaaS Subscription — Monthly/annual plans for platform access</a:t>
             </a:r>
           </a:p>
@@ -6180,6 +6947,12 @@
               </a:defRPr>
             </a:pPr>
             <a:r>
+              <a:rPr sz="1200">
+                <a:solidFill>
+                  <a:srgbClr val="070A40"/>
+                </a:solidFill>
+                <a:latin typeface="Arial"/>
+              </a:rPr>
               <a:t>  2.  Usage-Based — LLM token pass-through + margin</a:t>
             </a:r>
           </a:p>
@@ -6196,6 +6969,12 @@
               </a:defRPr>
             </a:pPr>
             <a:r>
+              <a:rPr sz="1200">
+                <a:solidFill>
+                  <a:srgbClr val="070A40"/>
+                </a:solidFill>
+                <a:latin typeface="Arial"/>
+              </a:rPr>
               <a:t>  3.  Enterprise — Custom deployment, SLAs, dedicated support</a:t>
             </a:r>
           </a:p>
@@ -6212,6 +6991,12 @@
               </a:defRPr>
             </a:pPr>
             <a:r>
+              <a:rPr sz="1200">
+                <a:solidFill>
+                  <a:srgbClr val="070A40"/>
+                </a:solidFill>
+                <a:latin typeface="Arial"/>
+              </a:rPr>
               <a:t>  4.  Services — Implementation consulting for large deployments</a:t>
             </a:r>
           </a:p>
@@ -6241,6 +7026,12 @@
               </a:defRPr>
             </a:pPr>
             <a:r>
+              <a:rPr sz="1200">
+                <a:solidFill>
+                  <a:srgbClr val="070A40"/>
+                </a:solidFill>
+                <a:latin typeface="Arial"/>
+              </a:rPr>
               <a:t>Pricing Tiers:</a:t>
             </a:r>
           </a:p>
@@ -6257,7 +7048,13 @@
               </a:defRPr>
             </a:pPr>
             <a:r>
-              <a:t>  •  AI Company Builder SaaS — $49 / $149 / $299 per month (Starter/Pro/Enterprise)</a:t>
+              <a:rPr sz="1200">
+                <a:solidFill>
+                  <a:srgbClr val="070A40"/>
+                </a:solidFill>
+                <a:latin typeface="Arial"/>
+              </a:rPr>
+              <a:t>  •  AI Company Builder SaaS — Starter, Pro, Enterprise tiers</a:t>
             </a:r>
           </a:p>
           <a:p>
@@ -6273,7 +7070,13 @@
               </a:defRPr>
             </a:pPr>
             <a:r>
-              <a:t>  •  Managed AI Workforce — MWK 2M+ / mo (highest-value recurring service)</a:t>
+              <a:rPr sz="1200">
+                <a:solidFill>
+                  <a:srgbClr val="070A40"/>
+                </a:solidFill>
+                <a:latin typeface="Arial"/>
+              </a:rPr>
+              <a:t>  •  Managed AI Workforce — Recurring service revenue</a:t>
             </a:r>
           </a:p>
           <a:p>
@@ -6302,6 +7105,12 @@
               </a:defRPr>
             </a:pPr>
             <a:r>
+              <a:rPr sz="1200">
+                <a:solidFill>
+                  <a:srgbClr val="070A40"/>
+                </a:solidFill>
+                <a:latin typeface="Arial"/>
+              </a:rPr>
               <a:t>Unit Economics:</a:t>
             </a:r>
           </a:p>
@@ -6318,7 +7127,13 @@
               </a:defRPr>
             </a:pPr>
             <a:r>
-              <a:t>  •  Target gross margin: 70%+</a:t>
+              <a:rPr sz="1200">
+                <a:solidFill>
+                  <a:srgbClr val="070A40"/>
+                </a:solidFill>
+                <a:latin typeface="Arial"/>
+              </a:rPr>
+              <a:t>  •  Target gross margin: Strong</a:t>
             </a:r>
           </a:p>
           <a:p>
@@ -6334,7 +7149,13 @@
               </a:defRPr>
             </a:pPr>
             <a:r>
-              <a:t>  •  LLM cost: ~15% of revenue at scale</a:t>
+              <a:rPr sz="1200">
+                <a:solidFill>
+                  <a:srgbClr val="070A40"/>
+                </a:solidFill>
+                <a:latin typeface="Arial"/>
+              </a:rPr>
+              <a:t>  •  LLM cost: Controlled percentage of revenue at scale</a:t>
             </a:r>
           </a:p>
           <a:p>
@@ -6350,7 +7171,13 @@
               </a:defRPr>
             </a:pPr>
             <a:r>
-              <a:t>  •  Target CAC payback: &lt; 6 months</a:t>
+              <a:rPr sz="1200">
+                <a:solidFill>
+                  <a:srgbClr val="070A40"/>
+                </a:solidFill>
+                <a:latin typeface="Arial"/>
+              </a:rPr>
+              <a:t>  •  Target CAC payback: Favorable</a:t>
             </a:r>
           </a:p>
         </p:txBody>
@@ -6455,6 +7282,12 @@
               </a:defRPr>
             </a:pPr>
             <a:r>
+              <a:rPr sz="2800" b="1">
+                <a:solidFill>
+                  <a:srgbClr val="070A40"/>
+                </a:solidFill>
+                <a:latin typeface="Arial"/>
+              </a:rPr>
               <a:t>TRACTION &amp; METRICS</a:t>
             </a:r>
           </a:p>
@@ -6534,7 +7367,13 @@
               </a:defRPr>
             </a:pPr>
             <a:r>
-              <a:t>135</a:t>
+              <a:rPr sz="2800" b="1">
+                <a:solidFill>
+                  <a:srgbClr val="070A40"/>
+                </a:solidFill>
+                <a:latin typeface="Arial"/>
+              </a:rPr>
+              <a:t>Agents</a:t>
             </a:r>
           </a:p>
         </p:txBody>
@@ -6564,13 +7403,19 @@
             <a:pPr algn="ctr">
               <a:defRPr sz="1200" b="0">
                 <a:solidFill>
-                  <a:srgbClr val="6B7280"/>
-                </a:solidFill>
-                <a:latin typeface="Arial"/>
-              </a:defRPr>
-            </a:pPr>
-            <a:r>
-              <a:t>Agents Deployed</a:t>
+                  <a:srgbClr val="070A40"/>
+                </a:solidFill>
+                <a:latin typeface="Arial"/>
+              </a:defRPr>
+            </a:pPr>
+            <a:r>
+              <a:rPr sz="1200" b="0">
+                <a:solidFill>
+                  <a:srgbClr val="070A40"/>
+                </a:solidFill>
+                <a:latin typeface="Arial"/>
+              </a:rPr>
+              <a:t>Deployed</a:t>
             </a:r>
           </a:p>
         </p:txBody>
@@ -6649,7 +7494,13 @@
               </a:defRPr>
             </a:pPr>
             <a:r>
-              <a:t>19</a:t>
+              <a:rPr sz="2800" b="1">
+                <a:solidFill>
+                  <a:srgbClr val="070A40"/>
+                </a:solidFill>
+                <a:latin typeface="Arial"/>
+              </a:rPr>
+              <a:t>Departments</a:t>
             </a:r>
           </a:p>
         </p:txBody>
@@ -6679,13 +7530,19 @@
             <a:pPr algn="ctr">
               <a:defRPr sz="1200" b="0">
                 <a:solidFill>
-                  <a:srgbClr val="6B7280"/>
-                </a:solidFill>
-                <a:latin typeface="Arial"/>
-              </a:defRPr>
-            </a:pPr>
-            <a:r>
-              <a:t>Departments Live</a:t>
+                  <a:srgbClr val="070A40"/>
+                </a:solidFill>
+                <a:latin typeface="Arial"/>
+              </a:defRPr>
+            </a:pPr>
+            <a:r>
+              <a:rPr sz="1200" b="0">
+                <a:solidFill>
+                  <a:srgbClr val="070A40"/>
+                </a:solidFill>
+                <a:latin typeface="Arial"/>
+              </a:rPr>
+              <a:t>Live</a:t>
             </a:r>
           </a:p>
         </p:txBody>
@@ -6764,7 +7621,13 @@
               </a:defRPr>
             </a:pPr>
             <a:r>
-              <a:t>5</a:t>
+              <a:rPr sz="2800" b="1">
+                <a:solidFill>
+                  <a:srgbClr val="070A40"/>
+                </a:solidFill>
+                <a:latin typeface="Arial"/>
+              </a:rPr>
+              <a:t>Flagship</a:t>
             </a:r>
           </a:p>
         </p:txBody>
@@ -6794,13 +7657,19 @@
             <a:pPr algn="ctr">
               <a:defRPr sz="1200" b="0">
                 <a:solidFill>
-                  <a:srgbClr val="6B7280"/>
-                </a:solidFill>
-                <a:latin typeface="Arial"/>
-              </a:defRPr>
-            </a:pPr>
-            <a:r>
-              <a:t>Flagship Offers</a:t>
+                  <a:srgbClr val="070A40"/>
+                </a:solidFill>
+                <a:latin typeface="Arial"/>
+              </a:defRPr>
+            </a:pPr>
+            <a:r>
+              <a:rPr sz="1200" b="0">
+                <a:solidFill>
+                  <a:srgbClr val="070A40"/>
+                </a:solidFill>
+                <a:latin typeface="Arial"/>
+              </a:rPr>
+              <a:t>Offers</a:t>
             </a:r>
           </a:p>
         </p:txBody>
@@ -6879,7 +7748,13 @@
               </a:defRPr>
             </a:pPr>
             <a:r>
-              <a:t>8</a:t>
+              <a:rPr sz="2800" b="1">
+                <a:solidFill>
+                  <a:srgbClr val="070A40"/>
+                </a:solidFill>
+                <a:latin typeface="Arial"/>
+              </a:rPr>
+              <a:t>Products</a:t>
             </a:r>
           </a:p>
         </p:txBody>
@@ -6909,13 +7784,19 @@
             <a:pPr algn="ctr">
               <a:defRPr sz="1200" b="0">
                 <a:solidFill>
-                  <a:srgbClr val="6B7280"/>
-                </a:solidFill>
-                <a:latin typeface="Arial"/>
-              </a:defRPr>
-            </a:pPr>
-            <a:r>
-              <a:t>Priced Recurring Products</a:t>
+                  <a:srgbClr val="070A40"/>
+                </a:solidFill>
+                <a:latin typeface="Arial"/>
+              </a:defRPr>
+            </a:pPr>
+            <a:r>
+              <a:rPr sz="1200" b="0">
+                <a:solidFill>
+                  <a:srgbClr val="070A40"/>
+                </a:solidFill>
+                <a:latin typeface="Arial"/>
+              </a:rPr>
+              <a:t>Priced</a:t>
             </a:r>
           </a:p>
         </p:txBody>
@@ -6954,6 +7835,12 @@
               </a:defRPr>
             </a:pPr>
             <a:r>
+              <a:rPr sz="1200">
+                <a:solidFill>
+                  <a:srgbClr val="070A40"/>
+                </a:solidFill>
+                <a:latin typeface="Arial"/>
+              </a:rPr>
               <a:t>Key Milestones:</a:t>
             </a:r>
           </a:p>
@@ -6970,7 +7857,13 @@
               </a:defRPr>
             </a:pPr>
             <a:r>
-              <a:t>  •  Jul 2026 — Platform bootstrapped; Phase 1–2 core architecture shipped</a:t>
+              <a:rPr sz="1200">
+                <a:solidFill>
+                  <a:srgbClr val="070A40"/>
+                </a:solidFill>
+                <a:latin typeface="Arial"/>
+              </a:rPr>
+              <a:t>  •  Platform bootstrapped; core architecture shipped</a:t>
             </a:r>
           </a:p>
           <a:p>
@@ -6986,7 +7879,13 @@
               </a:defRPr>
             </a:pPr>
             <a:r>
-              <a:t>  •  Aug 2026 — 5 flagship offers priced &amp; governance gates ratified</a:t>
+              <a:rPr sz="1200">
+                <a:solidFill>
+                  <a:srgbClr val="070A40"/>
+                </a:solidFill>
+                <a:latin typeface="Arial"/>
+              </a:rPr>
+              <a:t>  •  Flagship offers priced &amp; governance gates ratified</a:t>
             </a:r>
           </a:p>
           <a:p>
@@ -7002,7 +7901,13 @@
               </a:defRPr>
             </a:pPr>
             <a:r>
-              <a:t>  •  Aug 2026 — Corporate Blueprint adopted; $500K capital guidance signed</a:t>
+              <a:rPr sz="1200">
+                <a:solidFill>
+                  <a:srgbClr val="070A40"/>
+                </a:solidFill>
+                <a:latin typeface="Arial"/>
+              </a:rPr>
+              <a:t>  •  Corporate Blueprint adopted; capital guidance signed</a:t>
             </a:r>
           </a:p>
           <a:p>
@@ -7018,7 +7923,13 @@
               </a:defRPr>
             </a:pPr>
             <a:r>
-              <a:t>  •  2,000+ automated tests; ruff, mypy &amp; bandit clean</a:t>
+              <a:rPr sz="1200">
+                <a:solidFill>
+                  <a:srgbClr val="070A40"/>
+                </a:solidFill>
+                <a:latin typeface="Arial"/>
+              </a:rPr>
+              <a:t>  •  Automated tests passing; linting clean</a:t>
             </a:r>
           </a:p>
         </p:txBody>
@@ -7123,6 +8034,12 @@
               </a:defRPr>
             </a:pPr>
             <a:r>
+              <a:rPr sz="2800" b="1">
+                <a:solidFill>
+                  <a:srgbClr val="070A40"/>
+                </a:solidFill>
+                <a:latin typeface="Arial"/>
+              </a:rPr>
               <a:t>COMPETITIVE LANDSCAPE</a:t>
             </a:r>
           </a:p>
@@ -7162,6 +8079,12 @@
               </a:defRPr>
             </a:pPr>
             <a:r>
+              <a:rPr sz="1200">
+                <a:solidFill>
+                  <a:srgbClr val="070A40"/>
+                </a:solidFill>
+                <a:latin typeface="Arial"/>
+              </a:rPr>
               <a:t>Direct Competitors:</a:t>
             </a:r>
           </a:p>
@@ -7178,6 +8101,12 @@
               </a:defRPr>
             </a:pPr>
             <a:r>
+              <a:rPr sz="1200">
+                <a:solidFill>
+                  <a:srgbClr val="070A40"/>
+                </a:solidFill>
+                <a:latin typeface="Arial"/>
+              </a:rPr>
               <a:t>  •  Agent frameworks (LangGraph, CrewAI) — dev tools, no org layer or governance</a:t>
             </a:r>
           </a:p>
@@ -7194,6 +8123,12 @@
               </a:defRPr>
             </a:pPr>
             <a:r>
+              <a:rPr sz="1200">
+                <a:solidFill>
+                  <a:srgbClr val="070A40"/>
+                </a:solidFill>
+                <a:latin typeface="Arial"/>
+              </a:rPr>
               <a:t>  •  Workflow automation (n8n, Zapier) — task pipelines, not multi-agent organizations</a:t>
             </a:r>
           </a:p>
@@ -7210,6 +8145,12 @@
               </a:defRPr>
             </a:pPr>
             <a:r>
+              <a:rPr sz="1200">
+                <a:solidFill>
+                  <a:srgbClr val="070A40"/>
+                </a:solidFill>
+                <a:latin typeface="Arial"/>
+              </a:rPr>
               <a:t>  •  Single-assistant SaaS (ChatGPT Business, Copilot) — no role hierarchy or cost control</a:t>
             </a:r>
           </a:p>
@@ -7239,6 +8180,12 @@
               </a:defRPr>
             </a:pPr>
             <a:r>
+              <a:rPr sz="1200">
+                <a:solidFill>
+                  <a:srgbClr val="070A40"/>
+                </a:solidFill>
+                <a:latin typeface="Arial"/>
+              </a:rPr>
               <a:t>Indirect Alternatives:</a:t>
             </a:r>
           </a:p>
@@ -7255,6 +8202,12 @@
               </a:defRPr>
             </a:pPr>
             <a:r>
+              <a:rPr sz="1200">
+                <a:solidFill>
+                  <a:srgbClr val="070A40"/>
+                </a:solidFill>
+                <a:latin typeface="Arial"/>
+              </a:rPr>
               <a:t>  •  Custom-built agent frameworks (high engineering cost)</a:t>
             </a:r>
           </a:p>
@@ -7271,6 +8224,12 @@
               </a:defRPr>
             </a:pPr>
             <a:r>
+              <a:rPr sz="1200">
+                <a:solidFill>
+                  <a:srgbClr val="070A40"/>
+                </a:solidFill>
+                <a:latin typeface="Arial"/>
+              </a:rPr>
               <a:t>  •  ChatGPT/Claude for single tasks (no orchestration)</a:t>
             </a:r>
           </a:p>
@@ -7287,6 +8246,12 @@
               </a:defRPr>
             </a:pPr>
             <a:r>
+              <a:rPr sz="1200">
+                <a:solidFill>
+                  <a:srgbClr val="070A40"/>
+                </a:solidFill>
+                <a:latin typeface="Arial"/>
+              </a:rPr>
               <a:t>  •  Enterprise ML platforms (overkill for most orgs)</a:t>
             </a:r>
           </a:p>
@@ -7316,6 +8281,12 @@
               </a:defRPr>
             </a:pPr>
             <a:r>
+              <a:rPr sz="1200">
+                <a:solidFill>
+                  <a:srgbClr val="070A40"/>
+                </a:solidFill>
+                <a:latin typeface="Arial"/>
+              </a:rPr>
               <a:t>Our Differentiation:</a:t>
             </a:r>
           </a:p>
@@ -7332,6 +8303,12 @@
               </a:defRPr>
             </a:pPr>
             <a:r>
+              <a:rPr sz="1200">
+                <a:solidFill>
+                  <a:srgbClr val="070A40"/>
+                </a:solidFill>
+                <a:latin typeface="Arial"/>
+              </a:rPr>
               <a:t>  ✓  AI-native company structure (not just a tool)</a:t>
             </a:r>
           </a:p>
@@ -7348,6 +8325,12 @@
               </a:defRPr>
             </a:pPr>
             <a:r>
+              <a:rPr sz="1200">
+                <a:solidFill>
+                  <a:srgbClr val="070A40"/>
+                </a:solidFill>
+                <a:latin typeface="Arial"/>
+              </a:rPr>
               <a:t>  ✓  Built-in cost transparency &amp; budget enforcement</a:t>
             </a:r>
           </a:p>
@@ -7364,6 +8347,12 @@
               </a:defRPr>
             </a:pPr>
             <a:r>
+              <a:rPr sz="1200">
+                <a:solidFill>
+                  <a:srgbClr val="070A40"/>
+                </a:solidFill>
+                <a:latin typeface="Arial"/>
+              </a:rPr>
               <a:t>  ✓  Human-in-the-loop safety gates</a:t>
             </a:r>
           </a:p>
@@ -7380,6 +8369,12 @@
               </a:defRPr>
             </a:pPr>
             <a:r>
+              <a:rPr sz="1200">
+                <a:solidFill>
+                  <a:srgbClr val="070A40"/>
+                </a:solidFill>
+                <a:latin typeface="Arial"/>
+              </a:rPr>
               <a:t>  ✓  Multi-provider with automatic fallback</a:t>
             </a:r>
           </a:p>
@@ -7396,6 +8391,12 @@
               </a:defRPr>
             </a:pPr>
             <a:r>
+              <a:rPr sz="1200">
+                <a:solidFill>
+                  <a:srgbClr val="070A40"/>
+                </a:solidFill>
+                <a:latin typeface="Arial"/>
+              </a:rPr>
               <a:t>  ✓  Local-first option (Ollama) for zero-cost inference</a:t>
             </a:r>
           </a:p>
@@ -7452,7 +8453,7 @@
     </a:clrScheme>
     <a:fontScheme name="Office">
       <a:majorFont>
-        <a:latin typeface="Calibri"/>
+        <a:latin typeface="Arial"/>
         <a:ea typeface=""/>
         <a:cs typeface=""/>
         <a:font script="Jpan" typeface="ＭＳ Ｐゴシック"/>
@@ -7487,7 +8488,7 @@
         <a:font script="Geor" typeface="Sylfaen"/>
       </a:majorFont>
       <a:minorFont>
-        <a:latin typeface="Calibri"/>
+        <a:latin typeface="Arial"/>
         <a:ea typeface=""/>
         <a:cs typeface=""/>
         <a:font script="Jpan" typeface="ＭＳ Ｐゴシック"/>

--- a/static/brand/templates/pitch-deck.pptx
+++ b/static/brand/templates/pitch-deck.pptx
@@ -3339,7 +3339,49 @@
                 </a:solidFill>
                 <a:latin typeface="Arial"/>
               </a:rPr>
-              <a:t>Confidential — August 2026</a:t>
+              <a:t>INTERNAL DRAFT — October 2026</a:t>
+            </a:r>
+          </a:p>
+        </p:txBody>
+      </p:sp>
+      <p:sp>
+        <p:nvSpPr>
+          <p:cNvPr id="8" name="TextBox 7"/>
+          <p:cNvSpPr txBox="1"/>
+          <p:nvPr/>
+        </p:nvSpPr>
+        <p:spPr>
+          <a:xfrm>
+            <a:off x="457200" y="6510528"/>
+            <a:ext cx="8229600" cy="274320"/>
+          </a:xfrm>
+          <a:prstGeom prst="rect">
+            <a:avLst/>
+          </a:prstGeom>
+          <a:noFill/>
+        </p:spPr>
+        <p:txBody>
+          <a:bodyPr wrap="square">
+            <a:spAutoFit/>
+          </a:bodyPr>
+          <a:lstStyle/>
+          <a:p>
+            <a:pPr algn="r">
+              <a:defRPr sz="1200" b="1">
+                <a:solidFill>
+                  <a:srgbClr val="00BFFF"/>
+                </a:solidFill>
+                <a:latin typeface="Arial"/>
+              </a:defRPr>
+            </a:pPr>
+            <a:r>
+              <a:rPr sz="1200" b="1">
+                <a:solidFill>
+                  <a:srgbClr val="00BFFF"/>
+                </a:solidFill>
+                <a:latin typeface="Arial"/>
+              </a:rPr>
+              <a:t>INTERNAL DRAFT — NOT FOR EXTERNAL DISTRIBUTION</a:t>
             </a:r>
           </a:p>
         </p:txBody>
@@ -3746,6 +3788,48 @@
           </a:p>
         </p:txBody>
       </p:sp>
+      <p:sp>
+        <p:nvSpPr>
+          <p:cNvPr id="5" name="TextBox 4"/>
+          <p:cNvSpPr txBox="1"/>
+          <p:nvPr/>
+        </p:nvSpPr>
+        <p:spPr>
+          <a:xfrm>
+            <a:off x="457200" y="6510528"/>
+            <a:ext cx="8229600" cy="274320"/>
+          </a:xfrm>
+          <a:prstGeom prst="rect">
+            <a:avLst/>
+          </a:prstGeom>
+          <a:noFill/>
+        </p:spPr>
+        <p:txBody>
+          <a:bodyPr wrap="square">
+            <a:spAutoFit/>
+          </a:bodyPr>
+          <a:lstStyle/>
+          <a:p>
+            <a:pPr algn="r">
+              <a:defRPr sz="1200" b="1">
+                <a:solidFill>
+                  <a:srgbClr val="070A40"/>
+                </a:solidFill>
+                <a:latin typeface="Arial"/>
+              </a:defRPr>
+            </a:pPr>
+            <a:r>
+              <a:rPr sz="1200" b="1">
+                <a:solidFill>
+                  <a:srgbClr val="070A40"/>
+                </a:solidFill>
+                <a:latin typeface="Arial"/>
+              </a:rPr>
+              <a:t>INTERNAL DRAFT — NOT FOR EXTERNAL DISTRIBUTION</a:t>
+            </a:r>
+          </a:p>
+        </p:txBody>
+      </p:sp>
     </p:spTree>
   </p:cSld>
   <p:clrMapOvr>
@@ -4214,6 +4298,48 @@
           </a:p>
         </p:txBody>
       </p:sp>
+      <p:sp>
+        <p:nvSpPr>
+          <p:cNvPr id="5" name="TextBox 4"/>
+          <p:cNvSpPr txBox="1"/>
+          <p:nvPr/>
+        </p:nvSpPr>
+        <p:spPr>
+          <a:xfrm>
+            <a:off x="457200" y="6510528"/>
+            <a:ext cx="8229600" cy="274320"/>
+          </a:xfrm>
+          <a:prstGeom prst="rect">
+            <a:avLst/>
+          </a:prstGeom>
+          <a:noFill/>
+        </p:spPr>
+        <p:txBody>
+          <a:bodyPr wrap="square">
+            <a:spAutoFit/>
+          </a:bodyPr>
+          <a:lstStyle/>
+          <a:p>
+            <a:pPr algn="r">
+              <a:defRPr sz="1200" b="1">
+                <a:solidFill>
+                  <a:srgbClr val="070A40"/>
+                </a:solidFill>
+                <a:latin typeface="Arial"/>
+              </a:defRPr>
+            </a:pPr>
+            <a:r>
+              <a:rPr sz="1200" b="1">
+                <a:solidFill>
+                  <a:srgbClr val="070A40"/>
+                </a:solidFill>
+                <a:latin typeface="Arial"/>
+              </a:rPr>
+              <a:t>INTERNAL DRAFT — NOT FOR EXTERNAL DISTRIBUTION</a:t>
+            </a:r>
+          </a:p>
+        </p:txBody>
+      </p:sp>
     </p:spTree>
   </p:cSld>
   <p:clrMapOvr>
@@ -4644,6 +4770,48 @@
           </a:p>
         </p:txBody>
       </p:sp>
+      <p:sp>
+        <p:nvSpPr>
+          <p:cNvPr id="7" name="TextBox 6"/>
+          <p:cNvSpPr txBox="1"/>
+          <p:nvPr/>
+        </p:nvSpPr>
+        <p:spPr>
+          <a:xfrm>
+            <a:off x="457200" y="6510528"/>
+            <a:ext cx="8229600" cy="274320"/>
+          </a:xfrm>
+          <a:prstGeom prst="rect">
+            <a:avLst/>
+          </a:prstGeom>
+          <a:noFill/>
+        </p:spPr>
+        <p:txBody>
+          <a:bodyPr wrap="square">
+            <a:spAutoFit/>
+          </a:bodyPr>
+          <a:lstStyle/>
+          <a:p>
+            <a:pPr algn="r">
+              <a:defRPr sz="1200" b="1">
+                <a:solidFill>
+                  <a:srgbClr val="00BFFF"/>
+                </a:solidFill>
+                <a:latin typeface="Arial"/>
+              </a:defRPr>
+            </a:pPr>
+            <a:r>
+              <a:rPr sz="1200" b="1">
+                <a:solidFill>
+                  <a:srgbClr val="00BFFF"/>
+                </a:solidFill>
+                <a:latin typeface="Arial"/>
+              </a:rPr>
+              <a:t>INTERNAL DRAFT — NOT FOR EXTERNAL DISTRIBUTION</a:t>
+            </a:r>
+          </a:p>
+        </p:txBody>
+      </p:sp>
     </p:spTree>
   </p:cSld>
   <p:clrMapOvr>
@@ -4926,6 +5094,48 @@
           </a:p>
         </p:txBody>
       </p:sp>
+      <p:sp>
+        <p:nvSpPr>
+          <p:cNvPr id="8" name="TextBox 7"/>
+          <p:cNvSpPr txBox="1"/>
+          <p:nvPr/>
+        </p:nvSpPr>
+        <p:spPr>
+          <a:xfrm>
+            <a:off x="457200" y="6510528"/>
+            <a:ext cx="8229600" cy="274320"/>
+          </a:xfrm>
+          <a:prstGeom prst="rect">
+            <a:avLst/>
+          </a:prstGeom>
+          <a:noFill/>
+        </p:spPr>
+        <p:txBody>
+          <a:bodyPr wrap="square">
+            <a:spAutoFit/>
+          </a:bodyPr>
+          <a:lstStyle/>
+          <a:p>
+            <a:pPr algn="r">
+              <a:defRPr sz="1200" b="1">
+                <a:solidFill>
+                  <a:srgbClr val="00BFFF"/>
+                </a:solidFill>
+                <a:latin typeface="Arial"/>
+              </a:defRPr>
+            </a:pPr>
+            <a:r>
+              <a:rPr sz="1200" b="1">
+                <a:solidFill>
+                  <a:srgbClr val="00BFFF"/>
+                </a:solidFill>
+                <a:latin typeface="Arial"/>
+              </a:rPr>
+              <a:t>INTERNAL DRAFT — NOT FOR EXTERNAL DISTRIBUTION</a:t>
+            </a:r>
+          </a:p>
+        </p:txBody>
+      </p:sp>
     </p:spTree>
   </p:cSld>
   <p:clrMapOvr>
@@ -5280,6 +5490,48 @@
           </a:p>
         </p:txBody>
       </p:sp>
+      <p:sp>
+        <p:nvSpPr>
+          <p:cNvPr id="5" name="TextBox 4"/>
+          <p:cNvSpPr txBox="1"/>
+          <p:nvPr/>
+        </p:nvSpPr>
+        <p:spPr>
+          <a:xfrm>
+            <a:off x="457200" y="6510528"/>
+            <a:ext cx="8229600" cy="274320"/>
+          </a:xfrm>
+          <a:prstGeom prst="rect">
+            <a:avLst/>
+          </a:prstGeom>
+          <a:noFill/>
+        </p:spPr>
+        <p:txBody>
+          <a:bodyPr wrap="square">
+            <a:spAutoFit/>
+          </a:bodyPr>
+          <a:lstStyle/>
+          <a:p>
+            <a:pPr algn="r">
+              <a:defRPr sz="1200" b="1">
+                <a:solidFill>
+                  <a:srgbClr val="070A40"/>
+                </a:solidFill>
+                <a:latin typeface="Arial"/>
+              </a:defRPr>
+            </a:pPr>
+            <a:r>
+              <a:rPr sz="1200" b="1">
+                <a:solidFill>
+                  <a:srgbClr val="070A40"/>
+                </a:solidFill>
+                <a:latin typeface="Arial"/>
+              </a:rPr>
+              <a:t>INTERNAL DRAFT — NOT FOR EXTERNAL DISTRIBUTION</a:t>
+            </a:r>
+          </a:p>
+        </p:txBody>
+      </p:sp>
     </p:spTree>
   </p:cSld>
   <p:clrMapOvr>
@@ -5587,6 +5839,48 @@
           </a:p>
         </p:txBody>
       </p:sp>
+      <p:sp>
+        <p:nvSpPr>
+          <p:cNvPr id="7" name="TextBox 6"/>
+          <p:cNvSpPr txBox="1"/>
+          <p:nvPr/>
+        </p:nvSpPr>
+        <p:spPr>
+          <a:xfrm>
+            <a:off x="457200" y="6510528"/>
+            <a:ext cx="8229600" cy="274320"/>
+          </a:xfrm>
+          <a:prstGeom prst="rect">
+            <a:avLst/>
+          </a:prstGeom>
+          <a:noFill/>
+        </p:spPr>
+        <p:txBody>
+          <a:bodyPr wrap="square">
+            <a:spAutoFit/>
+          </a:bodyPr>
+          <a:lstStyle/>
+          <a:p>
+            <a:pPr algn="r">
+              <a:defRPr sz="1200" b="1">
+                <a:solidFill>
+                  <a:srgbClr val="070A40"/>
+                </a:solidFill>
+                <a:latin typeface="Arial"/>
+              </a:defRPr>
+            </a:pPr>
+            <a:r>
+              <a:rPr sz="1200" b="1">
+                <a:solidFill>
+                  <a:srgbClr val="070A40"/>
+                </a:solidFill>
+                <a:latin typeface="Arial"/>
+              </a:rPr>
+              <a:t>INTERNAL DRAFT — NOT FOR EXTERNAL DISTRIBUTION</a:t>
+            </a:r>
+          </a:p>
+        </p:txBody>
+      </p:sp>
     </p:spTree>
   </p:cSld>
   <p:clrMapOvr>
@@ -5895,6 +6189,48 @@
           </a:p>
         </p:txBody>
       </p:sp>
+      <p:sp>
+        <p:nvSpPr>
+          <p:cNvPr id="6" name="TextBox 5"/>
+          <p:cNvSpPr txBox="1"/>
+          <p:nvPr/>
+        </p:nvSpPr>
+        <p:spPr>
+          <a:xfrm>
+            <a:off x="457200" y="6510528"/>
+            <a:ext cx="8229600" cy="274320"/>
+          </a:xfrm>
+          <a:prstGeom prst="rect">
+            <a:avLst/>
+          </a:prstGeom>
+          <a:noFill/>
+        </p:spPr>
+        <p:txBody>
+          <a:bodyPr wrap="square">
+            <a:spAutoFit/>
+          </a:bodyPr>
+          <a:lstStyle/>
+          <a:p>
+            <a:pPr algn="r">
+              <a:defRPr sz="1200" b="1">
+                <a:solidFill>
+                  <a:srgbClr val="070A40"/>
+                </a:solidFill>
+                <a:latin typeface="Arial"/>
+              </a:defRPr>
+            </a:pPr>
+            <a:r>
+              <a:rPr sz="1200" b="1">
+                <a:solidFill>
+                  <a:srgbClr val="070A40"/>
+                </a:solidFill>
+                <a:latin typeface="Arial"/>
+              </a:rPr>
+              <a:t>INTERNAL DRAFT — NOT FOR EXTERNAL DISTRIBUTION</a:t>
+            </a:r>
+          </a:p>
+        </p:txBody>
+      </p:sp>
     </p:spTree>
   </p:cSld>
   <p:clrMapOvr>
@@ -6290,6 +6626,48 @@
           </a:p>
         </p:txBody>
       </p:sp>
+      <p:sp>
+        <p:nvSpPr>
+          <p:cNvPr id="8" name="TextBox 7"/>
+          <p:cNvSpPr txBox="1"/>
+          <p:nvPr/>
+        </p:nvSpPr>
+        <p:spPr>
+          <a:xfrm>
+            <a:off x="457200" y="6510528"/>
+            <a:ext cx="8229600" cy="274320"/>
+          </a:xfrm>
+          <a:prstGeom prst="rect">
+            <a:avLst/>
+          </a:prstGeom>
+          <a:noFill/>
+        </p:spPr>
+        <p:txBody>
+          <a:bodyPr wrap="square">
+            <a:spAutoFit/>
+          </a:bodyPr>
+          <a:lstStyle/>
+          <a:p>
+            <a:pPr algn="r">
+              <a:defRPr sz="1200" b="1">
+                <a:solidFill>
+                  <a:srgbClr val="070A40"/>
+                </a:solidFill>
+                <a:latin typeface="Arial"/>
+              </a:defRPr>
+            </a:pPr>
+            <a:r>
+              <a:rPr sz="1200" b="1">
+                <a:solidFill>
+                  <a:srgbClr val="070A40"/>
+                </a:solidFill>
+                <a:latin typeface="Arial"/>
+              </a:rPr>
+              <a:t>INTERNAL DRAFT — NOT FOR EXTERNAL DISTRIBUTION</a:t>
+            </a:r>
+          </a:p>
+        </p:txBody>
+      </p:sp>
     </p:spTree>
   </p:cSld>
   <p:clrMapOvr>
@@ -6758,6 +7136,48 @@
           </a:p>
         </p:txBody>
       </p:sp>
+      <p:sp>
+        <p:nvSpPr>
+          <p:cNvPr id="5" name="TextBox 4"/>
+          <p:cNvSpPr txBox="1"/>
+          <p:nvPr/>
+        </p:nvSpPr>
+        <p:spPr>
+          <a:xfrm>
+            <a:off x="457200" y="6510528"/>
+            <a:ext cx="8229600" cy="274320"/>
+          </a:xfrm>
+          <a:prstGeom prst="rect">
+            <a:avLst/>
+          </a:prstGeom>
+          <a:noFill/>
+        </p:spPr>
+        <p:txBody>
+          <a:bodyPr wrap="square">
+            <a:spAutoFit/>
+          </a:bodyPr>
+          <a:lstStyle/>
+          <a:p>
+            <a:pPr algn="r">
+              <a:defRPr sz="1200" b="1">
+                <a:solidFill>
+                  <a:srgbClr val="070A40"/>
+                </a:solidFill>
+                <a:latin typeface="Arial"/>
+              </a:defRPr>
+            </a:pPr>
+            <a:r>
+              <a:rPr sz="1200" b="1">
+                <a:solidFill>
+                  <a:srgbClr val="070A40"/>
+                </a:solidFill>
+                <a:latin typeface="Arial"/>
+              </a:rPr>
+              <a:t>INTERNAL DRAFT — NOT FOR EXTERNAL DISTRIBUTION</a:t>
+            </a:r>
+          </a:p>
+        </p:txBody>
+      </p:sp>
     </p:spTree>
   </p:cSld>
   <p:clrMapOvr>
@@ -7182,6 +7602,48 @@
           </a:p>
         </p:txBody>
       </p:sp>
+      <p:sp>
+        <p:nvSpPr>
+          <p:cNvPr id="5" name="TextBox 4"/>
+          <p:cNvSpPr txBox="1"/>
+          <p:nvPr/>
+        </p:nvSpPr>
+        <p:spPr>
+          <a:xfrm>
+            <a:off x="457200" y="6510528"/>
+            <a:ext cx="8229600" cy="274320"/>
+          </a:xfrm>
+          <a:prstGeom prst="rect">
+            <a:avLst/>
+          </a:prstGeom>
+          <a:noFill/>
+        </p:spPr>
+        <p:txBody>
+          <a:bodyPr wrap="square">
+            <a:spAutoFit/>
+          </a:bodyPr>
+          <a:lstStyle/>
+          <a:p>
+            <a:pPr algn="r">
+              <a:defRPr sz="1200" b="1">
+                <a:solidFill>
+                  <a:srgbClr val="070A40"/>
+                </a:solidFill>
+                <a:latin typeface="Arial"/>
+              </a:defRPr>
+            </a:pPr>
+            <a:r>
+              <a:rPr sz="1200" b="1">
+                <a:solidFill>
+                  <a:srgbClr val="070A40"/>
+                </a:solidFill>
+                <a:latin typeface="Arial"/>
+              </a:rPr>
+              <a:t>INTERNAL DRAFT — NOT FOR EXTERNAL DISTRIBUTION</a:t>
+            </a:r>
+          </a:p>
+        </p:txBody>
+      </p:sp>
     </p:spTree>
   </p:cSld>
   <p:clrMapOvr>
@@ -7934,6 +8396,48 @@
           </a:p>
         </p:txBody>
       </p:sp>
+      <p:sp>
+        <p:nvSpPr>
+          <p:cNvPr id="17" name="TextBox 16"/>
+          <p:cNvSpPr txBox="1"/>
+          <p:nvPr/>
+        </p:nvSpPr>
+        <p:spPr>
+          <a:xfrm>
+            <a:off x="457200" y="6510528"/>
+            <a:ext cx="8229600" cy="274320"/>
+          </a:xfrm>
+          <a:prstGeom prst="rect">
+            <a:avLst/>
+          </a:prstGeom>
+          <a:noFill/>
+        </p:spPr>
+        <p:txBody>
+          <a:bodyPr wrap="square">
+            <a:spAutoFit/>
+          </a:bodyPr>
+          <a:lstStyle/>
+          <a:p>
+            <a:pPr algn="r">
+              <a:defRPr sz="1200" b="1">
+                <a:solidFill>
+                  <a:srgbClr val="070A40"/>
+                </a:solidFill>
+                <a:latin typeface="Arial"/>
+              </a:defRPr>
+            </a:pPr>
+            <a:r>
+              <a:rPr sz="1200" b="1">
+                <a:solidFill>
+                  <a:srgbClr val="070A40"/>
+                </a:solidFill>
+                <a:latin typeface="Arial"/>
+              </a:rPr>
+              <a:t>INTERNAL DRAFT — NOT FOR EXTERNAL DISTRIBUTION</a:t>
+            </a:r>
+          </a:p>
+        </p:txBody>
+      </p:sp>
     </p:spTree>
   </p:cSld>
   <p:clrMapOvr>
@@ -8398,6 +8902,48 @@
                 <a:latin typeface="Arial"/>
               </a:rPr>
               <a:t>  ✓  Local-first option (Ollama) for zero-cost inference</a:t>
+            </a:r>
+          </a:p>
+        </p:txBody>
+      </p:sp>
+      <p:sp>
+        <p:nvSpPr>
+          <p:cNvPr id="5" name="TextBox 4"/>
+          <p:cNvSpPr txBox="1"/>
+          <p:nvPr/>
+        </p:nvSpPr>
+        <p:spPr>
+          <a:xfrm>
+            <a:off x="457200" y="6510528"/>
+            <a:ext cx="8229600" cy="274320"/>
+          </a:xfrm>
+          <a:prstGeom prst="rect">
+            <a:avLst/>
+          </a:prstGeom>
+          <a:noFill/>
+        </p:spPr>
+        <p:txBody>
+          <a:bodyPr wrap="square">
+            <a:spAutoFit/>
+          </a:bodyPr>
+          <a:lstStyle/>
+          <a:p>
+            <a:pPr algn="r">
+              <a:defRPr sz="1200" b="1">
+                <a:solidFill>
+                  <a:srgbClr val="070A40"/>
+                </a:solidFill>
+                <a:latin typeface="Arial"/>
+              </a:defRPr>
+            </a:pPr>
+            <a:r>
+              <a:rPr sz="1200" b="1">
+                <a:solidFill>
+                  <a:srgbClr val="070A40"/>
+                </a:solidFill>
+                <a:latin typeface="Arial"/>
+              </a:rPr>
+              <a:t>INTERNAL DRAFT — NOT FOR EXTERNAL DISTRIBUTION</a:t>
             </a:r>
           </a:p>
         </p:txBody>

--- a/static/brand/templates/pitch-deck.pptx
+++ b/static/brand/templates/pitch-deck.pptx
@@ -16,8 +16,6 @@
     <p:sldId id="264" r:id="rId15"/>
     <p:sldId id="265" r:id="rId16"/>
     <p:sldId id="266" r:id="rId17"/>
-    <p:sldId id="267" r:id="rId18"/>
-    <p:sldId id="268" r:id="rId19"/>
   </p:sldIdLst>
   <p:sldSz cx="9144000" cy="6858000" type="screen4x3"/>
   <p:notesSz cx="6858000" cy="9144000"/>
@@ -3183,8 +3181,8 @@
         </p:nvSpPr>
         <p:spPr>
           <a:xfrm>
-            <a:off x="914400" y="2331720"/>
-            <a:ext cx="7315200" cy="914400"/>
+            <a:off x="365760" y="2468880"/>
+            <a:ext cx="8412480" cy="731520"/>
           </a:xfrm>
           <a:prstGeom prst="rect">
             <a:avLst/>
@@ -3225,8 +3223,8 @@
         </p:nvSpPr>
         <p:spPr>
           <a:xfrm>
-            <a:off x="914400" y="3337560"/>
-            <a:ext cx="7315200" cy="548640"/>
+            <a:off x="914400" y="3291840"/>
+            <a:ext cx="7315200" cy="457200"/>
           </a:xfrm>
           <a:prstGeom prst="rect">
             <a:avLst/>
@@ -3267,7 +3265,7 @@
         </p:nvSpPr>
         <p:spPr>
           <a:xfrm>
-            <a:off x="3200400" y="3977639"/>
+            <a:off x="3200400" y="3931920"/>
             <a:ext cx="2743200" cy="36576"/>
           </a:xfrm>
           <a:prstGeom prst="rect">
@@ -3310,8 +3308,8 @@
         </p:nvSpPr>
         <p:spPr>
           <a:xfrm>
-            <a:off x="914400" y="4251960"/>
-            <a:ext cx="7315200" cy="457200"/>
+            <a:off x="914400" y="4224528"/>
+            <a:ext cx="7315200" cy="274320"/>
           </a:xfrm>
           <a:prstGeom prst="rect">
             <a:avLst/>
@@ -3325,7 +3323,7 @@
           <a:lstStyle/>
           <a:p>
             <a:pPr algn="ctr">
-              <a:defRPr sz="1200" b="0">
+              <a:defRPr sz="1200" b="1">
                 <a:solidFill>
                   <a:srgbClr val="9CA3AF"/>
                 </a:solidFill>
@@ -3333,13 +3331,55 @@
               </a:defRPr>
             </a:pPr>
             <a:r>
-              <a:rPr sz="1200" b="0">
+              <a:rPr sz="1200" b="1">
                 <a:solidFill>
                   <a:srgbClr val="9CA3AF"/>
                 </a:solidFill>
                 <a:latin typeface="Arial"/>
               </a:rPr>
-              <a:t>Confidential — August 2026</a:t>
+              <a:t>INTERNAL DRAFT — October 2026</a:t>
+            </a:r>
+          </a:p>
+        </p:txBody>
+      </p:sp>
+      <p:sp>
+        <p:nvSpPr>
+          <p:cNvPr id="8" name="TextBox 7"/>
+          <p:cNvSpPr txBox="1"/>
+          <p:nvPr/>
+        </p:nvSpPr>
+        <p:spPr>
+          <a:xfrm>
+            <a:off x="457200" y="6510528"/>
+            <a:ext cx="8229600" cy="274320"/>
+          </a:xfrm>
+          <a:prstGeom prst="rect">
+            <a:avLst/>
+          </a:prstGeom>
+          <a:noFill/>
+        </p:spPr>
+        <p:txBody>
+          <a:bodyPr wrap="square">
+            <a:spAutoFit/>
+          </a:bodyPr>
+          <a:lstStyle/>
+          <a:p>
+            <a:pPr algn="r">
+              <a:defRPr sz="1200" b="1">
+                <a:solidFill>
+                  <a:srgbClr val="00BFFF"/>
+                </a:solidFill>
+                <a:latin typeface="Arial"/>
+              </a:defRPr>
+            </a:pPr>
+            <a:r>
+              <a:rPr sz="1200" b="1">
+                <a:solidFill>
+                  <a:srgbClr val="00BFFF"/>
+                </a:solidFill>
+                <a:latin typeface="Arial"/>
+              </a:rPr>
+              <a:t>INTERNAL DRAFT — NOT FOR EXTERNAL DISTRIBUTION</a:t>
             </a:r>
           </a:p>
         </p:txBody>
@@ -3358,7 +3398,7 @@
     <p:bg>
       <p:bgPr>
         <a:solidFill>
-          <a:srgbClr val="FFFFFF"/>
+          <a:srgbClr val="070A40"/>
         </a:solidFill>
         <a:effectLst/>
       </p:bgPr>
@@ -3421,8 +3461,8 @@
         </p:nvSpPr>
         <p:spPr>
           <a:xfrm>
-            <a:off x="457200" y="365760"/>
-            <a:ext cx="8229600" cy="548640"/>
+            <a:off x="914400" y="502920"/>
+            <a:ext cx="7315200" cy="640080"/>
           </a:xfrm>
           <a:prstGeom prst="rect">
             <a:avLst/>
@@ -3435,36 +3475,205 @@
           </a:bodyPr>
           <a:lstStyle/>
           <a:p>
+            <a:pPr algn="ctr">
+              <a:defRPr sz="3200" b="1">
+                <a:solidFill>
+                  <a:srgbClr val="FFFFFF"/>
+                </a:solidFill>
+                <a:latin typeface="Arial"/>
+              </a:defRPr>
+            </a:pPr>
+            <a:r>
+              <a:rPr sz="3200" b="1">
+                <a:solidFill>
+                  <a:srgbClr val="FFFFFF"/>
+                </a:solidFill>
+                <a:latin typeface="Arial"/>
+              </a:rPr>
+              <a:t>THE ASK</a:t>
+            </a:r>
+          </a:p>
+        </p:txBody>
+      </p:sp>
+      <p:sp>
+        <p:nvSpPr>
+          <p:cNvPr id="4" name="Rectangle 3"/>
+          <p:cNvSpPr/>
+          <p:nvPr/>
+        </p:nvSpPr>
+        <p:spPr>
+          <a:xfrm>
+            <a:off x="3200400" y="1234440"/>
+            <a:ext cx="2743200" cy="36576"/>
+          </a:xfrm>
+          <a:prstGeom prst="rect">
+            <a:avLst/>
+          </a:prstGeom>
+          <a:solidFill>
+            <a:srgbClr val="E63946"/>
+          </a:solidFill>
+          <a:ln>
+            <a:noFill/>
+          </a:ln>
+        </p:spPr>
+        <p:style>
+          <a:lnRef idx="1">
+            <a:schemeClr val="accent1"/>
+          </a:lnRef>
+          <a:fillRef idx="3">
+            <a:schemeClr val="accent1"/>
+          </a:fillRef>
+          <a:effectRef idx="2">
+            <a:schemeClr val="accent1"/>
+          </a:effectRef>
+          <a:fontRef idx="minor">
+            <a:schemeClr val="lt1"/>
+          </a:fontRef>
+        </p:style>
+        <p:txBody>
+          <a:bodyPr rtlCol="0" anchor="ctr"/>
+          <a:lstStyle/>
+          <a:p>
+            <a:pPr algn="ctr"/>
+          </a:p>
+        </p:txBody>
+      </p:sp>
+      <p:sp>
+        <p:nvSpPr>
+          <p:cNvPr id="5" name="TextBox 4"/>
+          <p:cNvSpPr txBox="1"/>
+          <p:nvPr/>
+        </p:nvSpPr>
+        <p:spPr>
+          <a:xfrm>
+            <a:off x="914400" y="1417320"/>
+            <a:ext cx="7315200" cy="502920"/>
+          </a:xfrm>
+          <a:prstGeom prst="rect">
+            <a:avLst/>
+          </a:prstGeom>
+          <a:noFill/>
+        </p:spPr>
+        <p:txBody>
+          <a:bodyPr wrap="square">
+            <a:spAutoFit/>
+          </a:bodyPr>
+          <a:lstStyle/>
+          <a:p>
+            <a:pPr algn="ctr">
+              <a:defRPr sz="2400" b="0">
+                <a:solidFill>
+                  <a:srgbClr val="00BFFF"/>
+                </a:solidFill>
+                <a:latin typeface="Arial"/>
+              </a:defRPr>
+            </a:pPr>
+            <a:r>
+              <a:rPr sz="2400" b="0">
+                <a:solidFill>
+                  <a:srgbClr val="00BFFF"/>
+                </a:solidFill>
+                <a:latin typeface="Arial"/>
+              </a:rPr>
+              <a:t>Raising seed capital</a:t>
+            </a:r>
+          </a:p>
+        </p:txBody>
+      </p:sp>
+      <p:sp>
+        <p:nvSpPr>
+          <p:cNvPr id="6" name="TextBox 5"/>
+          <p:cNvSpPr txBox="1"/>
+          <p:nvPr/>
+        </p:nvSpPr>
+        <p:spPr>
+          <a:xfrm>
+            <a:off x="914400" y="1965960"/>
+            <a:ext cx="7315200" cy="411480"/>
+          </a:xfrm>
+          <a:prstGeom prst="rect">
+            <a:avLst/>
+          </a:prstGeom>
+          <a:noFill/>
+        </p:spPr>
+        <p:txBody>
+          <a:bodyPr wrap="square">
+            <a:spAutoFit/>
+          </a:bodyPr>
+          <a:lstStyle/>
+          <a:p>
+            <a:pPr algn="ctr">
+              <a:defRPr sz="1200" b="1">
+                <a:solidFill>
+                  <a:srgbClr val="9CA3AF"/>
+                </a:solidFill>
+                <a:latin typeface="Arial"/>
+              </a:defRPr>
+            </a:pPr>
+            <a:r>
+              <a:rPr sz="1200" b="1">
+                <a:solidFill>
+                  <a:srgbClr val="9CA3AF"/>
+                </a:solidFill>
+                <a:latin typeface="Arial"/>
+              </a:rPr>
+              <a:t>Amount, instrument and runway: pending board decision — not stated in this draft.</a:t>
+            </a:r>
+          </a:p>
+        </p:txBody>
+      </p:sp>
+      <p:sp>
+        <p:nvSpPr>
+          <p:cNvPr id="7" name="TextBox 6"/>
+          <p:cNvSpPr txBox="1"/>
+          <p:nvPr/>
+        </p:nvSpPr>
+        <p:spPr>
+          <a:xfrm>
+            <a:off x="914400" y="2606040"/>
+            <a:ext cx="3474720" cy="365760"/>
+          </a:xfrm>
+          <a:prstGeom prst="rect">
+            <a:avLst/>
+          </a:prstGeom>
+          <a:noFill/>
+        </p:spPr>
+        <p:txBody>
+          <a:bodyPr wrap="square">
+            <a:spAutoFit/>
+          </a:bodyPr>
+          <a:lstStyle/>
+          <a:p>
             <a:pPr algn="l">
-              <a:defRPr sz="2800" b="1">
-                <a:solidFill>
-                  <a:srgbClr val="070A40"/>
-                </a:solidFill>
-                <a:latin typeface="Arial"/>
-              </a:defRPr>
-            </a:pPr>
-            <a:r>
-              <a:rPr sz="2800" b="1">
-                <a:solidFill>
-                  <a:srgbClr val="070A40"/>
-                </a:solidFill>
-                <a:latin typeface="Arial"/>
-              </a:rPr>
-              <a:t>TEAM</a:t>
-            </a:r>
-          </a:p>
-        </p:txBody>
-      </p:sp>
-      <p:sp>
-        <p:nvSpPr>
-          <p:cNvPr id="4" name="TextBox 3"/>
+              <a:defRPr sz="1400" b="1">
+                <a:solidFill>
+                  <a:srgbClr val="FFFFFF"/>
+                </a:solidFill>
+                <a:latin typeface="Arial"/>
+              </a:defRPr>
+            </a:pPr>
+            <a:r>
+              <a:rPr sz="1400" b="1">
+                <a:solidFill>
+                  <a:srgbClr val="FFFFFF"/>
+                </a:solidFill>
+                <a:latin typeface="Arial"/>
+              </a:rPr>
+              <a:t>Use of funds</a:t>
+            </a:r>
+          </a:p>
+        </p:txBody>
+      </p:sp>
+      <p:sp>
+        <p:nvSpPr>
+          <p:cNvPr id="8" name="TextBox 7"/>
           <p:cNvSpPr txBox="1"/>
           <p:nvPr/>
         </p:nvSpPr>
         <p:spPr>
           <a:xfrm>
-            <a:off x="731520" y="1097280"/>
-            <a:ext cx="7772400" cy="5029200"/>
+            <a:off x="914400" y="3017520"/>
+            <a:ext cx="3566160" cy="2926080"/>
           </a:xfrm>
           <a:prstGeom prst="rect">
             <a:avLst/>
@@ -3481,21 +3690,21 @@
               <a:spcAft>
                 <a:spcPts val="600"/>
               </a:spcAft>
-              <a:defRPr sz="1300">
-                <a:solidFill>
-                  <a:srgbClr val="070A40"/>
-                </a:solidFill>
-                <a:latin typeface="Arial"/>
-              </a:defRPr>
-            </a:pPr>
-            <a:r>
-              <a:rPr sz="1300">
-                <a:solidFill>
-                  <a:srgbClr val="070A40"/>
-                </a:solidFill>
-                <a:latin typeface="Arial"/>
-              </a:rPr>
-              <a:t>Leadership:</a:t>
+              <a:defRPr sz="1200">
+                <a:solidFill>
+                  <a:srgbClr val="FFFFFF"/>
+                </a:solidFill>
+                <a:latin typeface="Arial"/>
+              </a:defRPr>
+            </a:pPr>
+            <a:r>
+              <a:rPr sz="1200">
+                <a:solidFill>
+                  <a:srgbClr val="FFFFFF"/>
+                </a:solidFill>
+                <a:latin typeface="Arial"/>
+              </a:rPr>
+              <a:t>Talent — sales, delivery, compliance, DevRel</a:t>
             </a:r>
           </a:p>
           <a:p>
@@ -3503,21 +3712,21 @@
               <a:spcAft>
                 <a:spcPts val="600"/>
               </a:spcAft>
-              <a:defRPr sz="1300">
-                <a:solidFill>
-                  <a:srgbClr val="070A40"/>
-                </a:solidFill>
-                <a:latin typeface="Arial"/>
-              </a:defRPr>
-            </a:pPr>
-            <a:r>
-              <a:rPr sz="1300">
-                <a:solidFill>
-                  <a:srgbClr val="070A40"/>
-                </a:solidFill>
-                <a:latin typeface="Arial"/>
-              </a:rPr>
-              <a:t>  •  Jack Mlusu — Founder &amp; CEO — builder-operator; runs an AI agent organization</a:t>
+              <a:defRPr sz="1200">
+                <a:solidFill>
+                  <a:srgbClr val="FFFFFF"/>
+                </a:solidFill>
+                <a:latin typeface="Arial"/>
+              </a:defRPr>
+            </a:pPr>
+            <a:r>
+              <a:rPr sz="1200">
+                <a:solidFill>
+                  <a:srgbClr val="FFFFFF"/>
+                </a:solidFill>
+                <a:latin typeface="Arial"/>
+              </a:rPr>
+              <a:t>Client pilots — Offers A, B and C</a:t>
             </a:r>
           </a:p>
           <a:p>
@@ -3525,21 +3734,21 @@
               <a:spcAft>
                 <a:spcPts val="600"/>
               </a:spcAft>
-              <a:defRPr sz="1300">
-                <a:solidFill>
-                  <a:srgbClr val="070A40"/>
-                </a:solidFill>
-                <a:latin typeface="Arial"/>
-              </a:defRPr>
-            </a:pPr>
-            <a:r>
-              <a:rPr sz="1300">
-                <a:solidFill>
-                  <a:srgbClr val="070A40"/>
-                </a:solidFill>
-                <a:latin typeface="Arial"/>
-              </a:rPr>
-              <a:t>  •  AI Executive Cabinet — CTO, CFO, CMO, CLO, CSO, COO, CAIO</a:t>
+              <a:defRPr sz="1200">
+                <a:solidFill>
+                  <a:srgbClr val="FFFFFF"/>
+                </a:solidFill>
+                <a:latin typeface="Arial"/>
+              </a:defRPr>
+            </a:pPr>
+            <a:r>
+              <a:rPr sz="1200">
+                <a:solidFill>
+                  <a:srgbClr val="FFFFFF"/>
+                </a:solidFill>
+                <a:latin typeface="Arial"/>
+              </a:rPr>
+              <a:t>Hardware lab — on-prem GPU, field kits</a:t>
             </a:r>
           </a:p>
           <a:p>
@@ -3547,21 +3756,21 @@
               <a:spcAft>
                 <a:spcPts val="600"/>
               </a:spcAft>
-              <a:defRPr sz="1300">
-                <a:solidFill>
-                  <a:srgbClr val="070A40"/>
-                </a:solidFill>
-                <a:latin typeface="Arial"/>
-              </a:defRPr>
-            </a:pPr>
-            <a:r>
-              <a:rPr sz="1300">
-                <a:solidFill>
-                  <a:srgbClr val="070A40"/>
-                </a:solidFill>
-                <a:latin typeface="Arial"/>
-              </a:rPr>
-              <a:t>  •  Board of Directors — Standing committees (Strategy, Finance, Risk, Technology, Product, Customer, Governance)</a:t>
+              <a:defRPr sz="1200">
+                <a:solidFill>
+                  <a:srgbClr val="FFFFFF"/>
+                </a:solidFill>
+                <a:latin typeface="Arial"/>
+              </a:defRPr>
+            </a:pPr>
+            <a:r>
+              <a:rPr sz="1200">
+                <a:solidFill>
+                  <a:srgbClr val="FFFFFF"/>
+                </a:solidFill>
+                <a:latin typeface="Arial"/>
+              </a:rPr>
+              <a:t>Compliance — Malawi DPA 2017, GDPR, SOC 2 readiness</a:t>
             </a:r>
           </a:p>
           <a:p>
@@ -3569,34 +3778,108 @@
               <a:spcAft>
                 <a:spcPts val="600"/>
               </a:spcAft>
-              <a:defRPr sz="1300">
-                <a:solidFill>
-                  <a:srgbClr val="070A40"/>
-                </a:solidFill>
-                <a:latin typeface="Arial"/>
-              </a:defRPr>
-            </a:pPr>
-          </a:p>
+              <a:defRPr sz="1200">
+                <a:solidFill>
+                  <a:srgbClr val="FFFFFF"/>
+                </a:solidFill>
+                <a:latin typeface="Arial"/>
+              </a:defRPr>
+            </a:pPr>
+            <a:r>
+              <a:rPr sz="1200">
+                <a:solidFill>
+                  <a:srgbClr val="FFFFFF"/>
+                </a:solidFill>
+                <a:latin typeface="Arial"/>
+              </a:rPr>
+              <a:t>Emergency reserve</a:t>
+            </a:r>
+          </a:p>
+        </p:txBody>
+      </p:sp>
+      <p:sp>
+        <p:nvSpPr>
+          <p:cNvPr id="9" name="TextBox 8"/>
+          <p:cNvSpPr txBox="1"/>
+          <p:nvPr/>
+        </p:nvSpPr>
+        <p:spPr>
+          <a:xfrm>
+            <a:off x="4846320" y="2606040"/>
+            <a:ext cx="3474720" cy="365760"/>
+          </a:xfrm>
+          <a:prstGeom prst="rect">
+            <a:avLst/>
+          </a:prstGeom>
+          <a:noFill/>
+        </p:spPr>
+        <p:txBody>
+          <a:bodyPr wrap="square">
+            <a:spAutoFit/>
+          </a:bodyPr>
+          <a:lstStyle/>
+          <a:p>
+            <a:pPr algn="l">
+              <a:defRPr sz="1400" b="1">
+                <a:solidFill>
+                  <a:srgbClr val="FFFFFF"/>
+                </a:solidFill>
+                <a:latin typeface="Arial"/>
+              </a:defRPr>
+            </a:pPr>
+            <a:r>
+              <a:rPr sz="1400" b="1">
+                <a:solidFill>
+                  <a:srgbClr val="FFFFFF"/>
+                </a:solidFill>
+                <a:latin typeface="Arial"/>
+              </a:rPr>
+              <a:t>Milestones this buys</a:t>
+            </a:r>
+          </a:p>
+        </p:txBody>
+      </p:sp>
+      <p:sp>
+        <p:nvSpPr>
+          <p:cNvPr id="10" name="TextBox 9"/>
+          <p:cNvSpPr txBox="1"/>
+          <p:nvPr/>
+        </p:nvSpPr>
+        <p:spPr>
+          <a:xfrm>
+            <a:off x="4846320" y="3017520"/>
+            <a:ext cx="3566160" cy="2926080"/>
+          </a:xfrm>
+          <a:prstGeom prst="rect">
+            <a:avLst/>
+          </a:prstGeom>
+          <a:noFill/>
+        </p:spPr>
+        <p:txBody>
+          <a:bodyPr wrap="square">
+            <a:spAutoFit/>
+          </a:bodyPr>
+          <a:lstStyle/>
           <a:p>
             <a:pPr>
               <a:spcAft>
                 <a:spcPts val="600"/>
               </a:spcAft>
-              <a:defRPr sz="1300">
-                <a:solidFill>
-                  <a:srgbClr val="070A40"/>
-                </a:solidFill>
-                <a:latin typeface="Arial"/>
-              </a:defRPr>
-            </a:pPr>
-            <a:r>
-              <a:rPr sz="1300">
-                <a:solidFill>
-                  <a:srgbClr val="070A40"/>
-                </a:solidFill>
-                <a:latin typeface="Arial"/>
-              </a:rPr>
-              <a:t>Advisors:</a:t>
+              <a:defRPr sz="1200">
+                <a:solidFill>
+                  <a:srgbClr val="FFFFFF"/>
+                </a:solidFill>
+                <a:latin typeface="Arial"/>
+              </a:defRPr>
+            </a:pPr>
+            <a:r>
+              <a:rPr sz="1200">
+                <a:solidFill>
+                  <a:srgbClr val="FFFFFF"/>
+                </a:solidFill>
+                <a:latin typeface="Arial"/>
+              </a:rPr>
+              <a:t>Signed paying pilots across Offers A–C</a:t>
             </a:r>
           </a:p>
           <a:p>
@@ -3604,21 +3887,21 @@
               <a:spcAft>
                 <a:spcPts val="600"/>
               </a:spcAft>
-              <a:defRPr sz="1300">
-                <a:solidFill>
-                  <a:srgbClr val="070A40"/>
-                </a:solidFill>
-                <a:latin typeface="Arial"/>
-              </a:defRPr>
-            </a:pPr>
-            <a:r>
-              <a:rPr sz="1300">
-                <a:solidFill>
-                  <a:srgbClr val="070A40"/>
-                </a:solidFill>
-                <a:latin typeface="Arial"/>
-              </a:rPr>
-              <a:t>  •  Board Chair — governance &amp; escalation authority</a:t>
+              <a:defRPr sz="1200">
+                <a:solidFill>
+                  <a:srgbClr val="FFFFFF"/>
+                </a:solidFill>
+                <a:latin typeface="Arial"/>
+              </a:defRPr>
+            </a:pPr>
+            <a:r>
+              <a:rPr sz="1200">
+                <a:solidFill>
+                  <a:srgbClr val="FFFFFF"/>
+                </a:solidFill>
+                <a:latin typeface="Arial"/>
+              </a:rPr>
+              <a:t>Recurring revenue run-rate established</a:t>
             </a:r>
           </a:p>
           <a:p>
@@ -3626,21 +3909,21 @@
               <a:spcAft>
                 <a:spcPts val="600"/>
               </a:spcAft>
-              <a:defRPr sz="1300">
-                <a:solidFill>
-                  <a:srgbClr val="070A40"/>
-                </a:solidFill>
-                <a:latin typeface="Arial"/>
-              </a:defRPr>
-            </a:pPr>
-            <a:r>
-              <a:rPr sz="1300">
-                <a:solidFill>
-                  <a:srgbClr val="070A40"/>
-                </a:solidFill>
-                <a:latin typeface="Arial"/>
-              </a:rPr>
-              <a:t>  •  Corporate Constitution — 5-tier approval matrix, decision order, escalation SLAs</a:t>
+              <a:defRPr sz="1200">
+                <a:solidFill>
+                  <a:srgbClr val="FFFFFF"/>
+                </a:solidFill>
+                <a:latin typeface="Arial"/>
+              </a:defRPr>
+            </a:pPr>
+            <a:r>
+              <a:rPr sz="1200">
+                <a:solidFill>
+                  <a:srgbClr val="FFFFFF"/>
+                </a:solidFill>
+                <a:latin typeface="Arial"/>
+              </a:rPr>
+              <a:t>Governance gates operating under audit</a:t>
             </a:r>
           </a:p>
           <a:p>
@@ -3648,100 +3931,148 @@
               <a:spcAft>
                 <a:spcPts val="600"/>
               </a:spcAft>
-              <a:defRPr sz="1300">
-                <a:solidFill>
-                  <a:srgbClr val="070A40"/>
-                </a:solidFill>
-                <a:latin typeface="Arial"/>
-              </a:defRPr>
-            </a:pPr>
-          </a:p>
-          <a:p>
-            <a:pPr>
-              <a:spcAft>
-                <a:spcPts val="600"/>
-              </a:spcAft>
-              <a:defRPr sz="1300">
-                <a:solidFill>
-                  <a:srgbClr val="070A40"/>
-                </a:solidFill>
-                <a:latin typeface="Arial"/>
-              </a:defRPr>
-            </a:pPr>
-            <a:r>
-              <a:rPr sz="1300">
-                <a:solidFill>
-                  <a:srgbClr val="070A40"/>
-                </a:solidFill>
-                <a:latin typeface="Arial"/>
-              </a:rPr>
-              <a:t>Hiring Plan (per Blueprint):</a:t>
-            </a:r>
-          </a:p>
-          <a:p>
-            <a:pPr>
-              <a:spcAft>
-                <a:spcPts val="600"/>
-              </a:spcAft>
-              <a:defRPr sz="1300">
-                <a:solidFill>
-                  <a:srgbClr val="070A40"/>
-                </a:solidFill>
-                <a:latin typeface="Arial"/>
-              </a:defRPr>
-            </a:pPr>
-            <a:r>
-              <a:rPr sz="1300">
-                <a:solidFill>
-                  <a:srgbClr val="070A40"/>
-                </a:solidFill>
-                <a:latin typeface="Arial"/>
-              </a:rPr>
-              <a:t>  •  Platform Licensing Sales Lead (Offer E) — Priority One, breakout revenue line</a:t>
-            </a:r>
-          </a:p>
-          <a:p>
-            <a:pPr>
-              <a:spcAft>
-                <a:spcPts val="600"/>
-              </a:spcAft>
-              <a:defRPr sz="1300">
-                <a:solidFill>
-                  <a:srgbClr val="070A40"/>
-                </a:solidFill>
-                <a:latin typeface="Arial"/>
-              </a:defRPr>
-            </a:pPr>
-            <a:r>
-              <a:rPr sz="1300">
-                <a:solidFill>
-                  <a:srgbClr val="070A40"/>
-                </a:solidFill>
-                <a:latin typeface="Arial"/>
-              </a:rPr>
-              <a:t>  •  BPA/Chatbot Delivery Lead (Offer B) — NGO USD revenue</a:t>
-            </a:r>
-          </a:p>
-          <a:p>
-            <a:pPr>
-              <a:spcAft>
-                <a:spcPts val="600"/>
-              </a:spcAft>
-              <a:defRPr sz="1300">
-                <a:solidFill>
-                  <a:srgbClr val="070A40"/>
-                </a:solidFill>
-                <a:latin typeface="Arial"/>
-              </a:defRPr>
-            </a:pPr>
-            <a:r>
-              <a:rPr sz="1300">
-                <a:solidFill>
-                  <a:srgbClr val="070A40"/>
-                </a:solidFill>
-                <a:latin typeface="Arial"/>
-              </a:rPr>
-              <a:t>  •  Compliance Officer + DevRel Engineer — unblock Offer B/C &amp; developer adoption</a:t>
+              <a:defRPr sz="1200">
+                <a:solidFill>
+                  <a:srgbClr val="FFFFFF"/>
+                </a:solidFill>
+                <a:latin typeface="Arial"/>
+              </a:defRPr>
+            </a:pPr>
+            <a:r>
+              <a:rPr sz="1200">
+                <a:solidFill>
+                  <a:srgbClr val="FFFFFF"/>
+                </a:solidFill>
+                <a:latin typeface="Arial"/>
+              </a:rPr>
+              <a:t>Repeatable delivery playbook per offer</a:t>
+            </a:r>
+          </a:p>
+        </p:txBody>
+      </p:sp>
+      <p:sp>
+        <p:nvSpPr>
+          <p:cNvPr id="11" name="Rectangle 10"/>
+          <p:cNvSpPr/>
+          <p:nvPr/>
+        </p:nvSpPr>
+        <p:spPr>
+          <a:xfrm>
+            <a:off x="2286000" y="5074920"/>
+            <a:ext cx="4572000" cy="27432"/>
+          </a:xfrm>
+          <a:prstGeom prst="rect">
+            <a:avLst/>
+          </a:prstGeom>
+          <a:solidFill>
+            <a:srgbClr val="00BFFF"/>
+          </a:solidFill>
+          <a:ln>
+            <a:noFill/>
+          </a:ln>
+        </p:spPr>
+        <p:style>
+          <a:lnRef idx="1">
+            <a:schemeClr val="accent1"/>
+          </a:lnRef>
+          <a:fillRef idx="3">
+            <a:schemeClr val="accent1"/>
+          </a:fillRef>
+          <a:effectRef idx="2">
+            <a:schemeClr val="accent1"/>
+          </a:effectRef>
+          <a:fontRef idx="minor">
+            <a:schemeClr val="lt1"/>
+          </a:fontRef>
+        </p:style>
+        <p:txBody>
+          <a:bodyPr rtlCol="0" anchor="ctr"/>
+          <a:lstStyle/>
+          <a:p>
+            <a:pPr algn="ctr"/>
+          </a:p>
+        </p:txBody>
+      </p:sp>
+      <p:sp>
+        <p:nvSpPr>
+          <p:cNvPr id="12" name="TextBox 11"/>
+          <p:cNvSpPr txBox="1"/>
+          <p:nvPr/>
+        </p:nvSpPr>
+        <p:spPr>
+          <a:xfrm>
+            <a:off x="914400" y="5257800"/>
+            <a:ext cx="7315200" cy="822960"/>
+          </a:xfrm>
+          <a:prstGeom prst="rect">
+            <a:avLst/>
+          </a:prstGeom>
+          <a:noFill/>
+        </p:spPr>
+        <p:txBody>
+          <a:bodyPr wrap="square">
+            <a:spAutoFit/>
+          </a:bodyPr>
+          <a:lstStyle/>
+          <a:p>
+            <a:pPr algn="ctr">
+              <a:defRPr sz="1400" b="1">
+                <a:solidFill>
+                  <a:srgbClr val="FFFFFF"/>
+                </a:solidFill>
+                <a:latin typeface="Arial"/>
+              </a:defRPr>
+            </a:pPr>
+            <a:r>
+              <a:rPr sz="1400" b="1">
+                <a:solidFill>
+                  <a:srgbClr val="FFFFFF"/>
+                </a:solidFill>
+                <a:latin typeface="Arial"/>
+              </a:rPr>
+              <a:t>We are asking for a first institutional round to fund paying pilots across Offers A, B and C, and to make the four hires above.</a:t>
+            </a:r>
+          </a:p>
+        </p:txBody>
+      </p:sp>
+      <p:sp>
+        <p:nvSpPr>
+          <p:cNvPr id="13" name="TextBox 12"/>
+          <p:cNvSpPr txBox="1"/>
+          <p:nvPr/>
+        </p:nvSpPr>
+        <p:spPr>
+          <a:xfrm>
+            <a:off x="457200" y="6510528"/>
+            <a:ext cx="8229600" cy="274320"/>
+          </a:xfrm>
+          <a:prstGeom prst="rect">
+            <a:avLst/>
+          </a:prstGeom>
+          <a:noFill/>
+        </p:spPr>
+        <p:txBody>
+          <a:bodyPr wrap="square">
+            <a:spAutoFit/>
+          </a:bodyPr>
+          <a:lstStyle/>
+          <a:p>
+            <a:pPr algn="r">
+              <a:defRPr sz="1200" b="1">
+                <a:solidFill>
+                  <a:srgbClr val="00BFFF"/>
+                </a:solidFill>
+                <a:latin typeface="Arial"/>
+              </a:defRPr>
+            </a:pPr>
+            <a:r>
+              <a:rPr sz="1200" b="1">
+                <a:solidFill>
+                  <a:srgbClr val="00BFFF"/>
+                </a:solidFill>
+                <a:latin typeface="Arial"/>
+              </a:rPr>
+              <a:t>INTERNAL DRAFT — NOT FOR EXTERNAL DISTRIBUTION</a:t>
             </a:r>
           </a:p>
         </p:txBody>
@@ -3824,7 +4155,7 @@
         <p:spPr>
           <a:xfrm>
             <a:off x="457200" y="365760"/>
-            <a:ext cx="8229600" cy="548640"/>
+            <a:ext cx="8229600" cy="640080"/>
           </a:xfrm>
           <a:prstGeom prst="rect">
             <a:avLst/>
@@ -3852,410 +4183,27 @@
                 </a:solidFill>
                 <a:latin typeface="Arial"/>
               </a:rPr>
-              <a:t>FINANCIALS</a:t>
-            </a:r>
-          </a:p>
-        </p:txBody>
-      </p:sp>
-      <p:sp>
-        <p:nvSpPr>
-          <p:cNvPr id="4" name="TextBox 3"/>
-          <p:cNvSpPr txBox="1"/>
-          <p:nvPr/>
-        </p:nvSpPr>
-        <p:spPr>
-          <a:xfrm>
-            <a:off x="731520" y="1097280"/>
-            <a:ext cx="7772400" cy="5029200"/>
-          </a:xfrm>
-          <a:prstGeom prst="rect">
-            <a:avLst/>
-          </a:prstGeom>
-          <a:noFill/>
-        </p:spPr>
-        <p:txBody>
-          <a:bodyPr wrap="square">
-            <a:spAutoFit/>
-          </a:bodyPr>
-          <a:lstStyle/>
-          <a:p>
-            <a:pPr>
-              <a:spcAft>
-                <a:spcPts val="600"/>
-              </a:spcAft>
-              <a:defRPr sz="1300">
-                <a:solidFill>
-                  <a:srgbClr val="070A40"/>
-                </a:solidFill>
-                <a:latin typeface="Arial"/>
-              </a:defRPr>
-            </a:pPr>
-            <a:r>
-              <a:rPr sz="1300">
-                <a:solidFill>
-                  <a:srgbClr val="070A40"/>
-                </a:solidFill>
-                <a:latin typeface="Arial"/>
-              </a:rPr>
-              <a:t>Revenue Projections (targets, pending validation):</a:t>
-            </a:r>
-          </a:p>
-          <a:p>
-            <a:pPr>
-              <a:spcAft>
-                <a:spcPts val="600"/>
-              </a:spcAft>
-              <a:defRPr sz="1300">
-                <a:solidFill>
-                  <a:srgbClr val="070A40"/>
-                </a:solidFill>
-                <a:latin typeface="Arial"/>
-              </a:defRPr>
-            </a:pPr>
-            <a:r>
-              <a:rPr sz="1300">
-                <a:solidFill>
-                  <a:srgbClr val="070A40"/>
-                </a:solidFill>
-                <a:latin typeface="Arial"/>
-              </a:rPr>
-              <a:t>  •  Year One:  Early revenue traction</a:t>
-            </a:r>
-          </a:p>
-          <a:p>
-            <a:pPr>
-              <a:spcAft>
-                <a:spcPts val="600"/>
-              </a:spcAft>
-              <a:defRPr sz="1300">
-                <a:solidFill>
-                  <a:srgbClr val="070A40"/>
-                </a:solidFill>
-                <a:latin typeface="Arial"/>
-              </a:defRPr>
-            </a:pPr>
-            <a:r>
-              <a:rPr sz="1300">
-                <a:solidFill>
-                  <a:srgbClr val="070A40"/>
-                </a:solidFill>
-                <a:latin typeface="Arial"/>
-              </a:rPr>
-              <a:t>  •  Year Two:  Recurring contracts + SaaS growth</a:t>
-            </a:r>
-          </a:p>
-          <a:p>
-            <a:pPr>
-              <a:spcAft>
-                <a:spcPts val="600"/>
-              </a:spcAft>
-              <a:defRPr sz="1300">
-                <a:solidFill>
-                  <a:srgbClr val="070A40"/>
-                </a:solidFill>
-                <a:latin typeface="Arial"/>
-              </a:defRPr>
-            </a:pPr>
-            <a:r>
-              <a:rPr sz="1300">
-                <a:solidFill>
-                  <a:srgbClr val="070A40"/>
-                </a:solidFill>
-                <a:latin typeface="Arial"/>
-              </a:rPr>
-              <a:t>  •  Year Three:  SaaS + managed workforce scale</a:t>
-            </a:r>
-          </a:p>
-          <a:p>
-            <a:pPr>
-              <a:spcAft>
-                <a:spcPts val="600"/>
-              </a:spcAft>
-              <a:defRPr sz="1300">
-                <a:solidFill>
-                  <a:srgbClr val="070A40"/>
-                </a:solidFill>
-                <a:latin typeface="Arial"/>
-              </a:defRPr>
-            </a:pPr>
-          </a:p>
-          <a:p>
-            <a:pPr>
-              <a:spcAft>
-                <a:spcPts val="600"/>
-              </a:spcAft>
-              <a:defRPr sz="1300">
-                <a:solidFill>
-                  <a:srgbClr val="070A40"/>
-                </a:solidFill>
-                <a:latin typeface="Arial"/>
-              </a:defRPr>
-            </a:pPr>
-            <a:r>
-              <a:rPr sz="1300">
-                <a:solidFill>
-                  <a:srgbClr val="070A40"/>
-                </a:solidFill>
-                <a:latin typeface="Arial"/>
-              </a:rPr>
-              <a:t>Key Assumptions:</a:t>
-            </a:r>
-          </a:p>
-          <a:p>
-            <a:pPr>
-              <a:spcAft>
-                <a:spcPts val="600"/>
-              </a:spcAft>
-              <a:defRPr sz="1300">
-                <a:solidFill>
-                  <a:srgbClr val="070A40"/>
-                </a:solidFill>
-                <a:latin typeface="Arial"/>
-              </a:defRPr>
-            </a:pPr>
-            <a:r>
-              <a:rPr sz="1300">
-                <a:solidFill>
-                  <a:srgbClr val="070A40"/>
-                </a:solidFill>
-                <a:latin typeface="Arial"/>
-              </a:rPr>
-              <a:t>  •  Month-over-month revenue growth in ramp</a:t>
-            </a:r>
-          </a:p>
-          <a:p>
-            <a:pPr>
-              <a:spcAft>
-                <a:spcPts val="600"/>
-              </a:spcAft>
-              <a:defRPr sz="1300">
-                <a:solidFill>
-                  <a:srgbClr val="070A40"/>
-                </a:solidFill>
-                <a:latin typeface="Arial"/>
-              </a:defRPr>
-            </a:pPr>
-            <a:r>
-              <a:rPr sz="1300">
-                <a:solidFill>
-                  <a:srgbClr val="070A40"/>
-                </a:solidFill>
-                <a:latin typeface="Arial"/>
-              </a:rPr>
-              <a:t>  •  Strong gross margin target; LLM cost controlled at scale</a:t>
-            </a:r>
-          </a:p>
-          <a:p>
-            <a:pPr>
-              <a:spcAft>
-                <a:spcPts val="600"/>
-              </a:spcAft>
-              <a:defRPr sz="1300">
-                <a:solidFill>
-                  <a:srgbClr val="070A40"/>
-                </a:solidFill>
-                <a:latin typeface="Arial"/>
-              </a:defRPr>
-            </a:pPr>
-            <a:r>
-              <a:rPr sz="1300">
-                <a:solidFill>
-                  <a:srgbClr val="070A40"/>
-                </a:solidFill>
-                <a:latin typeface="Arial"/>
-              </a:rPr>
-              <a:t>  •  Net retention target per Mission success metrics</a:t>
-            </a:r>
-          </a:p>
-          <a:p>
-            <a:pPr>
-              <a:spcAft>
-                <a:spcPts val="600"/>
-              </a:spcAft>
-              <a:defRPr sz="1300">
-                <a:solidFill>
-                  <a:srgbClr val="070A40"/>
-                </a:solidFill>
-                <a:latin typeface="Arial"/>
-              </a:defRPr>
-            </a:pPr>
-          </a:p>
-          <a:p>
-            <a:pPr>
-              <a:spcAft>
-                <a:spcPts val="600"/>
-              </a:spcAft>
-              <a:defRPr sz="1300">
-                <a:solidFill>
-                  <a:srgbClr val="070A40"/>
-                </a:solidFill>
-                <a:latin typeface="Arial"/>
-              </a:defRPr>
-            </a:pPr>
-            <a:r>
-              <a:rPr sz="1300">
-                <a:solidFill>
-                  <a:srgbClr val="070A40"/>
-                </a:solidFill>
-                <a:latin typeface="Arial"/>
-              </a:rPr>
-              <a:t>Use of Funds (per Corporate Blueprint):</a:t>
-            </a:r>
-          </a:p>
-          <a:p>
-            <a:pPr>
-              <a:spcAft>
-                <a:spcPts val="600"/>
-              </a:spcAft>
-              <a:defRPr sz="1300">
-                <a:solidFill>
-                  <a:srgbClr val="070A40"/>
-                </a:solidFill>
-                <a:latin typeface="Arial"/>
-              </a:defRPr>
-            </a:pPr>
-            <a:r>
-              <a:rPr sz="1300">
-                <a:solidFill>
-                  <a:srgbClr val="070A40"/>
-                </a:solidFill>
-                <a:latin typeface="Arial"/>
-              </a:rPr>
-              <a:t>  •  Talent — Sales leads, compliance, DevRel</a:t>
-            </a:r>
-          </a:p>
-          <a:p>
-            <a:pPr>
-              <a:spcAft>
-                <a:spcPts val="600"/>
-              </a:spcAft>
-              <a:defRPr sz="1300">
-                <a:solidFill>
-                  <a:srgbClr val="070A40"/>
-                </a:solidFill>
-                <a:latin typeface="Arial"/>
-              </a:defRPr>
-            </a:pPr>
-            <a:r>
-              <a:rPr sz="1300">
-                <a:solidFill>
-                  <a:srgbClr val="070A40"/>
-                </a:solidFill>
-                <a:latin typeface="Arial"/>
-              </a:rPr>
-              <a:t>  •  Client Pilots — Multiple offers across A–C</a:t>
-            </a:r>
-          </a:p>
-          <a:p>
-            <a:pPr>
-              <a:spcAft>
-                <a:spcPts val="600"/>
-              </a:spcAft>
-              <a:defRPr sz="1300">
-                <a:solidFill>
-                  <a:srgbClr val="070A40"/>
-                </a:solidFill>
-                <a:latin typeface="Arial"/>
-              </a:defRPr>
-            </a:pPr>
-            <a:r>
-              <a:rPr sz="1300">
-                <a:solidFill>
-                  <a:srgbClr val="070A40"/>
-                </a:solidFill>
-                <a:latin typeface="Arial"/>
-              </a:rPr>
-              <a:t>  •  Hardware Lab — On-prem GPU for offline-first proof; field kits</a:t>
-            </a:r>
-          </a:p>
-          <a:p>
-            <a:pPr>
-              <a:spcAft>
-                <a:spcPts val="600"/>
-              </a:spcAft>
-              <a:defRPr sz="1300">
-                <a:solidFill>
-                  <a:srgbClr val="070A40"/>
-                </a:solidFill>
-                <a:latin typeface="Arial"/>
-              </a:defRPr>
-            </a:pPr>
-            <a:r>
-              <a:rPr sz="1300">
-                <a:solidFill>
-                  <a:srgbClr val="070A40"/>
-                </a:solidFill>
-                <a:latin typeface="Arial"/>
-              </a:rPr>
-              <a:t>  •  Compliance &amp; Legal — Malawi DPA 2017, GDPR, SOC 2 prep</a:t>
-            </a:r>
-          </a:p>
-          <a:p>
-            <a:pPr>
-              <a:spcAft>
-                <a:spcPts val="600"/>
-              </a:spcAft>
-              <a:defRPr sz="1300">
-                <a:solidFill>
-                  <a:srgbClr val="070A40"/>
-                </a:solidFill>
-                <a:latin typeface="Arial"/>
-              </a:defRPr>
-            </a:pPr>
-            <a:r>
-              <a:rPr sz="1300">
-                <a:solidFill>
-                  <a:srgbClr val="070A40"/>
-                </a:solidFill>
-                <a:latin typeface="Arial"/>
-              </a:rPr>
-              <a:t>  •  Emergency Reserve — CEO-only release</a:t>
-            </a:r>
-          </a:p>
-        </p:txBody>
-      </p:sp>
-    </p:spTree>
-  </p:cSld>
-  <p:clrMapOvr>
-    <a:masterClrMapping/>
-  </p:clrMapOvr>
-</p:sld>
-</file>
-
-<file path=ppt/slides/slide12.xml><?xml version="1.0" encoding="utf-8"?>
-<p:sld xmlns:a="http://schemas.openxmlformats.org/drawingml/2006/main" xmlns:p="http://schemas.openxmlformats.org/presentationml/2006/main" xmlns:r="http://schemas.openxmlformats.org/officeDocument/2006/relationships">
-  <p:cSld>
-    <p:bg>
-      <p:bgPr>
-        <a:solidFill>
-          <a:srgbClr val="070A40"/>
-        </a:solidFill>
-        <a:effectLst/>
-      </p:bgPr>
-    </p:bg>
-    <p:spTree>
-      <p:nvGrpSpPr>
-        <p:cNvPr id="1" name=""/>
-        <p:cNvGrpSpPr/>
-        <p:nvPr/>
-      </p:nvGrpSpPr>
-      <p:grpSpPr/>
-      <p:sp>
-        <p:nvSpPr>
-          <p:cNvPr id="2" name="Rectangle 1"/>
+              <a:t>RISKS &amp; HOW WE MITIGATE THEM</a:t>
+            </a:r>
+          </a:p>
+        </p:txBody>
+      </p:sp>
+      <p:sp>
+        <p:nvSpPr>
+          <p:cNvPr id="4" name="Rounded Rectangle 3"/>
           <p:cNvSpPr/>
           <p:nvPr/>
         </p:nvSpPr>
         <p:spPr>
           <a:xfrm>
-            <a:off x="0" y="0"/>
-            <a:ext cx="137160" cy="6858000"/>
-          </a:xfrm>
-          <a:prstGeom prst="rect">
+            <a:off x="502920" y="1188720"/>
+            <a:ext cx="8138160" cy="713232"/>
+          </a:xfrm>
+          <a:prstGeom prst="roundRect">
             <a:avLst/>
           </a:prstGeom>
           <a:solidFill>
-            <a:srgbClr val="070A40"/>
+            <a:srgbClr val="F2F2F2"/>
           </a:solidFill>
           <a:ln>
             <a:noFill/>
@@ -4285,14 +4233,14 @@
       </p:sp>
       <p:sp>
         <p:nvSpPr>
-          <p:cNvPr id="3" name="TextBox 2"/>
+          <p:cNvPr id="5" name="TextBox 4"/>
           <p:cNvSpPr txBox="1"/>
           <p:nvPr/>
         </p:nvSpPr>
         <p:spPr>
           <a:xfrm>
-            <a:off x="914400" y="731520"/>
-            <a:ext cx="7315200" cy="731520"/>
+            <a:off x="685800" y="1261872"/>
+            <a:ext cx="3017520" cy="548640"/>
           </a:xfrm>
           <a:prstGeom prst="rect">
             <a:avLst/>
@@ -4305,42 +4253,84 @@
           </a:bodyPr>
           <a:lstStyle/>
           <a:p>
-            <a:pPr algn="ctr">
-              <a:defRPr sz="3200" b="1">
-                <a:solidFill>
-                  <a:srgbClr val="FFFFFF"/>
-                </a:solidFill>
-                <a:latin typeface="Arial"/>
-              </a:defRPr>
-            </a:pPr>
-            <a:r>
-              <a:rPr sz="3200" b="1">
-                <a:solidFill>
-                  <a:srgbClr val="FFFFFF"/>
-                </a:solidFill>
-                <a:latin typeface="Arial"/>
-              </a:rPr>
-              <a:t>THE ASK</a:t>
-            </a:r>
-          </a:p>
-        </p:txBody>
-      </p:sp>
-      <p:sp>
-        <p:nvSpPr>
-          <p:cNvPr id="4" name="Rectangle 3"/>
+            <a:pPr algn="l">
+              <a:defRPr sz="1200" b="1">
+                <a:solidFill>
+                  <a:srgbClr val="070A40"/>
+                </a:solidFill>
+                <a:latin typeface="Arial"/>
+              </a:defRPr>
+            </a:pPr>
+            <a:r>
+              <a:rPr sz="1200" b="1">
+                <a:solidFill>
+                  <a:srgbClr val="070A40"/>
+                </a:solidFill>
+                <a:latin typeface="Arial"/>
+              </a:rPr>
+              <a:t>Dependence on third-party models</a:t>
+            </a:r>
+          </a:p>
+        </p:txBody>
+      </p:sp>
+      <p:sp>
+        <p:nvSpPr>
+          <p:cNvPr id="6" name="TextBox 5"/>
+          <p:cNvSpPr txBox="1"/>
+          <p:nvPr/>
+        </p:nvSpPr>
+        <p:spPr>
+          <a:xfrm>
+            <a:off x="3794760" y="1261872"/>
+            <a:ext cx="4663440" cy="548640"/>
+          </a:xfrm>
+          <a:prstGeom prst="rect">
+            <a:avLst/>
+          </a:prstGeom>
+          <a:noFill/>
+        </p:spPr>
+        <p:txBody>
+          <a:bodyPr wrap="square">
+            <a:spAutoFit/>
+          </a:bodyPr>
+          <a:lstStyle/>
+          <a:p>
+            <a:pPr algn="l">
+              <a:defRPr sz="1200" b="0">
+                <a:solidFill>
+                  <a:srgbClr val="070A40"/>
+                </a:solidFill>
+                <a:latin typeface="Arial"/>
+              </a:defRPr>
+            </a:pPr>
+            <a:r>
+              <a:rPr sz="1200" b="0">
+                <a:solidFill>
+                  <a:srgbClr val="070A40"/>
+                </a:solidFill>
+                <a:latin typeface="Arial"/>
+              </a:rPr>
+              <a:t>Multi-provider routing with automatic fallback; local inference option</a:t>
+            </a:r>
+          </a:p>
+        </p:txBody>
+      </p:sp>
+      <p:sp>
+        <p:nvSpPr>
+          <p:cNvPr id="7" name="Rounded Rectangle 6"/>
           <p:cNvSpPr/>
           <p:nvPr/>
         </p:nvSpPr>
         <p:spPr>
           <a:xfrm>
-            <a:off x="3200400" y="1554480"/>
-            <a:ext cx="2743200" cy="36576"/>
-          </a:xfrm>
-          <a:prstGeom prst="rect">
+            <a:off x="502920" y="2011680"/>
+            <a:ext cx="8138160" cy="713232"/>
+          </a:xfrm>
+          <a:prstGeom prst="roundRect">
             <a:avLst/>
           </a:prstGeom>
           <a:solidFill>
-            <a:srgbClr val="E63946"/>
+            <a:srgbClr val="F2F2F2"/>
           </a:solidFill>
           <a:ln>
             <a:noFill/>
@@ -4370,14 +4360,14 @@
       </p:sp>
       <p:sp>
         <p:nvSpPr>
-          <p:cNvPr id="5" name="TextBox 4"/>
+          <p:cNvPr id="8" name="TextBox 7"/>
           <p:cNvSpPr txBox="1"/>
           <p:nvPr/>
         </p:nvSpPr>
         <p:spPr>
           <a:xfrm>
-            <a:off x="914400" y="1828800"/>
-            <a:ext cx="7315200" cy="731520"/>
+            <a:off x="685800" y="2084832"/>
+            <a:ext cx="3017520" cy="548640"/>
           </a:xfrm>
           <a:prstGeom prst="rect">
             <a:avLst/>
@@ -4390,36 +4380,36 @@
           </a:bodyPr>
           <a:lstStyle/>
           <a:p>
-            <a:pPr algn="ctr">
-              <a:defRPr sz="2400" b="0">
-                <a:solidFill>
-                  <a:srgbClr val="00BFFF"/>
-                </a:solidFill>
-                <a:latin typeface="Arial"/>
-              </a:defRPr>
-            </a:pPr>
-            <a:r>
-              <a:rPr sz="2400" b="0">
-                <a:solidFill>
-                  <a:srgbClr val="00BFFF"/>
-                </a:solidFill>
-                <a:latin typeface="Arial"/>
-              </a:rPr>
-              <a:t>Raising Seed Capital</a:t>
-            </a:r>
-          </a:p>
-        </p:txBody>
-      </p:sp>
-      <p:sp>
-        <p:nvSpPr>
-          <p:cNvPr id="6" name="TextBox 5"/>
+            <a:pPr algn="l">
+              <a:defRPr sz="1200" b="1">
+                <a:solidFill>
+                  <a:srgbClr val="070A40"/>
+                </a:solidFill>
+                <a:latin typeface="Arial"/>
+              </a:defRPr>
+            </a:pPr>
+            <a:r>
+              <a:rPr sz="1200" b="1">
+                <a:solidFill>
+                  <a:srgbClr val="070A40"/>
+                </a:solidFill>
+                <a:latin typeface="Arial"/>
+              </a:rPr>
+              <a:t>Regulatory and data-protection exposure</a:t>
+            </a:r>
+          </a:p>
+        </p:txBody>
+      </p:sp>
+      <p:sp>
+        <p:nvSpPr>
+          <p:cNvPr id="9" name="TextBox 8"/>
           <p:cNvSpPr txBox="1"/>
           <p:nvPr/>
         </p:nvSpPr>
         <p:spPr>
           <a:xfrm>
-            <a:off x="1371600" y="2926080"/>
-            <a:ext cx="6400800" cy="3200400"/>
+            <a:off x="3794760" y="2084832"/>
+            <a:ext cx="4663440" cy="548640"/>
           </a:xfrm>
           <a:prstGeom prst="rect">
             <a:avLst/>
@@ -4432,260 +4422,42 @@
           </a:bodyPr>
           <a:lstStyle/>
           <a:p>
-            <a:pPr>
-              <a:spcAft>
-                <a:spcPts val="600"/>
-              </a:spcAft>
-              <a:defRPr sz="1400">
-                <a:solidFill>
-                  <a:srgbClr val="FFFFFF"/>
-                </a:solidFill>
-                <a:latin typeface="Arial"/>
-              </a:defRPr>
-            </a:pPr>
-            <a:r>
-              <a:rPr sz="1400">
-                <a:solidFill>
-                  <a:srgbClr val="FFFFFF"/>
-                </a:solidFill>
-                <a:latin typeface="Arial"/>
-              </a:rPr>
-              <a:t>Use of Funds (aligned to Corporate Blueprint):</a:t>
-            </a:r>
-          </a:p>
-          <a:p>
-            <a:pPr>
-              <a:spcAft>
-                <a:spcPts val="600"/>
-              </a:spcAft>
-              <a:defRPr sz="1400">
-                <a:solidFill>
-                  <a:srgbClr val="FFFFFF"/>
-                </a:solidFill>
-                <a:latin typeface="Arial"/>
-              </a:defRPr>
-            </a:pPr>
-            <a:r>
-              <a:rPr sz="1400">
-                <a:solidFill>
-                  <a:srgbClr val="FFFFFF"/>
-                </a:solidFill>
-                <a:latin typeface="Arial"/>
-              </a:rPr>
-              <a:t>  •  Talent — Platform Licensing Sales Lead (Offer E), chatbot/compliance leads</a:t>
-            </a:r>
-          </a:p>
-          <a:p>
-            <a:pPr>
-              <a:spcAft>
-                <a:spcPts val="600"/>
-              </a:spcAft>
-              <a:defRPr sz="1400">
-                <a:solidFill>
-                  <a:srgbClr val="FFFFFF"/>
-                </a:solidFill>
-                <a:latin typeface="Arial"/>
-              </a:defRPr>
-            </a:pPr>
-            <a:r>
-              <a:rPr sz="1400">
-                <a:solidFill>
-                  <a:srgbClr val="FFFFFF"/>
-                </a:solidFill>
-                <a:latin typeface="Arial"/>
-              </a:rPr>
-              <a:t>  •  Client pilots — Multiple offers across A, B, C (post governance gates)</a:t>
-            </a:r>
-          </a:p>
-          <a:p>
-            <a:pPr>
-              <a:spcAft>
-                <a:spcPts val="600"/>
-              </a:spcAft>
-              <a:defRPr sz="1400">
-                <a:solidFill>
-                  <a:srgbClr val="FFFFFF"/>
-                </a:solidFill>
-                <a:latin typeface="Arial"/>
-              </a:defRPr>
-            </a:pPr>
-            <a:r>
-              <a:rPr sz="1400">
-                <a:solidFill>
-                  <a:srgbClr val="FFFFFF"/>
-                </a:solidFill>
-                <a:latin typeface="Arial"/>
-              </a:rPr>
-              <a:t>  •  Hardware lab — On-prem GPU for offline-first proof; field kits</a:t>
-            </a:r>
-          </a:p>
-          <a:p>
-            <a:pPr>
-              <a:spcAft>
-                <a:spcPts val="600"/>
-              </a:spcAft>
-              <a:defRPr sz="1400">
-                <a:solidFill>
-                  <a:srgbClr val="FFFFFF"/>
-                </a:solidFill>
-                <a:latin typeface="Arial"/>
-              </a:defRPr>
-            </a:pPr>
-            <a:r>
-              <a:rPr sz="1400">
-                <a:solidFill>
-                  <a:srgbClr val="FFFFFF"/>
-                </a:solidFill>
-                <a:latin typeface="Arial"/>
-              </a:rPr>
-              <a:t>  •  Compliance — Malawi DPA 2017, GDPR opinion, SOC 2 Type II readiness</a:t>
-            </a:r>
-          </a:p>
-          <a:p>
-            <a:pPr>
-              <a:spcAft>
-                <a:spcPts val="600"/>
-              </a:spcAft>
-              <a:defRPr sz="1400">
-                <a:solidFill>
-                  <a:srgbClr val="FFFFFF"/>
-                </a:solidFill>
-                <a:latin typeface="Arial"/>
-              </a:defRPr>
-            </a:pPr>
-          </a:p>
-          <a:p>
-            <a:pPr>
-              <a:spcAft>
-                <a:spcPts val="600"/>
-              </a:spcAft>
-              <a:defRPr sz="1400">
-                <a:solidFill>
-                  <a:srgbClr val="FFFFFF"/>
-                </a:solidFill>
-                <a:latin typeface="Arial"/>
-              </a:defRPr>
-            </a:pPr>
-            <a:r>
-              <a:rPr sz="1400">
-                <a:solidFill>
-                  <a:srgbClr val="FFFFFF"/>
-                </a:solidFill>
-                <a:latin typeface="Arial"/>
-              </a:rPr>
-              <a:t>Milestones with this raise:</a:t>
-            </a:r>
-          </a:p>
-          <a:p>
-            <a:pPr>
-              <a:spcAft>
-                <a:spcPts val="600"/>
-              </a:spcAft>
-              <a:defRPr sz="1400">
-                <a:solidFill>
-                  <a:srgbClr val="FFFFFF"/>
-                </a:solidFill>
-                <a:latin typeface="Arial"/>
-              </a:defRPr>
-            </a:pPr>
-            <a:r>
-              <a:rPr sz="1400">
-                <a:solidFill>
-                  <a:srgbClr val="FFFFFF"/>
-                </a:solidFill>
-                <a:latin typeface="Arial"/>
-              </a:rPr>
-              <a:t>  •  Paying pilot clients across Offers A–C</a:t>
-            </a:r>
-          </a:p>
-          <a:p>
-            <a:pPr>
-              <a:spcAft>
-                <a:spcPts val="600"/>
-              </a:spcAft>
-              <a:defRPr sz="1400">
-                <a:solidFill>
-                  <a:srgbClr val="FFFFFF"/>
-                </a:solidFill>
-                <a:latin typeface="Arial"/>
-              </a:defRPr>
-            </a:pPr>
-            <a:r>
-              <a:rPr sz="1400">
-                <a:solidFill>
-                  <a:srgbClr val="FFFFFF"/>
-                </a:solidFill>
-                <a:latin typeface="Arial"/>
-              </a:rPr>
-              <a:t>  •  ARR run-rate (SaaS + managed recurring)</a:t>
-            </a:r>
-          </a:p>
-          <a:p>
-            <a:pPr>
-              <a:spcAft>
-                <a:spcPts val="600"/>
-              </a:spcAft>
-              <a:defRPr sz="1400">
-                <a:solidFill>
-                  <a:srgbClr val="FFFFFF"/>
-                </a:solidFill>
-                <a:latin typeface="Arial"/>
-              </a:defRPr>
-            </a:pPr>
-            <a:r>
-              <a:rPr sz="1400">
-                <a:solidFill>
-                  <a:srgbClr val="FFFFFF"/>
-                </a:solidFill>
-                <a:latin typeface="Arial"/>
-              </a:rPr>
-              <a:t>  •  Phase Five autonomous mode live — self-governing AI company</a:t>
-            </a:r>
-          </a:p>
-        </p:txBody>
-      </p:sp>
-    </p:spTree>
-  </p:cSld>
-  <p:clrMapOvr>
-    <a:masterClrMapping/>
-  </p:clrMapOvr>
-</p:sld>
-</file>
-
-<file path=ppt/slides/slide13.xml><?xml version="1.0" encoding="utf-8"?>
-<p:sld xmlns:a="http://schemas.openxmlformats.org/drawingml/2006/main" xmlns:p="http://schemas.openxmlformats.org/presentationml/2006/main" xmlns:r="http://schemas.openxmlformats.org/officeDocument/2006/relationships">
-  <p:cSld>
-    <p:bg>
-      <p:bgPr>
-        <a:solidFill>
-          <a:srgbClr val="070A40"/>
-        </a:solidFill>
-        <a:effectLst/>
-      </p:bgPr>
-    </p:bg>
-    <p:spTree>
-      <p:nvGrpSpPr>
-        <p:cNvPr id="1" name=""/>
-        <p:cNvGrpSpPr/>
-        <p:nvPr/>
-      </p:nvGrpSpPr>
-      <p:grpSpPr/>
-      <p:sp>
-        <p:nvSpPr>
-          <p:cNvPr id="2" name="Rectangle 1"/>
+            <a:pPr algn="l">
+              <a:defRPr sz="1200" b="0">
+                <a:solidFill>
+                  <a:srgbClr val="070A40"/>
+                </a:solidFill>
+                <a:latin typeface="Arial"/>
+              </a:defRPr>
+            </a:pPr>
+            <a:r>
+              <a:rPr sz="1200" b="0">
+                <a:solidFill>
+                  <a:srgbClr val="070A40"/>
+                </a:solidFill>
+                <a:latin typeface="Arial"/>
+              </a:rPr>
+              <a:t>Malawi DPA 2017 controls, GDPR opinion, SOC 2 readiness</a:t>
+            </a:r>
+          </a:p>
+        </p:txBody>
+      </p:sp>
+      <p:sp>
+        <p:nvSpPr>
+          <p:cNvPr id="10" name="Rounded Rectangle 9"/>
           <p:cNvSpPr/>
           <p:nvPr/>
         </p:nvSpPr>
         <p:spPr>
           <a:xfrm>
-            <a:off x="594360" y="457200"/>
-            <a:ext cx="1371600" cy="1371600"/>
-          </a:xfrm>
-          <a:prstGeom prst="rect">
+            <a:off x="502920" y="2834640"/>
+            <a:ext cx="8138160" cy="713232"/>
+          </a:xfrm>
+          <a:prstGeom prst="roundRect">
             <a:avLst/>
           </a:prstGeom>
           <a:solidFill>
-            <a:srgbClr val="FFFFFF"/>
+            <a:srgbClr val="F2F2F2"/>
           </a:solidFill>
           <a:ln>
             <a:noFill/>
@@ -4713,40 +4485,16 @@
           </a:p>
         </p:txBody>
       </p:sp>
-      <p:pic>
-        <p:nvPicPr>
-          <p:cNvPr id="3" name="Company Logo" descr="LightSpeed Holdings logo"/>
-          <p:cNvPicPr>
-            <a:picLocks noChangeAspect="1"/>
-          </p:cNvPicPr>
-          <p:nvPr/>
-        </p:nvPicPr>
-        <p:blipFill>
-          <a:blip r:embed="rId2"/>
-          <a:stretch>
-            <a:fillRect/>
-          </a:stretch>
-        </p:blipFill>
-        <p:spPr>
-          <a:xfrm>
-            <a:off x="594360" y="457200"/>
-            <a:ext cx="1371600" cy="1371600"/>
-          </a:xfrm>
-          <a:prstGeom prst="rect">
-            <a:avLst/>
-          </a:prstGeom>
-        </p:spPr>
-      </p:pic>
-      <p:sp>
-        <p:nvSpPr>
-          <p:cNvPr id="4" name="TextBox 3"/>
+      <p:sp>
+        <p:nvSpPr>
+          <p:cNvPr id="11" name="TextBox 10"/>
           <p:cNvSpPr txBox="1"/>
           <p:nvPr/>
         </p:nvSpPr>
         <p:spPr>
           <a:xfrm>
-            <a:off x="914400" y="2011680"/>
-            <a:ext cx="7315200" cy="914400"/>
+            <a:off x="685800" y="2907792"/>
+            <a:ext cx="3017520" cy="548640"/>
           </a:xfrm>
           <a:prstGeom prst="rect">
             <a:avLst/>
@@ -4759,36 +4507,36 @@
           </a:bodyPr>
           <a:lstStyle/>
           <a:p>
-            <a:pPr algn="ctr">
-              <a:defRPr sz="3600" b="1">
-                <a:solidFill>
-                  <a:srgbClr val="FFFFFF"/>
-                </a:solidFill>
-                <a:latin typeface="Arial"/>
-              </a:defRPr>
-            </a:pPr>
-            <a:r>
-              <a:rPr sz="3600" b="1">
-                <a:solidFill>
-                  <a:srgbClr val="FFFFFF"/>
-                </a:solidFill>
-                <a:latin typeface="Arial"/>
-              </a:rPr>
-              <a:t>THANK YOU</a:t>
-            </a:r>
-          </a:p>
-        </p:txBody>
-      </p:sp>
-      <p:sp>
-        <p:nvSpPr>
-          <p:cNvPr id="5" name="TextBox 4"/>
+            <a:pPr algn="l">
+              <a:defRPr sz="1200" b="1">
+                <a:solidFill>
+                  <a:srgbClr val="070A40"/>
+                </a:solidFill>
+                <a:latin typeface="Arial"/>
+              </a:defRPr>
+            </a:pPr>
+            <a:r>
+              <a:rPr sz="1200" b="1">
+                <a:solidFill>
+                  <a:srgbClr val="070A40"/>
+                </a:solidFill>
+                <a:latin typeface="Arial"/>
+              </a:rPr>
+              <a:t>Single-founder execution risk</a:t>
+            </a:r>
+          </a:p>
+        </p:txBody>
+      </p:sp>
+      <p:sp>
+        <p:nvSpPr>
+          <p:cNvPr id="12" name="TextBox 11"/>
           <p:cNvSpPr txBox="1"/>
           <p:nvPr/>
         </p:nvSpPr>
         <p:spPr>
           <a:xfrm>
-            <a:off x="914400" y="3108960"/>
-            <a:ext cx="7315200" cy="548640"/>
+            <a:off x="3794760" y="2907792"/>
+            <a:ext cx="4663440" cy="548640"/>
           </a:xfrm>
           <a:prstGeom prst="rect">
             <a:avLst/>
@@ -4801,42 +4549,42 @@
           </a:bodyPr>
           <a:lstStyle/>
           <a:p>
-            <a:pPr algn="ctr">
-              <a:defRPr sz="1800" b="1">
-                <a:solidFill>
-                  <a:srgbClr val="00BFFF"/>
-                </a:solidFill>
-                <a:latin typeface="Arial"/>
-              </a:defRPr>
-            </a:pPr>
-            <a:r>
-              <a:rPr sz="1800" b="1">
-                <a:solidFill>
-                  <a:srgbClr val="00BFFF"/>
-                </a:solidFill>
-                <a:latin typeface="Arial"/>
-              </a:rPr>
-              <a:t>ASPIRE. ACT. ACHIEVE.</a:t>
-            </a:r>
-          </a:p>
-        </p:txBody>
-      </p:sp>
-      <p:sp>
-        <p:nvSpPr>
-          <p:cNvPr id="6" name="Rectangle 5"/>
+            <a:pPr algn="l">
+              <a:defRPr sz="1200" b="0">
+                <a:solidFill>
+                  <a:srgbClr val="070A40"/>
+                </a:solidFill>
+                <a:latin typeface="Arial"/>
+              </a:defRPr>
+            </a:pPr>
+            <a:r>
+              <a:rPr sz="1200" b="0">
+                <a:solidFill>
+                  <a:srgbClr val="070A40"/>
+                </a:solidFill>
+                <a:latin typeface="Arial"/>
+              </a:rPr>
+              <a:t>Named hiring plan; agent cabinet under human approval gates</a:t>
+            </a:r>
+          </a:p>
+        </p:txBody>
+      </p:sp>
+      <p:sp>
+        <p:nvSpPr>
+          <p:cNvPr id="13" name="Rounded Rectangle 12"/>
           <p:cNvSpPr/>
           <p:nvPr/>
         </p:nvSpPr>
         <p:spPr>
           <a:xfrm>
-            <a:off x="3200400" y="3657600"/>
-            <a:ext cx="2743200" cy="36576"/>
-          </a:xfrm>
-          <a:prstGeom prst="rect">
+            <a:off x="502920" y="3657600"/>
+            <a:ext cx="8138160" cy="713232"/>
+          </a:xfrm>
+          <a:prstGeom prst="roundRect">
             <a:avLst/>
           </a:prstGeom>
           <a:solidFill>
-            <a:srgbClr val="E63946"/>
+            <a:srgbClr val="F2F2F2"/>
           </a:solidFill>
           <a:ln>
             <a:noFill/>
@@ -4866,14 +4614,14 @@
       </p:sp>
       <p:sp>
         <p:nvSpPr>
-          <p:cNvPr id="7" name="TextBox 6"/>
+          <p:cNvPr id="14" name="TextBox 13"/>
           <p:cNvSpPr txBox="1"/>
           <p:nvPr/>
         </p:nvSpPr>
         <p:spPr>
           <a:xfrm>
-            <a:off x="914400" y="4114800"/>
-            <a:ext cx="7315200" cy="1371600"/>
+            <a:off x="685800" y="3730752"/>
+            <a:ext cx="3017520" cy="548640"/>
           </a:xfrm>
           <a:prstGeom prst="rect">
             <a:avLst/>
@@ -4886,42 +4634,360 @@
           </a:bodyPr>
           <a:lstStyle/>
           <a:p>
-            <a:pPr algn="ctr">
-              <a:defRPr sz="1400" b="0">
-                <a:solidFill>
-                  <a:srgbClr val="FFFFFF"/>
-                </a:solidFill>
-                <a:latin typeface="Arial"/>
-              </a:defRPr>
-            </a:pPr>
-            <a:r>
-              <a:rPr sz="1400" b="0">
-                <a:solidFill>
-                  <a:srgbClr val="FFFFFF"/>
-                </a:solidFill>
-                <a:latin typeface="Arial"/>
-              </a:rPr>
-              <a:t>Jack Mlusu, Founder &amp; CEO</a:t>
-            </a:r>
-            <a:br/>
-            <a:r>
-              <a:rPr sz="1400" b="0">
-                <a:solidFill>
-                  <a:srgbClr val="FFFFFF"/>
-                </a:solidFill>
-                <a:latin typeface="Arial"/>
-              </a:rPr>
-              <a:t>jmlusu@gmail.com</a:t>
-            </a:r>
-            <a:br/>
-            <a:r>
-              <a:rPr sz="1400" b="0">
-                <a:solidFill>
-                  <a:srgbClr val="FFFFFF"/>
-                </a:solidFill>
-                <a:latin typeface="Arial"/>
-              </a:rPr>
-              <a:t>lightspeedholdings.vercel.app</a:t>
+            <a:pPr algn="l">
+              <a:defRPr sz="1200" b="1">
+                <a:solidFill>
+                  <a:srgbClr val="070A40"/>
+                </a:solidFill>
+                <a:latin typeface="Arial"/>
+              </a:defRPr>
+            </a:pPr>
+            <a:r>
+              <a:rPr sz="1200" b="1">
+                <a:solidFill>
+                  <a:srgbClr val="070A40"/>
+                </a:solidFill>
+                <a:latin typeface="Arial"/>
+              </a:rPr>
+              <a:t>Selling ahead of proof</a:t>
+            </a:r>
+          </a:p>
+        </p:txBody>
+      </p:sp>
+      <p:sp>
+        <p:nvSpPr>
+          <p:cNvPr id="15" name="TextBox 14"/>
+          <p:cNvSpPr txBox="1"/>
+          <p:nvPr/>
+        </p:nvSpPr>
+        <p:spPr>
+          <a:xfrm>
+            <a:off x="3794760" y="3730752"/>
+            <a:ext cx="4663440" cy="548640"/>
+          </a:xfrm>
+          <a:prstGeom prst="rect">
+            <a:avLst/>
+          </a:prstGeom>
+          <a:noFill/>
+        </p:spPr>
+        <p:txBody>
+          <a:bodyPr wrap="square">
+            <a:spAutoFit/>
+          </a:bodyPr>
+          <a:lstStyle/>
+          <a:p>
+            <a:pPr algn="l">
+              <a:defRPr sz="1200" b="0">
+                <a:solidFill>
+                  <a:srgbClr val="070A40"/>
+                </a:solidFill>
+                <a:latin typeface="Arial"/>
+              </a:defRPr>
+            </a:pPr>
+            <a:r>
+              <a:rPr sz="1200" b="0">
+                <a:solidFill>
+                  <a:srgbClr val="070A40"/>
+                </a:solidFill>
+                <a:latin typeface="Arial"/>
+              </a:rPr>
+              <a:t>Pilots capped in scope and budget; no scale claims before delivery</a:t>
+            </a:r>
+          </a:p>
+        </p:txBody>
+      </p:sp>
+      <p:sp>
+        <p:nvSpPr>
+          <p:cNvPr id="16" name="Rounded Rectangle 15"/>
+          <p:cNvSpPr/>
+          <p:nvPr/>
+        </p:nvSpPr>
+        <p:spPr>
+          <a:xfrm>
+            <a:off x="502920" y="4480560"/>
+            <a:ext cx="8138160" cy="713232"/>
+          </a:xfrm>
+          <a:prstGeom prst="roundRect">
+            <a:avLst/>
+          </a:prstGeom>
+          <a:solidFill>
+            <a:srgbClr val="F2F2F2"/>
+          </a:solidFill>
+          <a:ln>
+            <a:noFill/>
+          </a:ln>
+        </p:spPr>
+        <p:style>
+          <a:lnRef idx="1">
+            <a:schemeClr val="accent1"/>
+          </a:lnRef>
+          <a:fillRef idx="3">
+            <a:schemeClr val="accent1"/>
+          </a:fillRef>
+          <a:effectRef idx="2">
+            <a:schemeClr val="accent1"/>
+          </a:effectRef>
+          <a:fontRef idx="minor">
+            <a:schemeClr val="lt1"/>
+          </a:fontRef>
+        </p:style>
+        <p:txBody>
+          <a:bodyPr rtlCol="0" anchor="ctr"/>
+          <a:lstStyle/>
+          <a:p>
+            <a:pPr algn="ctr"/>
+          </a:p>
+        </p:txBody>
+      </p:sp>
+      <p:sp>
+        <p:nvSpPr>
+          <p:cNvPr id="17" name="TextBox 16"/>
+          <p:cNvSpPr txBox="1"/>
+          <p:nvPr/>
+        </p:nvSpPr>
+        <p:spPr>
+          <a:xfrm>
+            <a:off x="685800" y="4553712"/>
+            <a:ext cx="3017520" cy="548640"/>
+          </a:xfrm>
+          <a:prstGeom prst="rect">
+            <a:avLst/>
+          </a:prstGeom>
+          <a:noFill/>
+        </p:spPr>
+        <p:txBody>
+          <a:bodyPr wrap="square">
+            <a:spAutoFit/>
+          </a:bodyPr>
+          <a:lstStyle/>
+          <a:p>
+            <a:pPr algn="l">
+              <a:defRPr sz="1200" b="1">
+                <a:solidFill>
+                  <a:srgbClr val="070A40"/>
+                </a:solidFill>
+                <a:latin typeface="Arial"/>
+              </a:defRPr>
+            </a:pPr>
+            <a:r>
+              <a:rPr sz="1200" b="1">
+                <a:solidFill>
+                  <a:srgbClr val="070A40"/>
+                </a:solidFill>
+                <a:latin typeface="Arial"/>
+              </a:rPr>
+              <a:t>Cost overrun on inference</a:t>
+            </a:r>
+          </a:p>
+        </p:txBody>
+      </p:sp>
+      <p:sp>
+        <p:nvSpPr>
+          <p:cNvPr id="18" name="TextBox 17"/>
+          <p:cNvSpPr txBox="1"/>
+          <p:nvPr/>
+        </p:nvSpPr>
+        <p:spPr>
+          <a:xfrm>
+            <a:off x="3794760" y="4553712"/>
+            <a:ext cx="4663440" cy="548640"/>
+          </a:xfrm>
+          <a:prstGeom prst="rect">
+            <a:avLst/>
+          </a:prstGeom>
+          <a:noFill/>
+        </p:spPr>
+        <p:txBody>
+          <a:bodyPr wrap="square">
+            <a:spAutoFit/>
+          </a:bodyPr>
+          <a:lstStyle/>
+          <a:p>
+            <a:pPr algn="l">
+              <a:defRPr sz="1200" b="0">
+                <a:solidFill>
+                  <a:srgbClr val="070A40"/>
+                </a:solidFill>
+                <a:latin typeface="Arial"/>
+              </a:defRPr>
+            </a:pPr>
+            <a:r>
+              <a:rPr sz="1200" b="0">
+                <a:solidFill>
+                  <a:srgbClr val="070A40"/>
+                </a:solidFill>
+                <a:latin typeface="Arial"/>
+              </a:rPr>
+              <a:t>Per-agent budgets and cost enforcement, not after-the-fact reporting</a:t>
+            </a:r>
+          </a:p>
+        </p:txBody>
+      </p:sp>
+      <p:sp>
+        <p:nvSpPr>
+          <p:cNvPr id="19" name="Rounded Rectangle 18"/>
+          <p:cNvSpPr/>
+          <p:nvPr/>
+        </p:nvSpPr>
+        <p:spPr>
+          <a:xfrm>
+            <a:off x="502920" y="5303520"/>
+            <a:ext cx="8138160" cy="713232"/>
+          </a:xfrm>
+          <a:prstGeom prst="roundRect">
+            <a:avLst/>
+          </a:prstGeom>
+          <a:solidFill>
+            <a:srgbClr val="F2F2F2"/>
+          </a:solidFill>
+          <a:ln>
+            <a:noFill/>
+          </a:ln>
+        </p:spPr>
+        <p:style>
+          <a:lnRef idx="1">
+            <a:schemeClr val="accent1"/>
+          </a:lnRef>
+          <a:fillRef idx="3">
+            <a:schemeClr val="accent1"/>
+          </a:fillRef>
+          <a:effectRef idx="2">
+            <a:schemeClr val="accent1"/>
+          </a:effectRef>
+          <a:fontRef idx="minor">
+            <a:schemeClr val="lt1"/>
+          </a:fontRef>
+        </p:style>
+        <p:txBody>
+          <a:bodyPr rtlCol="0" anchor="ctr"/>
+          <a:lstStyle/>
+          <a:p>
+            <a:pPr algn="ctr"/>
+          </a:p>
+        </p:txBody>
+      </p:sp>
+      <p:sp>
+        <p:nvSpPr>
+          <p:cNvPr id="20" name="TextBox 19"/>
+          <p:cNvSpPr txBox="1"/>
+          <p:nvPr/>
+        </p:nvSpPr>
+        <p:spPr>
+          <a:xfrm>
+            <a:off x="685800" y="5376672"/>
+            <a:ext cx="3017520" cy="548640"/>
+          </a:xfrm>
+          <a:prstGeom prst="rect">
+            <a:avLst/>
+          </a:prstGeom>
+          <a:noFill/>
+        </p:spPr>
+        <p:txBody>
+          <a:bodyPr wrap="square">
+            <a:spAutoFit/>
+          </a:bodyPr>
+          <a:lstStyle/>
+          <a:p>
+            <a:pPr algn="l">
+              <a:defRPr sz="1200" b="1">
+                <a:solidFill>
+                  <a:srgbClr val="070A40"/>
+                </a:solidFill>
+                <a:latin typeface="Arial"/>
+              </a:defRPr>
+            </a:pPr>
+            <a:r>
+              <a:rPr sz="1200" b="1">
+                <a:solidFill>
+                  <a:srgbClr val="070A40"/>
+                </a:solidFill>
+                <a:latin typeface="Arial"/>
+              </a:rPr>
+              <a:t>Concentration in one market</a:t>
+            </a:r>
+          </a:p>
+        </p:txBody>
+      </p:sp>
+      <p:sp>
+        <p:nvSpPr>
+          <p:cNvPr id="21" name="TextBox 20"/>
+          <p:cNvSpPr txBox="1"/>
+          <p:nvPr/>
+        </p:nvSpPr>
+        <p:spPr>
+          <a:xfrm>
+            <a:off x="3794760" y="5376672"/>
+            <a:ext cx="4663440" cy="548640"/>
+          </a:xfrm>
+          <a:prstGeom prst="rect">
+            <a:avLst/>
+          </a:prstGeom>
+          <a:noFill/>
+        </p:spPr>
+        <p:txBody>
+          <a:bodyPr wrap="square">
+            <a:spAutoFit/>
+          </a:bodyPr>
+          <a:lstStyle/>
+          <a:p>
+            <a:pPr algn="l">
+              <a:defRPr sz="1200" b="0">
+                <a:solidFill>
+                  <a:srgbClr val="070A40"/>
+                </a:solidFill>
+                <a:latin typeface="Arial"/>
+              </a:defRPr>
+            </a:pPr>
+            <a:r>
+              <a:rPr sz="1200" b="0">
+                <a:solidFill>
+                  <a:srgbClr val="070A40"/>
+                </a:solidFill>
+                <a:latin typeface="Arial"/>
+              </a:rPr>
+              <a:t>SADC-first, with offers designed for remote delivery</a:t>
+            </a:r>
+          </a:p>
+        </p:txBody>
+      </p:sp>
+      <p:sp>
+        <p:nvSpPr>
+          <p:cNvPr id="22" name="TextBox 21"/>
+          <p:cNvSpPr txBox="1"/>
+          <p:nvPr/>
+        </p:nvSpPr>
+        <p:spPr>
+          <a:xfrm>
+            <a:off x="457200" y="6510528"/>
+            <a:ext cx="8229600" cy="274320"/>
+          </a:xfrm>
+          <a:prstGeom prst="rect">
+            <a:avLst/>
+          </a:prstGeom>
+          <a:noFill/>
+        </p:spPr>
+        <p:txBody>
+          <a:bodyPr wrap="square">
+            <a:spAutoFit/>
+          </a:bodyPr>
+          <a:lstStyle/>
+          <a:p>
+            <a:pPr algn="r">
+              <a:defRPr sz="1200" b="1">
+                <a:solidFill>
+                  <a:srgbClr val="070A40"/>
+                </a:solidFill>
+                <a:latin typeface="Arial"/>
+              </a:defRPr>
+            </a:pPr>
+            <a:r>
+              <a:rPr sz="1200" b="1">
+                <a:solidFill>
+                  <a:srgbClr val="070A40"/>
+                </a:solidFill>
+                <a:latin typeface="Arial"/>
+              </a:rPr>
+              <a:t>INTERNAL DRAFT — NOT FOR EXTERNAL DISTRIBUTION</a:t>
             </a:r>
           </a:p>
         </p:txBody>
@@ -5004,7 +5070,7 @@
         <p:spPr>
           <a:xfrm>
             <a:off x="457200" y="365760"/>
-            <a:ext cx="8229600" cy="548640"/>
+            <a:ext cx="8229600" cy="640080"/>
           </a:xfrm>
           <a:prstGeom prst="rect">
             <a:avLst/>
@@ -5032,7 +5098,7 @@
                 </a:solidFill>
                 <a:latin typeface="Arial"/>
               </a:rPr>
-              <a:t>AGENDA</a:t>
+              <a:t>THE PROBLEM</a:t>
             </a:r>
           </a:p>
         </p:txBody>
@@ -5045,8 +5111,8 @@
         </p:nvSpPr>
         <p:spPr>
           <a:xfrm>
-            <a:off x="731520" y="1097280"/>
-            <a:ext cx="7315200" cy="5029200"/>
+            <a:off x="731520" y="1234440"/>
+            <a:ext cx="7772400" cy="3291840"/>
           </a:xfrm>
           <a:prstGeom prst="rect">
             <a:avLst/>
@@ -5059,223 +5125,240 @@
           </a:bodyPr>
           <a:lstStyle/>
           <a:p>
-            <a:pPr>
+            <a:pPr marL="219456" indent="-219456">
               <a:spcAft>
                 <a:spcPts val="600"/>
               </a:spcAft>
-              <a:defRPr sz="1600">
-                <a:solidFill>
-                  <a:srgbClr val="070A40"/>
-                </a:solidFill>
-                <a:latin typeface="Arial"/>
-              </a:defRPr>
-            </a:pPr>
-            <a:r>
-              <a:rPr sz="1600">
-                <a:solidFill>
-                  <a:srgbClr val="070A40"/>
-                </a:solidFill>
-                <a:latin typeface="Arial"/>
-              </a:rPr>
-              <a:t>1.  The Problem</a:t>
-            </a:r>
-          </a:p>
-          <a:p>
-            <a:pPr>
+              <a:defRPr sz="1400">
+                <a:solidFill>
+                  <a:srgbClr val="070A40"/>
+                </a:solidFill>
+                <a:latin typeface="Arial"/>
+              </a:defRPr>
+            </a:pPr>
+            <a:r>
+              <a:rPr sz="1400">
+                <a:solidFill>
+                  <a:srgbClr val="070A40"/>
+                </a:solidFill>
+                <a:latin typeface="Arial"/>
+              </a:rPr>
+              <a:t>•  Deploying AI agents at scale means custom integration, monitoring and governance for every one</a:t>
+            </a:r>
+          </a:p>
+          <a:p>
+            <a:pPr marL="219456" indent="-219456">
               <a:spcAft>
                 <a:spcPts val="600"/>
               </a:spcAft>
-              <a:defRPr sz="1600">
-                <a:solidFill>
-                  <a:srgbClr val="070A40"/>
-                </a:solidFill>
-                <a:latin typeface="Arial"/>
-              </a:defRPr>
-            </a:pPr>
-            <a:r>
-              <a:rPr sz="1600">
-                <a:solidFill>
-                  <a:srgbClr val="070A40"/>
-                </a:solidFill>
-                <a:latin typeface="Arial"/>
-              </a:rPr>
-              <a:t>2.  Our Solution</a:t>
-            </a:r>
-          </a:p>
-          <a:p>
-            <a:pPr>
+              <a:defRPr sz="1400">
+                <a:solidFill>
+                  <a:srgbClr val="070A40"/>
+                </a:solidFill>
+                <a:latin typeface="Arial"/>
+              </a:defRPr>
+            </a:pPr>
+            <a:r>
+              <a:rPr sz="1400">
+                <a:solidFill>
+                  <a:srgbClr val="070A40"/>
+                </a:solidFill>
+                <a:latin typeface="Arial"/>
+              </a:rPr>
+              <a:t>•  Existing tools are either too simple (chatbots) or too complex (enterprise ML platforms)</a:t>
+            </a:r>
+          </a:p>
+          <a:p>
+            <a:pPr marL="219456" indent="-219456">
               <a:spcAft>
                 <a:spcPts val="600"/>
               </a:spcAft>
-              <a:defRPr sz="1600">
-                <a:solidFill>
-                  <a:srgbClr val="070A40"/>
-                </a:solidFill>
-                <a:latin typeface="Arial"/>
-              </a:defRPr>
-            </a:pPr>
-            <a:r>
-              <a:rPr sz="1600">
-                <a:solidFill>
-                  <a:srgbClr val="070A40"/>
-                </a:solidFill>
-                <a:latin typeface="Arial"/>
-              </a:rPr>
-              <a:t>3.  Market Opportunity</a:t>
-            </a:r>
-          </a:p>
-          <a:p>
-            <a:pPr>
+              <a:defRPr sz="1400">
+                <a:solidFill>
+                  <a:srgbClr val="070A40"/>
+                </a:solidFill>
+                <a:latin typeface="Arial"/>
+              </a:defRPr>
+            </a:pPr>
+            <a:r>
+              <a:rPr sz="1400">
+                <a:solidFill>
+                  <a:srgbClr val="070A40"/>
+                </a:solidFill>
+                <a:latin typeface="Arial"/>
+              </a:rPr>
+              <a:t>•  No turnkey way exists to stand up an entire AI-powered organization</a:t>
+            </a:r>
+          </a:p>
+          <a:p>
+            <a:pPr marL="219456" indent="-219456">
               <a:spcAft>
                 <a:spcPts val="600"/>
               </a:spcAft>
-              <a:defRPr sz="1600">
-                <a:solidFill>
-                  <a:srgbClr val="070A40"/>
-                </a:solidFill>
-                <a:latin typeface="Arial"/>
-              </a:defRPr>
-            </a:pPr>
-            <a:r>
-              <a:rPr sz="1600">
-                <a:solidFill>
-                  <a:srgbClr val="070A40"/>
-                </a:solidFill>
-                <a:latin typeface="Arial"/>
-              </a:rPr>
-              <a:t>4.  Product &amp; Technology</a:t>
-            </a:r>
-          </a:p>
-          <a:p>
-            <a:pPr>
+              <a:defRPr sz="1400">
+                <a:solidFill>
+                  <a:srgbClr val="070A40"/>
+                </a:solidFill>
+                <a:latin typeface="Arial"/>
+              </a:defRPr>
+            </a:pPr>
+            <a:r>
+              <a:rPr sz="1400">
+                <a:solidFill>
+                  <a:srgbClr val="070A40"/>
+                </a:solidFill>
+                <a:latin typeface="Arial"/>
+              </a:rPr>
+              <a:t>•  Cost tracking, human oversight and multi-provider management are afterthoughts</a:t>
+            </a:r>
+          </a:p>
+          <a:p>
+            <a:pPr marL="219456" indent="-219456">
               <a:spcAft>
                 <a:spcPts val="600"/>
               </a:spcAft>
-              <a:defRPr sz="1600">
-                <a:solidFill>
-                  <a:srgbClr val="070A40"/>
-                </a:solidFill>
-                <a:latin typeface="Arial"/>
-              </a:defRPr>
-            </a:pPr>
-            <a:r>
-              <a:rPr sz="1600">
-                <a:solidFill>
-                  <a:srgbClr val="070A40"/>
-                </a:solidFill>
-                <a:latin typeface="Arial"/>
-              </a:rPr>
-              <a:t>5.  Business Model</a:t>
-            </a:r>
-          </a:p>
-          <a:p>
-            <a:pPr>
-              <a:spcAft>
-                <a:spcPts val="600"/>
-              </a:spcAft>
-              <a:defRPr sz="1600">
-                <a:solidFill>
-                  <a:srgbClr val="070A40"/>
-                </a:solidFill>
-                <a:latin typeface="Arial"/>
-              </a:defRPr>
-            </a:pPr>
-            <a:r>
-              <a:rPr sz="1600">
-                <a:solidFill>
-                  <a:srgbClr val="070A40"/>
-                </a:solidFill>
-                <a:latin typeface="Arial"/>
-              </a:rPr>
-              <a:t>6.  Traction &amp; Metrics</a:t>
-            </a:r>
-          </a:p>
-          <a:p>
-            <a:pPr>
-              <a:spcAft>
-                <a:spcPts val="600"/>
-              </a:spcAft>
-              <a:defRPr sz="1600">
-                <a:solidFill>
-                  <a:srgbClr val="070A40"/>
-                </a:solidFill>
-                <a:latin typeface="Arial"/>
-              </a:defRPr>
-            </a:pPr>
-            <a:r>
-              <a:rPr sz="1600">
-                <a:solidFill>
-                  <a:srgbClr val="070A40"/>
-                </a:solidFill>
-                <a:latin typeface="Arial"/>
-              </a:rPr>
-              <a:t>7.  Competitive Landscape</a:t>
-            </a:r>
-          </a:p>
-          <a:p>
-            <a:pPr>
-              <a:spcAft>
-                <a:spcPts val="600"/>
-              </a:spcAft>
-              <a:defRPr sz="1600">
-                <a:solidFill>
-                  <a:srgbClr val="070A40"/>
-                </a:solidFill>
-                <a:latin typeface="Arial"/>
-              </a:defRPr>
-            </a:pPr>
-            <a:r>
-              <a:rPr sz="1600">
-                <a:solidFill>
-                  <a:srgbClr val="070A40"/>
-                </a:solidFill>
-                <a:latin typeface="Arial"/>
-              </a:rPr>
-              <a:t>8.  Team</a:t>
-            </a:r>
-          </a:p>
-          <a:p>
-            <a:pPr>
-              <a:spcAft>
-                <a:spcPts val="600"/>
-              </a:spcAft>
-              <a:defRPr sz="1600">
-                <a:solidFill>
-                  <a:srgbClr val="070A40"/>
-                </a:solidFill>
-                <a:latin typeface="Arial"/>
-              </a:defRPr>
-            </a:pPr>
-            <a:r>
-              <a:rPr sz="1600">
-                <a:solidFill>
-                  <a:srgbClr val="070A40"/>
-                </a:solidFill>
-                <a:latin typeface="Arial"/>
-              </a:rPr>
-              <a:t>9.  Financials</a:t>
-            </a:r>
-          </a:p>
-          <a:p>
-            <a:pPr>
-              <a:spcAft>
-                <a:spcPts val="600"/>
-              </a:spcAft>
-              <a:defRPr sz="1600">
-                <a:solidFill>
-                  <a:srgbClr val="070A40"/>
-                </a:solidFill>
-                <a:latin typeface="Arial"/>
-              </a:defRPr>
-            </a:pPr>
-            <a:r>
-              <a:rPr sz="1600">
-                <a:solidFill>
-                  <a:srgbClr val="070A40"/>
-                </a:solidFill>
-                <a:latin typeface="Arial"/>
-              </a:rPr>
-              <a:t>10. The Ask</a:t>
+              <a:defRPr sz="1400">
+                <a:solidFill>
+                  <a:srgbClr val="070A40"/>
+                </a:solidFill>
+                <a:latin typeface="Arial"/>
+              </a:defRPr>
+            </a:pPr>
+            <a:r>
+              <a:rPr sz="1400">
+                <a:solidFill>
+                  <a:srgbClr val="070A40"/>
+                </a:solidFill>
+                <a:latin typeface="Arial"/>
+              </a:rPr>
+              <a:t>•  Governance arrives late, if at all: approvals, audit trails and escalation rules live outside the tooling</a:t>
+            </a:r>
+          </a:p>
+        </p:txBody>
+      </p:sp>
+      <p:sp>
+        <p:nvSpPr>
+          <p:cNvPr id="5" name="Rounded Rectangle 4"/>
+          <p:cNvSpPr/>
+          <p:nvPr/>
+        </p:nvSpPr>
+        <p:spPr>
+          <a:xfrm>
+            <a:off x="914400" y="4709160"/>
+            <a:ext cx="7315200" cy="1051560"/>
+          </a:xfrm>
+          <a:prstGeom prst="roundRect">
+            <a:avLst/>
+          </a:prstGeom>
+          <a:solidFill>
+            <a:srgbClr val="F2F2F2"/>
+          </a:solidFill>
+          <a:ln>
+            <a:noFill/>
+          </a:ln>
+        </p:spPr>
+        <p:style>
+          <a:lnRef idx="1">
+            <a:schemeClr val="accent1"/>
+          </a:lnRef>
+          <a:fillRef idx="3">
+            <a:schemeClr val="accent1"/>
+          </a:fillRef>
+          <a:effectRef idx="2">
+            <a:schemeClr val="accent1"/>
+          </a:effectRef>
+          <a:fontRef idx="minor">
+            <a:schemeClr val="lt1"/>
+          </a:fontRef>
+        </p:style>
+        <p:txBody>
+          <a:bodyPr rtlCol="0" anchor="ctr"/>
+          <a:lstStyle/>
+          <a:p>
+            <a:pPr algn="ctr"/>
+          </a:p>
+        </p:txBody>
+      </p:sp>
+      <p:sp>
+        <p:nvSpPr>
+          <p:cNvPr id="6" name="TextBox 5"/>
+          <p:cNvSpPr txBox="1"/>
+          <p:nvPr/>
+        </p:nvSpPr>
+        <p:spPr>
+          <a:xfrm>
+            <a:off x="1188720" y="4892040"/>
+            <a:ext cx="6766560" cy="731520"/>
+          </a:xfrm>
+          <a:prstGeom prst="rect">
+            <a:avLst/>
+          </a:prstGeom>
+          <a:noFill/>
+        </p:spPr>
+        <p:txBody>
+          <a:bodyPr wrap="square">
+            <a:spAutoFit/>
+          </a:bodyPr>
+          <a:lstStyle/>
+          <a:p>
+            <a:pPr algn="ctr">
+              <a:defRPr sz="1400" b="1">
+                <a:solidFill>
+                  <a:srgbClr val="070A40"/>
+                </a:solidFill>
+                <a:latin typeface="Arial"/>
+              </a:defRPr>
+            </a:pPr>
+            <a:r>
+              <a:rPr sz="1400" b="1">
+                <a:solidFill>
+                  <a:srgbClr val="070A40"/>
+                </a:solidFill>
+                <a:latin typeface="Arial"/>
+              </a:rPr>
+              <a:t>"Building an AI-native company shouldn't require a team of ML engineers."</a:t>
+            </a:r>
+          </a:p>
+        </p:txBody>
+      </p:sp>
+      <p:sp>
+        <p:nvSpPr>
+          <p:cNvPr id="7" name="TextBox 6"/>
+          <p:cNvSpPr txBox="1"/>
+          <p:nvPr/>
+        </p:nvSpPr>
+        <p:spPr>
+          <a:xfrm>
+            <a:off x="457200" y="6510528"/>
+            <a:ext cx="8229600" cy="274320"/>
+          </a:xfrm>
+          <a:prstGeom prst="rect">
+            <a:avLst/>
+          </a:prstGeom>
+          <a:noFill/>
+        </p:spPr>
+        <p:txBody>
+          <a:bodyPr wrap="square">
+            <a:spAutoFit/>
+          </a:bodyPr>
+          <a:lstStyle/>
+          <a:p>
+            <a:pPr algn="r">
+              <a:defRPr sz="1200" b="1">
+                <a:solidFill>
+                  <a:srgbClr val="070A40"/>
+                </a:solidFill>
+                <a:latin typeface="Arial"/>
+              </a:defRPr>
+            </a:pPr>
+            <a:r>
+              <a:rPr sz="1200" b="1">
+                <a:solidFill>
+                  <a:srgbClr val="070A40"/>
+                </a:solidFill>
+                <a:latin typeface="Arial"/>
+              </a:rPr>
+              <a:t>INTERNAL DRAFT — NOT FOR EXTERNAL DISTRIBUTION</a:t>
             </a:r>
           </a:p>
         </p:txBody>
@@ -5358,7 +5441,7 @@
         <p:spPr>
           <a:xfrm>
             <a:off x="457200" y="365760"/>
-            <a:ext cx="8229600" cy="548640"/>
+            <a:ext cx="8229600" cy="640080"/>
           </a:xfrm>
           <a:prstGeom prst="rect">
             <a:avLst/>
@@ -5386,7 +5469,7 @@
                 </a:solidFill>
                 <a:latin typeface="Arial"/>
               </a:rPr>
-              <a:t>THE PROBLEM</a:t>
+              <a:t>OUR SOLUTION</a:t>
             </a:r>
           </a:p>
         </p:txBody>
@@ -5399,8 +5482,50 @@
         </p:nvSpPr>
         <p:spPr>
           <a:xfrm>
-            <a:off x="731520" y="1188720"/>
-            <a:ext cx="7772400" cy="3657600"/>
+            <a:off x="731520" y="1097280"/>
+            <a:ext cx="7772400" cy="685800"/>
+          </a:xfrm>
+          <a:prstGeom prst="rect">
+            <a:avLst/>
+          </a:prstGeom>
+          <a:noFill/>
+        </p:spPr>
+        <p:txBody>
+          <a:bodyPr wrap="square">
+            <a:spAutoFit/>
+          </a:bodyPr>
+          <a:lstStyle/>
+          <a:p>
+            <a:pPr algn="l">
+              <a:defRPr sz="1600" b="0">
+                <a:solidFill>
+                  <a:srgbClr val="070A40"/>
+                </a:solidFill>
+                <a:latin typeface="Arial"/>
+              </a:defRPr>
+            </a:pPr>
+            <a:r>
+              <a:rPr sz="1600" b="0">
+                <a:solidFill>
+                  <a:srgbClr val="070A40"/>
+                </a:solidFill>
+                <a:latin typeface="Arial"/>
+              </a:rPr>
+              <a:t>AI Company Builder — a CLI platform that generates, orchestrates and manages complete AI agent organizations.</a:t>
+            </a:r>
+          </a:p>
+        </p:txBody>
+      </p:sp>
+      <p:sp>
+        <p:nvSpPr>
+          <p:cNvPr id="5" name="TextBox 4"/>
+          <p:cNvSpPr txBox="1"/>
+          <p:nvPr/>
+        </p:nvSpPr>
+        <p:spPr>
+          <a:xfrm>
+            <a:off x="731520" y="2011680"/>
+            <a:ext cx="7772400" cy="1828800"/>
           </a:xfrm>
           <a:prstGeom prst="rect">
             <a:avLst/>
@@ -5417,21 +5542,21 @@
               <a:spcAft>
                 <a:spcPts val="600"/>
               </a:spcAft>
-              <a:defRPr sz="1400">
-                <a:solidFill>
-                  <a:srgbClr val="070A40"/>
-                </a:solidFill>
-                <a:latin typeface="Arial"/>
-              </a:defRPr>
-            </a:pPr>
-            <a:r>
-              <a:rPr sz="1400">
-                <a:solidFill>
-                  <a:srgbClr val="070A40"/>
-                </a:solidFill>
-                <a:latin typeface="Arial"/>
-              </a:rPr>
-              <a:t>•  Organizations struggle to deploy AI agents at scale — each requires custom integration, monitoring, and governance</a:t>
+              <a:defRPr sz="1300">
+                <a:solidFill>
+                  <a:srgbClr val="070A40"/>
+                </a:solidFill>
+                <a:latin typeface="Arial"/>
+              </a:defRPr>
+            </a:pPr>
+            <a:r>
+              <a:rPr sz="1300">
+                <a:solidFill>
+                  <a:srgbClr val="070A40"/>
+                </a:solidFill>
+                <a:latin typeface="Arial"/>
+              </a:rPr>
+              <a:t>✓  Registry-driven: define agents in YAML, generate OpenCode-compatible markdown</a:t>
             </a:r>
           </a:p>
           <a:p>
@@ -5439,21 +5564,21 @@
               <a:spcAft>
                 <a:spcPts val="600"/>
               </a:spcAft>
-              <a:defRPr sz="1400">
-                <a:solidFill>
-                  <a:srgbClr val="070A40"/>
-                </a:solidFill>
-                <a:latin typeface="Arial"/>
-              </a:defRPr>
-            </a:pPr>
-            <a:r>
-              <a:rPr sz="1400">
-                <a:solidFill>
-                  <a:srgbClr val="070A40"/>
-                </a:solidFill>
-                <a:latin typeface="Arial"/>
-              </a:rPr>
-              <a:t>•  Existing tools are either too simple (chatbots) or too complex (enterprise ML platforms)</a:t>
+              <a:defRPr sz="1300">
+                <a:solidFill>
+                  <a:srgbClr val="070A40"/>
+                </a:solidFill>
+                <a:latin typeface="Arial"/>
+              </a:defRPr>
+            </a:pPr>
+            <a:r>
+              <a:rPr sz="1300">
+                <a:solidFill>
+                  <a:srgbClr val="070A40"/>
+                </a:solidFill>
+                <a:latin typeface="Arial"/>
+              </a:rPr>
+              <a:t>✓  Multi-provider LLM routing — OpenAI, Anthropic, DeepSeek, Gemini — with fallback</a:t>
             </a:r>
           </a:p>
           <a:p>
@@ -5461,21 +5586,21 @@
               <a:spcAft>
                 <a:spcPts val="600"/>
               </a:spcAft>
-              <a:defRPr sz="1400">
-                <a:solidFill>
-                  <a:srgbClr val="070A40"/>
-                </a:solidFill>
-                <a:latin typeface="Arial"/>
-              </a:defRPr>
-            </a:pPr>
-            <a:r>
-              <a:rPr sz="1400">
-                <a:solidFill>
-                  <a:srgbClr val="070A40"/>
-                </a:solidFill>
-                <a:latin typeface="Arial"/>
-              </a:rPr>
-              <a:t>•  No turnkey solution exists for building an entire AI-powered organization</a:t>
+              <a:defRPr sz="1300">
+                <a:solidFill>
+                  <a:srgbClr val="070A40"/>
+                </a:solidFill>
+                <a:latin typeface="Arial"/>
+              </a:defRPr>
+            </a:pPr>
+            <a:r>
+              <a:rPr sz="1300">
+                <a:solidFill>
+                  <a:srgbClr val="070A40"/>
+                </a:solidFill>
+                <a:latin typeface="Arial"/>
+              </a:rPr>
+              <a:t>✓  Per-agent cost tracking and budget enforcement</a:t>
             </a:r>
           </a:p>
           <a:p>
@@ -5483,35 +5608,79 @@
               <a:spcAft>
                 <a:spcPts val="600"/>
               </a:spcAft>
-              <a:defRPr sz="1400">
-                <a:solidFill>
-                  <a:srgbClr val="070A40"/>
-                </a:solidFill>
-                <a:latin typeface="Arial"/>
-              </a:defRPr>
-            </a:pPr>
-            <a:r>
-              <a:rPr sz="1400">
-                <a:solidFill>
-                  <a:srgbClr val="070A40"/>
-                </a:solidFill>
-                <a:latin typeface="Arial"/>
-              </a:rPr>
-              <a:t>•  Cost tracking, human oversight, and multi-provider management are afterthoughts</a:t>
-            </a:r>
-          </a:p>
-        </p:txBody>
-      </p:sp>
-      <p:sp>
-        <p:nvSpPr>
-          <p:cNvPr id="5" name="Rounded Rectangle 4"/>
+              <a:defRPr sz="1300">
+                <a:solidFill>
+                  <a:srgbClr val="070A40"/>
+                </a:solidFill>
+                <a:latin typeface="Arial"/>
+              </a:defRPr>
+            </a:pPr>
+            <a:r>
+              <a:rPr sz="1300">
+                <a:solidFill>
+                  <a:srgbClr val="070A40"/>
+                </a:solidFill>
+                <a:latin typeface="Arial"/>
+              </a:rPr>
+              <a:t>✓  Human-in-the-loop approval gates for irreversible actions</a:t>
+            </a:r>
+          </a:p>
+          <a:p>
+            <a:pPr>
+              <a:spcAft>
+                <a:spcPts val="600"/>
+              </a:spcAft>
+              <a:defRPr sz="1300">
+                <a:solidFill>
+                  <a:srgbClr val="070A40"/>
+                </a:solidFill>
+                <a:latin typeface="Arial"/>
+              </a:defRPr>
+            </a:pPr>
+            <a:r>
+              <a:rPr sz="1300">
+                <a:solidFill>
+                  <a:srgbClr val="070A40"/>
+                </a:solidFill>
+                <a:latin typeface="Arial"/>
+              </a:rPr>
+              <a:t>✓  MessageBus task queue for cross-agent coordination</a:t>
+            </a:r>
+          </a:p>
+          <a:p>
+            <a:pPr>
+              <a:spcAft>
+                <a:spcPts val="600"/>
+              </a:spcAft>
+              <a:defRPr sz="1300">
+                <a:solidFill>
+                  <a:srgbClr val="070A40"/>
+                </a:solidFill>
+                <a:latin typeface="Arial"/>
+              </a:defRPr>
+            </a:pPr>
+            <a:r>
+              <a:rPr sz="1300">
+                <a:solidFill>
+                  <a:srgbClr val="070A40"/>
+                </a:solidFill>
+                <a:latin typeface="Arial"/>
+              </a:rPr>
+              <a:t>✓  Pre-built agent roles across every department</a:t>
+            </a:r>
+          </a:p>
+        </p:txBody>
+      </p:sp>
+      <p:sp>
+        <p:nvSpPr>
+          <p:cNvPr id="6" name="Rounded Rectangle 5"/>
           <p:cNvSpPr/>
           <p:nvPr/>
         </p:nvSpPr>
         <p:spPr>
           <a:xfrm>
-            <a:off x="914400" y="4754880"/>
-            <a:ext cx="7315200" cy="1097280"/>
+            <a:off x="731520" y="4069080"/>
+            <a:ext cx="2514600" cy="1691640"/>
           </a:xfrm>
           <a:prstGeom prst="roundRect">
             <a:avLst/>
@@ -5547,14 +5716,14 @@
       </p:sp>
       <p:sp>
         <p:nvSpPr>
-          <p:cNvPr id="6" name="TextBox 5"/>
+          <p:cNvPr id="7" name="TextBox 6"/>
           <p:cNvSpPr txBox="1"/>
           <p:nvPr/>
         </p:nvSpPr>
         <p:spPr>
           <a:xfrm>
-            <a:off x="1188720" y="4937760"/>
-            <a:ext cx="6766560" cy="822960"/>
+            <a:off x="914400" y="4206240"/>
+            <a:ext cx="2148840" cy="320040"/>
           </a:xfrm>
           <a:prstGeom prst="rect">
             <a:avLst/>
@@ -5567,7 +5736,7 @@
           </a:bodyPr>
           <a:lstStyle/>
           <a:p>
-            <a:pPr algn="ctr">
+            <a:pPr algn="l">
               <a:defRPr sz="1400" b="1">
                 <a:solidFill>
                   <a:srgbClr val="070A40"/>
@@ -5582,7 +5751,345 @@
                 </a:solidFill>
                 <a:latin typeface="Arial"/>
               </a:rPr>
-              <a:t>"Building an AI-native company shouldn't require a team of ML engineers."</a:t>
+              <a:t>1.  Define</a:t>
+            </a:r>
+          </a:p>
+        </p:txBody>
+      </p:sp>
+      <p:sp>
+        <p:nvSpPr>
+          <p:cNvPr id="8" name="TextBox 7"/>
+          <p:cNvSpPr txBox="1"/>
+          <p:nvPr/>
+        </p:nvSpPr>
+        <p:spPr>
+          <a:xfrm>
+            <a:off x="914400" y="4526280"/>
+            <a:ext cx="2148840" cy="1143000"/>
+          </a:xfrm>
+          <a:prstGeom prst="rect">
+            <a:avLst/>
+          </a:prstGeom>
+          <a:noFill/>
+        </p:spPr>
+        <p:txBody>
+          <a:bodyPr wrap="square">
+            <a:spAutoFit/>
+          </a:bodyPr>
+          <a:lstStyle/>
+          <a:p>
+            <a:pPr algn="l">
+              <a:defRPr sz="1200" b="0">
+                <a:solidFill>
+                  <a:srgbClr val="070A40"/>
+                </a:solidFill>
+                <a:latin typeface="Arial"/>
+              </a:defRPr>
+            </a:pPr>
+            <a:r>
+              <a:rPr sz="1200" b="0">
+                <a:solidFill>
+                  <a:srgbClr val="070A40"/>
+                </a:solidFill>
+                <a:latin typeface="Arial"/>
+              </a:rPr>
+              <a:t>One YAML registry lists every role, tool and permission the organization is allowed to use.</a:t>
+            </a:r>
+          </a:p>
+        </p:txBody>
+      </p:sp>
+      <p:sp>
+        <p:nvSpPr>
+          <p:cNvPr id="9" name="Rounded Rectangle 8"/>
+          <p:cNvSpPr/>
+          <p:nvPr/>
+        </p:nvSpPr>
+        <p:spPr>
+          <a:xfrm>
+            <a:off x="3429000" y="4069080"/>
+            <a:ext cx="2514600" cy="1691640"/>
+          </a:xfrm>
+          <a:prstGeom prst="roundRect">
+            <a:avLst/>
+          </a:prstGeom>
+          <a:solidFill>
+            <a:srgbClr val="F2F2F2"/>
+          </a:solidFill>
+          <a:ln>
+            <a:noFill/>
+          </a:ln>
+        </p:spPr>
+        <p:style>
+          <a:lnRef idx="1">
+            <a:schemeClr val="accent1"/>
+          </a:lnRef>
+          <a:fillRef idx="3">
+            <a:schemeClr val="accent1"/>
+          </a:fillRef>
+          <a:effectRef idx="2">
+            <a:schemeClr val="accent1"/>
+          </a:effectRef>
+          <a:fontRef idx="minor">
+            <a:schemeClr val="lt1"/>
+          </a:fontRef>
+        </p:style>
+        <p:txBody>
+          <a:bodyPr rtlCol="0" anchor="ctr"/>
+          <a:lstStyle/>
+          <a:p>
+            <a:pPr algn="ctr"/>
+          </a:p>
+        </p:txBody>
+      </p:sp>
+      <p:sp>
+        <p:nvSpPr>
+          <p:cNvPr id="10" name="TextBox 9"/>
+          <p:cNvSpPr txBox="1"/>
+          <p:nvPr/>
+        </p:nvSpPr>
+        <p:spPr>
+          <a:xfrm>
+            <a:off x="3611880" y="4206240"/>
+            <a:ext cx="2148840" cy="320040"/>
+          </a:xfrm>
+          <a:prstGeom prst="rect">
+            <a:avLst/>
+          </a:prstGeom>
+          <a:noFill/>
+        </p:spPr>
+        <p:txBody>
+          <a:bodyPr wrap="square">
+            <a:spAutoFit/>
+          </a:bodyPr>
+          <a:lstStyle/>
+          <a:p>
+            <a:pPr algn="l">
+              <a:defRPr sz="1400" b="1">
+                <a:solidFill>
+                  <a:srgbClr val="070A40"/>
+                </a:solidFill>
+                <a:latin typeface="Arial"/>
+              </a:defRPr>
+            </a:pPr>
+            <a:r>
+              <a:rPr sz="1400" b="1">
+                <a:solidFill>
+                  <a:srgbClr val="070A40"/>
+                </a:solidFill>
+                <a:latin typeface="Arial"/>
+              </a:rPr>
+              <a:t>2.  Generate</a:t>
+            </a:r>
+          </a:p>
+        </p:txBody>
+      </p:sp>
+      <p:sp>
+        <p:nvSpPr>
+          <p:cNvPr id="11" name="TextBox 10"/>
+          <p:cNvSpPr txBox="1"/>
+          <p:nvPr/>
+        </p:nvSpPr>
+        <p:spPr>
+          <a:xfrm>
+            <a:off x="3611880" y="4526280"/>
+            <a:ext cx="2148840" cy="1143000"/>
+          </a:xfrm>
+          <a:prstGeom prst="rect">
+            <a:avLst/>
+          </a:prstGeom>
+          <a:noFill/>
+        </p:spPr>
+        <p:txBody>
+          <a:bodyPr wrap="square">
+            <a:spAutoFit/>
+          </a:bodyPr>
+          <a:lstStyle/>
+          <a:p>
+            <a:pPr algn="l">
+              <a:defRPr sz="1200" b="0">
+                <a:solidFill>
+                  <a:srgbClr val="070A40"/>
+                </a:solidFill>
+                <a:latin typeface="Arial"/>
+              </a:defRPr>
+            </a:pPr>
+            <a:r>
+              <a:rPr sz="1200" b="0">
+                <a:solidFill>
+                  <a:srgbClr val="070A40"/>
+                </a:solidFill>
+                <a:latin typeface="Arial"/>
+              </a:rPr>
+              <a:t>The CLI renders agent cards, permissions and prompts, so the organization is version-controlled like code.</a:t>
+            </a:r>
+          </a:p>
+        </p:txBody>
+      </p:sp>
+      <p:sp>
+        <p:nvSpPr>
+          <p:cNvPr id="12" name="Rounded Rectangle 11"/>
+          <p:cNvSpPr/>
+          <p:nvPr/>
+        </p:nvSpPr>
+        <p:spPr>
+          <a:xfrm>
+            <a:off x="6126480" y="4069080"/>
+            <a:ext cx="2514600" cy="1691640"/>
+          </a:xfrm>
+          <a:prstGeom prst="roundRect">
+            <a:avLst/>
+          </a:prstGeom>
+          <a:solidFill>
+            <a:srgbClr val="F2F2F2"/>
+          </a:solidFill>
+          <a:ln>
+            <a:noFill/>
+          </a:ln>
+        </p:spPr>
+        <p:style>
+          <a:lnRef idx="1">
+            <a:schemeClr val="accent1"/>
+          </a:lnRef>
+          <a:fillRef idx="3">
+            <a:schemeClr val="accent1"/>
+          </a:fillRef>
+          <a:effectRef idx="2">
+            <a:schemeClr val="accent1"/>
+          </a:effectRef>
+          <a:fontRef idx="minor">
+            <a:schemeClr val="lt1"/>
+          </a:fontRef>
+        </p:style>
+        <p:txBody>
+          <a:bodyPr rtlCol="0" anchor="ctr"/>
+          <a:lstStyle/>
+          <a:p>
+            <a:pPr algn="ctr"/>
+          </a:p>
+        </p:txBody>
+      </p:sp>
+      <p:sp>
+        <p:nvSpPr>
+          <p:cNvPr id="13" name="TextBox 12"/>
+          <p:cNvSpPr txBox="1"/>
+          <p:nvPr/>
+        </p:nvSpPr>
+        <p:spPr>
+          <a:xfrm>
+            <a:off x="6309360" y="4206240"/>
+            <a:ext cx="2148840" cy="320040"/>
+          </a:xfrm>
+          <a:prstGeom prst="rect">
+            <a:avLst/>
+          </a:prstGeom>
+          <a:noFill/>
+        </p:spPr>
+        <p:txBody>
+          <a:bodyPr wrap="square">
+            <a:spAutoFit/>
+          </a:bodyPr>
+          <a:lstStyle/>
+          <a:p>
+            <a:pPr algn="l">
+              <a:defRPr sz="1400" b="1">
+                <a:solidFill>
+                  <a:srgbClr val="070A40"/>
+                </a:solidFill>
+                <a:latin typeface="Arial"/>
+              </a:defRPr>
+            </a:pPr>
+            <a:r>
+              <a:rPr sz="1400" b="1">
+                <a:solidFill>
+                  <a:srgbClr val="070A40"/>
+                </a:solidFill>
+                <a:latin typeface="Arial"/>
+              </a:rPr>
+              <a:t>3.  Run</a:t>
+            </a:r>
+          </a:p>
+        </p:txBody>
+      </p:sp>
+      <p:sp>
+        <p:nvSpPr>
+          <p:cNvPr id="14" name="TextBox 13"/>
+          <p:cNvSpPr txBox="1"/>
+          <p:nvPr/>
+        </p:nvSpPr>
+        <p:spPr>
+          <a:xfrm>
+            <a:off x="6309360" y="4526280"/>
+            <a:ext cx="2148840" cy="1143000"/>
+          </a:xfrm>
+          <a:prstGeom prst="rect">
+            <a:avLst/>
+          </a:prstGeom>
+          <a:noFill/>
+        </p:spPr>
+        <p:txBody>
+          <a:bodyPr wrap="square">
+            <a:spAutoFit/>
+          </a:bodyPr>
+          <a:lstStyle/>
+          <a:p>
+            <a:pPr algn="l">
+              <a:defRPr sz="1200" b="0">
+                <a:solidFill>
+                  <a:srgbClr val="070A40"/>
+                </a:solidFill>
+                <a:latin typeface="Arial"/>
+              </a:defRPr>
+            </a:pPr>
+            <a:r>
+              <a:rPr sz="1200" b="0">
+                <a:solidFill>
+                  <a:srgbClr val="070A40"/>
+                </a:solidFill>
+                <a:latin typeface="Arial"/>
+              </a:rPr>
+              <a:t>Work moves through a task queue under approval gates, with per-agent budgets and a full audit trail.</a:t>
+            </a:r>
+          </a:p>
+        </p:txBody>
+      </p:sp>
+      <p:sp>
+        <p:nvSpPr>
+          <p:cNvPr id="15" name="TextBox 14"/>
+          <p:cNvSpPr txBox="1"/>
+          <p:nvPr/>
+        </p:nvSpPr>
+        <p:spPr>
+          <a:xfrm>
+            <a:off x="457200" y="6510528"/>
+            <a:ext cx="8229600" cy="274320"/>
+          </a:xfrm>
+          <a:prstGeom prst="rect">
+            <a:avLst/>
+          </a:prstGeom>
+          <a:noFill/>
+        </p:spPr>
+        <p:txBody>
+          <a:bodyPr wrap="square">
+            <a:spAutoFit/>
+          </a:bodyPr>
+          <a:lstStyle/>
+          <a:p>
+            <a:pPr algn="r">
+              <a:defRPr sz="1200" b="1">
+                <a:solidFill>
+                  <a:srgbClr val="070A40"/>
+                </a:solidFill>
+                <a:latin typeface="Arial"/>
+              </a:defRPr>
+            </a:pPr>
+            <a:r>
+              <a:rPr sz="1200" b="1">
+                <a:solidFill>
+                  <a:srgbClr val="070A40"/>
+                </a:solidFill>
+                <a:latin typeface="Arial"/>
+              </a:rPr>
+              <a:t>INTERNAL DRAFT — NOT FOR EXTERNAL DISTRIBUTION</a:t>
             </a:r>
           </a:p>
         </p:txBody>
@@ -5665,7 +6172,7 @@
         <p:spPr>
           <a:xfrm>
             <a:off x="457200" y="365760"/>
-            <a:ext cx="8229600" cy="548640"/>
+            <a:ext cx="8229600" cy="640080"/>
           </a:xfrm>
           <a:prstGeom prst="rect">
             <a:avLst/>
@@ -5693,7 +6200,7 @@
                 </a:solidFill>
                 <a:latin typeface="Arial"/>
               </a:rPr>
-              <a:t>OUR SOLUTION</a:t>
+              <a:t>WHY NOW</a:t>
             </a:r>
           </a:p>
         </p:txBody>
@@ -5706,8 +6213,8 @@
         </p:nvSpPr>
         <p:spPr>
           <a:xfrm>
-            <a:off x="731520" y="1097280"/>
-            <a:ext cx="7772400" cy="731520"/>
+            <a:off x="731520" y="1051560"/>
+            <a:ext cx="7772400" cy="502920"/>
           </a:xfrm>
           <a:prstGeom prst="rect">
             <a:avLst/>
@@ -5721,35 +6228,78 @@
           <a:lstStyle/>
           <a:p>
             <a:pPr algn="l">
-              <a:defRPr sz="1600" b="0">
-                <a:solidFill>
-                  <a:srgbClr val="070A40"/>
-                </a:solidFill>
-                <a:latin typeface="Arial"/>
-              </a:defRPr>
-            </a:pPr>
-            <a:r>
-              <a:rPr sz="1600" b="0">
-                <a:solidFill>
-                  <a:srgbClr val="070A40"/>
-                </a:solidFill>
-                <a:latin typeface="Arial"/>
-              </a:rPr>
-              <a:t>AI Company Builder — a CLI platform that generates, orchestrates, and manages complete AI agent organizations.</a:t>
-            </a:r>
-          </a:p>
-        </p:txBody>
-      </p:sp>
-      <p:sp>
-        <p:nvSpPr>
-          <p:cNvPr id="5" name="TextBox 4"/>
+              <a:defRPr sz="1400" b="0">
+                <a:solidFill>
+                  <a:srgbClr val="070A40"/>
+                </a:solidFill>
+                <a:latin typeface="Arial"/>
+              </a:defRPr>
+            </a:pPr>
+            <a:r>
+              <a:rPr sz="1400" b="0">
+                <a:solidFill>
+                  <a:srgbClr val="070A40"/>
+                </a:solidFill>
+                <a:latin typeface="Arial"/>
+              </a:rPr>
+              <a:t>Three shifts make an AI-native organization buildable today but not two years ago:</a:t>
+            </a:r>
+          </a:p>
+        </p:txBody>
+      </p:sp>
+      <p:sp>
+        <p:nvSpPr>
+          <p:cNvPr id="5" name="Rounded Rectangle 4"/>
+          <p:cNvSpPr/>
+          <p:nvPr/>
+        </p:nvSpPr>
+        <p:spPr>
+          <a:xfrm>
+            <a:off x="731520" y="1783080"/>
+            <a:ext cx="2514600" cy="1828800"/>
+          </a:xfrm>
+          <a:prstGeom prst="roundRect">
+            <a:avLst/>
+          </a:prstGeom>
+          <a:solidFill>
+            <a:srgbClr val="F2F2F2"/>
+          </a:solidFill>
+          <a:ln>
+            <a:noFill/>
+          </a:ln>
+        </p:spPr>
+        <p:style>
+          <a:lnRef idx="1">
+            <a:schemeClr val="accent1"/>
+          </a:lnRef>
+          <a:fillRef idx="3">
+            <a:schemeClr val="accent1"/>
+          </a:fillRef>
+          <a:effectRef idx="2">
+            <a:schemeClr val="accent1"/>
+          </a:effectRef>
+          <a:fontRef idx="minor">
+            <a:schemeClr val="lt1"/>
+          </a:fontRef>
+        </p:style>
+        <p:txBody>
+          <a:bodyPr rtlCol="0" anchor="ctr"/>
+          <a:lstStyle/>
+          <a:p>
+            <a:pPr algn="ctr"/>
+          </a:p>
+        </p:txBody>
+      </p:sp>
+      <p:sp>
+        <p:nvSpPr>
+          <p:cNvPr id="6" name="TextBox 5"/>
           <p:cNvSpPr txBox="1"/>
           <p:nvPr/>
         </p:nvSpPr>
         <p:spPr>
           <a:xfrm>
-            <a:off x="731520" y="2011680"/>
-            <a:ext cx="7772400" cy="4114800"/>
+            <a:off x="914400" y="1920240"/>
+            <a:ext cx="2148840" cy="320040"/>
           </a:xfrm>
           <a:prstGeom prst="rect">
             <a:avLst/>
@@ -5762,135 +6312,445 @@
           </a:bodyPr>
           <a:lstStyle/>
           <a:p>
-            <a:pPr>
-              <a:spcAft>
-                <a:spcPts val="600"/>
-              </a:spcAft>
-              <a:defRPr sz="1300">
-                <a:solidFill>
-                  <a:srgbClr val="070A40"/>
-                </a:solidFill>
-                <a:latin typeface="Arial"/>
-              </a:defRPr>
-            </a:pPr>
-            <a:r>
-              <a:rPr sz="1300">
-                <a:solidFill>
-                  <a:srgbClr val="070A40"/>
-                </a:solidFill>
-                <a:latin typeface="Arial"/>
-              </a:rPr>
-              <a:t>✓  Registry-driven: Define agents in YAML, generate OpenCode-compatible markdown files</a:t>
-            </a:r>
-          </a:p>
-          <a:p>
-            <a:pPr>
-              <a:spcAft>
-                <a:spcPts val="600"/>
-              </a:spcAft>
-              <a:defRPr sz="1300">
-                <a:solidFill>
-                  <a:srgbClr val="070A40"/>
-                </a:solidFill>
-                <a:latin typeface="Arial"/>
-              </a:defRPr>
-            </a:pPr>
-            <a:r>
-              <a:rPr sz="1300">
-                <a:solidFill>
-                  <a:srgbClr val="070A40"/>
-                </a:solidFill>
-                <a:latin typeface="Arial"/>
-              </a:rPr>
-              <a:t>✓  Multi-provider LLM routing: OpenAI, Anthropic, DeepSeek, Gemini with automatic fallback</a:t>
-            </a:r>
-          </a:p>
-          <a:p>
-            <a:pPr>
-              <a:spcAft>
-                <a:spcPts val="600"/>
-              </a:spcAft>
-              <a:defRPr sz="1300">
-                <a:solidFill>
-                  <a:srgbClr val="070A40"/>
-                </a:solidFill>
-                <a:latin typeface="Arial"/>
-              </a:defRPr>
-            </a:pPr>
-            <a:r>
-              <a:rPr sz="1300">
-                <a:solidFill>
-                  <a:srgbClr val="070A40"/>
-                </a:solidFill>
-                <a:latin typeface="Arial"/>
-              </a:rPr>
-              <a:t>✓  Built-in cost tracking &amp; budget enforcement per agent</a:t>
-            </a:r>
-          </a:p>
-          <a:p>
-            <a:pPr>
-              <a:spcAft>
-                <a:spcPts val="600"/>
-              </a:spcAft>
-              <a:defRPr sz="1300">
-                <a:solidFill>
-                  <a:srgbClr val="070A40"/>
-                </a:solidFill>
-                <a:latin typeface="Arial"/>
-              </a:defRPr>
-            </a:pPr>
-            <a:r>
-              <a:rPr sz="1300">
-                <a:solidFill>
-                  <a:srgbClr val="070A40"/>
-                </a:solidFill>
-                <a:latin typeface="Arial"/>
-              </a:rPr>
-              <a:t>✓  Human-in-the-loop approval gates for dangerous operations</a:t>
-            </a:r>
-          </a:p>
-          <a:p>
-            <a:pPr>
-              <a:spcAft>
-                <a:spcPts val="600"/>
-              </a:spcAft>
-              <a:defRPr sz="1300">
-                <a:solidFill>
-                  <a:srgbClr val="070A40"/>
-                </a:solidFill>
-                <a:latin typeface="Arial"/>
-              </a:defRPr>
-            </a:pPr>
-            <a:r>
-              <a:rPr sz="1300">
-                <a:solidFill>
-                  <a:srgbClr val="070A40"/>
-                </a:solidFill>
-                <a:latin typeface="Arial"/>
-              </a:rPr>
-              <a:t>✓  MessageBus task queue for cross-agent coordination</a:t>
-            </a:r>
-          </a:p>
-          <a:p>
-            <a:pPr>
-              <a:spcAft>
-                <a:spcPts val="600"/>
-              </a:spcAft>
-              <a:defRPr sz="1300">
-                <a:solidFill>
-                  <a:srgbClr val="070A40"/>
-                </a:solidFill>
-                <a:latin typeface="Arial"/>
-              </a:defRPr>
-            </a:pPr>
-            <a:r>
-              <a:rPr sz="1300">
-                <a:solidFill>
-                  <a:srgbClr val="070A40"/>
-                </a:solidFill>
-                <a:latin typeface="Arial"/>
-              </a:rPr>
-              <a:t>✓  Pre-built agent roles across multiple departments</a:t>
+            <a:pPr algn="l">
+              <a:defRPr sz="1400" b="1">
+                <a:solidFill>
+                  <a:srgbClr val="070A40"/>
+                </a:solidFill>
+                <a:latin typeface="Arial"/>
+              </a:defRPr>
+            </a:pPr>
+            <a:r>
+              <a:rPr sz="1400" b="1">
+                <a:solidFill>
+                  <a:srgbClr val="070A40"/>
+                </a:solidFill>
+                <a:latin typeface="Arial"/>
+              </a:rPr>
+              <a:t>Capability</a:t>
+            </a:r>
+          </a:p>
+        </p:txBody>
+      </p:sp>
+      <p:sp>
+        <p:nvSpPr>
+          <p:cNvPr id="7" name="TextBox 6"/>
+          <p:cNvSpPr txBox="1"/>
+          <p:nvPr/>
+        </p:nvSpPr>
+        <p:spPr>
+          <a:xfrm>
+            <a:off x="914400" y="2240280"/>
+            <a:ext cx="2148840" cy="1280160"/>
+          </a:xfrm>
+          <a:prstGeom prst="rect">
+            <a:avLst/>
+          </a:prstGeom>
+          <a:noFill/>
+        </p:spPr>
+        <p:txBody>
+          <a:bodyPr wrap="square">
+            <a:spAutoFit/>
+          </a:bodyPr>
+          <a:lstStyle/>
+          <a:p>
+            <a:pPr algn="l">
+              <a:defRPr sz="1200" b="0">
+                <a:solidFill>
+                  <a:srgbClr val="070A40"/>
+                </a:solidFill>
+                <a:latin typeface="Arial"/>
+              </a:defRPr>
+            </a:pPr>
+            <a:r>
+              <a:rPr sz="1200" b="0">
+                <a:solidFill>
+                  <a:srgbClr val="070A40"/>
+                </a:solidFill>
+                <a:latin typeface="Arial"/>
+              </a:rPr>
+              <a:t>Long-horizon tool use is now reliable enough to run multi-step work, not just answer questions.</a:t>
+            </a:r>
+          </a:p>
+        </p:txBody>
+      </p:sp>
+      <p:sp>
+        <p:nvSpPr>
+          <p:cNvPr id="8" name="Rounded Rectangle 7"/>
+          <p:cNvSpPr/>
+          <p:nvPr/>
+        </p:nvSpPr>
+        <p:spPr>
+          <a:xfrm>
+            <a:off x="3429000" y="1783080"/>
+            <a:ext cx="2514600" cy="1828800"/>
+          </a:xfrm>
+          <a:prstGeom prst="roundRect">
+            <a:avLst/>
+          </a:prstGeom>
+          <a:solidFill>
+            <a:srgbClr val="F2F2F2"/>
+          </a:solidFill>
+          <a:ln>
+            <a:noFill/>
+          </a:ln>
+        </p:spPr>
+        <p:style>
+          <a:lnRef idx="1">
+            <a:schemeClr val="accent1"/>
+          </a:lnRef>
+          <a:fillRef idx="3">
+            <a:schemeClr val="accent1"/>
+          </a:fillRef>
+          <a:effectRef idx="2">
+            <a:schemeClr val="accent1"/>
+          </a:effectRef>
+          <a:fontRef idx="minor">
+            <a:schemeClr val="lt1"/>
+          </a:fontRef>
+        </p:style>
+        <p:txBody>
+          <a:bodyPr rtlCol="0" anchor="ctr"/>
+          <a:lstStyle/>
+          <a:p>
+            <a:pPr algn="ctr"/>
+          </a:p>
+        </p:txBody>
+      </p:sp>
+      <p:sp>
+        <p:nvSpPr>
+          <p:cNvPr id="9" name="TextBox 8"/>
+          <p:cNvSpPr txBox="1"/>
+          <p:nvPr/>
+        </p:nvSpPr>
+        <p:spPr>
+          <a:xfrm>
+            <a:off x="3611880" y="1920240"/>
+            <a:ext cx="2148840" cy="320040"/>
+          </a:xfrm>
+          <a:prstGeom prst="rect">
+            <a:avLst/>
+          </a:prstGeom>
+          <a:noFill/>
+        </p:spPr>
+        <p:txBody>
+          <a:bodyPr wrap="square">
+            <a:spAutoFit/>
+          </a:bodyPr>
+          <a:lstStyle/>
+          <a:p>
+            <a:pPr algn="l">
+              <a:defRPr sz="1400" b="1">
+                <a:solidFill>
+                  <a:srgbClr val="070A40"/>
+                </a:solidFill>
+                <a:latin typeface="Arial"/>
+              </a:defRPr>
+            </a:pPr>
+            <a:r>
+              <a:rPr sz="1400" b="1">
+                <a:solidFill>
+                  <a:srgbClr val="070A40"/>
+                </a:solidFill>
+                <a:latin typeface="Arial"/>
+              </a:rPr>
+              <a:t>Cost</a:t>
+            </a:r>
+          </a:p>
+        </p:txBody>
+      </p:sp>
+      <p:sp>
+        <p:nvSpPr>
+          <p:cNvPr id="10" name="TextBox 9"/>
+          <p:cNvSpPr txBox="1"/>
+          <p:nvPr/>
+        </p:nvSpPr>
+        <p:spPr>
+          <a:xfrm>
+            <a:off x="3611880" y="2240280"/>
+            <a:ext cx="2148840" cy="1280160"/>
+          </a:xfrm>
+          <a:prstGeom prst="rect">
+            <a:avLst/>
+          </a:prstGeom>
+          <a:noFill/>
+        </p:spPr>
+        <p:txBody>
+          <a:bodyPr wrap="square">
+            <a:spAutoFit/>
+          </a:bodyPr>
+          <a:lstStyle/>
+          <a:p>
+            <a:pPr algn="l">
+              <a:defRPr sz="1200" b="0">
+                <a:solidFill>
+                  <a:srgbClr val="070A40"/>
+                </a:solidFill>
+                <a:latin typeface="Arial"/>
+              </a:defRPr>
+            </a:pPr>
+            <a:r>
+              <a:rPr sz="1200" b="0">
+                <a:solidFill>
+                  <a:srgbClr val="070A40"/>
+                </a:solidFill>
+                <a:latin typeface="Arial"/>
+              </a:rPr>
+              <a:t>Inference has fallen far enough that per-agent budgets are a control problem, not a blocker.</a:t>
+            </a:r>
+          </a:p>
+        </p:txBody>
+      </p:sp>
+      <p:sp>
+        <p:nvSpPr>
+          <p:cNvPr id="11" name="Rounded Rectangle 10"/>
+          <p:cNvSpPr/>
+          <p:nvPr/>
+        </p:nvSpPr>
+        <p:spPr>
+          <a:xfrm>
+            <a:off x="6126480" y="1783080"/>
+            <a:ext cx="2514600" cy="1828800"/>
+          </a:xfrm>
+          <a:prstGeom prst="roundRect">
+            <a:avLst/>
+          </a:prstGeom>
+          <a:solidFill>
+            <a:srgbClr val="F2F2F2"/>
+          </a:solidFill>
+          <a:ln>
+            <a:noFill/>
+          </a:ln>
+        </p:spPr>
+        <p:style>
+          <a:lnRef idx="1">
+            <a:schemeClr val="accent1"/>
+          </a:lnRef>
+          <a:fillRef idx="3">
+            <a:schemeClr val="accent1"/>
+          </a:fillRef>
+          <a:effectRef idx="2">
+            <a:schemeClr val="accent1"/>
+          </a:effectRef>
+          <a:fontRef idx="minor">
+            <a:schemeClr val="lt1"/>
+          </a:fontRef>
+        </p:style>
+        <p:txBody>
+          <a:bodyPr rtlCol="0" anchor="ctr"/>
+          <a:lstStyle/>
+          <a:p>
+            <a:pPr algn="ctr"/>
+          </a:p>
+        </p:txBody>
+      </p:sp>
+      <p:sp>
+        <p:nvSpPr>
+          <p:cNvPr id="12" name="TextBox 11"/>
+          <p:cNvSpPr txBox="1"/>
+          <p:nvPr/>
+        </p:nvSpPr>
+        <p:spPr>
+          <a:xfrm>
+            <a:off x="6309360" y="1920240"/>
+            <a:ext cx="2148840" cy="320040"/>
+          </a:xfrm>
+          <a:prstGeom prst="rect">
+            <a:avLst/>
+          </a:prstGeom>
+          <a:noFill/>
+        </p:spPr>
+        <p:txBody>
+          <a:bodyPr wrap="square">
+            <a:spAutoFit/>
+          </a:bodyPr>
+          <a:lstStyle/>
+          <a:p>
+            <a:pPr algn="l">
+              <a:defRPr sz="1400" b="1">
+                <a:solidFill>
+                  <a:srgbClr val="070A40"/>
+                </a:solidFill>
+                <a:latin typeface="Arial"/>
+              </a:defRPr>
+            </a:pPr>
+            <a:r>
+              <a:rPr sz="1400" b="1">
+                <a:solidFill>
+                  <a:srgbClr val="070A40"/>
+                </a:solidFill>
+                <a:latin typeface="Arial"/>
+              </a:rPr>
+              <a:t>Expectation</a:t>
+            </a:r>
+          </a:p>
+        </p:txBody>
+      </p:sp>
+      <p:sp>
+        <p:nvSpPr>
+          <p:cNvPr id="13" name="TextBox 12"/>
+          <p:cNvSpPr txBox="1"/>
+          <p:nvPr/>
+        </p:nvSpPr>
+        <p:spPr>
+          <a:xfrm>
+            <a:off x="6309360" y="2240280"/>
+            <a:ext cx="2148840" cy="1280160"/>
+          </a:xfrm>
+          <a:prstGeom prst="rect">
+            <a:avLst/>
+          </a:prstGeom>
+          <a:noFill/>
+        </p:spPr>
+        <p:txBody>
+          <a:bodyPr wrap="square">
+            <a:spAutoFit/>
+          </a:bodyPr>
+          <a:lstStyle/>
+          <a:p>
+            <a:pPr algn="l">
+              <a:defRPr sz="1200" b="0">
+                <a:solidFill>
+                  <a:srgbClr val="070A40"/>
+                </a:solidFill>
+                <a:latin typeface="Arial"/>
+              </a:defRPr>
+            </a:pPr>
+            <a:r>
+              <a:rPr sz="1200" b="0">
+                <a:solidFill>
+                  <a:srgbClr val="070A40"/>
+                </a:solidFill>
+                <a:latin typeface="Arial"/>
+              </a:rPr>
+              <a:t>Clients now ask how AI changes how they operate, not whether it will.</a:t>
+            </a:r>
+          </a:p>
+        </p:txBody>
+      </p:sp>
+      <p:sp>
+        <p:nvSpPr>
+          <p:cNvPr id="14" name="Rounded Rectangle 13"/>
+          <p:cNvSpPr/>
+          <p:nvPr/>
+        </p:nvSpPr>
+        <p:spPr>
+          <a:xfrm>
+            <a:off x="502920" y="4114800"/>
+            <a:ext cx="8138160" cy="1280160"/>
+          </a:xfrm>
+          <a:prstGeom prst="roundRect">
+            <a:avLst/>
+          </a:prstGeom>
+          <a:solidFill>
+            <a:srgbClr val="F2F2F2"/>
+          </a:solidFill>
+          <a:ln>
+            <a:noFill/>
+          </a:ln>
+        </p:spPr>
+        <p:style>
+          <a:lnRef idx="1">
+            <a:schemeClr val="accent1"/>
+          </a:lnRef>
+          <a:fillRef idx="3">
+            <a:schemeClr val="accent1"/>
+          </a:fillRef>
+          <a:effectRef idx="2">
+            <a:schemeClr val="accent1"/>
+          </a:effectRef>
+          <a:fontRef idx="minor">
+            <a:schemeClr val="lt1"/>
+          </a:fontRef>
+        </p:style>
+        <p:txBody>
+          <a:bodyPr rtlCol="0" anchor="ctr"/>
+          <a:lstStyle/>
+          <a:p>
+            <a:pPr algn="ctr"/>
+          </a:p>
+        </p:txBody>
+      </p:sp>
+      <p:sp>
+        <p:nvSpPr>
+          <p:cNvPr id="15" name="TextBox 14"/>
+          <p:cNvSpPr txBox="1"/>
+          <p:nvPr/>
+        </p:nvSpPr>
+        <p:spPr>
+          <a:xfrm>
+            <a:off x="731520" y="4279392"/>
+            <a:ext cx="7680960" cy="1005839"/>
+          </a:xfrm>
+          <a:prstGeom prst="rect">
+            <a:avLst/>
+          </a:prstGeom>
+          <a:noFill/>
+        </p:spPr>
+        <p:txBody>
+          <a:bodyPr wrap="square">
+            <a:spAutoFit/>
+          </a:bodyPr>
+          <a:lstStyle/>
+          <a:p>
+            <a:pPr algn="l">
+              <a:defRPr sz="1200" b="0">
+                <a:solidFill>
+                  <a:srgbClr val="070A40"/>
+                </a:solidFill>
+                <a:latin typeface="Arial"/>
+              </a:defRPr>
+            </a:pPr>
+            <a:r>
+              <a:rPr sz="1200" b="0">
+                <a:solidFill>
+                  <a:srgbClr val="070A40"/>
+                </a:solidFill>
+                <a:latin typeface="Arial"/>
+              </a:rPr>
+              <a:t>Why us: we run this ourselves. The company operates on the same registry, governance gates and cost controls we sell — built for low-bandwidth, offline-capable deployment in Malawi and the wider SADC region.</a:t>
+            </a:r>
+          </a:p>
+        </p:txBody>
+      </p:sp>
+      <p:sp>
+        <p:nvSpPr>
+          <p:cNvPr id="16" name="TextBox 15"/>
+          <p:cNvSpPr txBox="1"/>
+          <p:nvPr/>
+        </p:nvSpPr>
+        <p:spPr>
+          <a:xfrm>
+            <a:off x="457200" y="6510528"/>
+            <a:ext cx="8229600" cy="274320"/>
+          </a:xfrm>
+          <a:prstGeom prst="rect">
+            <a:avLst/>
+          </a:prstGeom>
+          <a:noFill/>
+        </p:spPr>
+        <p:txBody>
+          <a:bodyPr wrap="square">
+            <a:spAutoFit/>
+          </a:bodyPr>
+          <a:lstStyle/>
+          <a:p>
+            <a:pPr algn="r">
+              <a:defRPr sz="1200" b="1">
+                <a:solidFill>
+                  <a:srgbClr val="070A40"/>
+                </a:solidFill>
+                <a:latin typeface="Arial"/>
+              </a:defRPr>
+            </a:pPr>
+            <a:r>
+              <a:rPr sz="1200" b="1">
+                <a:solidFill>
+                  <a:srgbClr val="070A40"/>
+                </a:solidFill>
+                <a:latin typeface="Arial"/>
+              </a:rPr>
+              <a:t>INTERNAL DRAFT — NOT FOR EXTERNAL DISTRIBUTION</a:t>
             </a:r>
           </a:p>
         </p:txBody>
@@ -5973,7 +6833,7 @@
         <p:spPr>
           <a:xfrm>
             <a:off x="457200" y="365760"/>
-            <a:ext cx="8229600" cy="548640"/>
+            <a:ext cx="8229600" cy="640080"/>
           </a:xfrm>
           <a:prstGeom prst="rect">
             <a:avLst/>
@@ -6014,8 +6874,8 @@
         </p:nvSpPr>
         <p:spPr>
           <a:xfrm>
-            <a:off x="731520" y="1097280"/>
-            <a:ext cx="7772400" cy="548640"/>
+            <a:off x="731520" y="1051560"/>
+            <a:ext cx="7772400" cy="640080"/>
           </a:xfrm>
           <a:prstGeom prst="rect">
             <a:avLst/>
@@ -6029,21 +6889,21 @@
           <a:lstStyle/>
           <a:p>
             <a:pPr algn="l">
-              <a:defRPr sz="1600" b="0">
-                <a:solidFill>
-                  <a:srgbClr val="070A40"/>
-                </a:solidFill>
-                <a:latin typeface="Arial"/>
-              </a:defRPr>
-            </a:pPr>
-            <a:r>
-              <a:rPr sz="1600" b="0">
-                <a:solidFill>
-                  <a:srgbClr val="070A40"/>
-                </a:solidFill>
-                <a:latin typeface="Arial"/>
-              </a:rPr>
-              <a:t>The AI agent infrastructure market is projected to reach significant scale by 2028.</a:t>
+              <a:defRPr sz="1400" b="0">
+                <a:solidFill>
+                  <a:srgbClr val="070A40"/>
+                </a:solidFill>
+                <a:latin typeface="Arial"/>
+              </a:defRPr>
+            </a:pPr>
+            <a:r>
+              <a:rPr sz="1400" b="0">
+                <a:solidFill>
+                  <a:srgbClr val="070A40"/>
+                </a:solidFill>
+                <a:latin typeface="Arial"/>
+              </a:rPr>
+              <a:t>Bottom-up sizing: accounts we can actually reach with each offer, priced from our own rate card. Market totals are pending a cited report.</a:t>
             </a:r>
           </a:p>
         </p:txBody>
@@ -6056,8 +6916,8 @@
         </p:nvSpPr>
         <p:spPr>
           <a:xfrm>
-            <a:off x="731520" y="1828800"/>
-            <a:ext cx="7772400" cy="2286000"/>
+            <a:off x="731520" y="1874519"/>
+            <a:ext cx="7772400" cy="1371600"/>
           </a:xfrm>
           <a:prstGeom prst="rect">
             <a:avLst/>
@@ -6088,7 +6948,7 @@
                 </a:solidFill>
                 <a:latin typeface="Arial"/>
               </a:rPr>
-              <a:t>TAM:  Enterprise AI agent platforms &amp; orchestration</a:t>
+              <a:t>TAM:  Enterprises and consultancies adopting agentic AI operations</a:t>
             </a:r>
           </a:p>
           <a:p>
@@ -6110,7 +6970,7 @@
                 </a:solidFill>
                 <a:latin typeface="Arial"/>
               </a:rPr>
-              <a:t>SAM:  Mid-market companies deploying AI agents</a:t>
+              <a:t>SAM:  Mid-market firms in Malawi and SADC reachable from Lilongwe</a:t>
             </a:r>
           </a:p>
           <a:p>
@@ -6132,7 +6992,7 @@
                 </a:solidFill>
                 <a:latin typeface="Arial"/>
               </a:rPr>
-              <a:t>SOM:  Developer-led, self-serve AI company builder</a:t>
+              <a:t>SOM:  Clients we can serve in the next four quarters</a:t>
             </a:r>
           </a:p>
         </p:txBody>
@@ -6145,8 +7005,8 @@
         </p:nvSpPr>
         <p:spPr>
           <a:xfrm>
-            <a:off x="731520" y="3657600"/>
-            <a:ext cx="7772400" cy="457200"/>
+            <a:off x="731520" y="3108960"/>
+            <a:ext cx="7772400" cy="365760"/>
           </a:xfrm>
           <a:prstGeom prst="rect">
             <a:avLst/>
@@ -6187,8 +7047,8 @@
         </p:nvSpPr>
         <p:spPr>
           <a:xfrm>
-            <a:off x="731520" y="4114800"/>
-            <a:ext cx="7772400" cy="2286000"/>
+            <a:off x="731520" y="3520440"/>
+            <a:ext cx="7772400" cy="1737360"/>
           </a:xfrm>
           <a:prstGeom prst="rect">
             <a:avLst/>
@@ -6201,7 +7061,7 @@
           </a:bodyPr>
           <a:lstStyle/>
           <a:p>
-            <a:pPr>
+            <a:pPr marL="219456" indent="-219456">
               <a:spcAft>
                 <a:spcPts val="600"/>
               </a:spcAft>
@@ -6219,11 +7079,11 @@
                 </a:solidFill>
                 <a:latin typeface="Arial"/>
               </a:rPr>
-              <a:t>•  Startups building AI-native products</a:t>
-            </a:r>
-          </a:p>
-          <a:p>
-            <a:pPr>
+              <a:t>•  Enterprises deploying internal AI agent fleets</a:t>
+            </a:r>
+          </a:p>
+          <a:p>
+            <a:pPr marL="219456" indent="-219456">
               <a:spcAft>
                 <a:spcPts val="600"/>
               </a:spcAft>
@@ -6241,11 +7101,11 @@
                 </a:solidFill>
                 <a:latin typeface="Arial"/>
               </a:rPr>
-              <a:t>•  SMBs automating operations with AI agents</a:t>
-            </a:r>
-          </a:p>
-          <a:p>
-            <a:pPr>
+              <a:t>•  SMBs automating operations</a:t>
+            </a:r>
+          </a:p>
+          <a:p>
+            <a:pPr marL="219456" indent="-219456">
               <a:spcAft>
                 <a:spcPts val="600"/>
               </a:spcAft>
@@ -6263,11 +7123,11 @@
                 </a:solidFill>
                 <a:latin typeface="Arial"/>
               </a:rPr>
-              <a:t>•  Enterprises deploying internal AI agent fleets</a:t>
-            </a:r>
-          </a:p>
-          <a:p>
-            <a:pPr>
+              <a:t>•  AI consultancies building client agent systems</a:t>
+            </a:r>
+          </a:p>
+          <a:p>
+            <a:pPr marL="219456" indent="-219456">
               <a:spcAft>
                 <a:spcPts val="600"/>
               </a:spcAft>
@@ -6285,7 +7145,134 @@
                 </a:solidFill>
                 <a:latin typeface="Arial"/>
               </a:rPr>
-              <a:t>•  AI consultancies building client agent systems</a:t>
+              <a:t>•  NGOs and development programs needing offline-capable tooling</a:t>
+            </a:r>
+          </a:p>
+        </p:txBody>
+      </p:sp>
+      <p:sp>
+        <p:nvSpPr>
+          <p:cNvPr id="8" name="Rounded Rectangle 7"/>
+          <p:cNvSpPr/>
+          <p:nvPr/>
+        </p:nvSpPr>
+        <p:spPr>
+          <a:xfrm>
+            <a:off x="502920" y="4937760"/>
+            <a:ext cx="8138160" cy="960120"/>
+          </a:xfrm>
+          <a:prstGeom prst="roundRect">
+            <a:avLst/>
+          </a:prstGeom>
+          <a:solidFill>
+            <a:srgbClr val="F2F2F2"/>
+          </a:solidFill>
+          <a:ln>
+            <a:noFill/>
+          </a:ln>
+        </p:spPr>
+        <p:style>
+          <a:lnRef idx="1">
+            <a:schemeClr val="accent1"/>
+          </a:lnRef>
+          <a:fillRef idx="3">
+            <a:schemeClr val="accent1"/>
+          </a:fillRef>
+          <a:effectRef idx="2">
+            <a:schemeClr val="accent1"/>
+          </a:effectRef>
+          <a:fontRef idx="minor">
+            <a:schemeClr val="lt1"/>
+          </a:fontRef>
+        </p:style>
+        <p:txBody>
+          <a:bodyPr rtlCol="0" anchor="ctr"/>
+          <a:lstStyle/>
+          <a:p>
+            <a:pPr algn="ctr"/>
+          </a:p>
+        </p:txBody>
+      </p:sp>
+      <p:sp>
+        <p:nvSpPr>
+          <p:cNvPr id="9" name="TextBox 8"/>
+          <p:cNvSpPr txBox="1"/>
+          <p:nvPr/>
+        </p:nvSpPr>
+        <p:spPr>
+          <a:xfrm>
+            <a:off x="731520" y="5102352"/>
+            <a:ext cx="7680960" cy="685800"/>
+          </a:xfrm>
+          <a:prstGeom prst="rect">
+            <a:avLst/>
+          </a:prstGeom>
+          <a:noFill/>
+        </p:spPr>
+        <p:txBody>
+          <a:bodyPr wrap="square">
+            <a:spAutoFit/>
+          </a:bodyPr>
+          <a:lstStyle/>
+          <a:p>
+            <a:pPr algn="l">
+              <a:defRPr sz="1200" b="0">
+                <a:solidFill>
+                  <a:srgbClr val="070A40"/>
+                </a:solidFill>
+                <a:latin typeface="Arial"/>
+              </a:defRPr>
+            </a:pPr>
+            <a:r>
+              <a:rPr sz="1200" b="0">
+                <a:solidFill>
+                  <a:srgbClr val="070A40"/>
+                </a:solidFill>
+                <a:latin typeface="Arial"/>
+              </a:rPr>
+              <a:t>We do not need the whole market. Paid delivery work from clients reachable from Lilongwe funds the platform, and the platform is what makes that delivery repeatable rather than bespoke.</a:t>
+            </a:r>
+          </a:p>
+        </p:txBody>
+      </p:sp>
+      <p:sp>
+        <p:nvSpPr>
+          <p:cNvPr id="10" name="TextBox 9"/>
+          <p:cNvSpPr txBox="1"/>
+          <p:nvPr/>
+        </p:nvSpPr>
+        <p:spPr>
+          <a:xfrm>
+            <a:off x="457200" y="6510528"/>
+            <a:ext cx="8229600" cy="274320"/>
+          </a:xfrm>
+          <a:prstGeom prst="rect">
+            <a:avLst/>
+          </a:prstGeom>
+          <a:noFill/>
+        </p:spPr>
+        <p:txBody>
+          <a:bodyPr wrap="square">
+            <a:spAutoFit/>
+          </a:bodyPr>
+          <a:lstStyle/>
+          <a:p>
+            <a:pPr algn="r">
+              <a:defRPr sz="1200" b="1">
+                <a:solidFill>
+                  <a:srgbClr val="070A40"/>
+                </a:solidFill>
+                <a:latin typeface="Arial"/>
+              </a:defRPr>
+            </a:pPr>
+            <a:r>
+              <a:rPr sz="1200" b="1">
+                <a:solidFill>
+                  <a:srgbClr val="070A40"/>
+                </a:solidFill>
+                <a:latin typeface="Arial"/>
+              </a:rPr>
+              <a:t>INTERNAL DRAFT — NOT FOR EXTERNAL DISTRIBUTION</a:t>
             </a:r>
           </a:p>
         </p:txBody>
@@ -6368,7 +7355,7 @@
         <p:spPr>
           <a:xfrm>
             <a:off x="457200" y="365760"/>
-            <a:ext cx="8229600" cy="548640"/>
+            <a:ext cx="8229600" cy="640080"/>
           </a:xfrm>
           <a:prstGeom prst="rect">
             <a:avLst/>
@@ -6396,7 +7383,7 @@
                 </a:solidFill>
                 <a:latin typeface="Arial"/>
               </a:rPr>
-              <a:t>PRODUCT &amp; TECHNOLOGY</a:t>
+              <a:t>PRODUCT &amp; BUSINESS MODEL</a:t>
             </a:r>
           </a:p>
         </p:txBody>
@@ -6409,8 +7396,50 @@
         </p:nvSpPr>
         <p:spPr>
           <a:xfrm>
-            <a:off x="731520" y="1097280"/>
-            <a:ext cx="7772400" cy="5029200"/>
+            <a:off x="502920" y="1051560"/>
+            <a:ext cx="3931920" cy="365760"/>
+          </a:xfrm>
+          <a:prstGeom prst="rect">
+            <a:avLst/>
+          </a:prstGeom>
+          <a:noFill/>
+        </p:spPr>
+        <p:txBody>
+          <a:bodyPr wrap="square">
+            <a:spAutoFit/>
+          </a:bodyPr>
+          <a:lstStyle/>
+          <a:p>
+            <a:pPr algn="l">
+              <a:defRPr sz="1600" b="1">
+                <a:solidFill>
+                  <a:srgbClr val="070A40"/>
+                </a:solidFill>
+                <a:latin typeface="Arial"/>
+              </a:defRPr>
+            </a:pPr>
+            <a:r>
+              <a:rPr sz="1600" b="1">
+                <a:solidFill>
+                  <a:srgbClr val="070A40"/>
+                </a:solidFill>
+                <a:latin typeface="Arial"/>
+              </a:rPr>
+              <a:t>What it does</a:t>
+            </a:r>
+          </a:p>
+        </p:txBody>
+      </p:sp>
+      <p:sp>
+        <p:nvSpPr>
+          <p:cNvPr id="5" name="TextBox 4"/>
+          <p:cNvSpPr txBox="1"/>
+          <p:nvPr/>
+        </p:nvSpPr>
+        <p:spPr>
+          <a:xfrm>
+            <a:off x="502920" y="1508760"/>
+            <a:ext cx="3977639" cy="4206240"/>
           </a:xfrm>
           <a:prstGeom prst="rect">
             <a:avLst/>
@@ -6441,7 +7470,7 @@
                 </a:solidFill>
                 <a:latin typeface="Arial"/>
               </a:rPr>
-              <a:t>Architecture:</a:t>
+              <a:t>Python CLI — no web server required</a:t>
             </a:r>
           </a:p>
           <a:p>
@@ -6463,7 +7492,7 @@
                 </a:solidFill>
                 <a:latin typeface="Arial"/>
               </a:rPr>
-              <a:t>  •  Python CLI (Typer) — no web server required</a:t>
+              <a:t>Registry YAML → template → agent files</a:t>
             </a:r>
           </a:p>
           <a:p>
@@ -6485,7 +7514,7 @@
                 </a:solidFill>
                 <a:latin typeface="Arial"/>
               </a:rPr>
-              <a:t>  •  Registry YAML → Jinja2 template → OpenCode agent files</a:t>
+              <a:t>ReAct loop with tool routing</a:t>
             </a:r>
           </a:p>
           <a:p>
@@ -6507,7 +7536,7 @@
                 </a:solidFill>
                 <a:latin typeface="Arial"/>
               </a:rPr>
-              <a:t>  •  ReAct agentic loop with tool routing</a:t>
+              <a:t>AgentLoop, CostTracker, HITLGate</a:t>
             </a:r>
           </a:p>
           <a:p>
@@ -6522,6 +7551,15 @@
                 <a:latin typeface="Arial"/>
               </a:defRPr>
             </a:pPr>
+            <a:r>
+              <a:rPr sz="1200">
+                <a:solidFill>
+                  <a:srgbClr val="070A40"/>
+                </a:solidFill>
+                <a:latin typeface="Arial"/>
+              </a:rPr>
+              <a:t>MessageBus task queue</a:t>
+            </a:r>
           </a:p>
           <a:p>
             <a:pPr>
@@ -6542,7 +7580,7 @@
                 </a:solidFill>
                 <a:latin typeface="Arial"/>
               </a:rPr>
-              <a:t>Core Components:</a:t>
+              <a:t>ModelRouter with provider fallback</a:t>
             </a:r>
           </a:p>
           <a:p>
@@ -6564,7 +7602,7 @@
                 </a:solidFill>
                 <a:latin typeface="Arial"/>
               </a:rPr>
-              <a:t>  •  AgentLoop — Multi-turn reasoning with tool execution</a:t>
+              <a:t>Least-privilege agent permissions</a:t>
             </a:r>
           </a:p>
           <a:p>
@@ -6586,9 +7624,74 @@
                 </a:solidFill>
                 <a:latin typeface="Arial"/>
               </a:rPr>
-              <a:t>  •  CostTracker — Real-time LLM spend monitoring</a:t>
-            </a:r>
-          </a:p>
+              <a:t>Bandit static analysis, pre-commit hooks</a:t>
+            </a:r>
+          </a:p>
+        </p:txBody>
+      </p:sp>
+      <p:sp>
+        <p:nvSpPr>
+          <p:cNvPr id="6" name="TextBox 5"/>
+          <p:cNvSpPr txBox="1"/>
+          <p:nvPr/>
+        </p:nvSpPr>
+        <p:spPr>
+          <a:xfrm>
+            <a:off x="4754880" y="1051560"/>
+            <a:ext cx="3931920" cy="365760"/>
+          </a:xfrm>
+          <a:prstGeom prst="rect">
+            <a:avLst/>
+          </a:prstGeom>
+          <a:noFill/>
+        </p:spPr>
+        <p:txBody>
+          <a:bodyPr wrap="square">
+            <a:spAutoFit/>
+          </a:bodyPr>
+          <a:lstStyle/>
+          <a:p>
+            <a:pPr algn="l">
+              <a:defRPr sz="1600" b="1">
+                <a:solidFill>
+                  <a:srgbClr val="070A40"/>
+                </a:solidFill>
+                <a:latin typeface="Arial"/>
+              </a:defRPr>
+            </a:pPr>
+            <a:r>
+              <a:rPr sz="1600" b="1">
+                <a:solidFill>
+                  <a:srgbClr val="070A40"/>
+                </a:solidFill>
+                <a:latin typeface="Arial"/>
+              </a:rPr>
+              <a:t>How it earns</a:t>
+            </a:r>
+          </a:p>
+        </p:txBody>
+      </p:sp>
+      <p:sp>
+        <p:nvSpPr>
+          <p:cNvPr id="7" name="TextBox 6"/>
+          <p:cNvSpPr txBox="1"/>
+          <p:nvPr/>
+        </p:nvSpPr>
+        <p:spPr>
+          <a:xfrm>
+            <a:off x="4754880" y="1508760"/>
+            <a:ext cx="3977639" cy="4206240"/>
+          </a:xfrm>
+          <a:prstGeom prst="rect">
+            <a:avLst/>
+          </a:prstGeom>
+          <a:noFill/>
+        </p:spPr>
+        <p:txBody>
+          <a:bodyPr wrap="square">
+            <a:spAutoFit/>
+          </a:bodyPr>
+          <a:lstStyle/>
           <a:p>
             <a:pPr>
               <a:spcAft>
@@ -6608,7 +7711,7 @@
                 </a:solidFill>
                 <a:latin typeface="Arial"/>
               </a:rPr>
-              <a:t>  •  HITLGate — Human approval for irreversible actions</a:t>
+              <a:t>SaaS subscription — platform access</a:t>
             </a:r>
           </a:p>
           <a:p>
@@ -6630,7 +7733,7 @@
                 </a:solidFill>
                 <a:latin typeface="Arial"/>
               </a:rPr>
-              <a:t>  •  MessageBus — JSON task queue for agent coordination</a:t>
+              <a:t>Usage — LLM pass-through plus margin</a:t>
             </a:r>
           </a:p>
           <a:p>
@@ -6652,7 +7755,7 @@
                 </a:solidFill>
                 <a:latin typeface="Arial"/>
               </a:rPr>
-              <a:t>  •  ModelRouter — Provider fallback chain (OpenAI → Anthropic → DeepSeek → Gemini)</a:t>
+              <a:t>Enterprise — deployment, SLA, support</a:t>
             </a:r>
           </a:p>
           <a:p>
@@ -6667,6 +7770,15 @@
                 <a:latin typeface="Arial"/>
               </a:defRPr>
             </a:pPr>
+            <a:r>
+              <a:rPr sz="1200">
+                <a:solidFill>
+                  <a:srgbClr val="070A40"/>
+                </a:solidFill>
+                <a:latin typeface="Arial"/>
+              </a:rPr>
+              <a:t>Services — implementation engagements</a:t>
+            </a:r>
           </a:p>
           <a:p>
             <a:pPr>
@@ -6680,15 +7792,6 @@
                 <a:latin typeface="Arial"/>
               </a:defRPr>
             </a:pPr>
-            <a:r>
-              <a:rPr sz="1200">
-                <a:solidFill>
-                  <a:srgbClr val="070A40"/>
-                </a:solidFill>
-                <a:latin typeface="Arial"/>
-              </a:rPr>
-              <a:t>Security:</a:t>
-            </a:r>
           </a:p>
           <a:p>
             <a:pPr>
@@ -6709,11 +7812,11 @@
                 </a:solidFill>
                 <a:latin typeface="Arial"/>
               </a:rPr>
-              <a:t>  •  Bandit static analysis, pre-commit hooks</a:t>
-            </a:r>
-          </a:p>
-          <a:p>
-            <a:pPr>
+              <a:t>Unit economics targets:</a:t>
+            </a:r>
+          </a:p>
+          <a:p>
+            <a:pPr marL="219456" indent="-219456">
               <a:spcAft>
                 <a:spcPts val="600"/>
               </a:spcAft>
@@ -6731,11 +7834,11 @@
                 </a:solidFill>
                 <a:latin typeface="Arial"/>
               </a:rPr>
-              <a:t>  •  Principle-of-least-privilege agent permissions</a:t>
-            </a:r>
-          </a:p>
-          <a:p>
-            <a:pPr>
+              <a:t>  •  Gross margin — pending CFO model</a:t>
+            </a:r>
+          </a:p>
+          <a:p>
+            <a:pPr marL="219456" indent="-219456">
               <a:spcAft>
                 <a:spcPts val="600"/>
               </a:spcAft>
@@ -6753,7 +7856,156 @@
                 </a:solidFill>
                 <a:latin typeface="Arial"/>
               </a:rPr>
-              <a:t>  •  Encrypted credential storage</a:t>
+              <a:t>  •  LLM cost — pending CFO model</a:t>
+            </a:r>
+          </a:p>
+          <a:p>
+            <a:pPr marL="219456" indent="-219456">
+              <a:spcAft>
+                <a:spcPts val="600"/>
+              </a:spcAft>
+              <a:defRPr sz="1200">
+                <a:solidFill>
+                  <a:srgbClr val="070A40"/>
+                </a:solidFill>
+                <a:latin typeface="Arial"/>
+              </a:defRPr>
+            </a:pPr>
+            <a:r>
+              <a:rPr sz="1200">
+                <a:solidFill>
+                  <a:srgbClr val="070A40"/>
+                </a:solidFill>
+                <a:latin typeface="Arial"/>
+              </a:rPr>
+              <a:t>  •  CAC payback — pending CFO model</a:t>
+            </a:r>
+          </a:p>
+        </p:txBody>
+      </p:sp>
+      <p:sp>
+        <p:nvSpPr>
+          <p:cNvPr id="8" name="Rounded Rectangle 7"/>
+          <p:cNvSpPr/>
+          <p:nvPr/>
+        </p:nvSpPr>
+        <p:spPr>
+          <a:xfrm>
+            <a:off x="502920" y="4343400"/>
+            <a:ext cx="8138160" cy="960120"/>
+          </a:xfrm>
+          <a:prstGeom prst="roundRect">
+            <a:avLst/>
+          </a:prstGeom>
+          <a:solidFill>
+            <a:srgbClr val="F2F2F2"/>
+          </a:solidFill>
+          <a:ln>
+            <a:noFill/>
+          </a:ln>
+        </p:spPr>
+        <p:style>
+          <a:lnRef idx="1">
+            <a:schemeClr val="accent1"/>
+          </a:lnRef>
+          <a:fillRef idx="3">
+            <a:schemeClr val="accent1"/>
+          </a:fillRef>
+          <a:effectRef idx="2">
+            <a:schemeClr val="accent1"/>
+          </a:effectRef>
+          <a:fontRef idx="minor">
+            <a:schemeClr val="lt1"/>
+          </a:fontRef>
+        </p:style>
+        <p:txBody>
+          <a:bodyPr rtlCol="0" anchor="ctr"/>
+          <a:lstStyle/>
+          <a:p>
+            <a:pPr algn="ctr"/>
+          </a:p>
+        </p:txBody>
+      </p:sp>
+      <p:sp>
+        <p:nvSpPr>
+          <p:cNvPr id="9" name="TextBox 8"/>
+          <p:cNvSpPr txBox="1"/>
+          <p:nvPr/>
+        </p:nvSpPr>
+        <p:spPr>
+          <a:xfrm>
+            <a:off x="731520" y="4507992"/>
+            <a:ext cx="7680960" cy="685800"/>
+          </a:xfrm>
+          <a:prstGeom prst="rect">
+            <a:avLst/>
+          </a:prstGeom>
+          <a:noFill/>
+        </p:spPr>
+        <p:txBody>
+          <a:bodyPr wrap="square">
+            <a:spAutoFit/>
+          </a:bodyPr>
+          <a:lstStyle/>
+          <a:p>
+            <a:pPr algn="l">
+              <a:defRPr sz="1200" b="0">
+                <a:solidFill>
+                  <a:srgbClr val="070A40"/>
+                </a:solidFill>
+                <a:latin typeface="Arial"/>
+              </a:defRPr>
+            </a:pPr>
+            <a:r>
+              <a:rPr sz="1200" b="0">
+                <a:solidFill>
+                  <a:srgbClr val="070A40"/>
+                </a:solidFill>
+                <a:latin typeface="Arial"/>
+              </a:rPr>
+              <a:t>One product, three ways to buy it: a subscription for platform access, usage billed on top, and an implementation engagement where the client wants delivery as well as software. The same system runs this company.</a:t>
+            </a:r>
+          </a:p>
+        </p:txBody>
+      </p:sp>
+      <p:sp>
+        <p:nvSpPr>
+          <p:cNvPr id="10" name="TextBox 9"/>
+          <p:cNvSpPr txBox="1"/>
+          <p:nvPr/>
+        </p:nvSpPr>
+        <p:spPr>
+          <a:xfrm>
+            <a:off x="457200" y="6510528"/>
+            <a:ext cx="8229600" cy="274320"/>
+          </a:xfrm>
+          <a:prstGeom prst="rect">
+            <a:avLst/>
+          </a:prstGeom>
+          <a:noFill/>
+        </p:spPr>
+        <p:txBody>
+          <a:bodyPr wrap="square">
+            <a:spAutoFit/>
+          </a:bodyPr>
+          <a:lstStyle/>
+          <a:p>
+            <a:pPr algn="r">
+              <a:defRPr sz="1200" b="1">
+                <a:solidFill>
+                  <a:srgbClr val="070A40"/>
+                </a:solidFill>
+                <a:latin typeface="Arial"/>
+              </a:defRPr>
+            </a:pPr>
+            <a:r>
+              <a:rPr sz="1200" b="1">
+                <a:solidFill>
+                  <a:srgbClr val="070A40"/>
+                </a:solidFill>
+                <a:latin typeface="Arial"/>
+              </a:rPr>
+              <a:t>INTERNAL DRAFT — NOT FOR EXTERNAL DISTRIBUTION</a:t>
             </a:r>
           </a:p>
         </p:txBody>
@@ -6836,7 +8088,7 @@
         <p:spPr>
           <a:xfrm>
             <a:off x="457200" y="365760"/>
-            <a:ext cx="8229600" cy="548640"/>
+            <a:ext cx="8229600" cy="640080"/>
           </a:xfrm>
           <a:prstGeom prst="rect">
             <a:avLst/>
@@ -6864,7 +8116,7 @@
                 </a:solidFill>
                 <a:latin typeface="Arial"/>
               </a:rPr>
-              <a:t>BUSINESS MODEL</a:t>
+              <a:t>TRACTION &amp; STATUS</a:t>
             </a:r>
           </a:p>
         </p:txBody>
@@ -6877,8 +8129,8 @@
         </p:nvSpPr>
         <p:spPr>
           <a:xfrm>
-            <a:off x="731520" y="1097280"/>
-            <a:ext cx="7772400" cy="5029200"/>
+            <a:off x="502920" y="1051560"/>
+            <a:ext cx="3931920" cy="365760"/>
           </a:xfrm>
           <a:prstGeom prst="rect">
             <a:avLst/>
@@ -6891,7 +8143,49 @@
           </a:bodyPr>
           <a:lstStyle/>
           <a:p>
-            <a:pPr>
+            <a:pPr algn="l">
+              <a:defRPr sz="1600" b="1">
+                <a:solidFill>
+                  <a:srgbClr val="070A40"/>
+                </a:solidFill>
+                <a:latin typeface="Arial"/>
+              </a:defRPr>
+            </a:pPr>
+            <a:r>
+              <a:rPr sz="1600" b="1">
+                <a:solidFill>
+                  <a:srgbClr val="070A40"/>
+                </a:solidFill>
+                <a:latin typeface="Arial"/>
+              </a:rPr>
+              <a:t>Built and working</a:t>
+            </a:r>
+          </a:p>
+        </p:txBody>
+      </p:sp>
+      <p:sp>
+        <p:nvSpPr>
+          <p:cNvPr id="5" name="TextBox 4"/>
+          <p:cNvSpPr txBox="1"/>
+          <p:nvPr/>
+        </p:nvSpPr>
+        <p:spPr>
+          <a:xfrm>
+            <a:off x="502920" y="1508760"/>
+            <a:ext cx="3931920" cy="2926080"/>
+          </a:xfrm>
+          <a:prstGeom prst="rect">
+            <a:avLst/>
+          </a:prstGeom>
+          <a:noFill/>
+        </p:spPr>
+        <p:txBody>
+          <a:bodyPr wrap="square">
+            <a:spAutoFit/>
+          </a:bodyPr>
+          <a:lstStyle/>
+          <a:p>
+            <a:pPr marL="219456" indent="-219456">
               <a:spcAft>
                 <a:spcPts val="600"/>
               </a:spcAft>
@@ -6909,11 +8203,11 @@
                 </a:solidFill>
                 <a:latin typeface="Arial"/>
               </a:rPr>
-              <a:t>Revenue Streams:</a:t>
-            </a:r>
-          </a:p>
-          <a:p>
-            <a:pPr>
+              <a:t>•  Platform shipped; agent registry in production</a:t>
+            </a:r>
+          </a:p>
+          <a:p>
+            <a:pPr marL="219456" indent="-219456">
               <a:spcAft>
                 <a:spcPts val="600"/>
               </a:spcAft>
@@ -6931,11 +8225,11 @@
                 </a:solidFill>
                 <a:latin typeface="Arial"/>
               </a:rPr>
-              <a:t>  1.  SaaS Subscription — Monthly/annual plans for platform access</a:t>
-            </a:r>
-          </a:p>
-          <a:p>
-            <a:pPr>
+              <a:t>•  Multi-provider routing with cost enforcement</a:t>
+            </a:r>
+          </a:p>
+          <a:p>
+            <a:pPr marL="219456" indent="-219456">
               <a:spcAft>
                 <a:spcPts val="600"/>
               </a:spcAft>
@@ -6953,11 +8247,11 @@
                 </a:solidFill>
                 <a:latin typeface="Arial"/>
               </a:rPr>
-              <a:t>  2.  Usage-Based — LLM token pass-through + margin</a:t>
-            </a:r>
-          </a:p>
-          <a:p>
-            <a:pPr>
+              <a:t>•  Human approval gates ratified</a:t>
+            </a:r>
+          </a:p>
+          <a:p>
+            <a:pPr marL="219456" indent="-219456">
               <a:spcAft>
                 <a:spcPts val="600"/>
               </a:spcAft>
@@ -6975,11 +8269,11 @@
                 </a:solidFill>
                 <a:latin typeface="Arial"/>
               </a:rPr>
-              <a:t>  3.  Enterprise — Custom deployment, SLAs, dedicated support</a:t>
-            </a:r>
-          </a:p>
-          <a:p>
-            <a:pPr>
+              <a:t>•  Audit trail and test suite in place</a:t>
+            </a:r>
+          </a:p>
+          <a:p>
+            <a:pPr marL="219456" indent="-219456">
               <a:spcAft>
                 <a:spcPts val="600"/>
               </a:spcAft>
@@ -6997,11 +8291,76 @@
                 </a:solidFill>
                 <a:latin typeface="Arial"/>
               </a:rPr>
-              <a:t>  4.  Services — Implementation consulting for large deployments</a:t>
-            </a:r>
-          </a:p>
-          <a:p>
-            <a:pPr>
+              <a:t>•  Corporate Blueprint adopted</a:t>
+            </a:r>
+          </a:p>
+        </p:txBody>
+      </p:sp>
+      <p:sp>
+        <p:nvSpPr>
+          <p:cNvPr id="6" name="TextBox 5"/>
+          <p:cNvSpPr txBox="1"/>
+          <p:nvPr/>
+        </p:nvSpPr>
+        <p:spPr>
+          <a:xfrm>
+            <a:off x="4754880" y="1051560"/>
+            <a:ext cx="3931920" cy="365760"/>
+          </a:xfrm>
+          <a:prstGeom prst="rect">
+            <a:avLst/>
+          </a:prstGeom>
+          <a:noFill/>
+        </p:spPr>
+        <p:txBody>
+          <a:bodyPr wrap="square">
+            <a:spAutoFit/>
+          </a:bodyPr>
+          <a:lstStyle/>
+          <a:p>
+            <a:pPr algn="l">
+              <a:defRPr sz="1600" b="1">
+                <a:solidFill>
+                  <a:srgbClr val="E63946"/>
+                </a:solidFill>
+                <a:latin typeface="Arial"/>
+              </a:defRPr>
+            </a:pPr>
+            <a:r>
+              <a:rPr sz="1600" b="1">
+                <a:solidFill>
+                  <a:srgbClr val="E63946"/>
+                </a:solidFill>
+                <a:latin typeface="Arial"/>
+              </a:rPr>
+              <a:t>Not yet</a:t>
+            </a:r>
+          </a:p>
+        </p:txBody>
+      </p:sp>
+      <p:sp>
+        <p:nvSpPr>
+          <p:cNvPr id="7" name="TextBox 6"/>
+          <p:cNvSpPr txBox="1"/>
+          <p:nvPr/>
+        </p:nvSpPr>
+        <p:spPr>
+          <a:xfrm>
+            <a:off x="4754880" y="1508760"/>
+            <a:ext cx="3931920" cy="2194560"/>
+          </a:xfrm>
+          <a:prstGeom prst="rect">
+            <a:avLst/>
+          </a:prstGeom>
+          <a:noFill/>
+        </p:spPr>
+        <p:txBody>
+          <a:bodyPr wrap="square">
+            <a:spAutoFit/>
+          </a:bodyPr>
+          <a:lstStyle/>
+          <a:p>
+            <a:pPr marL="219456" indent="-219456">
               <a:spcAft>
                 <a:spcPts val="600"/>
               </a:spcAft>
@@ -7012,9 +8371,18 @@
                 <a:latin typeface="Arial"/>
               </a:defRPr>
             </a:pPr>
-          </a:p>
-          <a:p>
-            <a:pPr>
+            <a:r>
+              <a:rPr sz="1200">
+                <a:solidFill>
+                  <a:srgbClr val="070A40"/>
+                </a:solidFill>
+                <a:latin typeface="Arial"/>
+              </a:rPr>
+              <a:t>•  No paying clients</a:t>
+            </a:r>
+          </a:p>
+          <a:p>
+            <a:pPr marL="219456" indent="-219456">
               <a:spcAft>
                 <a:spcPts val="600"/>
               </a:spcAft>
@@ -7032,11 +8400,11 @@
                 </a:solidFill>
                 <a:latin typeface="Arial"/>
               </a:rPr>
-              <a:t>Pricing Tiers:</a:t>
-            </a:r>
-          </a:p>
-          <a:p>
-            <a:pPr>
+              <a:t>•  No signed pilots</a:t>
+            </a:r>
+          </a:p>
+          <a:p>
+            <a:pPr marL="219456" indent="-219456">
               <a:spcAft>
                 <a:spcPts val="600"/>
               </a:spcAft>
@@ -7054,11 +8422,11 @@
                 </a:solidFill>
                 <a:latin typeface="Arial"/>
               </a:rPr>
-              <a:t>  •  AI Company Builder SaaS — Starter, Pro, Enterprise tiers</a:t>
-            </a:r>
-          </a:p>
-          <a:p>
-            <a:pPr>
+              <a:t>•  No revenue</a:t>
+            </a:r>
+          </a:p>
+          <a:p>
+            <a:pPr marL="219456" indent="-219456">
               <a:spcAft>
                 <a:spcPts val="600"/>
               </a:spcAft>
@@ -7076,108 +8444,134 @@
                 </a:solidFill>
                 <a:latin typeface="Arial"/>
               </a:rPr>
-              <a:t>  •  Managed AI Workforce — Recurring service revenue</a:t>
-            </a:r>
-          </a:p>
-          <a:p>
-            <a:pPr>
-              <a:spcAft>
-                <a:spcPts val="600"/>
-              </a:spcAft>
-              <a:defRPr sz="1200">
-                <a:solidFill>
-                  <a:srgbClr val="070A40"/>
-                </a:solidFill>
-                <a:latin typeface="Arial"/>
-              </a:defRPr>
-            </a:pPr>
-          </a:p>
-          <a:p>
-            <a:pPr>
-              <a:spcAft>
-                <a:spcPts val="600"/>
-              </a:spcAft>
-              <a:defRPr sz="1200">
-                <a:solidFill>
-                  <a:srgbClr val="070A40"/>
-                </a:solidFill>
-                <a:latin typeface="Arial"/>
-              </a:defRPr>
-            </a:pPr>
-            <a:r>
-              <a:rPr sz="1200">
-                <a:solidFill>
-                  <a:srgbClr val="070A40"/>
-                </a:solidFill>
-                <a:latin typeface="Arial"/>
-              </a:rPr>
-              <a:t>Unit Economics:</a:t>
-            </a:r>
-          </a:p>
-          <a:p>
-            <a:pPr>
-              <a:spcAft>
-                <a:spcPts val="600"/>
-              </a:spcAft>
-              <a:defRPr sz="1200">
-                <a:solidFill>
-                  <a:srgbClr val="070A40"/>
-                </a:solidFill>
-                <a:latin typeface="Arial"/>
-              </a:defRPr>
-            </a:pPr>
-            <a:r>
-              <a:rPr sz="1200">
-                <a:solidFill>
-                  <a:srgbClr val="070A40"/>
-                </a:solidFill>
-                <a:latin typeface="Arial"/>
-              </a:rPr>
-              <a:t>  •  Target gross margin: Strong</a:t>
-            </a:r>
-          </a:p>
-          <a:p>
-            <a:pPr>
-              <a:spcAft>
-                <a:spcPts val="600"/>
-              </a:spcAft>
-              <a:defRPr sz="1200">
-                <a:solidFill>
-                  <a:srgbClr val="070A40"/>
-                </a:solidFill>
-                <a:latin typeface="Arial"/>
-              </a:defRPr>
-            </a:pPr>
-            <a:r>
-              <a:rPr sz="1200">
-                <a:solidFill>
-                  <a:srgbClr val="070A40"/>
-                </a:solidFill>
-                <a:latin typeface="Arial"/>
-              </a:rPr>
-              <a:t>  •  LLM cost: Controlled percentage of revenue at scale</a:t>
-            </a:r>
-          </a:p>
-          <a:p>
-            <a:pPr>
-              <a:spcAft>
-                <a:spcPts val="600"/>
-              </a:spcAft>
-              <a:defRPr sz="1200">
-                <a:solidFill>
-                  <a:srgbClr val="070A40"/>
-                </a:solidFill>
-                <a:latin typeface="Arial"/>
-              </a:defRPr>
-            </a:pPr>
-            <a:r>
-              <a:rPr sz="1200">
-                <a:solidFill>
-                  <a:srgbClr val="070A40"/>
-                </a:solidFill>
-                <a:latin typeface="Arial"/>
-              </a:rPr>
-              <a:t>  •  Target CAC payback: Favorable</a:t>
+              <a:t>•  No external validation of the model</a:t>
+            </a:r>
+          </a:p>
+        </p:txBody>
+      </p:sp>
+      <p:sp>
+        <p:nvSpPr>
+          <p:cNvPr id="8" name="Rounded Rectangle 7"/>
+          <p:cNvSpPr/>
+          <p:nvPr/>
+        </p:nvSpPr>
+        <p:spPr>
+          <a:xfrm>
+            <a:off x="502920" y="4206240"/>
+            <a:ext cx="8138160" cy="960120"/>
+          </a:xfrm>
+          <a:prstGeom prst="roundRect">
+            <a:avLst/>
+          </a:prstGeom>
+          <a:solidFill>
+            <a:srgbClr val="F2F2F2"/>
+          </a:solidFill>
+          <a:ln>
+            <a:noFill/>
+          </a:ln>
+        </p:spPr>
+        <p:style>
+          <a:lnRef idx="1">
+            <a:schemeClr val="accent1"/>
+          </a:lnRef>
+          <a:fillRef idx="3">
+            <a:schemeClr val="accent1"/>
+          </a:fillRef>
+          <a:effectRef idx="2">
+            <a:schemeClr val="accent1"/>
+          </a:effectRef>
+          <a:fontRef idx="minor">
+            <a:schemeClr val="lt1"/>
+          </a:fontRef>
+        </p:style>
+        <p:txBody>
+          <a:bodyPr rtlCol="0" anchor="ctr"/>
+          <a:lstStyle/>
+          <a:p>
+            <a:pPr algn="ctr"/>
+          </a:p>
+        </p:txBody>
+      </p:sp>
+      <p:sp>
+        <p:nvSpPr>
+          <p:cNvPr id="9" name="TextBox 8"/>
+          <p:cNvSpPr txBox="1"/>
+          <p:nvPr/>
+        </p:nvSpPr>
+        <p:spPr>
+          <a:xfrm>
+            <a:off x="731520" y="4370831"/>
+            <a:ext cx="7680960" cy="685800"/>
+          </a:xfrm>
+          <a:prstGeom prst="rect">
+            <a:avLst/>
+          </a:prstGeom>
+          <a:noFill/>
+        </p:spPr>
+        <p:txBody>
+          <a:bodyPr wrap="square">
+            <a:spAutoFit/>
+          </a:bodyPr>
+          <a:lstStyle/>
+          <a:p>
+            <a:pPr algn="l">
+              <a:defRPr sz="1200" b="0">
+                <a:solidFill>
+                  <a:srgbClr val="070A40"/>
+                </a:solidFill>
+                <a:latin typeface="Arial"/>
+              </a:defRPr>
+            </a:pPr>
+            <a:r>
+              <a:rPr sz="1200" b="0">
+                <a:solidFill>
+                  <a:srgbClr val="070A40"/>
+                </a:solidFill>
+                <a:latin typeface="Arial"/>
+              </a:rPr>
+              <a:t>This raise funds the first paid pilots. Progress is measured by signed pilots, not by features shipped — so the next version of this slide should be a list of clients, not a list of capabilities.</a:t>
+            </a:r>
+          </a:p>
+        </p:txBody>
+      </p:sp>
+      <p:sp>
+        <p:nvSpPr>
+          <p:cNvPr id="10" name="TextBox 9"/>
+          <p:cNvSpPr txBox="1"/>
+          <p:nvPr/>
+        </p:nvSpPr>
+        <p:spPr>
+          <a:xfrm>
+            <a:off x="457200" y="6510528"/>
+            <a:ext cx="8229600" cy="274320"/>
+          </a:xfrm>
+          <a:prstGeom prst="rect">
+            <a:avLst/>
+          </a:prstGeom>
+          <a:noFill/>
+        </p:spPr>
+        <p:txBody>
+          <a:bodyPr wrap="square">
+            <a:spAutoFit/>
+          </a:bodyPr>
+          <a:lstStyle/>
+          <a:p>
+            <a:pPr algn="r">
+              <a:defRPr sz="1200" b="1">
+                <a:solidFill>
+                  <a:srgbClr val="070A40"/>
+                </a:solidFill>
+                <a:latin typeface="Arial"/>
+              </a:defRPr>
+            </a:pPr>
+            <a:r>
+              <a:rPr sz="1200" b="1">
+                <a:solidFill>
+                  <a:srgbClr val="070A40"/>
+                </a:solidFill>
+                <a:latin typeface="Arial"/>
+              </a:rPr>
+              <a:t>INTERNAL DRAFT — NOT FOR EXTERNAL DISTRIBUTION</a:t>
             </a:r>
           </a:p>
         </p:txBody>
@@ -7260,7 +8654,7 @@
         <p:spPr>
           <a:xfrm>
             <a:off x="457200" y="365760"/>
-            <a:ext cx="8229600" cy="548640"/>
+            <a:ext cx="8229600" cy="640080"/>
           </a:xfrm>
           <a:prstGeom prst="rect">
             <a:avLst/>
@@ -7288,21 +8682,371 @@
                 </a:solidFill>
                 <a:latin typeface="Arial"/>
               </a:rPr>
-              <a:t>TRACTION &amp; METRICS</a:t>
-            </a:r>
-          </a:p>
-        </p:txBody>
-      </p:sp>
-      <p:sp>
-        <p:nvSpPr>
-          <p:cNvPr id="4" name="Rounded Rectangle 3"/>
+              <a:t>COMPETITIVE LANDSCAPE</a:t>
+            </a:r>
+          </a:p>
+        </p:txBody>
+      </p:sp>
+      <p:sp>
+        <p:nvSpPr>
+          <p:cNvPr id="4" name="TextBox 3"/>
+          <p:cNvSpPr txBox="1"/>
+          <p:nvPr/>
+        </p:nvSpPr>
+        <p:spPr>
+          <a:xfrm>
+            <a:off x="502920" y="1051560"/>
+            <a:ext cx="3931920" cy="365760"/>
+          </a:xfrm>
+          <a:prstGeom prst="rect">
+            <a:avLst/>
+          </a:prstGeom>
+          <a:noFill/>
+        </p:spPr>
+        <p:txBody>
+          <a:bodyPr wrap="square">
+            <a:spAutoFit/>
+          </a:bodyPr>
+          <a:lstStyle/>
+          <a:p>
+            <a:pPr algn="l">
+              <a:defRPr sz="1600" b="1">
+                <a:solidFill>
+                  <a:srgbClr val="070A40"/>
+                </a:solidFill>
+                <a:latin typeface="Arial"/>
+              </a:defRPr>
+            </a:pPr>
+            <a:r>
+              <a:rPr sz="1600" b="1">
+                <a:solidFill>
+                  <a:srgbClr val="070A40"/>
+                </a:solidFill>
+                <a:latin typeface="Arial"/>
+              </a:rPr>
+              <a:t>Who else is in the space</a:t>
+            </a:r>
+          </a:p>
+        </p:txBody>
+      </p:sp>
+      <p:sp>
+        <p:nvSpPr>
+          <p:cNvPr id="5" name="TextBox 4"/>
+          <p:cNvSpPr txBox="1"/>
+          <p:nvPr/>
+        </p:nvSpPr>
+        <p:spPr>
+          <a:xfrm>
+            <a:off x="502920" y="1508760"/>
+            <a:ext cx="3977639" cy="4023360"/>
+          </a:xfrm>
+          <a:prstGeom prst="rect">
+            <a:avLst/>
+          </a:prstGeom>
+          <a:noFill/>
+        </p:spPr>
+        <p:txBody>
+          <a:bodyPr wrap="square">
+            <a:spAutoFit/>
+          </a:bodyPr>
+          <a:lstStyle/>
+          <a:p>
+            <a:pPr>
+              <a:spcAft>
+                <a:spcPts val="600"/>
+              </a:spcAft>
+              <a:defRPr sz="1200">
+                <a:solidFill>
+                  <a:srgbClr val="070A40"/>
+                </a:solidFill>
+                <a:latin typeface="Arial"/>
+              </a:defRPr>
+            </a:pPr>
+            <a:r>
+              <a:rPr sz="1200">
+                <a:solidFill>
+                  <a:srgbClr val="070A40"/>
+                </a:solidFill>
+                <a:latin typeface="Arial"/>
+              </a:rPr>
+              <a:t>Agent frameworks (LangGraph, CrewAI) — developer tools, no organization layer or governance</a:t>
+            </a:r>
+          </a:p>
+          <a:p>
+            <a:pPr>
+              <a:spcAft>
+                <a:spcPts val="600"/>
+              </a:spcAft>
+              <a:defRPr sz="1200">
+                <a:solidFill>
+                  <a:srgbClr val="070A40"/>
+                </a:solidFill>
+                <a:latin typeface="Arial"/>
+              </a:defRPr>
+            </a:pPr>
+            <a:r>
+              <a:rPr sz="1200">
+                <a:solidFill>
+                  <a:srgbClr val="070A40"/>
+                </a:solidFill>
+                <a:latin typeface="Arial"/>
+              </a:rPr>
+              <a:t>Workflow automation (n8n, Zapier) — task pipelines, not agent organizations</a:t>
+            </a:r>
+          </a:p>
+          <a:p>
+            <a:pPr>
+              <a:spcAft>
+                <a:spcPts val="600"/>
+              </a:spcAft>
+              <a:defRPr sz="1200">
+                <a:solidFill>
+                  <a:srgbClr val="070A40"/>
+                </a:solidFill>
+                <a:latin typeface="Arial"/>
+              </a:defRPr>
+            </a:pPr>
+            <a:r>
+              <a:rPr sz="1200">
+                <a:solidFill>
+                  <a:srgbClr val="070A40"/>
+                </a:solidFill>
+                <a:latin typeface="Arial"/>
+              </a:rPr>
+              <a:t>Assistant SaaS (ChatGPT Business, Copilot) — single assistant, no role hierarchy or cost control</a:t>
+            </a:r>
+          </a:p>
+          <a:p>
+            <a:pPr>
+              <a:spcAft>
+                <a:spcPts val="600"/>
+              </a:spcAft>
+              <a:defRPr sz="1200">
+                <a:solidFill>
+                  <a:srgbClr val="070A40"/>
+                </a:solidFill>
+                <a:latin typeface="Arial"/>
+              </a:defRPr>
+            </a:pPr>
+            <a:r>
+              <a:rPr sz="1200">
+                <a:solidFill>
+                  <a:srgbClr val="070A40"/>
+                </a:solidFill>
+                <a:latin typeface="Arial"/>
+              </a:rPr>
+              <a:t>Custom builds — high engineering cost, no reusable control plane</a:t>
+            </a:r>
+          </a:p>
+        </p:txBody>
+      </p:sp>
+      <p:sp>
+        <p:nvSpPr>
+          <p:cNvPr id="6" name="TextBox 5"/>
+          <p:cNvSpPr txBox="1"/>
+          <p:nvPr/>
+        </p:nvSpPr>
+        <p:spPr>
+          <a:xfrm>
+            <a:off x="4754880" y="1051560"/>
+            <a:ext cx="3931920" cy="365760"/>
+          </a:xfrm>
+          <a:prstGeom prst="rect">
+            <a:avLst/>
+          </a:prstGeom>
+          <a:noFill/>
+        </p:spPr>
+        <p:txBody>
+          <a:bodyPr wrap="square">
+            <a:spAutoFit/>
+          </a:bodyPr>
+          <a:lstStyle/>
+          <a:p>
+            <a:pPr algn="l">
+              <a:defRPr sz="1600" b="1">
+                <a:solidFill>
+                  <a:srgbClr val="E63946"/>
+                </a:solidFill>
+                <a:latin typeface="Arial"/>
+              </a:defRPr>
+            </a:pPr>
+            <a:r>
+              <a:rPr sz="1600" b="1">
+                <a:solidFill>
+                  <a:srgbClr val="E63946"/>
+                </a:solidFill>
+                <a:latin typeface="Arial"/>
+              </a:rPr>
+              <a:t>What we do differently</a:t>
+            </a:r>
+          </a:p>
+        </p:txBody>
+      </p:sp>
+      <p:sp>
+        <p:nvSpPr>
+          <p:cNvPr id="7" name="TextBox 6"/>
+          <p:cNvSpPr txBox="1"/>
+          <p:nvPr/>
+        </p:nvSpPr>
+        <p:spPr>
+          <a:xfrm>
+            <a:off x="4754880" y="1508760"/>
+            <a:ext cx="3977639" cy="4023360"/>
+          </a:xfrm>
+          <a:prstGeom prst="rect">
+            <a:avLst/>
+          </a:prstGeom>
+          <a:noFill/>
+        </p:spPr>
+        <p:txBody>
+          <a:bodyPr wrap="square">
+            <a:spAutoFit/>
+          </a:bodyPr>
+          <a:lstStyle/>
+          <a:p>
+            <a:pPr>
+              <a:spcAft>
+                <a:spcPts val="600"/>
+              </a:spcAft>
+              <a:defRPr sz="1200">
+                <a:solidFill>
+                  <a:srgbClr val="070A40"/>
+                </a:solidFill>
+                <a:latin typeface="Arial"/>
+              </a:defRPr>
+            </a:pPr>
+            <a:r>
+              <a:rPr sz="1200">
+                <a:solidFill>
+                  <a:srgbClr val="070A40"/>
+                </a:solidFill>
+                <a:latin typeface="Arial"/>
+              </a:rPr>
+              <a:t>✓  Organization structure, not a single agent</a:t>
+            </a:r>
+          </a:p>
+          <a:p>
+            <a:pPr>
+              <a:spcAft>
+                <a:spcPts val="600"/>
+              </a:spcAft>
+              <a:defRPr sz="1200">
+                <a:solidFill>
+                  <a:srgbClr val="070A40"/>
+                </a:solidFill>
+                <a:latin typeface="Arial"/>
+              </a:defRPr>
+            </a:pPr>
+            <a:r>
+              <a:rPr sz="1200">
+                <a:solidFill>
+                  <a:srgbClr val="070A40"/>
+                </a:solidFill>
+                <a:latin typeface="Arial"/>
+              </a:rPr>
+              <a:t>✓  Cost transparency and budget enforcement built in</a:t>
+            </a:r>
+          </a:p>
+          <a:p>
+            <a:pPr>
+              <a:spcAft>
+                <a:spcPts val="600"/>
+              </a:spcAft>
+              <a:defRPr sz="1200">
+                <a:solidFill>
+                  <a:srgbClr val="070A40"/>
+                </a:solidFill>
+                <a:latin typeface="Arial"/>
+              </a:defRPr>
+            </a:pPr>
+            <a:r>
+              <a:rPr sz="1200">
+                <a:solidFill>
+                  <a:srgbClr val="070A40"/>
+                </a:solidFill>
+                <a:latin typeface="Arial"/>
+              </a:rPr>
+              <a:t>✓  Human approval gates as a first-class feature</a:t>
+            </a:r>
+          </a:p>
+          <a:p>
+            <a:pPr>
+              <a:spcAft>
+                <a:spcPts val="600"/>
+              </a:spcAft>
+              <a:defRPr sz="1200">
+                <a:solidFill>
+                  <a:srgbClr val="070A40"/>
+                </a:solidFill>
+                <a:latin typeface="Arial"/>
+              </a:defRPr>
+            </a:pPr>
+            <a:r>
+              <a:rPr sz="1200">
+                <a:solidFill>
+                  <a:srgbClr val="070A40"/>
+                </a:solidFill>
+                <a:latin typeface="Arial"/>
+              </a:rPr>
+              <a:t>✓  Multi-provider, with automatic fallback</a:t>
+            </a:r>
+          </a:p>
+          <a:p>
+            <a:pPr>
+              <a:spcAft>
+                <a:spcPts val="600"/>
+              </a:spcAft>
+              <a:defRPr sz="1200">
+                <a:solidFill>
+                  <a:srgbClr val="070A40"/>
+                </a:solidFill>
+                <a:latin typeface="Arial"/>
+              </a:defRPr>
+            </a:pPr>
+            <a:r>
+              <a:rPr sz="1200">
+                <a:solidFill>
+                  <a:srgbClr val="070A40"/>
+                </a:solidFill>
+                <a:latin typeface="Arial"/>
+              </a:rPr>
+              <a:t>✓  Local-first inference for low-connectivity settings</a:t>
+            </a:r>
+          </a:p>
+          <a:p>
+            <a:pPr>
+              <a:spcAft>
+                <a:spcPts val="600"/>
+              </a:spcAft>
+              <a:defRPr sz="1200">
+                <a:solidFill>
+                  <a:srgbClr val="070A40"/>
+                </a:solidFill>
+                <a:latin typeface="Arial"/>
+              </a:defRPr>
+            </a:pPr>
+            <a:r>
+              <a:rPr sz="1200">
+                <a:solidFill>
+                  <a:srgbClr val="070A40"/>
+                </a:solidFill>
+                <a:latin typeface="Arial"/>
+              </a:rPr>
+              <a:t>✓  Governance and escalation rules shipped as code</a:t>
+            </a:r>
+          </a:p>
+        </p:txBody>
+      </p:sp>
+      <p:sp>
+        <p:nvSpPr>
+          <p:cNvPr id="8" name="Rounded Rectangle 7"/>
           <p:cNvSpPr/>
           <p:nvPr/>
         </p:nvSpPr>
         <p:spPr>
           <a:xfrm>
-            <a:off x="914400" y="1188720"/>
-            <a:ext cx="3200400" cy="1280160"/>
+            <a:off x="502920" y="4434840"/>
+            <a:ext cx="8138160" cy="960120"/>
           </a:xfrm>
           <a:prstGeom prst="roundRect">
             <a:avLst/>
@@ -7338,14 +9082,14 @@
       </p:sp>
       <p:sp>
         <p:nvSpPr>
-          <p:cNvPr id="5" name="TextBox 4"/>
+          <p:cNvPr id="9" name="TextBox 8"/>
           <p:cNvSpPr txBox="1"/>
           <p:nvPr/>
         </p:nvSpPr>
         <p:spPr>
           <a:xfrm>
-            <a:off x="1097280" y="1371600"/>
-            <a:ext cx="2834640" cy="548640"/>
+            <a:off x="731520" y="4599431"/>
+            <a:ext cx="7680960" cy="685800"/>
           </a:xfrm>
           <a:prstGeom prst="rect">
             <a:avLst/>
@@ -7358,36 +9102,36 @@
           </a:bodyPr>
           <a:lstStyle/>
           <a:p>
-            <a:pPr algn="ctr">
-              <a:defRPr sz="2800" b="1">
-                <a:solidFill>
-                  <a:srgbClr val="070A40"/>
-                </a:solidFill>
-                <a:latin typeface="Arial"/>
-              </a:defRPr>
-            </a:pPr>
-            <a:r>
-              <a:rPr sz="2800" b="1">
-                <a:solidFill>
-                  <a:srgbClr val="070A40"/>
-                </a:solidFill>
-                <a:latin typeface="Arial"/>
-              </a:rPr>
-              <a:t>Agents</a:t>
-            </a:r>
-          </a:p>
-        </p:txBody>
-      </p:sp>
-      <p:sp>
-        <p:nvSpPr>
-          <p:cNvPr id="6" name="TextBox 5"/>
+            <a:pPr algn="l">
+              <a:defRPr sz="1200" b="0">
+                <a:solidFill>
+                  <a:srgbClr val="070A40"/>
+                </a:solidFill>
+                <a:latin typeface="Arial"/>
+              </a:defRPr>
+            </a:pPr>
+            <a:r>
+              <a:rPr sz="1200" b="0">
+                <a:solidFill>
+                  <a:srgbClr val="070A40"/>
+                </a:solidFill>
+                <a:latin typeface="Arial"/>
+              </a:rPr>
+              <a:t>We are not competing on model access — the models are commodities and anyone can call them. We compete on the control plane around them: who may act, what it costs, and who signs off.</a:t>
+            </a:r>
+          </a:p>
+        </p:txBody>
+      </p:sp>
+      <p:sp>
+        <p:nvSpPr>
+          <p:cNvPr id="10" name="TextBox 9"/>
           <p:cNvSpPr txBox="1"/>
           <p:nvPr/>
         </p:nvSpPr>
         <p:spPr>
           <a:xfrm>
-            <a:off x="1097280" y="1920240"/>
-            <a:ext cx="2834640" cy="365760"/>
+            <a:off x="457200" y="6510528"/>
+            <a:ext cx="8229600" cy="274320"/>
           </a:xfrm>
           <a:prstGeom prst="rect">
             <a:avLst/>
@@ -7400,536 +9144,22 @@
           </a:bodyPr>
           <a:lstStyle/>
           <a:p>
-            <a:pPr algn="ctr">
-              <a:defRPr sz="1200" b="0">
-                <a:solidFill>
-                  <a:srgbClr val="070A40"/>
-                </a:solidFill>
-                <a:latin typeface="Arial"/>
-              </a:defRPr>
-            </a:pPr>
-            <a:r>
-              <a:rPr sz="1200" b="0">
-                <a:solidFill>
-                  <a:srgbClr val="070A40"/>
-                </a:solidFill>
-                <a:latin typeface="Arial"/>
-              </a:rPr>
-              <a:t>Deployed</a:t>
-            </a:r>
-          </a:p>
-        </p:txBody>
-      </p:sp>
-      <p:sp>
-        <p:nvSpPr>
-          <p:cNvPr id="7" name="Rounded Rectangle 6"/>
-          <p:cNvSpPr/>
-          <p:nvPr/>
-        </p:nvSpPr>
-        <p:spPr>
-          <a:xfrm>
-            <a:off x="4572000" y="1188720"/>
-            <a:ext cx="3200400" cy="1280160"/>
-          </a:xfrm>
-          <a:prstGeom prst="roundRect">
-            <a:avLst/>
-          </a:prstGeom>
-          <a:solidFill>
-            <a:srgbClr val="F2F2F2"/>
-          </a:solidFill>
-          <a:ln>
-            <a:noFill/>
-          </a:ln>
-        </p:spPr>
-        <p:style>
-          <a:lnRef idx="1">
-            <a:schemeClr val="accent1"/>
-          </a:lnRef>
-          <a:fillRef idx="3">
-            <a:schemeClr val="accent1"/>
-          </a:fillRef>
-          <a:effectRef idx="2">
-            <a:schemeClr val="accent1"/>
-          </a:effectRef>
-          <a:fontRef idx="minor">
-            <a:schemeClr val="lt1"/>
-          </a:fontRef>
-        </p:style>
-        <p:txBody>
-          <a:bodyPr rtlCol="0" anchor="ctr"/>
-          <a:lstStyle/>
-          <a:p>
-            <a:pPr algn="ctr"/>
-          </a:p>
-        </p:txBody>
-      </p:sp>
-      <p:sp>
-        <p:nvSpPr>
-          <p:cNvPr id="8" name="TextBox 7"/>
-          <p:cNvSpPr txBox="1"/>
-          <p:nvPr/>
-        </p:nvSpPr>
-        <p:spPr>
-          <a:xfrm>
-            <a:off x="4754880" y="1371600"/>
-            <a:ext cx="2834640" cy="548640"/>
-          </a:xfrm>
-          <a:prstGeom prst="rect">
-            <a:avLst/>
-          </a:prstGeom>
-          <a:noFill/>
-        </p:spPr>
-        <p:txBody>
-          <a:bodyPr wrap="square">
-            <a:spAutoFit/>
-          </a:bodyPr>
-          <a:lstStyle/>
-          <a:p>
-            <a:pPr algn="ctr">
-              <a:defRPr sz="2800" b="1">
-                <a:solidFill>
-                  <a:srgbClr val="070A40"/>
-                </a:solidFill>
-                <a:latin typeface="Arial"/>
-              </a:defRPr>
-            </a:pPr>
-            <a:r>
-              <a:rPr sz="2800" b="1">
-                <a:solidFill>
-                  <a:srgbClr val="070A40"/>
-                </a:solidFill>
-                <a:latin typeface="Arial"/>
-              </a:rPr>
-              <a:t>Departments</a:t>
-            </a:r>
-          </a:p>
-        </p:txBody>
-      </p:sp>
-      <p:sp>
-        <p:nvSpPr>
-          <p:cNvPr id="9" name="TextBox 8"/>
-          <p:cNvSpPr txBox="1"/>
-          <p:nvPr/>
-        </p:nvSpPr>
-        <p:spPr>
-          <a:xfrm>
-            <a:off x="4754880" y="1920240"/>
-            <a:ext cx="2834640" cy="365760"/>
-          </a:xfrm>
-          <a:prstGeom prst="rect">
-            <a:avLst/>
-          </a:prstGeom>
-          <a:noFill/>
-        </p:spPr>
-        <p:txBody>
-          <a:bodyPr wrap="square">
-            <a:spAutoFit/>
-          </a:bodyPr>
-          <a:lstStyle/>
-          <a:p>
-            <a:pPr algn="ctr">
-              <a:defRPr sz="1200" b="0">
-                <a:solidFill>
-                  <a:srgbClr val="070A40"/>
-                </a:solidFill>
-                <a:latin typeface="Arial"/>
-              </a:defRPr>
-            </a:pPr>
-            <a:r>
-              <a:rPr sz="1200" b="0">
-                <a:solidFill>
-                  <a:srgbClr val="070A40"/>
-                </a:solidFill>
-                <a:latin typeface="Arial"/>
-              </a:rPr>
-              <a:t>Live</a:t>
-            </a:r>
-          </a:p>
-        </p:txBody>
-      </p:sp>
-      <p:sp>
-        <p:nvSpPr>
-          <p:cNvPr id="10" name="Rounded Rectangle 9"/>
-          <p:cNvSpPr/>
-          <p:nvPr/>
-        </p:nvSpPr>
-        <p:spPr>
-          <a:xfrm>
-            <a:off x="914400" y="2834640"/>
-            <a:ext cx="3200400" cy="1280160"/>
-          </a:xfrm>
-          <a:prstGeom prst="roundRect">
-            <a:avLst/>
-          </a:prstGeom>
-          <a:solidFill>
-            <a:srgbClr val="F2F2F2"/>
-          </a:solidFill>
-          <a:ln>
-            <a:noFill/>
-          </a:ln>
-        </p:spPr>
-        <p:style>
-          <a:lnRef idx="1">
-            <a:schemeClr val="accent1"/>
-          </a:lnRef>
-          <a:fillRef idx="3">
-            <a:schemeClr val="accent1"/>
-          </a:fillRef>
-          <a:effectRef idx="2">
-            <a:schemeClr val="accent1"/>
-          </a:effectRef>
-          <a:fontRef idx="minor">
-            <a:schemeClr val="lt1"/>
-          </a:fontRef>
-        </p:style>
-        <p:txBody>
-          <a:bodyPr rtlCol="0" anchor="ctr"/>
-          <a:lstStyle/>
-          <a:p>
-            <a:pPr algn="ctr"/>
-          </a:p>
-        </p:txBody>
-      </p:sp>
-      <p:sp>
-        <p:nvSpPr>
-          <p:cNvPr id="11" name="TextBox 10"/>
-          <p:cNvSpPr txBox="1"/>
-          <p:nvPr/>
-        </p:nvSpPr>
-        <p:spPr>
-          <a:xfrm>
-            <a:off x="1097280" y="3017520"/>
-            <a:ext cx="2834640" cy="548640"/>
-          </a:xfrm>
-          <a:prstGeom prst="rect">
-            <a:avLst/>
-          </a:prstGeom>
-          <a:noFill/>
-        </p:spPr>
-        <p:txBody>
-          <a:bodyPr wrap="square">
-            <a:spAutoFit/>
-          </a:bodyPr>
-          <a:lstStyle/>
-          <a:p>
-            <a:pPr algn="ctr">
-              <a:defRPr sz="2800" b="1">
-                <a:solidFill>
-                  <a:srgbClr val="070A40"/>
-                </a:solidFill>
-                <a:latin typeface="Arial"/>
-              </a:defRPr>
-            </a:pPr>
-            <a:r>
-              <a:rPr sz="2800" b="1">
-                <a:solidFill>
-                  <a:srgbClr val="070A40"/>
-                </a:solidFill>
-                <a:latin typeface="Arial"/>
-              </a:rPr>
-              <a:t>Flagship</a:t>
-            </a:r>
-          </a:p>
-        </p:txBody>
-      </p:sp>
-      <p:sp>
-        <p:nvSpPr>
-          <p:cNvPr id="12" name="TextBox 11"/>
-          <p:cNvSpPr txBox="1"/>
-          <p:nvPr/>
-        </p:nvSpPr>
-        <p:spPr>
-          <a:xfrm>
-            <a:off x="1097280" y="3566160"/>
-            <a:ext cx="2834640" cy="365760"/>
-          </a:xfrm>
-          <a:prstGeom prst="rect">
-            <a:avLst/>
-          </a:prstGeom>
-          <a:noFill/>
-        </p:spPr>
-        <p:txBody>
-          <a:bodyPr wrap="square">
-            <a:spAutoFit/>
-          </a:bodyPr>
-          <a:lstStyle/>
-          <a:p>
-            <a:pPr algn="ctr">
-              <a:defRPr sz="1200" b="0">
-                <a:solidFill>
-                  <a:srgbClr val="070A40"/>
-                </a:solidFill>
-                <a:latin typeface="Arial"/>
-              </a:defRPr>
-            </a:pPr>
-            <a:r>
-              <a:rPr sz="1200" b="0">
-                <a:solidFill>
-                  <a:srgbClr val="070A40"/>
-                </a:solidFill>
-                <a:latin typeface="Arial"/>
-              </a:rPr>
-              <a:t>Offers</a:t>
-            </a:r>
-          </a:p>
-        </p:txBody>
-      </p:sp>
-      <p:sp>
-        <p:nvSpPr>
-          <p:cNvPr id="13" name="Rounded Rectangle 12"/>
-          <p:cNvSpPr/>
-          <p:nvPr/>
-        </p:nvSpPr>
-        <p:spPr>
-          <a:xfrm>
-            <a:off x="4572000" y="2834640"/>
-            <a:ext cx="3200400" cy="1280160"/>
-          </a:xfrm>
-          <a:prstGeom prst="roundRect">
-            <a:avLst/>
-          </a:prstGeom>
-          <a:solidFill>
-            <a:srgbClr val="F2F2F2"/>
-          </a:solidFill>
-          <a:ln>
-            <a:noFill/>
-          </a:ln>
-        </p:spPr>
-        <p:style>
-          <a:lnRef idx="1">
-            <a:schemeClr val="accent1"/>
-          </a:lnRef>
-          <a:fillRef idx="3">
-            <a:schemeClr val="accent1"/>
-          </a:fillRef>
-          <a:effectRef idx="2">
-            <a:schemeClr val="accent1"/>
-          </a:effectRef>
-          <a:fontRef idx="minor">
-            <a:schemeClr val="lt1"/>
-          </a:fontRef>
-        </p:style>
-        <p:txBody>
-          <a:bodyPr rtlCol="0" anchor="ctr"/>
-          <a:lstStyle/>
-          <a:p>
-            <a:pPr algn="ctr"/>
-          </a:p>
-        </p:txBody>
-      </p:sp>
-      <p:sp>
-        <p:nvSpPr>
-          <p:cNvPr id="14" name="TextBox 13"/>
-          <p:cNvSpPr txBox="1"/>
-          <p:nvPr/>
-        </p:nvSpPr>
-        <p:spPr>
-          <a:xfrm>
-            <a:off x="4754880" y="3017520"/>
-            <a:ext cx="2834640" cy="548640"/>
-          </a:xfrm>
-          <a:prstGeom prst="rect">
-            <a:avLst/>
-          </a:prstGeom>
-          <a:noFill/>
-        </p:spPr>
-        <p:txBody>
-          <a:bodyPr wrap="square">
-            <a:spAutoFit/>
-          </a:bodyPr>
-          <a:lstStyle/>
-          <a:p>
-            <a:pPr algn="ctr">
-              <a:defRPr sz="2800" b="1">
-                <a:solidFill>
-                  <a:srgbClr val="070A40"/>
-                </a:solidFill>
-                <a:latin typeface="Arial"/>
-              </a:defRPr>
-            </a:pPr>
-            <a:r>
-              <a:rPr sz="2800" b="1">
-                <a:solidFill>
-                  <a:srgbClr val="070A40"/>
-                </a:solidFill>
-                <a:latin typeface="Arial"/>
-              </a:rPr>
-              <a:t>Products</a:t>
-            </a:r>
-          </a:p>
-        </p:txBody>
-      </p:sp>
-      <p:sp>
-        <p:nvSpPr>
-          <p:cNvPr id="15" name="TextBox 14"/>
-          <p:cNvSpPr txBox="1"/>
-          <p:nvPr/>
-        </p:nvSpPr>
-        <p:spPr>
-          <a:xfrm>
-            <a:off x="4754880" y="3566160"/>
-            <a:ext cx="2834640" cy="365760"/>
-          </a:xfrm>
-          <a:prstGeom prst="rect">
-            <a:avLst/>
-          </a:prstGeom>
-          <a:noFill/>
-        </p:spPr>
-        <p:txBody>
-          <a:bodyPr wrap="square">
-            <a:spAutoFit/>
-          </a:bodyPr>
-          <a:lstStyle/>
-          <a:p>
-            <a:pPr algn="ctr">
-              <a:defRPr sz="1200" b="0">
-                <a:solidFill>
-                  <a:srgbClr val="070A40"/>
-                </a:solidFill>
-                <a:latin typeface="Arial"/>
-              </a:defRPr>
-            </a:pPr>
-            <a:r>
-              <a:rPr sz="1200" b="0">
-                <a:solidFill>
-                  <a:srgbClr val="070A40"/>
-                </a:solidFill>
-                <a:latin typeface="Arial"/>
-              </a:rPr>
-              <a:t>Priced</a:t>
-            </a:r>
-          </a:p>
-        </p:txBody>
-      </p:sp>
-      <p:sp>
-        <p:nvSpPr>
-          <p:cNvPr id="16" name="TextBox 15"/>
-          <p:cNvSpPr txBox="1"/>
-          <p:nvPr/>
-        </p:nvSpPr>
-        <p:spPr>
-          <a:xfrm>
-            <a:off x="731520" y="4572000"/>
-            <a:ext cx="7772400" cy="1828800"/>
-          </a:xfrm>
-          <a:prstGeom prst="rect">
-            <a:avLst/>
-          </a:prstGeom>
-          <a:noFill/>
-        </p:spPr>
-        <p:txBody>
-          <a:bodyPr wrap="square">
-            <a:spAutoFit/>
-          </a:bodyPr>
-          <a:lstStyle/>
-          <a:p>
-            <a:pPr>
-              <a:spcAft>
-                <a:spcPts val="600"/>
-              </a:spcAft>
-              <a:defRPr sz="1200">
-                <a:solidFill>
-                  <a:srgbClr val="070A40"/>
-                </a:solidFill>
-                <a:latin typeface="Arial"/>
-              </a:defRPr>
-            </a:pPr>
-            <a:r>
-              <a:rPr sz="1200">
-                <a:solidFill>
-                  <a:srgbClr val="070A40"/>
-                </a:solidFill>
-                <a:latin typeface="Arial"/>
-              </a:rPr>
-              <a:t>Key Milestones:</a:t>
-            </a:r>
-          </a:p>
-          <a:p>
-            <a:pPr>
-              <a:spcAft>
-                <a:spcPts val="600"/>
-              </a:spcAft>
-              <a:defRPr sz="1200">
-                <a:solidFill>
-                  <a:srgbClr val="070A40"/>
-                </a:solidFill>
-                <a:latin typeface="Arial"/>
-              </a:defRPr>
-            </a:pPr>
-            <a:r>
-              <a:rPr sz="1200">
-                <a:solidFill>
-                  <a:srgbClr val="070A40"/>
-                </a:solidFill>
-                <a:latin typeface="Arial"/>
-              </a:rPr>
-              <a:t>  •  Platform bootstrapped; core architecture shipped</a:t>
-            </a:r>
-          </a:p>
-          <a:p>
-            <a:pPr>
-              <a:spcAft>
-                <a:spcPts val="600"/>
-              </a:spcAft>
-              <a:defRPr sz="1200">
-                <a:solidFill>
-                  <a:srgbClr val="070A40"/>
-                </a:solidFill>
-                <a:latin typeface="Arial"/>
-              </a:defRPr>
-            </a:pPr>
-            <a:r>
-              <a:rPr sz="1200">
-                <a:solidFill>
-                  <a:srgbClr val="070A40"/>
-                </a:solidFill>
-                <a:latin typeface="Arial"/>
-              </a:rPr>
-              <a:t>  •  Flagship offers priced &amp; governance gates ratified</a:t>
-            </a:r>
-          </a:p>
-          <a:p>
-            <a:pPr>
-              <a:spcAft>
-                <a:spcPts val="600"/>
-              </a:spcAft>
-              <a:defRPr sz="1200">
-                <a:solidFill>
-                  <a:srgbClr val="070A40"/>
-                </a:solidFill>
-                <a:latin typeface="Arial"/>
-              </a:defRPr>
-            </a:pPr>
-            <a:r>
-              <a:rPr sz="1200">
-                <a:solidFill>
-                  <a:srgbClr val="070A40"/>
-                </a:solidFill>
-                <a:latin typeface="Arial"/>
-              </a:rPr>
-              <a:t>  •  Corporate Blueprint adopted; capital guidance signed</a:t>
-            </a:r>
-          </a:p>
-          <a:p>
-            <a:pPr>
-              <a:spcAft>
-                <a:spcPts val="600"/>
-              </a:spcAft>
-              <a:defRPr sz="1200">
-                <a:solidFill>
-                  <a:srgbClr val="070A40"/>
-                </a:solidFill>
-                <a:latin typeface="Arial"/>
-              </a:defRPr>
-            </a:pPr>
-            <a:r>
-              <a:rPr sz="1200">
-                <a:solidFill>
-                  <a:srgbClr val="070A40"/>
-                </a:solidFill>
-                <a:latin typeface="Arial"/>
-              </a:rPr>
-              <a:t>  •  Automated tests passing; linting clean</a:t>
+            <a:pPr algn="r">
+              <a:defRPr sz="1200" b="1">
+                <a:solidFill>
+                  <a:srgbClr val="070A40"/>
+                </a:solidFill>
+                <a:latin typeface="Arial"/>
+              </a:defRPr>
+            </a:pPr>
+            <a:r>
+              <a:rPr sz="1200" b="1">
+                <a:solidFill>
+                  <a:srgbClr val="070A40"/>
+                </a:solidFill>
+                <a:latin typeface="Arial"/>
+              </a:rPr>
+              <a:t>INTERNAL DRAFT — NOT FOR EXTERNAL DISTRIBUTION</a:t>
             </a:r>
           </a:p>
         </p:txBody>
@@ -8012,7 +9242,7 @@
         <p:spPr>
           <a:xfrm>
             <a:off x="457200" y="365760"/>
-            <a:ext cx="8229600" cy="548640"/>
+            <a:ext cx="8229600" cy="640080"/>
           </a:xfrm>
           <a:prstGeom prst="rect">
             <a:avLst/>
@@ -8040,7 +9270,7 @@
                 </a:solidFill>
                 <a:latin typeface="Arial"/>
               </a:rPr>
-              <a:t>COMPETITIVE LANDSCAPE</a:t>
+              <a:t>TEAM</a:t>
             </a:r>
           </a:p>
         </p:txBody>
@@ -8053,8 +9283,50 @@
         </p:nvSpPr>
         <p:spPr>
           <a:xfrm>
-            <a:off x="731520" y="1097280"/>
-            <a:ext cx="7772400" cy="5029200"/>
+            <a:off x="502920" y="1051560"/>
+            <a:ext cx="3931920" cy="365760"/>
+          </a:xfrm>
+          <a:prstGeom prst="rect">
+            <a:avLst/>
+          </a:prstGeom>
+          <a:noFill/>
+        </p:spPr>
+        <p:txBody>
+          <a:bodyPr wrap="square">
+            <a:spAutoFit/>
+          </a:bodyPr>
+          <a:lstStyle/>
+          <a:p>
+            <a:pPr algn="l">
+              <a:defRPr sz="1600" b="1">
+                <a:solidFill>
+                  <a:srgbClr val="070A40"/>
+                </a:solidFill>
+                <a:latin typeface="Arial"/>
+              </a:defRPr>
+            </a:pPr>
+            <a:r>
+              <a:rPr sz="1600" b="1">
+                <a:solidFill>
+                  <a:srgbClr val="070A40"/>
+                </a:solidFill>
+                <a:latin typeface="Arial"/>
+              </a:rPr>
+              <a:t>Leadership</a:t>
+            </a:r>
+          </a:p>
+        </p:txBody>
+      </p:sp>
+      <p:sp>
+        <p:nvSpPr>
+          <p:cNvPr id="5" name="TextBox 4"/>
+          <p:cNvSpPr txBox="1"/>
+          <p:nvPr/>
+        </p:nvSpPr>
+        <p:spPr>
+          <a:xfrm>
+            <a:off x="502920" y="1508760"/>
+            <a:ext cx="3977639" cy="4023360"/>
           </a:xfrm>
           <a:prstGeom prst="rect">
             <a:avLst/>
@@ -8085,7 +9357,29 @@
                 </a:solidFill>
                 <a:latin typeface="Arial"/>
               </a:rPr>
-              <a:t>Direct Competitors:</a:t>
+              <a:t>Jack Mlusu — Founder &amp; CEO</a:t>
+            </a:r>
+          </a:p>
+          <a:p>
+            <a:pPr marL="402336" indent="-201168">
+              <a:spcAft>
+                <a:spcPts val="600"/>
+              </a:spcAft>
+              <a:defRPr sz="1200">
+                <a:solidFill>
+                  <a:srgbClr val="070A40"/>
+                </a:solidFill>
+                <a:latin typeface="Arial"/>
+              </a:defRPr>
+            </a:pPr>
+            <a:r>
+              <a:rPr sz="1200">
+                <a:solidFill>
+                  <a:srgbClr val="070A40"/>
+                </a:solidFill>
+                <a:latin typeface="Arial"/>
+              </a:rPr>
+              <a:t>  Builder-operator; runs the company on the platform it sells</a:t>
             </a:r>
           </a:p>
           <a:p>
@@ -8100,15 +9394,6 @@
                 <a:latin typeface="Arial"/>
               </a:defRPr>
             </a:pPr>
-            <a:r>
-              <a:rPr sz="1200">
-                <a:solidFill>
-                  <a:srgbClr val="070A40"/>
-                </a:solidFill>
-                <a:latin typeface="Arial"/>
-              </a:rPr>
-              <a:t>  •  Agent frameworks (LangGraph, CrewAI) — dev tools, no org layer or governance</a:t>
-            </a:r>
           </a:p>
           <a:p>
             <a:pPr>
@@ -8129,7 +9414,29 @@
                 </a:solidFill>
                 <a:latin typeface="Arial"/>
               </a:rPr>
-              <a:t>  •  Workflow automation (n8n, Zapier) — task pipelines, not multi-agent organizations</a:t>
+              <a:t>AI Executive Cabinet</a:t>
+            </a:r>
+          </a:p>
+          <a:p>
+            <a:pPr marL="402336" indent="-201168">
+              <a:spcAft>
+                <a:spcPts val="600"/>
+              </a:spcAft>
+              <a:defRPr sz="1200">
+                <a:solidFill>
+                  <a:srgbClr val="070A40"/>
+                </a:solidFill>
+                <a:latin typeface="Arial"/>
+              </a:defRPr>
+            </a:pPr>
+            <a:r>
+              <a:rPr sz="1200">
+                <a:solidFill>
+                  <a:srgbClr val="070A40"/>
+                </a:solidFill>
+                <a:latin typeface="Arial"/>
+              </a:rPr>
+              <a:t>  CTO, CFO, CMO, CLO, CSO, COO, CAIO — operating agents under human approval gates</a:t>
             </a:r>
           </a:p>
           <a:p>
@@ -8144,15 +9451,6 @@
                 <a:latin typeface="Arial"/>
               </a:defRPr>
             </a:pPr>
-            <a:r>
-              <a:rPr sz="1200">
-                <a:solidFill>
-                  <a:srgbClr val="070A40"/>
-                </a:solidFill>
-                <a:latin typeface="Arial"/>
-              </a:rPr>
-              <a:t>  •  Single-assistant SaaS (ChatGPT Business, Copilot) — no role hierarchy or cost control</a:t>
-            </a:r>
           </a:p>
           <a:p>
             <a:pPr>
@@ -8166,6 +9464,190 @@
                 <a:latin typeface="Arial"/>
               </a:defRPr>
             </a:pPr>
+            <a:r>
+              <a:rPr sz="1200">
+                <a:solidFill>
+                  <a:srgbClr val="070A40"/>
+                </a:solidFill>
+                <a:latin typeface="Arial"/>
+              </a:rPr>
+              <a:t>Board of Directors</a:t>
+            </a:r>
+          </a:p>
+          <a:p>
+            <a:pPr marL="402336" indent="-201168">
+              <a:spcAft>
+                <a:spcPts val="600"/>
+              </a:spcAft>
+              <a:defRPr sz="1200">
+                <a:solidFill>
+                  <a:srgbClr val="070A40"/>
+                </a:solidFill>
+                <a:latin typeface="Arial"/>
+              </a:defRPr>
+            </a:pPr>
+            <a:r>
+              <a:rPr sz="1200">
+                <a:solidFill>
+                  <a:srgbClr val="070A40"/>
+                </a:solidFill>
+                <a:latin typeface="Arial"/>
+              </a:rPr>
+              <a:t>  Standing committees: Strategy, Finance, Risk, Technology, Product, Customer, Governance</a:t>
+            </a:r>
+          </a:p>
+        </p:txBody>
+      </p:sp>
+      <p:sp>
+        <p:nvSpPr>
+          <p:cNvPr id="6" name="TextBox 5"/>
+          <p:cNvSpPr txBox="1"/>
+          <p:nvPr/>
+        </p:nvSpPr>
+        <p:spPr>
+          <a:xfrm>
+            <a:off x="4754880" y="1051560"/>
+            <a:ext cx="3931920" cy="365760"/>
+          </a:xfrm>
+          <a:prstGeom prst="rect">
+            <a:avLst/>
+          </a:prstGeom>
+          <a:noFill/>
+        </p:spPr>
+        <p:txBody>
+          <a:bodyPr wrap="square">
+            <a:spAutoFit/>
+          </a:bodyPr>
+          <a:lstStyle/>
+          <a:p>
+            <a:pPr algn="l">
+              <a:defRPr sz="1600" b="1">
+                <a:solidFill>
+                  <a:srgbClr val="E63946"/>
+                </a:solidFill>
+                <a:latin typeface="Arial"/>
+              </a:defRPr>
+            </a:pPr>
+            <a:r>
+              <a:rPr sz="1600" b="1">
+                <a:solidFill>
+                  <a:srgbClr val="E63946"/>
+                </a:solidFill>
+                <a:latin typeface="Arial"/>
+              </a:rPr>
+              <a:t>Hiring with this raise</a:t>
+            </a:r>
+          </a:p>
+        </p:txBody>
+      </p:sp>
+      <p:sp>
+        <p:nvSpPr>
+          <p:cNvPr id="7" name="TextBox 6"/>
+          <p:cNvSpPr txBox="1"/>
+          <p:nvPr/>
+        </p:nvSpPr>
+        <p:spPr>
+          <a:xfrm>
+            <a:off x="4754880" y="1508760"/>
+            <a:ext cx="3977639" cy="3657600"/>
+          </a:xfrm>
+          <a:prstGeom prst="rect">
+            <a:avLst/>
+          </a:prstGeom>
+          <a:noFill/>
+        </p:spPr>
+        <p:txBody>
+          <a:bodyPr wrap="square">
+            <a:spAutoFit/>
+          </a:bodyPr>
+          <a:lstStyle/>
+          <a:p>
+            <a:pPr marL="219456" indent="-219456">
+              <a:spcAft>
+                <a:spcPts val="600"/>
+              </a:spcAft>
+              <a:defRPr sz="1200">
+                <a:solidFill>
+                  <a:srgbClr val="070A40"/>
+                </a:solidFill>
+                <a:latin typeface="Arial"/>
+              </a:defRPr>
+            </a:pPr>
+            <a:r>
+              <a:rPr sz="1200">
+                <a:solidFill>
+                  <a:srgbClr val="070A40"/>
+                </a:solidFill>
+                <a:latin typeface="Arial"/>
+              </a:rPr>
+              <a:t>•  Platform Licensing Sales Lead — priority one</a:t>
+            </a:r>
+          </a:p>
+          <a:p>
+            <a:pPr marL="219456" indent="-219456">
+              <a:spcAft>
+                <a:spcPts val="600"/>
+              </a:spcAft>
+              <a:defRPr sz="1200">
+                <a:solidFill>
+                  <a:srgbClr val="070A40"/>
+                </a:solidFill>
+                <a:latin typeface="Arial"/>
+              </a:defRPr>
+            </a:pPr>
+            <a:r>
+              <a:rPr sz="1200">
+                <a:solidFill>
+                  <a:srgbClr val="070A40"/>
+                </a:solidFill>
+                <a:latin typeface="Arial"/>
+              </a:rPr>
+              <a:t>•  Delivery Lead for chatbot and compliance offers</a:t>
+            </a:r>
+          </a:p>
+          <a:p>
+            <a:pPr marL="219456" indent="-219456">
+              <a:spcAft>
+                <a:spcPts val="600"/>
+              </a:spcAft>
+              <a:defRPr sz="1200">
+                <a:solidFill>
+                  <a:srgbClr val="070A40"/>
+                </a:solidFill>
+                <a:latin typeface="Arial"/>
+              </a:defRPr>
+            </a:pPr>
+            <a:r>
+              <a:rPr sz="1200">
+                <a:solidFill>
+                  <a:srgbClr val="070A40"/>
+                </a:solidFill>
+                <a:latin typeface="Arial"/>
+              </a:rPr>
+              <a:t>•  Compliance Officer</a:t>
+            </a:r>
+          </a:p>
+          <a:p>
+            <a:pPr marL="219456" indent="-219456">
+              <a:spcAft>
+                <a:spcPts val="600"/>
+              </a:spcAft>
+              <a:defRPr sz="1200">
+                <a:solidFill>
+                  <a:srgbClr val="070A40"/>
+                </a:solidFill>
+                <a:latin typeface="Arial"/>
+              </a:defRPr>
+            </a:pPr>
+            <a:r>
+              <a:rPr sz="1200">
+                <a:solidFill>
+                  <a:srgbClr val="070A40"/>
+                </a:solidFill>
+                <a:latin typeface="Arial"/>
+              </a:rPr>
+              <a:t>•  Developer Relations Engineer</a:t>
+            </a:r>
           </a:p>
           <a:p>
             <a:pPr>
@@ -8179,15 +9661,6 @@
                 <a:latin typeface="Arial"/>
               </a:defRPr>
             </a:pPr>
-            <a:r>
-              <a:rPr sz="1200">
-                <a:solidFill>
-                  <a:srgbClr val="070A40"/>
-                </a:solidFill>
-                <a:latin typeface="Arial"/>
-              </a:rPr>
-              <a:t>Indirect Alternatives:</a:t>
-            </a:r>
           </a:p>
           <a:p>
             <a:pPr>
@@ -8208,196 +9681,134 @@
                 </a:solidFill>
                 <a:latin typeface="Arial"/>
               </a:rPr>
-              <a:t>  •  Custom-built agent frameworks (high engineering cost)</a:t>
-            </a:r>
-          </a:p>
-          <a:p>
-            <a:pPr>
-              <a:spcAft>
-                <a:spcPts val="600"/>
-              </a:spcAft>
-              <a:defRPr sz="1200">
-                <a:solidFill>
-                  <a:srgbClr val="070A40"/>
-                </a:solidFill>
-                <a:latin typeface="Arial"/>
-              </a:defRPr>
-            </a:pPr>
-            <a:r>
-              <a:rPr sz="1200">
-                <a:solidFill>
-                  <a:srgbClr val="070A40"/>
-                </a:solidFill>
-                <a:latin typeface="Arial"/>
-              </a:rPr>
-              <a:t>  •  ChatGPT/Claude for single tasks (no orchestration)</a:t>
-            </a:r>
-          </a:p>
-          <a:p>
-            <a:pPr>
-              <a:spcAft>
-                <a:spcPts val="600"/>
-              </a:spcAft>
-              <a:defRPr sz="1200">
-                <a:solidFill>
-                  <a:srgbClr val="070A40"/>
-                </a:solidFill>
-                <a:latin typeface="Arial"/>
-              </a:defRPr>
-            </a:pPr>
-            <a:r>
-              <a:rPr sz="1200">
-                <a:solidFill>
-                  <a:srgbClr val="070A40"/>
-                </a:solidFill>
-                <a:latin typeface="Arial"/>
-              </a:rPr>
-              <a:t>  •  Enterprise ML platforms (overkill for most orgs)</a:t>
-            </a:r>
-          </a:p>
-          <a:p>
-            <a:pPr>
-              <a:spcAft>
-                <a:spcPts val="600"/>
-              </a:spcAft>
-              <a:defRPr sz="1200">
-                <a:solidFill>
-                  <a:srgbClr val="070A40"/>
-                </a:solidFill>
-                <a:latin typeface="Arial"/>
-              </a:defRPr>
-            </a:pPr>
-          </a:p>
-          <a:p>
-            <a:pPr>
-              <a:spcAft>
-                <a:spcPts val="600"/>
-              </a:spcAft>
-              <a:defRPr sz="1200">
-                <a:solidFill>
-                  <a:srgbClr val="070A40"/>
-                </a:solidFill>
-                <a:latin typeface="Arial"/>
-              </a:defRPr>
-            </a:pPr>
-            <a:r>
-              <a:rPr sz="1200">
-                <a:solidFill>
-                  <a:srgbClr val="070A40"/>
-                </a:solidFill>
-                <a:latin typeface="Arial"/>
-              </a:rPr>
-              <a:t>Our Differentiation:</a:t>
-            </a:r>
-          </a:p>
-          <a:p>
-            <a:pPr>
-              <a:spcAft>
-                <a:spcPts val="600"/>
-              </a:spcAft>
-              <a:defRPr sz="1200">
-                <a:solidFill>
-                  <a:srgbClr val="070A40"/>
-                </a:solidFill>
-                <a:latin typeface="Arial"/>
-              </a:defRPr>
-            </a:pPr>
-            <a:r>
-              <a:rPr sz="1200">
-                <a:solidFill>
-                  <a:srgbClr val="070A40"/>
-                </a:solidFill>
-                <a:latin typeface="Arial"/>
-              </a:rPr>
-              <a:t>  ✓  AI-native company structure (not just a tool)</a:t>
-            </a:r>
-          </a:p>
-          <a:p>
-            <a:pPr>
-              <a:spcAft>
-                <a:spcPts val="600"/>
-              </a:spcAft>
-              <a:defRPr sz="1200">
-                <a:solidFill>
-                  <a:srgbClr val="070A40"/>
-                </a:solidFill>
-                <a:latin typeface="Arial"/>
-              </a:defRPr>
-            </a:pPr>
-            <a:r>
-              <a:rPr sz="1200">
-                <a:solidFill>
-                  <a:srgbClr val="070A40"/>
-                </a:solidFill>
-                <a:latin typeface="Arial"/>
-              </a:rPr>
-              <a:t>  ✓  Built-in cost transparency &amp; budget enforcement</a:t>
-            </a:r>
-          </a:p>
-          <a:p>
-            <a:pPr>
-              <a:spcAft>
-                <a:spcPts val="600"/>
-              </a:spcAft>
-              <a:defRPr sz="1200">
-                <a:solidFill>
-                  <a:srgbClr val="070A40"/>
-                </a:solidFill>
-                <a:latin typeface="Arial"/>
-              </a:defRPr>
-            </a:pPr>
-            <a:r>
-              <a:rPr sz="1200">
-                <a:solidFill>
-                  <a:srgbClr val="070A40"/>
-                </a:solidFill>
-                <a:latin typeface="Arial"/>
-              </a:rPr>
-              <a:t>  ✓  Human-in-the-loop safety gates</a:t>
-            </a:r>
-          </a:p>
-          <a:p>
-            <a:pPr>
-              <a:spcAft>
-                <a:spcPts val="600"/>
-              </a:spcAft>
-              <a:defRPr sz="1200">
-                <a:solidFill>
-                  <a:srgbClr val="070A40"/>
-                </a:solidFill>
-                <a:latin typeface="Arial"/>
-              </a:defRPr>
-            </a:pPr>
-            <a:r>
-              <a:rPr sz="1200">
-                <a:solidFill>
-                  <a:srgbClr val="070A40"/>
-                </a:solidFill>
-                <a:latin typeface="Arial"/>
-              </a:rPr>
-              <a:t>  ✓  Multi-provider with automatic fallback</a:t>
-            </a:r>
-          </a:p>
-          <a:p>
-            <a:pPr>
-              <a:spcAft>
-                <a:spcPts val="600"/>
-              </a:spcAft>
-              <a:defRPr sz="1200">
-                <a:solidFill>
-                  <a:srgbClr val="070A40"/>
-                </a:solidFill>
-                <a:latin typeface="Arial"/>
-              </a:defRPr>
-            </a:pPr>
-            <a:r>
-              <a:rPr sz="1200">
-                <a:solidFill>
-                  <a:srgbClr val="070A40"/>
-                </a:solidFill>
-                <a:latin typeface="Arial"/>
-              </a:rPr>
-              <a:t>  ✓  Local-first option (Ollama) for zero-cost inference</a:t>
+              <a:t>Human hires, not agent seats: clients buy from people.</a:t>
+            </a:r>
+          </a:p>
+        </p:txBody>
+      </p:sp>
+      <p:sp>
+        <p:nvSpPr>
+          <p:cNvPr id="8" name="Rounded Rectangle 7"/>
+          <p:cNvSpPr/>
+          <p:nvPr/>
+        </p:nvSpPr>
+        <p:spPr>
+          <a:xfrm>
+            <a:off x="502920" y="4709160"/>
+            <a:ext cx="8138160" cy="960120"/>
+          </a:xfrm>
+          <a:prstGeom prst="roundRect">
+            <a:avLst/>
+          </a:prstGeom>
+          <a:solidFill>
+            <a:srgbClr val="F2F2F2"/>
+          </a:solidFill>
+          <a:ln>
+            <a:noFill/>
+          </a:ln>
+        </p:spPr>
+        <p:style>
+          <a:lnRef idx="1">
+            <a:schemeClr val="accent1"/>
+          </a:lnRef>
+          <a:fillRef idx="3">
+            <a:schemeClr val="accent1"/>
+          </a:fillRef>
+          <a:effectRef idx="2">
+            <a:schemeClr val="accent1"/>
+          </a:effectRef>
+          <a:fontRef idx="minor">
+            <a:schemeClr val="lt1"/>
+          </a:fontRef>
+        </p:style>
+        <p:txBody>
+          <a:bodyPr rtlCol="0" anchor="ctr"/>
+          <a:lstStyle/>
+          <a:p>
+            <a:pPr algn="ctr"/>
+          </a:p>
+        </p:txBody>
+      </p:sp>
+      <p:sp>
+        <p:nvSpPr>
+          <p:cNvPr id="9" name="TextBox 8"/>
+          <p:cNvSpPr txBox="1"/>
+          <p:nvPr/>
+        </p:nvSpPr>
+        <p:spPr>
+          <a:xfrm>
+            <a:off x="731520" y="4873752"/>
+            <a:ext cx="7680960" cy="685800"/>
+          </a:xfrm>
+          <a:prstGeom prst="rect">
+            <a:avLst/>
+          </a:prstGeom>
+          <a:noFill/>
+        </p:spPr>
+        <p:txBody>
+          <a:bodyPr wrap="square">
+            <a:spAutoFit/>
+          </a:bodyPr>
+          <a:lstStyle/>
+          <a:p>
+            <a:pPr algn="l">
+              <a:defRPr sz="1200" b="0">
+                <a:solidFill>
+                  <a:srgbClr val="070A40"/>
+                </a:solidFill>
+                <a:latin typeface="Arial"/>
+              </a:defRPr>
+            </a:pPr>
+            <a:r>
+              <a:rPr sz="1200" b="0">
+                <a:solidFill>
+                  <a:srgbClr val="070A40"/>
+                </a:solidFill>
+                <a:latin typeface="Arial"/>
+              </a:rPr>
+              <a:t>The operating model already exists: a five-tier approval matrix, named escalation routes and an audit trail, applied to agents as well as people. The hiring plan adds the human roles that sell and deliver.</a:t>
+            </a:r>
+          </a:p>
+        </p:txBody>
+      </p:sp>
+      <p:sp>
+        <p:nvSpPr>
+          <p:cNvPr id="10" name="TextBox 9"/>
+          <p:cNvSpPr txBox="1"/>
+          <p:nvPr/>
+        </p:nvSpPr>
+        <p:spPr>
+          <a:xfrm>
+            <a:off x="457200" y="6510528"/>
+            <a:ext cx="8229600" cy="274320"/>
+          </a:xfrm>
+          <a:prstGeom prst="rect">
+            <a:avLst/>
+          </a:prstGeom>
+          <a:noFill/>
+        </p:spPr>
+        <p:txBody>
+          <a:bodyPr wrap="square">
+            <a:spAutoFit/>
+          </a:bodyPr>
+          <a:lstStyle/>
+          <a:p>
+            <a:pPr algn="r">
+              <a:defRPr sz="1200" b="1">
+                <a:solidFill>
+                  <a:srgbClr val="070A40"/>
+                </a:solidFill>
+                <a:latin typeface="Arial"/>
+              </a:defRPr>
+            </a:pPr>
+            <a:r>
+              <a:rPr sz="1200" b="1">
+                <a:solidFill>
+                  <a:srgbClr val="070A40"/>
+                </a:solidFill>
+                <a:latin typeface="Arial"/>
+              </a:rPr>
+              <a:t>INTERNAL DRAFT — NOT FOR EXTERNAL DISTRIBUTION</a:t>
             </a:r>
           </a:p>
         </p:txBody>

--- a/static/brand/templates/pitch-deck.pptx
+++ b/static/brand/templates/pitch-deck.pptx
@@ -3770,7 +3770,7 @@
                 </a:solidFill>
                 <a:latin typeface="Arial"/>
               </a:rPr>
-              <a:t>Compliance — Malawi DPA 2017, GDPR, SOC 2 readiness</a:t>
+              <a:t>Compliance — DPA 2024 alignment, GDPR opinion, SOC 2 prep</a:t>
             </a:r>
           </a:p>
           <a:p>
@@ -3923,7 +3923,7 @@
                 </a:solidFill>
                 <a:latin typeface="Arial"/>
               </a:rPr>
-              <a:t>Governance gates operating under audit</a:t>
+              <a:t>Governance gates live with tamper-evident audit trail</a:t>
             </a:r>
           </a:p>
           <a:p>
@@ -4437,7 +4437,7 @@
                 </a:solidFill>
                 <a:latin typeface="Arial"/>
               </a:rPr>
-              <a:t>Malawi DPA 2017 controls, GDPR opinion, SOC 2 readiness</a:t>
+              <a:t>Built to DPA 2024 and GDPR-grade handling; SOC 2 planned, not certified</a:t>
             </a:r>
           </a:p>
         </p:txBody>
@@ -8203,7 +8203,7 @@
                 </a:solidFill>
                 <a:latin typeface="Arial"/>
               </a:rPr>
-              <a:t>•  Platform shipped; agent registry in production</a:t>
+              <a:t>•  Platform built, running this company internally</a:t>
             </a:r>
           </a:p>
           <a:p>
@@ -8247,7 +8247,7 @@
                 </a:solidFill>
                 <a:latin typeface="Arial"/>
               </a:rPr>
-              <a:t>•  Human approval gates ratified</a:t>
+              <a:t>•  Human approval gates enforced in code</a:t>
             </a:r>
           </a:p>
           <a:p>

--- a/static/brand/templates/pitch-deck.pptx
+++ b/static/brand/templates/pitch-deck.pptx
@@ -16,8 +16,6 @@
     <p:sldId id="264" r:id="rId15"/>
     <p:sldId id="265" r:id="rId16"/>
     <p:sldId id="266" r:id="rId17"/>
-    <p:sldId id="267" r:id="rId18"/>
-    <p:sldId id="268" r:id="rId19"/>
   </p:sldIdLst>
   <p:sldSz cx="9144000" cy="6858000" type="screen4x3"/>
   <p:notesSz cx="6858000" cy="9144000"/>
@@ -3183,8 +3181,8 @@
         </p:nvSpPr>
         <p:spPr>
           <a:xfrm>
-            <a:off x="914400" y="2331720"/>
-            <a:ext cx="7315200" cy="914400"/>
+            <a:off x="365760" y="2468880"/>
+            <a:ext cx="8412480" cy="731520"/>
           </a:xfrm>
           <a:prstGeom prst="rect">
             <a:avLst/>
@@ -3225,8 +3223,8 @@
         </p:nvSpPr>
         <p:spPr>
           <a:xfrm>
-            <a:off x="914400" y="3337560"/>
-            <a:ext cx="7315200" cy="548640"/>
+            <a:off x="914400" y="3291840"/>
+            <a:ext cx="7315200" cy="457200"/>
           </a:xfrm>
           <a:prstGeom prst="rect">
             <a:avLst/>
@@ -3267,7 +3265,7 @@
         </p:nvSpPr>
         <p:spPr>
           <a:xfrm>
-            <a:off x="3200400" y="3977639"/>
+            <a:off x="3200400" y="3931920"/>
             <a:ext cx="2743200" cy="36576"/>
           </a:xfrm>
           <a:prstGeom prst="rect">
@@ -3310,8 +3308,8 @@
         </p:nvSpPr>
         <p:spPr>
           <a:xfrm>
-            <a:off x="914400" y="4251960"/>
-            <a:ext cx="7315200" cy="457200"/>
+            <a:off x="914400" y="4224528"/>
+            <a:ext cx="7315200" cy="274320"/>
           </a:xfrm>
           <a:prstGeom prst="rect">
             <a:avLst/>
@@ -3325,7 +3323,7 @@
           <a:lstStyle/>
           <a:p>
             <a:pPr algn="ctr">
-              <a:defRPr sz="1200" b="0">
+              <a:defRPr sz="1200" b="1">
                 <a:solidFill>
                   <a:srgbClr val="9CA3AF"/>
                 </a:solidFill>
@@ -3333,13 +3331,55 @@
               </a:defRPr>
             </a:pPr>
             <a:r>
-              <a:rPr sz="1200" b="0">
+              <a:rPr sz="1200" b="1">
                 <a:solidFill>
                   <a:srgbClr val="9CA3AF"/>
                 </a:solidFill>
                 <a:latin typeface="Arial"/>
               </a:rPr>
-              <a:t>Confidential — August 2026</a:t>
+              <a:t>INTERNAL DRAFT — October 2026</a:t>
+            </a:r>
+          </a:p>
+        </p:txBody>
+      </p:sp>
+      <p:sp>
+        <p:nvSpPr>
+          <p:cNvPr id="8" name="TextBox 7"/>
+          <p:cNvSpPr txBox="1"/>
+          <p:nvPr/>
+        </p:nvSpPr>
+        <p:spPr>
+          <a:xfrm>
+            <a:off x="457200" y="6510528"/>
+            <a:ext cx="8229600" cy="274320"/>
+          </a:xfrm>
+          <a:prstGeom prst="rect">
+            <a:avLst/>
+          </a:prstGeom>
+          <a:noFill/>
+        </p:spPr>
+        <p:txBody>
+          <a:bodyPr wrap="square">
+            <a:spAutoFit/>
+          </a:bodyPr>
+          <a:lstStyle/>
+          <a:p>
+            <a:pPr algn="r">
+              <a:defRPr sz="1200" b="1">
+                <a:solidFill>
+                  <a:srgbClr val="00BFFF"/>
+                </a:solidFill>
+                <a:latin typeface="Arial"/>
+              </a:defRPr>
+            </a:pPr>
+            <a:r>
+              <a:rPr sz="1200" b="1">
+                <a:solidFill>
+                  <a:srgbClr val="00BFFF"/>
+                </a:solidFill>
+                <a:latin typeface="Arial"/>
+              </a:rPr>
+              <a:t>INTERNAL DRAFT — NOT FOR EXTERNAL DISTRIBUTION</a:t>
             </a:r>
           </a:p>
         </p:txBody>
@@ -3358,7 +3398,7 @@
     <p:bg>
       <p:bgPr>
         <a:solidFill>
-          <a:srgbClr val="FFFFFF"/>
+          <a:srgbClr val="070A40"/>
         </a:solidFill>
         <a:effectLst/>
       </p:bgPr>
@@ -3421,8 +3461,8 @@
         </p:nvSpPr>
         <p:spPr>
           <a:xfrm>
-            <a:off x="457200" y="365760"/>
-            <a:ext cx="8229600" cy="548640"/>
+            <a:off x="914400" y="502920"/>
+            <a:ext cx="7315200" cy="640080"/>
           </a:xfrm>
           <a:prstGeom prst="rect">
             <a:avLst/>
@@ -3435,36 +3475,205 @@
           </a:bodyPr>
           <a:lstStyle/>
           <a:p>
+            <a:pPr algn="ctr">
+              <a:defRPr sz="3200" b="1">
+                <a:solidFill>
+                  <a:srgbClr val="FFFFFF"/>
+                </a:solidFill>
+                <a:latin typeface="Arial"/>
+              </a:defRPr>
+            </a:pPr>
+            <a:r>
+              <a:rPr sz="3200" b="1">
+                <a:solidFill>
+                  <a:srgbClr val="FFFFFF"/>
+                </a:solidFill>
+                <a:latin typeface="Arial"/>
+              </a:rPr>
+              <a:t>THE ASK</a:t>
+            </a:r>
+          </a:p>
+        </p:txBody>
+      </p:sp>
+      <p:sp>
+        <p:nvSpPr>
+          <p:cNvPr id="4" name="Rectangle 3"/>
+          <p:cNvSpPr/>
+          <p:nvPr/>
+        </p:nvSpPr>
+        <p:spPr>
+          <a:xfrm>
+            <a:off x="3200400" y="1234440"/>
+            <a:ext cx="2743200" cy="36576"/>
+          </a:xfrm>
+          <a:prstGeom prst="rect">
+            <a:avLst/>
+          </a:prstGeom>
+          <a:solidFill>
+            <a:srgbClr val="E63946"/>
+          </a:solidFill>
+          <a:ln>
+            <a:noFill/>
+          </a:ln>
+        </p:spPr>
+        <p:style>
+          <a:lnRef idx="1">
+            <a:schemeClr val="accent1"/>
+          </a:lnRef>
+          <a:fillRef idx="3">
+            <a:schemeClr val="accent1"/>
+          </a:fillRef>
+          <a:effectRef idx="2">
+            <a:schemeClr val="accent1"/>
+          </a:effectRef>
+          <a:fontRef idx="minor">
+            <a:schemeClr val="lt1"/>
+          </a:fontRef>
+        </p:style>
+        <p:txBody>
+          <a:bodyPr rtlCol="0" anchor="ctr"/>
+          <a:lstStyle/>
+          <a:p>
+            <a:pPr algn="ctr"/>
+          </a:p>
+        </p:txBody>
+      </p:sp>
+      <p:sp>
+        <p:nvSpPr>
+          <p:cNvPr id="5" name="TextBox 4"/>
+          <p:cNvSpPr txBox="1"/>
+          <p:nvPr/>
+        </p:nvSpPr>
+        <p:spPr>
+          <a:xfrm>
+            <a:off x="914400" y="1417320"/>
+            <a:ext cx="7315200" cy="502920"/>
+          </a:xfrm>
+          <a:prstGeom prst="rect">
+            <a:avLst/>
+          </a:prstGeom>
+          <a:noFill/>
+        </p:spPr>
+        <p:txBody>
+          <a:bodyPr wrap="square">
+            <a:spAutoFit/>
+          </a:bodyPr>
+          <a:lstStyle/>
+          <a:p>
+            <a:pPr algn="ctr">
+              <a:defRPr sz="2400" b="0">
+                <a:solidFill>
+                  <a:srgbClr val="00BFFF"/>
+                </a:solidFill>
+                <a:latin typeface="Arial"/>
+              </a:defRPr>
+            </a:pPr>
+            <a:r>
+              <a:rPr sz="2400" b="0">
+                <a:solidFill>
+                  <a:srgbClr val="00BFFF"/>
+                </a:solidFill>
+                <a:latin typeface="Arial"/>
+              </a:rPr>
+              <a:t>Raising seed capital</a:t>
+            </a:r>
+          </a:p>
+        </p:txBody>
+      </p:sp>
+      <p:sp>
+        <p:nvSpPr>
+          <p:cNvPr id="6" name="TextBox 5"/>
+          <p:cNvSpPr txBox="1"/>
+          <p:nvPr/>
+        </p:nvSpPr>
+        <p:spPr>
+          <a:xfrm>
+            <a:off x="914400" y="1965960"/>
+            <a:ext cx="7315200" cy="411480"/>
+          </a:xfrm>
+          <a:prstGeom prst="rect">
+            <a:avLst/>
+          </a:prstGeom>
+          <a:noFill/>
+        </p:spPr>
+        <p:txBody>
+          <a:bodyPr wrap="square">
+            <a:spAutoFit/>
+          </a:bodyPr>
+          <a:lstStyle/>
+          <a:p>
+            <a:pPr algn="ctr">
+              <a:defRPr sz="1200" b="1">
+                <a:solidFill>
+                  <a:srgbClr val="9CA3AF"/>
+                </a:solidFill>
+                <a:latin typeface="Arial"/>
+              </a:defRPr>
+            </a:pPr>
+            <a:r>
+              <a:rPr sz="1200" b="1">
+                <a:solidFill>
+                  <a:srgbClr val="9CA3AF"/>
+                </a:solidFill>
+                <a:latin typeface="Arial"/>
+              </a:rPr>
+              <a:t>Amount, instrument and runway: pending board decision — not stated in this draft.</a:t>
+            </a:r>
+          </a:p>
+        </p:txBody>
+      </p:sp>
+      <p:sp>
+        <p:nvSpPr>
+          <p:cNvPr id="7" name="TextBox 6"/>
+          <p:cNvSpPr txBox="1"/>
+          <p:nvPr/>
+        </p:nvSpPr>
+        <p:spPr>
+          <a:xfrm>
+            <a:off x="914400" y="2606040"/>
+            <a:ext cx="3474720" cy="365760"/>
+          </a:xfrm>
+          <a:prstGeom prst="rect">
+            <a:avLst/>
+          </a:prstGeom>
+          <a:noFill/>
+        </p:spPr>
+        <p:txBody>
+          <a:bodyPr wrap="square">
+            <a:spAutoFit/>
+          </a:bodyPr>
+          <a:lstStyle/>
+          <a:p>
             <a:pPr algn="l">
-              <a:defRPr sz="2800" b="1">
-                <a:solidFill>
-                  <a:srgbClr val="070A40"/>
-                </a:solidFill>
-                <a:latin typeface="Arial"/>
-              </a:defRPr>
-            </a:pPr>
-            <a:r>
-              <a:rPr sz="2800" b="1">
-                <a:solidFill>
-                  <a:srgbClr val="070A40"/>
-                </a:solidFill>
-                <a:latin typeface="Arial"/>
-              </a:rPr>
-              <a:t>TEAM</a:t>
-            </a:r>
-          </a:p>
-        </p:txBody>
-      </p:sp>
-      <p:sp>
-        <p:nvSpPr>
-          <p:cNvPr id="4" name="TextBox 3"/>
+              <a:defRPr sz="1400" b="1">
+                <a:solidFill>
+                  <a:srgbClr val="FFFFFF"/>
+                </a:solidFill>
+                <a:latin typeface="Arial"/>
+              </a:defRPr>
+            </a:pPr>
+            <a:r>
+              <a:rPr sz="1400" b="1">
+                <a:solidFill>
+                  <a:srgbClr val="FFFFFF"/>
+                </a:solidFill>
+                <a:latin typeface="Arial"/>
+              </a:rPr>
+              <a:t>Use of funds</a:t>
+            </a:r>
+          </a:p>
+        </p:txBody>
+      </p:sp>
+      <p:sp>
+        <p:nvSpPr>
+          <p:cNvPr id="8" name="TextBox 7"/>
           <p:cNvSpPr txBox="1"/>
           <p:nvPr/>
         </p:nvSpPr>
         <p:spPr>
           <a:xfrm>
-            <a:off x="731520" y="1097280"/>
-            <a:ext cx="7772400" cy="5029200"/>
+            <a:off x="914400" y="3017520"/>
+            <a:ext cx="3566160" cy="2926080"/>
           </a:xfrm>
           <a:prstGeom prst="rect">
             <a:avLst/>
@@ -3481,21 +3690,21 @@
               <a:spcAft>
                 <a:spcPts val="600"/>
               </a:spcAft>
-              <a:defRPr sz="1300">
-                <a:solidFill>
-                  <a:srgbClr val="070A40"/>
-                </a:solidFill>
-                <a:latin typeface="Arial"/>
-              </a:defRPr>
-            </a:pPr>
-            <a:r>
-              <a:rPr sz="1300">
-                <a:solidFill>
-                  <a:srgbClr val="070A40"/>
-                </a:solidFill>
-                <a:latin typeface="Arial"/>
-              </a:rPr>
-              <a:t>Leadership:</a:t>
+              <a:defRPr sz="1200">
+                <a:solidFill>
+                  <a:srgbClr val="FFFFFF"/>
+                </a:solidFill>
+                <a:latin typeface="Arial"/>
+              </a:defRPr>
+            </a:pPr>
+            <a:r>
+              <a:rPr sz="1200">
+                <a:solidFill>
+                  <a:srgbClr val="FFFFFF"/>
+                </a:solidFill>
+                <a:latin typeface="Arial"/>
+              </a:rPr>
+              <a:t>Talent — sales, delivery, compliance, DevRel</a:t>
             </a:r>
           </a:p>
           <a:p>
@@ -3503,21 +3712,21 @@
               <a:spcAft>
                 <a:spcPts val="600"/>
               </a:spcAft>
-              <a:defRPr sz="1300">
-                <a:solidFill>
-                  <a:srgbClr val="070A40"/>
-                </a:solidFill>
-                <a:latin typeface="Arial"/>
-              </a:defRPr>
-            </a:pPr>
-            <a:r>
-              <a:rPr sz="1300">
-                <a:solidFill>
-                  <a:srgbClr val="070A40"/>
-                </a:solidFill>
-                <a:latin typeface="Arial"/>
-              </a:rPr>
-              <a:t>  •  Jack Mlusu — Founder &amp; CEO — builder-operator; runs an AI agent organization</a:t>
+              <a:defRPr sz="1200">
+                <a:solidFill>
+                  <a:srgbClr val="FFFFFF"/>
+                </a:solidFill>
+                <a:latin typeface="Arial"/>
+              </a:defRPr>
+            </a:pPr>
+            <a:r>
+              <a:rPr sz="1200">
+                <a:solidFill>
+                  <a:srgbClr val="FFFFFF"/>
+                </a:solidFill>
+                <a:latin typeface="Arial"/>
+              </a:rPr>
+              <a:t>Client pilots — Offers A, B and C</a:t>
             </a:r>
           </a:p>
           <a:p>
@@ -3525,21 +3734,21 @@
               <a:spcAft>
                 <a:spcPts val="600"/>
               </a:spcAft>
-              <a:defRPr sz="1300">
-                <a:solidFill>
-                  <a:srgbClr val="070A40"/>
-                </a:solidFill>
-                <a:latin typeface="Arial"/>
-              </a:defRPr>
-            </a:pPr>
-            <a:r>
-              <a:rPr sz="1300">
-                <a:solidFill>
-                  <a:srgbClr val="070A40"/>
-                </a:solidFill>
-                <a:latin typeface="Arial"/>
-              </a:rPr>
-              <a:t>  •  AI Executive Cabinet — CTO, CFO, CMO, CLO, CSO, COO, CAIO</a:t>
+              <a:defRPr sz="1200">
+                <a:solidFill>
+                  <a:srgbClr val="FFFFFF"/>
+                </a:solidFill>
+                <a:latin typeface="Arial"/>
+              </a:defRPr>
+            </a:pPr>
+            <a:r>
+              <a:rPr sz="1200">
+                <a:solidFill>
+                  <a:srgbClr val="FFFFFF"/>
+                </a:solidFill>
+                <a:latin typeface="Arial"/>
+              </a:rPr>
+              <a:t>Hardware lab — on-prem GPU, field kits</a:t>
             </a:r>
           </a:p>
           <a:p>
@@ -3547,21 +3756,21 @@
               <a:spcAft>
                 <a:spcPts val="600"/>
               </a:spcAft>
-              <a:defRPr sz="1300">
-                <a:solidFill>
-                  <a:srgbClr val="070A40"/>
-                </a:solidFill>
-                <a:latin typeface="Arial"/>
-              </a:defRPr>
-            </a:pPr>
-            <a:r>
-              <a:rPr sz="1300">
-                <a:solidFill>
-                  <a:srgbClr val="070A40"/>
-                </a:solidFill>
-                <a:latin typeface="Arial"/>
-              </a:rPr>
-              <a:t>  •  Board of Directors — Standing committees (Strategy, Finance, Risk, Technology, Product, Customer, Governance)</a:t>
+              <a:defRPr sz="1200">
+                <a:solidFill>
+                  <a:srgbClr val="FFFFFF"/>
+                </a:solidFill>
+                <a:latin typeface="Arial"/>
+              </a:defRPr>
+            </a:pPr>
+            <a:r>
+              <a:rPr sz="1200">
+                <a:solidFill>
+                  <a:srgbClr val="FFFFFF"/>
+                </a:solidFill>
+                <a:latin typeface="Arial"/>
+              </a:rPr>
+              <a:t>Compliance — DPA 2024 alignment, GDPR opinion, SOC 2 prep</a:t>
             </a:r>
           </a:p>
           <a:p>
@@ -3569,34 +3778,108 @@
               <a:spcAft>
                 <a:spcPts val="600"/>
               </a:spcAft>
-              <a:defRPr sz="1300">
-                <a:solidFill>
-                  <a:srgbClr val="070A40"/>
-                </a:solidFill>
-                <a:latin typeface="Arial"/>
-              </a:defRPr>
-            </a:pPr>
-          </a:p>
+              <a:defRPr sz="1200">
+                <a:solidFill>
+                  <a:srgbClr val="FFFFFF"/>
+                </a:solidFill>
+                <a:latin typeface="Arial"/>
+              </a:defRPr>
+            </a:pPr>
+            <a:r>
+              <a:rPr sz="1200">
+                <a:solidFill>
+                  <a:srgbClr val="FFFFFF"/>
+                </a:solidFill>
+                <a:latin typeface="Arial"/>
+              </a:rPr>
+              <a:t>Emergency reserve</a:t>
+            </a:r>
+          </a:p>
+        </p:txBody>
+      </p:sp>
+      <p:sp>
+        <p:nvSpPr>
+          <p:cNvPr id="9" name="TextBox 8"/>
+          <p:cNvSpPr txBox="1"/>
+          <p:nvPr/>
+        </p:nvSpPr>
+        <p:spPr>
+          <a:xfrm>
+            <a:off x="4846320" y="2606040"/>
+            <a:ext cx="3474720" cy="365760"/>
+          </a:xfrm>
+          <a:prstGeom prst="rect">
+            <a:avLst/>
+          </a:prstGeom>
+          <a:noFill/>
+        </p:spPr>
+        <p:txBody>
+          <a:bodyPr wrap="square">
+            <a:spAutoFit/>
+          </a:bodyPr>
+          <a:lstStyle/>
+          <a:p>
+            <a:pPr algn="l">
+              <a:defRPr sz="1400" b="1">
+                <a:solidFill>
+                  <a:srgbClr val="FFFFFF"/>
+                </a:solidFill>
+                <a:latin typeface="Arial"/>
+              </a:defRPr>
+            </a:pPr>
+            <a:r>
+              <a:rPr sz="1400" b="1">
+                <a:solidFill>
+                  <a:srgbClr val="FFFFFF"/>
+                </a:solidFill>
+                <a:latin typeface="Arial"/>
+              </a:rPr>
+              <a:t>Milestones this buys</a:t>
+            </a:r>
+          </a:p>
+        </p:txBody>
+      </p:sp>
+      <p:sp>
+        <p:nvSpPr>
+          <p:cNvPr id="10" name="TextBox 9"/>
+          <p:cNvSpPr txBox="1"/>
+          <p:nvPr/>
+        </p:nvSpPr>
+        <p:spPr>
+          <a:xfrm>
+            <a:off x="4846320" y="3017520"/>
+            <a:ext cx="3566160" cy="2926080"/>
+          </a:xfrm>
+          <a:prstGeom prst="rect">
+            <a:avLst/>
+          </a:prstGeom>
+          <a:noFill/>
+        </p:spPr>
+        <p:txBody>
+          <a:bodyPr wrap="square">
+            <a:spAutoFit/>
+          </a:bodyPr>
+          <a:lstStyle/>
           <a:p>
             <a:pPr>
               <a:spcAft>
                 <a:spcPts val="600"/>
               </a:spcAft>
-              <a:defRPr sz="1300">
-                <a:solidFill>
-                  <a:srgbClr val="070A40"/>
-                </a:solidFill>
-                <a:latin typeface="Arial"/>
-              </a:defRPr>
-            </a:pPr>
-            <a:r>
-              <a:rPr sz="1300">
-                <a:solidFill>
-                  <a:srgbClr val="070A40"/>
-                </a:solidFill>
-                <a:latin typeface="Arial"/>
-              </a:rPr>
-              <a:t>Advisors:</a:t>
+              <a:defRPr sz="1200">
+                <a:solidFill>
+                  <a:srgbClr val="FFFFFF"/>
+                </a:solidFill>
+                <a:latin typeface="Arial"/>
+              </a:defRPr>
+            </a:pPr>
+            <a:r>
+              <a:rPr sz="1200">
+                <a:solidFill>
+                  <a:srgbClr val="FFFFFF"/>
+                </a:solidFill>
+                <a:latin typeface="Arial"/>
+              </a:rPr>
+              <a:t>Signed paying pilots across Offers A–C</a:t>
             </a:r>
           </a:p>
           <a:p>
@@ -3604,21 +3887,21 @@
               <a:spcAft>
                 <a:spcPts val="600"/>
               </a:spcAft>
-              <a:defRPr sz="1300">
-                <a:solidFill>
-                  <a:srgbClr val="070A40"/>
-                </a:solidFill>
-                <a:latin typeface="Arial"/>
-              </a:defRPr>
-            </a:pPr>
-            <a:r>
-              <a:rPr sz="1300">
-                <a:solidFill>
-                  <a:srgbClr val="070A40"/>
-                </a:solidFill>
-                <a:latin typeface="Arial"/>
-              </a:rPr>
-              <a:t>  •  Board Chair — governance &amp; escalation authority</a:t>
+              <a:defRPr sz="1200">
+                <a:solidFill>
+                  <a:srgbClr val="FFFFFF"/>
+                </a:solidFill>
+                <a:latin typeface="Arial"/>
+              </a:defRPr>
+            </a:pPr>
+            <a:r>
+              <a:rPr sz="1200">
+                <a:solidFill>
+                  <a:srgbClr val="FFFFFF"/>
+                </a:solidFill>
+                <a:latin typeface="Arial"/>
+              </a:rPr>
+              <a:t>Recurring revenue run-rate established</a:t>
             </a:r>
           </a:p>
           <a:p>
@@ -3626,21 +3909,21 @@
               <a:spcAft>
                 <a:spcPts val="600"/>
               </a:spcAft>
-              <a:defRPr sz="1300">
-                <a:solidFill>
-                  <a:srgbClr val="070A40"/>
-                </a:solidFill>
-                <a:latin typeface="Arial"/>
-              </a:defRPr>
-            </a:pPr>
-            <a:r>
-              <a:rPr sz="1300">
-                <a:solidFill>
-                  <a:srgbClr val="070A40"/>
-                </a:solidFill>
-                <a:latin typeface="Arial"/>
-              </a:rPr>
-              <a:t>  •  Corporate Constitution — 5-tier approval matrix, decision order, escalation SLAs</a:t>
+              <a:defRPr sz="1200">
+                <a:solidFill>
+                  <a:srgbClr val="FFFFFF"/>
+                </a:solidFill>
+                <a:latin typeface="Arial"/>
+              </a:defRPr>
+            </a:pPr>
+            <a:r>
+              <a:rPr sz="1200">
+                <a:solidFill>
+                  <a:srgbClr val="FFFFFF"/>
+                </a:solidFill>
+                <a:latin typeface="Arial"/>
+              </a:rPr>
+              <a:t>Governance gates live with tamper-evident audit trail</a:t>
             </a:r>
           </a:p>
           <a:p>
@@ -3648,100 +3931,148 @@
               <a:spcAft>
                 <a:spcPts val="600"/>
               </a:spcAft>
-              <a:defRPr sz="1300">
-                <a:solidFill>
-                  <a:srgbClr val="070A40"/>
-                </a:solidFill>
-                <a:latin typeface="Arial"/>
-              </a:defRPr>
-            </a:pPr>
-          </a:p>
-          <a:p>
-            <a:pPr>
-              <a:spcAft>
-                <a:spcPts val="600"/>
-              </a:spcAft>
-              <a:defRPr sz="1300">
-                <a:solidFill>
-                  <a:srgbClr val="070A40"/>
-                </a:solidFill>
-                <a:latin typeface="Arial"/>
-              </a:defRPr>
-            </a:pPr>
-            <a:r>
-              <a:rPr sz="1300">
-                <a:solidFill>
-                  <a:srgbClr val="070A40"/>
-                </a:solidFill>
-                <a:latin typeface="Arial"/>
-              </a:rPr>
-              <a:t>Hiring Plan (per Blueprint):</a:t>
-            </a:r>
-          </a:p>
-          <a:p>
-            <a:pPr>
-              <a:spcAft>
-                <a:spcPts val="600"/>
-              </a:spcAft>
-              <a:defRPr sz="1300">
-                <a:solidFill>
-                  <a:srgbClr val="070A40"/>
-                </a:solidFill>
-                <a:latin typeface="Arial"/>
-              </a:defRPr>
-            </a:pPr>
-            <a:r>
-              <a:rPr sz="1300">
-                <a:solidFill>
-                  <a:srgbClr val="070A40"/>
-                </a:solidFill>
-                <a:latin typeface="Arial"/>
-              </a:rPr>
-              <a:t>  •  Platform Licensing Sales Lead (Offer E) — Priority One, breakout revenue line</a:t>
-            </a:r>
-          </a:p>
-          <a:p>
-            <a:pPr>
-              <a:spcAft>
-                <a:spcPts val="600"/>
-              </a:spcAft>
-              <a:defRPr sz="1300">
-                <a:solidFill>
-                  <a:srgbClr val="070A40"/>
-                </a:solidFill>
-                <a:latin typeface="Arial"/>
-              </a:defRPr>
-            </a:pPr>
-            <a:r>
-              <a:rPr sz="1300">
-                <a:solidFill>
-                  <a:srgbClr val="070A40"/>
-                </a:solidFill>
-                <a:latin typeface="Arial"/>
-              </a:rPr>
-              <a:t>  •  BPA/Chatbot Delivery Lead (Offer B) — NGO USD revenue</a:t>
-            </a:r>
-          </a:p>
-          <a:p>
-            <a:pPr>
-              <a:spcAft>
-                <a:spcPts val="600"/>
-              </a:spcAft>
-              <a:defRPr sz="1300">
-                <a:solidFill>
-                  <a:srgbClr val="070A40"/>
-                </a:solidFill>
-                <a:latin typeface="Arial"/>
-              </a:defRPr>
-            </a:pPr>
-            <a:r>
-              <a:rPr sz="1300">
-                <a:solidFill>
-                  <a:srgbClr val="070A40"/>
-                </a:solidFill>
-                <a:latin typeface="Arial"/>
-              </a:rPr>
-              <a:t>  •  Compliance Officer + DevRel Engineer — unblock Offer B/C &amp; developer adoption</a:t>
+              <a:defRPr sz="1200">
+                <a:solidFill>
+                  <a:srgbClr val="FFFFFF"/>
+                </a:solidFill>
+                <a:latin typeface="Arial"/>
+              </a:defRPr>
+            </a:pPr>
+            <a:r>
+              <a:rPr sz="1200">
+                <a:solidFill>
+                  <a:srgbClr val="FFFFFF"/>
+                </a:solidFill>
+                <a:latin typeface="Arial"/>
+              </a:rPr>
+              <a:t>Repeatable delivery playbook per offer</a:t>
+            </a:r>
+          </a:p>
+        </p:txBody>
+      </p:sp>
+      <p:sp>
+        <p:nvSpPr>
+          <p:cNvPr id="11" name="Rectangle 10"/>
+          <p:cNvSpPr/>
+          <p:nvPr/>
+        </p:nvSpPr>
+        <p:spPr>
+          <a:xfrm>
+            <a:off x="2286000" y="5074920"/>
+            <a:ext cx="4572000" cy="27432"/>
+          </a:xfrm>
+          <a:prstGeom prst="rect">
+            <a:avLst/>
+          </a:prstGeom>
+          <a:solidFill>
+            <a:srgbClr val="00BFFF"/>
+          </a:solidFill>
+          <a:ln>
+            <a:noFill/>
+          </a:ln>
+        </p:spPr>
+        <p:style>
+          <a:lnRef idx="1">
+            <a:schemeClr val="accent1"/>
+          </a:lnRef>
+          <a:fillRef idx="3">
+            <a:schemeClr val="accent1"/>
+          </a:fillRef>
+          <a:effectRef idx="2">
+            <a:schemeClr val="accent1"/>
+          </a:effectRef>
+          <a:fontRef idx="minor">
+            <a:schemeClr val="lt1"/>
+          </a:fontRef>
+        </p:style>
+        <p:txBody>
+          <a:bodyPr rtlCol="0" anchor="ctr"/>
+          <a:lstStyle/>
+          <a:p>
+            <a:pPr algn="ctr"/>
+          </a:p>
+        </p:txBody>
+      </p:sp>
+      <p:sp>
+        <p:nvSpPr>
+          <p:cNvPr id="12" name="TextBox 11"/>
+          <p:cNvSpPr txBox="1"/>
+          <p:nvPr/>
+        </p:nvSpPr>
+        <p:spPr>
+          <a:xfrm>
+            <a:off x="914400" y="5257800"/>
+            <a:ext cx="7315200" cy="822960"/>
+          </a:xfrm>
+          <a:prstGeom prst="rect">
+            <a:avLst/>
+          </a:prstGeom>
+          <a:noFill/>
+        </p:spPr>
+        <p:txBody>
+          <a:bodyPr wrap="square">
+            <a:spAutoFit/>
+          </a:bodyPr>
+          <a:lstStyle/>
+          <a:p>
+            <a:pPr algn="ctr">
+              <a:defRPr sz="1400" b="1">
+                <a:solidFill>
+                  <a:srgbClr val="FFFFFF"/>
+                </a:solidFill>
+                <a:latin typeface="Arial"/>
+              </a:defRPr>
+            </a:pPr>
+            <a:r>
+              <a:rPr sz="1400" b="1">
+                <a:solidFill>
+                  <a:srgbClr val="FFFFFF"/>
+                </a:solidFill>
+                <a:latin typeface="Arial"/>
+              </a:rPr>
+              <a:t>We are asking for a first institutional round to fund paying pilots across Offers A, B and C, and to make the four hires above.</a:t>
+            </a:r>
+          </a:p>
+        </p:txBody>
+      </p:sp>
+      <p:sp>
+        <p:nvSpPr>
+          <p:cNvPr id="13" name="TextBox 12"/>
+          <p:cNvSpPr txBox="1"/>
+          <p:nvPr/>
+        </p:nvSpPr>
+        <p:spPr>
+          <a:xfrm>
+            <a:off x="457200" y="6510528"/>
+            <a:ext cx="8229600" cy="274320"/>
+          </a:xfrm>
+          <a:prstGeom prst="rect">
+            <a:avLst/>
+          </a:prstGeom>
+          <a:noFill/>
+        </p:spPr>
+        <p:txBody>
+          <a:bodyPr wrap="square">
+            <a:spAutoFit/>
+          </a:bodyPr>
+          <a:lstStyle/>
+          <a:p>
+            <a:pPr algn="r">
+              <a:defRPr sz="1200" b="1">
+                <a:solidFill>
+                  <a:srgbClr val="00BFFF"/>
+                </a:solidFill>
+                <a:latin typeface="Arial"/>
+              </a:defRPr>
+            </a:pPr>
+            <a:r>
+              <a:rPr sz="1200" b="1">
+                <a:solidFill>
+                  <a:srgbClr val="00BFFF"/>
+                </a:solidFill>
+                <a:latin typeface="Arial"/>
+              </a:rPr>
+              <a:t>INTERNAL DRAFT — NOT FOR EXTERNAL DISTRIBUTION</a:t>
             </a:r>
           </a:p>
         </p:txBody>
@@ -3824,7 +4155,7 @@
         <p:spPr>
           <a:xfrm>
             <a:off x="457200" y="365760"/>
-            <a:ext cx="8229600" cy="548640"/>
+            <a:ext cx="8229600" cy="640080"/>
           </a:xfrm>
           <a:prstGeom prst="rect">
             <a:avLst/>
@@ -3852,410 +4183,27 @@
                 </a:solidFill>
                 <a:latin typeface="Arial"/>
               </a:rPr>
-              <a:t>FINANCIALS</a:t>
-            </a:r>
-          </a:p>
-        </p:txBody>
-      </p:sp>
-      <p:sp>
-        <p:nvSpPr>
-          <p:cNvPr id="4" name="TextBox 3"/>
-          <p:cNvSpPr txBox="1"/>
-          <p:nvPr/>
-        </p:nvSpPr>
-        <p:spPr>
-          <a:xfrm>
-            <a:off x="731520" y="1097280"/>
-            <a:ext cx="7772400" cy="5029200"/>
-          </a:xfrm>
-          <a:prstGeom prst="rect">
-            <a:avLst/>
-          </a:prstGeom>
-          <a:noFill/>
-        </p:spPr>
-        <p:txBody>
-          <a:bodyPr wrap="square">
-            <a:spAutoFit/>
-          </a:bodyPr>
-          <a:lstStyle/>
-          <a:p>
-            <a:pPr>
-              <a:spcAft>
-                <a:spcPts val="600"/>
-              </a:spcAft>
-              <a:defRPr sz="1300">
-                <a:solidFill>
-                  <a:srgbClr val="070A40"/>
-                </a:solidFill>
-                <a:latin typeface="Arial"/>
-              </a:defRPr>
-            </a:pPr>
-            <a:r>
-              <a:rPr sz="1300">
-                <a:solidFill>
-                  <a:srgbClr val="070A40"/>
-                </a:solidFill>
-                <a:latin typeface="Arial"/>
-              </a:rPr>
-              <a:t>Revenue Projections (targets, pending validation):</a:t>
-            </a:r>
-          </a:p>
-          <a:p>
-            <a:pPr>
-              <a:spcAft>
-                <a:spcPts val="600"/>
-              </a:spcAft>
-              <a:defRPr sz="1300">
-                <a:solidFill>
-                  <a:srgbClr val="070A40"/>
-                </a:solidFill>
-                <a:latin typeface="Arial"/>
-              </a:defRPr>
-            </a:pPr>
-            <a:r>
-              <a:rPr sz="1300">
-                <a:solidFill>
-                  <a:srgbClr val="070A40"/>
-                </a:solidFill>
-                <a:latin typeface="Arial"/>
-              </a:rPr>
-              <a:t>  •  Year One:  Early revenue traction</a:t>
-            </a:r>
-          </a:p>
-          <a:p>
-            <a:pPr>
-              <a:spcAft>
-                <a:spcPts val="600"/>
-              </a:spcAft>
-              <a:defRPr sz="1300">
-                <a:solidFill>
-                  <a:srgbClr val="070A40"/>
-                </a:solidFill>
-                <a:latin typeface="Arial"/>
-              </a:defRPr>
-            </a:pPr>
-            <a:r>
-              <a:rPr sz="1300">
-                <a:solidFill>
-                  <a:srgbClr val="070A40"/>
-                </a:solidFill>
-                <a:latin typeface="Arial"/>
-              </a:rPr>
-              <a:t>  •  Year Two:  Recurring contracts + SaaS growth</a:t>
-            </a:r>
-          </a:p>
-          <a:p>
-            <a:pPr>
-              <a:spcAft>
-                <a:spcPts val="600"/>
-              </a:spcAft>
-              <a:defRPr sz="1300">
-                <a:solidFill>
-                  <a:srgbClr val="070A40"/>
-                </a:solidFill>
-                <a:latin typeface="Arial"/>
-              </a:defRPr>
-            </a:pPr>
-            <a:r>
-              <a:rPr sz="1300">
-                <a:solidFill>
-                  <a:srgbClr val="070A40"/>
-                </a:solidFill>
-                <a:latin typeface="Arial"/>
-              </a:rPr>
-              <a:t>  •  Year Three:  SaaS + managed workforce scale</a:t>
-            </a:r>
-          </a:p>
-          <a:p>
-            <a:pPr>
-              <a:spcAft>
-                <a:spcPts val="600"/>
-              </a:spcAft>
-              <a:defRPr sz="1300">
-                <a:solidFill>
-                  <a:srgbClr val="070A40"/>
-                </a:solidFill>
-                <a:latin typeface="Arial"/>
-              </a:defRPr>
-            </a:pPr>
-          </a:p>
-          <a:p>
-            <a:pPr>
-              <a:spcAft>
-                <a:spcPts val="600"/>
-              </a:spcAft>
-              <a:defRPr sz="1300">
-                <a:solidFill>
-                  <a:srgbClr val="070A40"/>
-                </a:solidFill>
-                <a:latin typeface="Arial"/>
-              </a:defRPr>
-            </a:pPr>
-            <a:r>
-              <a:rPr sz="1300">
-                <a:solidFill>
-                  <a:srgbClr val="070A40"/>
-                </a:solidFill>
-                <a:latin typeface="Arial"/>
-              </a:rPr>
-              <a:t>Key Assumptions:</a:t>
-            </a:r>
-          </a:p>
-          <a:p>
-            <a:pPr>
-              <a:spcAft>
-                <a:spcPts val="600"/>
-              </a:spcAft>
-              <a:defRPr sz="1300">
-                <a:solidFill>
-                  <a:srgbClr val="070A40"/>
-                </a:solidFill>
-                <a:latin typeface="Arial"/>
-              </a:defRPr>
-            </a:pPr>
-            <a:r>
-              <a:rPr sz="1300">
-                <a:solidFill>
-                  <a:srgbClr val="070A40"/>
-                </a:solidFill>
-                <a:latin typeface="Arial"/>
-              </a:rPr>
-              <a:t>  •  Month-over-month revenue growth in ramp</a:t>
-            </a:r>
-          </a:p>
-          <a:p>
-            <a:pPr>
-              <a:spcAft>
-                <a:spcPts val="600"/>
-              </a:spcAft>
-              <a:defRPr sz="1300">
-                <a:solidFill>
-                  <a:srgbClr val="070A40"/>
-                </a:solidFill>
-                <a:latin typeface="Arial"/>
-              </a:defRPr>
-            </a:pPr>
-            <a:r>
-              <a:rPr sz="1300">
-                <a:solidFill>
-                  <a:srgbClr val="070A40"/>
-                </a:solidFill>
-                <a:latin typeface="Arial"/>
-              </a:rPr>
-              <a:t>  •  Strong gross margin target; LLM cost controlled at scale</a:t>
-            </a:r>
-          </a:p>
-          <a:p>
-            <a:pPr>
-              <a:spcAft>
-                <a:spcPts val="600"/>
-              </a:spcAft>
-              <a:defRPr sz="1300">
-                <a:solidFill>
-                  <a:srgbClr val="070A40"/>
-                </a:solidFill>
-                <a:latin typeface="Arial"/>
-              </a:defRPr>
-            </a:pPr>
-            <a:r>
-              <a:rPr sz="1300">
-                <a:solidFill>
-                  <a:srgbClr val="070A40"/>
-                </a:solidFill>
-                <a:latin typeface="Arial"/>
-              </a:rPr>
-              <a:t>  •  Net retention target per Mission success metrics</a:t>
-            </a:r>
-          </a:p>
-          <a:p>
-            <a:pPr>
-              <a:spcAft>
-                <a:spcPts val="600"/>
-              </a:spcAft>
-              <a:defRPr sz="1300">
-                <a:solidFill>
-                  <a:srgbClr val="070A40"/>
-                </a:solidFill>
-                <a:latin typeface="Arial"/>
-              </a:defRPr>
-            </a:pPr>
-          </a:p>
-          <a:p>
-            <a:pPr>
-              <a:spcAft>
-                <a:spcPts val="600"/>
-              </a:spcAft>
-              <a:defRPr sz="1300">
-                <a:solidFill>
-                  <a:srgbClr val="070A40"/>
-                </a:solidFill>
-                <a:latin typeface="Arial"/>
-              </a:defRPr>
-            </a:pPr>
-            <a:r>
-              <a:rPr sz="1300">
-                <a:solidFill>
-                  <a:srgbClr val="070A40"/>
-                </a:solidFill>
-                <a:latin typeface="Arial"/>
-              </a:rPr>
-              <a:t>Use of Funds (per Corporate Blueprint):</a:t>
-            </a:r>
-          </a:p>
-          <a:p>
-            <a:pPr>
-              <a:spcAft>
-                <a:spcPts val="600"/>
-              </a:spcAft>
-              <a:defRPr sz="1300">
-                <a:solidFill>
-                  <a:srgbClr val="070A40"/>
-                </a:solidFill>
-                <a:latin typeface="Arial"/>
-              </a:defRPr>
-            </a:pPr>
-            <a:r>
-              <a:rPr sz="1300">
-                <a:solidFill>
-                  <a:srgbClr val="070A40"/>
-                </a:solidFill>
-                <a:latin typeface="Arial"/>
-              </a:rPr>
-              <a:t>  •  Talent — Sales leads, compliance, DevRel</a:t>
-            </a:r>
-          </a:p>
-          <a:p>
-            <a:pPr>
-              <a:spcAft>
-                <a:spcPts val="600"/>
-              </a:spcAft>
-              <a:defRPr sz="1300">
-                <a:solidFill>
-                  <a:srgbClr val="070A40"/>
-                </a:solidFill>
-                <a:latin typeface="Arial"/>
-              </a:defRPr>
-            </a:pPr>
-            <a:r>
-              <a:rPr sz="1300">
-                <a:solidFill>
-                  <a:srgbClr val="070A40"/>
-                </a:solidFill>
-                <a:latin typeface="Arial"/>
-              </a:rPr>
-              <a:t>  •  Client Pilots — Multiple offers across A–C</a:t>
-            </a:r>
-          </a:p>
-          <a:p>
-            <a:pPr>
-              <a:spcAft>
-                <a:spcPts val="600"/>
-              </a:spcAft>
-              <a:defRPr sz="1300">
-                <a:solidFill>
-                  <a:srgbClr val="070A40"/>
-                </a:solidFill>
-                <a:latin typeface="Arial"/>
-              </a:defRPr>
-            </a:pPr>
-            <a:r>
-              <a:rPr sz="1300">
-                <a:solidFill>
-                  <a:srgbClr val="070A40"/>
-                </a:solidFill>
-                <a:latin typeface="Arial"/>
-              </a:rPr>
-              <a:t>  •  Hardware Lab — On-prem GPU for offline-first proof; field kits</a:t>
-            </a:r>
-          </a:p>
-          <a:p>
-            <a:pPr>
-              <a:spcAft>
-                <a:spcPts val="600"/>
-              </a:spcAft>
-              <a:defRPr sz="1300">
-                <a:solidFill>
-                  <a:srgbClr val="070A40"/>
-                </a:solidFill>
-                <a:latin typeface="Arial"/>
-              </a:defRPr>
-            </a:pPr>
-            <a:r>
-              <a:rPr sz="1300">
-                <a:solidFill>
-                  <a:srgbClr val="070A40"/>
-                </a:solidFill>
-                <a:latin typeface="Arial"/>
-              </a:rPr>
-              <a:t>  •  Compliance &amp; Legal — Malawi DPA 2017, GDPR, SOC 2 prep</a:t>
-            </a:r>
-          </a:p>
-          <a:p>
-            <a:pPr>
-              <a:spcAft>
-                <a:spcPts val="600"/>
-              </a:spcAft>
-              <a:defRPr sz="1300">
-                <a:solidFill>
-                  <a:srgbClr val="070A40"/>
-                </a:solidFill>
-                <a:latin typeface="Arial"/>
-              </a:defRPr>
-            </a:pPr>
-            <a:r>
-              <a:rPr sz="1300">
-                <a:solidFill>
-                  <a:srgbClr val="070A40"/>
-                </a:solidFill>
-                <a:latin typeface="Arial"/>
-              </a:rPr>
-              <a:t>  •  Emergency Reserve — CEO-only release</a:t>
-            </a:r>
-          </a:p>
-        </p:txBody>
-      </p:sp>
-    </p:spTree>
-  </p:cSld>
-  <p:clrMapOvr>
-    <a:masterClrMapping/>
-  </p:clrMapOvr>
-</p:sld>
-</file>
-
-<file path=ppt/slides/slide12.xml><?xml version="1.0" encoding="utf-8"?>
-<p:sld xmlns:a="http://schemas.openxmlformats.org/drawingml/2006/main" xmlns:p="http://schemas.openxmlformats.org/presentationml/2006/main" xmlns:r="http://schemas.openxmlformats.org/officeDocument/2006/relationships">
-  <p:cSld>
-    <p:bg>
-      <p:bgPr>
-        <a:solidFill>
-          <a:srgbClr val="070A40"/>
-        </a:solidFill>
-        <a:effectLst/>
-      </p:bgPr>
-    </p:bg>
-    <p:spTree>
-      <p:nvGrpSpPr>
-        <p:cNvPr id="1" name=""/>
-        <p:cNvGrpSpPr/>
-        <p:nvPr/>
-      </p:nvGrpSpPr>
-      <p:grpSpPr/>
-      <p:sp>
-        <p:nvSpPr>
-          <p:cNvPr id="2" name="Rectangle 1"/>
+              <a:t>RISKS &amp; HOW WE MITIGATE THEM</a:t>
+            </a:r>
+          </a:p>
+        </p:txBody>
+      </p:sp>
+      <p:sp>
+        <p:nvSpPr>
+          <p:cNvPr id="4" name="Rounded Rectangle 3"/>
           <p:cNvSpPr/>
           <p:nvPr/>
         </p:nvSpPr>
         <p:spPr>
           <a:xfrm>
-            <a:off x="0" y="0"/>
-            <a:ext cx="137160" cy="6858000"/>
-          </a:xfrm>
-          <a:prstGeom prst="rect">
+            <a:off x="502920" y="1188720"/>
+            <a:ext cx="8138160" cy="713232"/>
+          </a:xfrm>
+          <a:prstGeom prst="roundRect">
             <a:avLst/>
           </a:prstGeom>
           <a:solidFill>
-            <a:srgbClr val="070A40"/>
+            <a:srgbClr val="F2F2F2"/>
           </a:solidFill>
           <a:ln>
             <a:noFill/>
@@ -4285,14 +4233,14 @@
       </p:sp>
       <p:sp>
         <p:nvSpPr>
-          <p:cNvPr id="3" name="TextBox 2"/>
+          <p:cNvPr id="5" name="TextBox 4"/>
           <p:cNvSpPr txBox="1"/>
           <p:nvPr/>
         </p:nvSpPr>
         <p:spPr>
           <a:xfrm>
-            <a:off x="914400" y="731520"/>
-            <a:ext cx="7315200" cy="731520"/>
+            <a:off x="685800" y="1261872"/>
+            <a:ext cx="3017520" cy="548640"/>
           </a:xfrm>
           <a:prstGeom prst="rect">
             <a:avLst/>
@@ -4305,42 +4253,84 @@
           </a:bodyPr>
           <a:lstStyle/>
           <a:p>
-            <a:pPr algn="ctr">
-              <a:defRPr sz="3200" b="1">
-                <a:solidFill>
-                  <a:srgbClr val="FFFFFF"/>
-                </a:solidFill>
-                <a:latin typeface="Arial"/>
-              </a:defRPr>
-            </a:pPr>
-            <a:r>
-              <a:rPr sz="3200" b="1">
-                <a:solidFill>
-                  <a:srgbClr val="FFFFFF"/>
-                </a:solidFill>
-                <a:latin typeface="Arial"/>
-              </a:rPr>
-              <a:t>THE ASK</a:t>
-            </a:r>
-          </a:p>
-        </p:txBody>
-      </p:sp>
-      <p:sp>
-        <p:nvSpPr>
-          <p:cNvPr id="4" name="Rectangle 3"/>
+            <a:pPr algn="l">
+              <a:defRPr sz="1200" b="1">
+                <a:solidFill>
+                  <a:srgbClr val="070A40"/>
+                </a:solidFill>
+                <a:latin typeface="Arial"/>
+              </a:defRPr>
+            </a:pPr>
+            <a:r>
+              <a:rPr sz="1200" b="1">
+                <a:solidFill>
+                  <a:srgbClr val="070A40"/>
+                </a:solidFill>
+                <a:latin typeface="Arial"/>
+              </a:rPr>
+              <a:t>Dependence on third-party models</a:t>
+            </a:r>
+          </a:p>
+        </p:txBody>
+      </p:sp>
+      <p:sp>
+        <p:nvSpPr>
+          <p:cNvPr id="6" name="TextBox 5"/>
+          <p:cNvSpPr txBox="1"/>
+          <p:nvPr/>
+        </p:nvSpPr>
+        <p:spPr>
+          <a:xfrm>
+            <a:off x="3794760" y="1261872"/>
+            <a:ext cx="4663440" cy="548640"/>
+          </a:xfrm>
+          <a:prstGeom prst="rect">
+            <a:avLst/>
+          </a:prstGeom>
+          <a:noFill/>
+        </p:spPr>
+        <p:txBody>
+          <a:bodyPr wrap="square">
+            <a:spAutoFit/>
+          </a:bodyPr>
+          <a:lstStyle/>
+          <a:p>
+            <a:pPr algn="l">
+              <a:defRPr sz="1200" b="0">
+                <a:solidFill>
+                  <a:srgbClr val="070A40"/>
+                </a:solidFill>
+                <a:latin typeface="Arial"/>
+              </a:defRPr>
+            </a:pPr>
+            <a:r>
+              <a:rPr sz="1200" b="0">
+                <a:solidFill>
+                  <a:srgbClr val="070A40"/>
+                </a:solidFill>
+                <a:latin typeface="Arial"/>
+              </a:rPr>
+              <a:t>Multi-provider routing with automatic fallback; local inference option</a:t>
+            </a:r>
+          </a:p>
+        </p:txBody>
+      </p:sp>
+      <p:sp>
+        <p:nvSpPr>
+          <p:cNvPr id="7" name="Rounded Rectangle 6"/>
           <p:cNvSpPr/>
           <p:nvPr/>
         </p:nvSpPr>
         <p:spPr>
           <a:xfrm>
-            <a:off x="3200400" y="1554480"/>
-            <a:ext cx="2743200" cy="36576"/>
-          </a:xfrm>
-          <a:prstGeom prst="rect">
+            <a:off x="502920" y="2011680"/>
+            <a:ext cx="8138160" cy="713232"/>
+          </a:xfrm>
+          <a:prstGeom prst="roundRect">
             <a:avLst/>
           </a:prstGeom>
           <a:solidFill>
-            <a:srgbClr val="E63946"/>
+            <a:srgbClr val="F2F2F2"/>
           </a:solidFill>
           <a:ln>
             <a:noFill/>
@@ -4370,14 +4360,14 @@
       </p:sp>
       <p:sp>
         <p:nvSpPr>
-          <p:cNvPr id="5" name="TextBox 4"/>
+          <p:cNvPr id="8" name="TextBox 7"/>
           <p:cNvSpPr txBox="1"/>
           <p:nvPr/>
         </p:nvSpPr>
         <p:spPr>
           <a:xfrm>
-            <a:off x="914400" y="1828800"/>
-            <a:ext cx="7315200" cy="731520"/>
+            <a:off x="685800" y="2084832"/>
+            <a:ext cx="3017520" cy="548640"/>
           </a:xfrm>
           <a:prstGeom prst="rect">
             <a:avLst/>
@@ -4390,36 +4380,36 @@
           </a:bodyPr>
           <a:lstStyle/>
           <a:p>
-            <a:pPr algn="ctr">
-              <a:defRPr sz="2400" b="0">
-                <a:solidFill>
-                  <a:srgbClr val="00BFFF"/>
-                </a:solidFill>
-                <a:latin typeface="Arial"/>
-              </a:defRPr>
-            </a:pPr>
-            <a:r>
-              <a:rPr sz="2400" b="0">
-                <a:solidFill>
-                  <a:srgbClr val="00BFFF"/>
-                </a:solidFill>
-                <a:latin typeface="Arial"/>
-              </a:rPr>
-              <a:t>Raising Seed Capital</a:t>
-            </a:r>
-          </a:p>
-        </p:txBody>
-      </p:sp>
-      <p:sp>
-        <p:nvSpPr>
-          <p:cNvPr id="6" name="TextBox 5"/>
+            <a:pPr algn="l">
+              <a:defRPr sz="1200" b="1">
+                <a:solidFill>
+                  <a:srgbClr val="070A40"/>
+                </a:solidFill>
+                <a:latin typeface="Arial"/>
+              </a:defRPr>
+            </a:pPr>
+            <a:r>
+              <a:rPr sz="1200" b="1">
+                <a:solidFill>
+                  <a:srgbClr val="070A40"/>
+                </a:solidFill>
+                <a:latin typeface="Arial"/>
+              </a:rPr>
+              <a:t>Regulatory and data-protection exposure</a:t>
+            </a:r>
+          </a:p>
+        </p:txBody>
+      </p:sp>
+      <p:sp>
+        <p:nvSpPr>
+          <p:cNvPr id="9" name="TextBox 8"/>
           <p:cNvSpPr txBox="1"/>
           <p:nvPr/>
         </p:nvSpPr>
         <p:spPr>
           <a:xfrm>
-            <a:off x="1371600" y="2926080"/>
-            <a:ext cx="6400800" cy="3200400"/>
+            <a:off x="3794760" y="2084832"/>
+            <a:ext cx="4663440" cy="548640"/>
           </a:xfrm>
           <a:prstGeom prst="rect">
             <a:avLst/>
@@ -4432,260 +4422,42 @@
           </a:bodyPr>
           <a:lstStyle/>
           <a:p>
-            <a:pPr>
-              <a:spcAft>
-                <a:spcPts val="600"/>
-              </a:spcAft>
-              <a:defRPr sz="1400">
-                <a:solidFill>
-                  <a:srgbClr val="FFFFFF"/>
-                </a:solidFill>
-                <a:latin typeface="Arial"/>
-              </a:defRPr>
-            </a:pPr>
-            <a:r>
-              <a:rPr sz="1400">
-                <a:solidFill>
-                  <a:srgbClr val="FFFFFF"/>
-                </a:solidFill>
-                <a:latin typeface="Arial"/>
-              </a:rPr>
-              <a:t>Use of Funds (aligned to Corporate Blueprint):</a:t>
-            </a:r>
-          </a:p>
-          <a:p>
-            <a:pPr>
-              <a:spcAft>
-                <a:spcPts val="600"/>
-              </a:spcAft>
-              <a:defRPr sz="1400">
-                <a:solidFill>
-                  <a:srgbClr val="FFFFFF"/>
-                </a:solidFill>
-                <a:latin typeface="Arial"/>
-              </a:defRPr>
-            </a:pPr>
-            <a:r>
-              <a:rPr sz="1400">
-                <a:solidFill>
-                  <a:srgbClr val="FFFFFF"/>
-                </a:solidFill>
-                <a:latin typeface="Arial"/>
-              </a:rPr>
-              <a:t>  •  Talent — Platform Licensing Sales Lead (Offer E), chatbot/compliance leads</a:t>
-            </a:r>
-          </a:p>
-          <a:p>
-            <a:pPr>
-              <a:spcAft>
-                <a:spcPts val="600"/>
-              </a:spcAft>
-              <a:defRPr sz="1400">
-                <a:solidFill>
-                  <a:srgbClr val="FFFFFF"/>
-                </a:solidFill>
-                <a:latin typeface="Arial"/>
-              </a:defRPr>
-            </a:pPr>
-            <a:r>
-              <a:rPr sz="1400">
-                <a:solidFill>
-                  <a:srgbClr val="FFFFFF"/>
-                </a:solidFill>
-                <a:latin typeface="Arial"/>
-              </a:rPr>
-              <a:t>  •  Client pilots — Multiple offers across A, B, C (post governance gates)</a:t>
-            </a:r>
-          </a:p>
-          <a:p>
-            <a:pPr>
-              <a:spcAft>
-                <a:spcPts val="600"/>
-              </a:spcAft>
-              <a:defRPr sz="1400">
-                <a:solidFill>
-                  <a:srgbClr val="FFFFFF"/>
-                </a:solidFill>
-                <a:latin typeface="Arial"/>
-              </a:defRPr>
-            </a:pPr>
-            <a:r>
-              <a:rPr sz="1400">
-                <a:solidFill>
-                  <a:srgbClr val="FFFFFF"/>
-                </a:solidFill>
-                <a:latin typeface="Arial"/>
-              </a:rPr>
-              <a:t>  •  Hardware lab — On-prem GPU for offline-first proof; field kits</a:t>
-            </a:r>
-          </a:p>
-          <a:p>
-            <a:pPr>
-              <a:spcAft>
-                <a:spcPts val="600"/>
-              </a:spcAft>
-              <a:defRPr sz="1400">
-                <a:solidFill>
-                  <a:srgbClr val="FFFFFF"/>
-                </a:solidFill>
-                <a:latin typeface="Arial"/>
-              </a:defRPr>
-            </a:pPr>
-            <a:r>
-              <a:rPr sz="1400">
-                <a:solidFill>
-                  <a:srgbClr val="FFFFFF"/>
-                </a:solidFill>
-                <a:latin typeface="Arial"/>
-              </a:rPr>
-              <a:t>  •  Compliance — Malawi DPA 2017, GDPR opinion, SOC 2 Type II readiness</a:t>
-            </a:r>
-          </a:p>
-          <a:p>
-            <a:pPr>
-              <a:spcAft>
-                <a:spcPts val="600"/>
-              </a:spcAft>
-              <a:defRPr sz="1400">
-                <a:solidFill>
-                  <a:srgbClr val="FFFFFF"/>
-                </a:solidFill>
-                <a:latin typeface="Arial"/>
-              </a:defRPr>
-            </a:pPr>
-          </a:p>
-          <a:p>
-            <a:pPr>
-              <a:spcAft>
-                <a:spcPts val="600"/>
-              </a:spcAft>
-              <a:defRPr sz="1400">
-                <a:solidFill>
-                  <a:srgbClr val="FFFFFF"/>
-                </a:solidFill>
-                <a:latin typeface="Arial"/>
-              </a:defRPr>
-            </a:pPr>
-            <a:r>
-              <a:rPr sz="1400">
-                <a:solidFill>
-                  <a:srgbClr val="FFFFFF"/>
-                </a:solidFill>
-                <a:latin typeface="Arial"/>
-              </a:rPr>
-              <a:t>Milestones with this raise:</a:t>
-            </a:r>
-          </a:p>
-          <a:p>
-            <a:pPr>
-              <a:spcAft>
-                <a:spcPts val="600"/>
-              </a:spcAft>
-              <a:defRPr sz="1400">
-                <a:solidFill>
-                  <a:srgbClr val="FFFFFF"/>
-                </a:solidFill>
-                <a:latin typeface="Arial"/>
-              </a:defRPr>
-            </a:pPr>
-            <a:r>
-              <a:rPr sz="1400">
-                <a:solidFill>
-                  <a:srgbClr val="FFFFFF"/>
-                </a:solidFill>
-                <a:latin typeface="Arial"/>
-              </a:rPr>
-              <a:t>  •  Paying pilot clients across Offers A–C</a:t>
-            </a:r>
-          </a:p>
-          <a:p>
-            <a:pPr>
-              <a:spcAft>
-                <a:spcPts val="600"/>
-              </a:spcAft>
-              <a:defRPr sz="1400">
-                <a:solidFill>
-                  <a:srgbClr val="FFFFFF"/>
-                </a:solidFill>
-                <a:latin typeface="Arial"/>
-              </a:defRPr>
-            </a:pPr>
-            <a:r>
-              <a:rPr sz="1400">
-                <a:solidFill>
-                  <a:srgbClr val="FFFFFF"/>
-                </a:solidFill>
-                <a:latin typeface="Arial"/>
-              </a:rPr>
-              <a:t>  •  ARR run-rate (SaaS + managed recurring)</a:t>
-            </a:r>
-          </a:p>
-          <a:p>
-            <a:pPr>
-              <a:spcAft>
-                <a:spcPts val="600"/>
-              </a:spcAft>
-              <a:defRPr sz="1400">
-                <a:solidFill>
-                  <a:srgbClr val="FFFFFF"/>
-                </a:solidFill>
-                <a:latin typeface="Arial"/>
-              </a:defRPr>
-            </a:pPr>
-            <a:r>
-              <a:rPr sz="1400">
-                <a:solidFill>
-                  <a:srgbClr val="FFFFFF"/>
-                </a:solidFill>
-                <a:latin typeface="Arial"/>
-              </a:rPr>
-              <a:t>  •  Phase Five autonomous mode live — self-governing AI company</a:t>
-            </a:r>
-          </a:p>
-        </p:txBody>
-      </p:sp>
-    </p:spTree>
-  </p:cSld>
-  <p:clrMapOvr>
-    <a:masterClrMapping/>
-  </p:clrMapOvr>
-</p:sld>
-</file>
-
-<file path=ppt/slides/slide13.xml><?xml version="1.0" encoding="utf-8"?>
-<p:sld xmlns:a="http://schemas.openxmlformats.org/drawingml/2006/main" xmlns:p="http://schemas.openxmlformats.org/presentationml/2006/main" xmlns:r="http://schemas.openxmlformats.org/officeDocument/2006/relationships">
-  <p:cSld>
-    <p:bg>
-      <p:bgPr>
-        <a:solidFill>
-          <a:srgbClr val="070A40"/>
-        </a:solidFill>
-        <a:effectLst/>
-      </p:bgPr>
-    </p:bg>
-    <p:spTree>
-      <p:nvGrpSpPr>
-        <p:cNvPr id="1" name=""/>
-        <p:cNvGrpSpPr/>
-        <p:nvPr/>
-      </p:nvGrpSpPr>
-      <p:grpSpPr/>
-      <p:sp>
-        <p:nvSpPr>
-          <p:cNvPr id="2" name="Rectangle 1"/>
+            <a:pPr algn="l">
+              <a:defRPr sz="1200" b="0">
+                <a:solidFill>
+                  <a:srgbClr val="070A40"/>
+                </a:solidFill>
+                <a:latin typeface="Arial"/>
+              </a:defRPr>
+            </a:pPr>
+            <a:r>
+              <a:rPr sz="1200" b="0">
+                <a:solidFill>
+                  <a:srgbClr val="070A40"/>
+                </a:solidFill>
+                <a:latin typeface="Arial"/>
+              </a:rPr>
+              <a:t>Built to DPA 2024 and GDPR-grade handling; SOC 2 planned, not certified</a:t>
+            </a:r>
+          </a:p>
+        </p:txBody>
+      </p:sp>
+      <p:sp>
+        <p:nvSpPr>
+          <p:cNvPr id="10" name="Rounded Rectangle 9"/>
           <p:cNvSpPr/>
           <p:nvPr/>
         </p:nvSpPr>
         <p:spPr>
           <a:xfrm>
-            <a:off x="594360" y="457200"/>
-            <a:ext cx="1371600" cy="1371600"/>
-          </a:xfrm>
-          <a:prstGeom prst="rect">
+            <a:off x="502920" y="2834640"/>
+            <a:ext cx="8138160" cy="713232"/>
+          </a:xfrm>
+          <a:prstGeom prst="roundRect">
             <a:avLst/>
           </a:prstGeom>
           <a:solidFill>
-            <a:srgbClr val="FFFFFF"/>
+            <a:srgbClr val="F2F2F2"/>
           </a:solidFill>
           <a:ln>
             <a:noFill/>
@@ -4713,40 +4485,16 @@
           </a:p>
         </p:txBody>
       </p:sp>
-      <p:pic>
-        <p:nvPicPr>
-          <p:cNvPr id="3" name="Company Logo" descr="LightSpeed Holdings logo"/>
-          <p:cNvPicPr>
-            <a:picLocks noChangeAspect="1"/>
-          </p:cNvPicPr>
-          <p:nvPr/>
-        </p:nvPicPr>
-        <p:blipFill>
-          <a:blip r:embed="rId2"/>
-          <a:stretch>
-            <a:fillRect/>
-          </a:stretch>
-        </p:blipFill>
-        <p:spPr>
-          <a:xfrm>
-            <a:off x="594360" y="457200"/>
-            <a:ext cx="1371600" cy="1371600"/>
-          </a:xfrm>
-          <a:prstGeom prst="rect">
-            <a:avLst/>
-          </a:prstGeom>
-        </p:spPr>
-      </p:pic>
-      <p:sp>
-        <p:nvSpPr>
-          <p:cNvPr id="4" name="TextBox 3"/>
+      <p:sp>
+        <p:nvSpPr>
+          <p:cNvPr id="11" name="TextBox 10"/>
           <p:cNvSpPr txBox="1"/>
           <p:nvPr/>
         </p:nvSpPr>
         <p:spPr>
           <a:xfrm>
-            <a:off x="914400" y="2011680"/>
-            <a:ext cx="7315200" cy="914400"/>
+            <a:off x="685800" y="2907792"/>
+            <a:ext cx="3017520" cy="548640"/>
           </a:xfrm>
           <a:prstGeom prst="rect">
             <a:avLst/>
@@ -4759,36 +4507,36 @@
           </a:bodyPr>
           <a:lstStyle/>
           <a:p>
-            <a:pPr algn="ctr">
-              <a:defRPr sz="3600" b="1">
-                <a:solidFill>
-                  <a:srgbClr val="FFFFFF"/>
-                </a:solidFill>
-                <a:latin typeface="Arial"/>
-              </a:defRPr>
-            </a:pPr>
-            <a:r>
-              <a:rPr sz="3600" b="1">
-                <a:solidFill>
-                  <a:srgbClr val="FFFFFF"/>
-                </a:solidFill>
-                <a:latin typeface="Arial"/>
-              </a:rPr>
-              <a:t>THANK YOU</a:t>
-            </a:r>
-          </a:p>
-        </p:txBody>
-      </p:sp>
-      <p:sp>
-        <p:nvSpPr>
-          <p:cNvPr id="5" name="TextBox 4"/>
+            <a:pPr algn="l">
+              <a:defRPr sz="1200" b="1">
+                <a:solidFill>
+                  <a:srgbClr val="070A40"/>
+                </a:solidFill>
+                <a:latin typeface="Arial"/>
+              </a:defRPr>
+            </a:pPr>
+            <a:r>
+              <a:rPr sz="1200" b="1">
+                <a:solidFill>
+                  <a:srgbClr val="070A40"/>
+                </a:solidFill>
+                <a:latin typeface="Arial"/>
+              </a:rPr>
+              <a:t>Single-founder execution risk</a:t>
+            </a:r>
+          </a:p>
+        </p:txBody>
+      </p:sp>
+      <p:sp>
+        <p:nvSpPr>
+          <p:cNvPr id="12" name="TextBox 11"/>
           <p:cNvSpPr txBox="1"/>
           <p:nvPr/>
         </p:nvSpPr>
         <p:spPr>
           <a:xfrm>
-            <a:off x="914400" y="3108960"/>
-            <a:ext cx="7315200" cy="548640"/>
+            <a:off x="3794760" y="2907792"/>
+            <a:ext cx="4663440" cy="548640"/>
           </a:xfrm>
           <a:prstGeom prst="rect">
             <a:avLst/>
@@ -4801,42 +4549,42 @@
           </a:bodyPr>
           <a:lstStyle/>
           <a:p>
-            <a:pPr algn="ctr">
-              <a:defRPr sz="1800" b="1">
-                <a:solidFill>
-                  <a:srgbClr val="00BFFF"/>
-                </a:solidFill>
-                <a:latin typeface="Arial"/>
-              </a:defRPr>
-            </a:pPr>
-            <a:r>
-              <a:rPr sz="1800" b="1">
-                <a:solidFill>
-                  <a:srgbClr val="00BFFF"/>
-                </a:solidFill>
-                <a:latin typeface="Arial"/>
-              </a:rPr>
-              <a:t>ASPIRE. ACT. ACHIEVE.</a:t>
-            </a:r>
-          </a:p>
-        </p:txBody>
-      </p:sp>
-      <p:sp>
-        <p:nvSpPr>
-          <p:cNvPr id="6" name="Rectangle 5"/>
+            <a:pPr algn="l">
+              <a:defRPr sz="1200" b="0">
+                <a:solidFill>
+                  <a:srgbClr val="070A40"/>
+                </a:solidFill>
+                <a:latin typeface="Arial"/>
+              </a:defRPr>
+            </a:pPr>
+            <a:r>
+              <a:rPr sz="1200" b="0">
+                <a:solidFill>
+                  <a:srgbClr val="070A40"/>
+                </a:solidFill>
+                <a:latin typeface="Arial"/>
+              </a:rPr>
+              <a:t>Named hiring plan; agent cabinet under human approval gates</a:t>
+            </a:r>
+          </a:p>
+        </p:txBody>
+      </p:sp>
+      <p:sp>
+        <p:nvSpPr>
+          <p:cNvPr id="13" name="Rounded Rectangle 12"/>
           <p:cNvSpPr/>
           <p:nvPr/>
         </p:nvSpPr>
         <p:spPr>
           <a:xfrm>
-            <a:off x="3200400" y="3657600"/>
-            <a:ext cx="2743200" cy="36576"/>
-          </a:xfrm>
-          <a:prstGeom prst="rect">
+            <a:off x="502920" y="3657600"/>
+            <a:ext cx="8138160" cy="713232"/>
+          </a:xfrm>
+          <a:prstGeom prst="roundRect">
             <a:avLst/>
           </a:prstGeom>
           <a:solidFill>
-            <a:srgbClr val="E63946"/>
+            <a:srgbClr val="F2F2F2"/>
           </a:solidFill>
           <a:ln>
             <a:noFill/>
@@ -4866,14 +4614,14 @@
       </p:sp>
       <p:sp>
         <p:nvSpPr>
-          <p:cNvPr id="7" name="TextBox 6"/>
+          <p:cNvPr id="14" name="TextBox 13"/>
           <p:cNvSpPr txBox="1"/>
           <p:nvPr/>
         </p:nvSpPr>
         <p:spPr>
           <a:xfrm>
-            <a:off x="914400" y="4114800"/>
-            <a:ext cx="7315200" cy="1371600"/>
+            <a:off x="685800" y="3730752"/>
+            <a:ext cx="3017520" cy="548640"/>
           </a:xfrm>
           <a:prstGeom prst="rect">
             <a:avLst/>
@@ -4886,42 +4634,360 @@
           </a:bodyPr>
           <a:lstStyle/>
           <a:p>
-            <a:pPr algn="ctr">
-              <a:defRPr sz="1400" b="0">
-                <a:solidFill>
-                  <a:srgbClr val="FFFFFF"/>
-                </a:solidFill>
-                <a:latin typeface="Arial"/>
-              </a:defRPr>
-            </a:pPr>
-            <a:r>
-              <a:rPr sz="1400" b="0">
-                <a:solidFill>
-                  <a:srgbClr val="FFFFFF"/>
-                </a:solidFill>
-                <a:latin typeface="Arial"/>
-              </a:rPr>
-              <a:t>Jack Mlusu, Founder &amp; CEO</a:t>
-            </a:r>
-            <a:br/>
-            <a:r>
-              <a:rPr sz="1400" b="0">
-                <a:solidFill>
-                  <a:srgbClr val="FFFFFF"/>
-                </a:solidFill>
-                <a:latin typeface="Arial"/>
-              </a:rPr>
-              <a:t>jmlusu@gmail.com</a:t>
-            </a:r>
-            <a:br/>
-            <a:r>
-              <a:rPr sz="1400" b="0">
-                <a:solidFill>
-                  <a:srgbClr val="FFFFFF"/>
-                </a:solidFill>
-                <a:latin typeface="Arial"/>
-              </a:rPr>
-              <a:t>lightspeedholdings.vercel.app</a:t>
+            <a:pPr algn="l">
+              <a:defRPr sz="1200" b="1">
+                <a:solidFill>
+                  <a:srgbClr val="070A40"/>
+                </a:solidFill>
+                <a:latin typeface="Arial"/>
+              </a:defRPr>
+            </a:pPr>
+            <a:r>
+              <a:rPr sz="1200" b="1">
+                <a:solidFill>
+                  <a:srgbClr val="070A40"/>
+                </a:solidFill>
+                <a:latin typeface="Arial"/>
+              </a:rPr>
+              <a:t>Selling ahead of proof</a:t>
+            </a:r>
+          </a:p>
+        </p:txBody>
+      </p:sp>
+      <p:sp>
+        <p:nvSpPr>
+          <p:cNvPr id="15" name="TextBox 14"/>
+          <p:cNvSpPr txBox="1"/>
+          <p:nvPr/>
+        </p:nvSpPr>
+        <p:spPr>
+          <a:xfrm>
+            <a:off x="3794760" y="3730752"/>
+            <a:ext cx="4663440" cy="548640"/>
+          </a:xfrm>
+          <a:prstGeom prst="rect">
+            <a:avLst/>
+          </a:prstGeom>
+          <a:noFill/>
+        </p:spPr>
+        <p:txBody>
+          <a:bodyPr wrap="square">
+            <a:spAutoFit/>
+          </a:bodyPr>
+          <a:lstStyle/>
+          <a:p>
+            <a:pPr algn="l">
+              <a:defRPr sz="1200" b="0">
+                <a:solidFill>
+                  <a:srgbClr val="070A40"/>
+                </a:solidFill>
+                <a:latin typeface="Arial"/>
+              </a:defRPr>
+            </a:pPr>
+            <a:r>
+              <a:rPr sz="1200" b="0">
+                <a:solidFill>
+                  <a:srgbClr val="070A40"/>
+                </a:solidFill>
+                <a:latin typeface="Arial"/>
+              </a:rPr>
+              <a:t>Pilots capped in scope and budget; no scale claims before delivery</a:t>
+            </a:r>
+          </a:p>
+        </p:txBody>
+      </p:sp>
+      <p:sp>
+        <p:nvSpPr>
+          <p:cNvPr id="16" name="Rounded Rectangle 15"/>
+          <p:cNvSpPr/>
+          <p:nvPr/>
+        </p:nvSpPr>
+        <p:spPr>
+          <a:xfrm>
+            <a:off x="502920" y="4480560"/>
+            <a:ext cx="8138160" cy="713232"/>
+          </a:xfrm>
+          <a:prstGeom prst="roundRect">
+            <a:avLst/>
+          </a:prstGeom>
+          <a:solidFill>
+            <a:srgbClr val="F2F2F2"/>
+          </a:solidFill>
+          <a:ln>
+            <a:noFill/>
+          </a:ln>
+        </p:spPr>
+        <p:style>
+          <a:lnRef idx="1">
+            <a:schemeClr val="accent1"/>
+          </a:lnRef>
+          <a:fillRef idx="3">
+            <a:schemeClr val="accent1"/>
+          </a:fillRef>
+          <a:effectRef idx="2">
+            <a:schemeClr val="accent1"/>
+          </a:effectRef>
+          <a:fontRef idx="minor">
+            <a:schemeClr val="lt1"/>
+          </a:fontRef>
+        </p:style>
+        <p:txBody>
+          <a:bodyPr rtlCol="0" anchor="ctr"/>
+          <a:lstStyle/>
+          <a:p>
+            <a:pPr algn="ctr"/>
+          </a:p>
+        </p:txBody>
+      </p:sp>
+      <p:sp>
+        <p:nvSpPr>
+          <p:cNvPr id="17" name="TextBox 16"/>
+          <p:cNvSpPr txBox="1"/>
+          <p:nvPr/>
+        </p:nvSpPr>
+        <p:spPr>
+          <a:xfrm>
+            <a:off x="685800" y="4553712"/>
+            <a:ext cx="3017520" cy="548640"/>
+          </a:xfrm>
+          <a:prstGeom prst="rect">
+            <a:avLst/>
+          </a:prstGeom>
+          <a:noFill/>
+        </p:spPr>
+        <p:txBody>
+          <a:bodyPr wrap="square">
+            <a:spAutoFit/>
+          </a:bodyPr>
+          <a:lstStyle/>
+          <a:p>
+            <a:pPr algn="l">
+              <a:defRPr sz="1200" b="1">
+                <a:solidFill>
+                  <a:srgbClr val="070A40"/>
+                </a:solidFill>
+                <a:latin typeface="Arial"/>
+              </a:defRPr>
+            </a:pPr>
+            <a:r>
+              <a:rPr sz="1200" b="1">
+                <a:solidFill>
+                  <a:srgbClr val="070A40"/>
+                </a:solidFill>
+                <a:latin typeface="Arial"/>
+              </a:rPr>
+              <a:t>Cost overrun on inference</a:t>
+            </a:r>
+          </a:p>
+        </p:txBody>
+      </p:sp>
+      <p:sp>
+        <p:nvSpPr>
+          <p:cNvPr id="18" name="TextBox 17"/>
+          <p:cNvSpPr txBox="1"/>
+          <p:nvPr/>
+        </p:nvSpPr>
+        <p:spPr>
+          <a:xfrm>
+            <a:off x="3794760" y="4553712"/>
+            <a:ext cx="4663440" cy="548640"/>
+          </a:xfrm>
+          <a:prstGeom prst="rect">
+            <a:avLst/>
+          </a:prstGeom>
+          <a:noFill/>
+        </p:spPr>
+        <p:txBody>
+          <a:bodyPr wrap="square">
+            <a:spAutoFit/>
+          </a:bodyPr>
+          <a:lstStyle/>
+          <a:p>
+            <a:pPr algn="l">
+              <a:defRPr sz="1200" b="0">
+                <a:solidFill>
+                  <a:srgbClr val="070A40"/>
+                </a:solidFill>
+                <a:latin typeface="Arial"/>
+              </a:defRPr>
+            </a:pPr>
+            <a:r>
+              <a:rPr sz="1200" b="0">
+                <a:solidFill>
+                  <a:srgbClr val="070A40"/>
+                </a:solidFill>
+                <a:latin typeface="Arial"/>
+              </a:rPr>
+              <a:t>Per-agent budgets and cost enforcement, not after-the-fact reporting</a:t>
+            </a:r>
+          </a:p>
+        </p:txBody>
+      </p:sp>
+      <p:sp>
+        <p:nvSpPr>
+          <p:cNvPr id="19" name="Rounded Rectangle 18"/>
+          <p:cNvSpPr/>
+          <p:nvPr/>
+        </p:nvSpPr>
+        <p:spPr>
+          <a:xfrm>
+            <a:off x="502920" y="5303520"/>
+            <a:ext cx="8138160" cy="713232"/>
+          </a:xfrm>
+          <a:prstGeom prst="roundRect">
+            <a:avLst/>
+          </a:prstGeom>
+          <a:solidFill>
+            <a:srgbClr val="F2F2F2"/>
+          </a:solidFill>
+          <a:ln>
+            <a:noFill/>
+          </a:ln>
+        </p:spPr>
+        <p:style>
+          <a:lnRef idx="1">
+            <a:schemeClr val="accent1"/>
+          </a:lnRef>
+          <a:fillRef idx="3">
+            <a:schemeClr val="accent1"/>
+          </a:fillRef>
+          <a:effectRef idx="2">
+            <a:schemeClr val="accent1"/>
+          </a:effectRef>
+          <a:fontRef idx="minor">
+            <a:schemeClr val="lt1"/>
+          </a:fontRef>
+        </p:style>
+        <p:txBody>
+          <a:bodyPr rtlCol="0" anchor="ctr"/>
+          <a:lstStyle/>
+          <a:p>
+            <a:pPr algn="ctr"/>
+          </a:p>
+        </p:txBody>
+      </p:sp>
+      <p:sp>
+        <p:nvSpPr>
+          <p:cNvPr id="20" name="TextBox 19"/>
+          <p:cNvSpPr txBox="1"/>
+          <p:nvPr/>
+        </p:nvSpPr>
+        <p:spPr>
+          <a:xfrm>
+            <a:off x="685800" y="5376672"/>
+            <a:ext cx="3017520" cy="548640"/>
+          </a:xfrm>
+          <a:prstGeom prst="rect">
+            <a:avLst/>
+          </a:prstGeom>
+          <a:noFill/>
+        </p:spPr>
+        <p:txBody>
+          <a:bodyPr wrap="square">
+            <a:spAutoFit/>
+          </a:bodyPr>
+          <a:lstStyle/>
+          <a:p>
+            <a:pPr algn="l">
+              <a:defRPr sz="1200" b="1">
+                <a:solidFill>
+                  <a:srgbClr val="070A40"/>
+                </a:solidFill>
+                <a:latin typeface="Arial"/>
+              </a:defRPr>
+            </a:pPr>
+            <a:r>
+              <a:rPr sz="1200" b="1">
+                <a:solidFill>
+                  <a:srgbClr val="070A40"/>
+                </a:solidFill>
+                <a:latin typeface="Arial"/>
+              </a:rPr>
+              <a:t>Concentration in one market</a:t>
+            </a:r>
+          </a:p>
+        </p:txBody>
+      </p:sp>
+      <p:sp>
+        <p:nvSpPr>
+          <p:cNvPr id="21" name="TextBox 20"/>
+          <p:cNvSpPr txBox="1"/>
+          <p:nvPr/>
+        </p:nvSpPr>
+        <p:spPr>
+          <a:xfrm>
+            <a:off x="3794760" y="5376672"/>
+            <a:ext cx="4663440" cy="548640"/>
+          </a:xfrm>
+          <a:prstGeom prst="rect">
+            <a:avLst/>
+          </a:prstGeom>
+          <a:noFill/>
+        </p:spPr>
+        <p:txBody>
+          <a:bodyPr wrap="square">
+            <a:spAutoFit/>
+          </a:bodyPr>
+          <a:lstStyle/>
+          <a:p>
+            <a:pPr algn="l">
+              <a:defRPr sz="1200" b="0">
+                <a:solidFill>
+                  <a:srgbClr val="070A40"/>
+                </a:solidFill>
+                <a:latin typeface="Arial"/>
+              </a:defRPr>
+            </a:pPr>
+            <a:r>
+              <a:rPr sz="1200" b="0">
+                <a:solidFill>
+                  <a:srgbClr val="070A40"/>
+                </a:solidFill>
+                <a:latin typeface="Arial"/>
+              </a:rPr>
+              <a:t>SADC-first, with offers designed for remote delivery</a:t>
+            </a:r>
+          </a:p>
+        </p:txBody>
+      </p:sp>
+      <p:sp>
+        <p:nvSpPr>
+          <p:cNvPr id="22" name="TextBox 21"/>
+          <p:cNvSpPr txBox="1"/>
+          <p:nvPr/>
+        </p:nvSpPr>
+        <p:spPr>
+          <a:xfrm>
+            <a:off x="457200" y="6510528"/>
+            <a:ext cx="8229600" cy="274320"/>
+          </a:xfrm>
+          <a:prstGeom prst="rect">
+            <a:avLst/>
+          </a:prstGeom>
+          <a:noFill/>
+        </p:spPr>
+        <p:txBody>
+          <a:bodyPr wrap="square">
+            <a:spAutoFit/>
+          </a:bodyPr>
+          <a:lstStyle/>
+          <a:p>
+            <a:pPr algn="r">
+              <a:defRPr sz="1200" b="1">
+                <a:solidFill>
+                  <a:srgbClr val="070A40"/>
+                </a:solidFill>
+                <a:latin typeface="Arial"/>
+              </a:defRPr>
+            </a:pPr>
+            <a:r>
+              <a:rPr sz="1200" b="1">
+                <a:solidFill>
+                  <a:srgbClr val="070A40"/>
+                </a:solidFill>
+                <a:latin typeface="Arial"/>
+              </a:rPr>
+              <a:t>INTERNAL DRAFT — NOT FOR EXTERNAL DISTRIBUTION</a:t>
             </a:r>
           </a:p>
         </p:txBody>
@@ -5004,7 +5070,7 @@
         <p:spPr>
           <a:xfrm>
             <a:off x="457200" y="365760"/>
-            <a:ext cx="8229600" cy="548640"/>
+            <a:ext cx="8229600" cy="640080"/>
           </a:xfrm>
           <a:prstGeom prst="rect">
             <a:avLst/>
@@ -5032,7 +5098,7 @@
                 </a:solidFill>
                 <a:latin typeface="Arial"/>
               </a:rPr>
-              <a:t>AGENDA</a:t>
+              <a:t>THE PROBLEM</a:t>
             </a:r>
           </a:p>
         </p:txBody>
@@ -5045,8 +5111,8 @@
         </p:nvSpPr>
         <p:spPr>
           <a:xfrm>
-            <a:off x="731520" y="1097280"/>
-            <a:ext cx="7315200" cy="5029200"/>
+            <a:off x="731520" y="1234440"/>
+            <a:ext cx="7772400" cy="3291840"/>
           </a:xfrm>
           <a:prstGeom prst="rect">
             <a:avLst/>
@@ -5059,223 +5125,240 @@
           </a:bodyPr>
           <a:lstStyle/>
           <a:p>
-            <a:pPr>
+            <a:pPr marL="219456" indent="-219456">
               <a:spcAft>
                 <a:spcPts val="600"/>
               </a:spcAft>
-              <a:defRPr sz="1600">
-                <a:solidFill>
-                  <a:srgbClr val="070A40"/>
-                </a:solidFill>
-                <a:latin typeface="Arial"/>
-              </a:defRPr>
-            </a:pPr>
-            <a:r>
-              <a:rPr sz="1600">
-                <a:solidFill>
-                  <a:srgbClr val="070A40"/>
-                </a:solidFill>
-                <a:latin typeface="Arial"/>
-              </a:rPr>
-              <a:t>1.  The Problem</a:t>
-            </a:r>
-          </a:p>
-          <a:p>
-            <a:pPr>
+              <a:defRPr sz="1400">
+                <a:solidFill>
+                  <a:srgbClr val="070A40"/>
+                </a:solidFill>
+                <a:latin typeface="Arial"/>
+              </a:defRPr>
+            </a:pPr>
+            <a:r>
+              <a:rPr sz="1400">
+                <a:solidFill>
+                  <a:srgbClr val="070A40"/>
+                </a:solidFill>
+                <a:latin typeface="Arial"/>
+              </a:rPr>
+              <a:t>•  Deploying AI agents at scale means custom integration, monitoring and governance for every one</a:t>
+            </a:r>
+          </a:p>
+          <a:p>
+            <a:pPr marL="219456" indent="-219456">
               <a:spcAft>
                 <a:spcPts val="600"/>
               </a:spcAft>
-              <a:defRPr sz="1600">
-                <a:solidFill>
-                  <a:srgbClr val="070A40"/>
-                </a:solidFill>
-                <a:latin typeface="Arial"/>
-              </a:defRPr>
-            </a:pPr>
-            <a:r>
-              <a:rPr sz="1600">
-                <a:solidFill>
-                  <a:srgbClr val="070A40"/>
-                </a:solidFill>
-                <a:latin typeface="Arial"/>
-              </a:rPr>
-              <a:t>2.  Our Solution</a:t>
-            </a:r>
-          </a:p>
-          <a:p>
-            <a:pPr>
+              <a:defRPr sz="1400">
+                <a:solidFill>
+                  <a:srgbClr val="070A40"/>
+                </a:solidFill>
+                <a:latin typeface="Arial"/>
+              </a:defRPr>
+            </a:pPr>
+            <a:r>
+              <a:rPr sz="1400">
+                <a:solidFill>
+                  <a:srgbClr val="070A40"/>
+                </a:solidFill>
+                <a:latin typeface="Arial"/>
+              </a:rPr>
+              <a:t>•  Existing tools are either too simple (chatbots) or too complex (enterprise ML platforms)</a:t>
+            </a:r>
+          </a:p>
+          <a:p>
+            <a:pPr marL="219456" indent="-219456">
               <a:spcAft>
                 <a:spcPts val="600"/>
               </a:spcAft>
-              <a:defRPr sz="1600">
-                <a:solidFill>
-                  <a:srgbClr val="070A40"/>
-                </a:solidFill>
-                <a:latin typeface="Arial"/>
-              </a:defRPr>
-            </a:pPr>
-            <a:r>
-              <a:rPr sz="1600">
-                <a:solidFill>
-                  <a:srgbClr val="070A40"/>
-                </a:solidFill>
-                <a:latin typeface="Arial"/>
-              </a:rPr>
-              <a:t>3.  Market Opportunity</a:t>
-            </a:r>
-          </a:p>
-          <a:p>
-            <a:pPr>
+              <a:defRPr sz="1400">
+                <a:solidFill>
+                  <a:srgbClr val="070A40"/>
+                </a:solidFill>
+                <a:latin typeface="Arial"/>
+              </a:defRPr>
+            </a:pPr>
+            <a:r>
+              <a:rPr sz="1400">
+                <a:solidFill>
+                  <a:srgbClr val="070A40"/>
+                </a:solidFill>
+                <a:latin typeface="Arial"/>
+              </a:rPr>
+              <a:t>•  No turnkey way exists to stand up an entire AI-powered organization</a:t>
+            </a:r>
+          </a:p>
+          <a:p>
+            <a:pPr marL="219456" indent="-219456">
               <a:spcAft>
                 <a:spcPts val="600"/>
               </a:spcAft>
-              <a:defRPr sz="1600">
-                <a:solidFill>
-                  <a:srgbClr val="070A40"/>
-                </a:solidFill>
-                <a:latin typeface="Arial"/>
-              </a:defRPr>
-            </a:pPr>
-            <a:r>
-              <a:rPr sz="1600">
-                <a:solidFill>
-                  <a:srgbClr val="070A40"/>
-                </a:solidFill>
-                <a:latin typeface="Arial"/>
-              </a:rPr>
-              <a:t>4.  Product &amp; Technology</a:t>
-            </a:r>
-          </a:p>
-          <a:p>
-            <a:pPr>
+              <a:defRPr sz="1400">
+                <a:solidFill>
+                  <a:srgbClr val="070A40"/>
+                </a:solidFill>
+                <a:latin typeface="Arial"/>
+              </a:defRPr>
+            </a:pPr>
+            <a:r>
+              <a:rPr sz="1400">
+                <a:solidFill>
+                  <a:srgbClr val="070A40"/>
+                </a:solidFill>
+                <a:latin typeface="Arial"/>
+              </a:rPr>
+              <a:t>•  Cost tracking, human oversight and multi-provider management are afterthoughts</a:t>
+            </a:r>
+          </a:p>
+          <a:p>
+            <a:pPr marL="219456" indent="-219456">
               <a:spcAft>
                 <a:spcPts val="600"/>
               </a:spcAft>
-              <a:defRPr sz="1600">
-                <a:solidFill>
-                  <a:srgbClr val="070A40"/>
-                </a:solidFill>
-                <a:latin typeface="Arial"/>
-              </a:defRPr>
-            </a:pPr>
-            <a:r>
-              <a:rPr sz="1600">
-                <a:solidFill>
-                  <a:srgbClr val="070A40"/>
-                </a:solidFill>
-                <a:latin typeface="Arial"/>
-              </a:rPr>
-              <a:t>5.  Business Model</a:t>
-            </a:r>
-          </a:p>
-          <a:p>
-            <a:pPr>
-              <a:spcAft>
-                <a:spcPts val="600"/>
-              </a:spcAft>
-              <a:defRPr sz="1600">
-                <a:solidFill>
-                  <a:srgbClr val="070A40"/>
-                </a:solidFill>
-                <a:latin typeface="Arial"/>
-              </a:defRPr>
-            </a:pPr>
-            <a:r>
-              <a:rPr sz="1600">
-                <a:solidFill>
-                  <a:srgbClr val="070A40"/>
-                </a:solidFill>
-                <a:latin typeface="Arial"/>
-              </a:rPr>
-              <a:t>6.  Traction &amp; Metrics</a:t>
-            </a:r>
-          </a:p>
-          <a:p>
-            <a:pPr>
-              <a:spcAft>
-                <a:spcPts val="600"/>
-              </a:spcAft>
-              <a:defRPr sz="1600">
-                <a:solidFill>
-                  <a:srgbClr val="070A40"/>
-                </a:solidFill>
-                <a:latin typeface="Arial"/>
-              </a:defRPr>
-            </a:pPr>
-            <a:r>
-              <a:rPr sz="1600">
-                <a:solidFill>
-                  <a:srgbClr val="070A40"/>
-                </a:solidFill>
-                <a:latin typeface="Arial"/>
-              </a:rPr>
-              <a:t>7.  Competitive Landscape</a:t>
-            </a:r>
-          </a:p>
-          <a:p>
-            <a:pPr>
-              <a:spcAft>
-                <a:spcPts val="600"/>
-              </a:spcAft>
-              <a:defRPr sz="1600">
-                <a:solidFill>
-                  <a:srgbClr val="070A40"/>
-                </a:solidFill>
-                <a:latin typeface="Arial"/>
-              </a:defRPr>
-            </a:pPr>
-            <a:r>
-              <a:rPr sz="1600">
-                <a:solidFill>
-                  <a:srgbClr val="070A40"/>
-                </a:solidFill>
-                <a:latin typeface="Arial"/>
-              </a:rPr>
-              <a:t>8.  Team</a:t>
-            </a:r>
-          </a:p>
-          <a:p>
-            <a:pPr>
-              <a:spcAft>
-                <a:spcPts val="600"/>
-              </a:spcAft>
-              <a:defRPr sz="1600">
-                <a:solidFill>
-                  <a:srgbClr val="070A40"/>
-                </a:solidFill>
-                <a:latin typeface="Arial"/>
-              </a:defRPr>
-            </a:pPr>
-            <a:r>
-              <a:rPr sz="1600">
-                <a:solidFill>
-                  <a:srgbClr val="070A40"/>
-                </a:solidFill>
-                <a:latin typeface="Arial"/>
-              </a:rPr>
-              <a:t>9.  Financials</a:t>
-            </a:r>
-          </a:p>
-          <a:p>
-            <a:pPr>
-              <a:spcAft>
-                <a:spcPts val="600"/>
-              </a:spcAft>
-              <a:defRPr sz="1600">
-                <a:solidFill>
-                  <a:srgbClr val="070A40"/>
-                </a:solidFill>
-                <a:latin typeface="Arial"/>
-              </a:defRPr>
-            </a:pPr>
-            <a:r>
-              <a:rPr sz="1600">
-                <a:solidFill>
-                  <a:srgbClr val="070A40"/>
-                </a:solidFill>
-                <a:latin typeface="Arial"/>
-              </a:rPr>
-              <a:t>10. The Ask</a:t>
+              <a:defRPr sz="1400">
+                <a:solidFill>
+                  <a:srgbClr val="070A40"/>
+                </a:solidFill>
+                <a:latin typeface="Arial"/>
+              </a:defRPr>
+            </a:pPr>
+            <a:r>
+              <a:rPr sz="1400">
+                <a:solidFill>
+                  <a:srgbClr val="070A40"/>
+                </a:solidFill>
+                <a:latin typeface="Arial"/>
+              </a:rPr>
+              <a:t>•  Governance arrives late, if at all: approvals, audit trails and escalation rules live outside the tooling</a:t>
+            </a:r>
+          </a:p>
+        </p:txBody>
+      </p:sp>
+      <p:sp>
+        <p:nvSpPr>
+          <p:cNvPr id="5" name="Rounded Rectangle 4"/>
+          <p:cNvSpPr/>
+          <p:nvPr/>
+        </p:nvSpPr>
+        <p:spPr>
+          <a:xfrm>
+            <a:off x="914400" y="4709160"/>
+            <a:ext cx="7315200" cy="1051560"/>
+          </a:xfrm>
+          <a:prstGeom prst="roundRect">
+            <a:avLst/>
+          </a:prstGeom>
+          <a:solidFill>
+            <a:srgbClr val="F2F2F2"/>
+          </a:solidFill>
+          <a:ln>
+            <a:noFill/>
+          </a:ln>
+        </p:spPr>
+        <p:style>
+          <a:lnRef idx="1">
+            <a:schemeClr val="accent1"/>
+          </a:lnRef>
+          <a:fillRef idx="3">
+            <a:schemeClr val="accent1"/>
+          </a:fillRef>
+          <a:effectRef idx="2">
+            <a:schemeClr val="accent1"/>
+          </a:effectRef>
+          <a:fontRef idx="minor">
+            <a:schemeClr val="lt1"/>
+          </a:fontRef>
+        </p:style>
+        <p:txBody>
+          <a:bodyPr rtlCol="0" anchor="ctr"/>
+          <a:lstStyle/>
+          <a:p>
+            <a:pPr algn="ctr"/>
+          </a:p>
+        </p:txBody>
+      </p:sp>
+      <p:sp>
+        <p:nvSpPr>
+          <p:cNvPr id="6" name="TextBox 5"/>
+          <p:cNvSpPr txBox="1"/>
+          <p:nvPr/>
+        </p:nvSpPr>
+        <p:spPr>
+          <a:xfrm>
+            <a:off x="1188720" y="4892040"/>
+            <a:ext cx="6766560" cy="731520"/>
+          </a:xfrm>
+          <a:prstGeom prst="rect">
+            <a:avLst/>
+          </a:prstGeom>
+          <a:noFill/>
+        </p:spPr>
+        <p:txBody>
+          <a:bodyPr wrap="square">
+            <a:spAutoFit/>
+          </a:bodyPr>
+          <a:lstStyle/>
+          <a:p>
+            <a:pPr algn="ctr">
+              <a:defRPr sz="1400" b="1">
+                <a:solidFill>
+                  <a:srgbClr val="070A40"/>
+                </a:solidFill>
+                <a:latin typeface="Arial"/>
+              </a:defRPr>
+            </a:pPr>
+            <a:r>
+              <a:rPr sz="1400" b="1">
+                <a:solidFill>
+                  <a:srgbClr val="070A40"/>
+                </a:solidFill>
+                <a:latin typeface="Arial"/>
+              </a:rPr>
+              <a:t>"Building an AI-native company shouldn't require a team of ML engineers."</a:t>
+            </a:r>
+          </a:p>
+        </p:txBody>
+      </p:sp>
+      <p:sp>
+        <p:nvSpPr>
+          <p:cNvPr id="7" name="TextBox 6"/>
+          <p:cNvSpPr txBox="1"/>
+          <p:nvPr/>
+        </p:nvSpPr>
+        <p:spPr>
+          <a:xfrm>
+            <a:off x="457200" y="6510528"/>
+            <a:ext cx="8229600" cy="274320"/>
+          </a:xfrm>
+          <a:prstGeom prst="rect">
+            <a:avLst/>
+          </a:prstGeom>
+          <a:noFill/>
+        </p:spPr>
+        <p:txBody>
+          <a:bodyPr wrap="square">
+            <a:spAutoFit/>
+          </a:bodyPr>
+          <a:lstStyle/>
+          <a:p>
+            <a:pPr algn="r">
+              <a:defRPr sz="1200" b="1">
+                <a:solidFill>
+                  <a:srgbClr val="070A40"/>
+                </a:solidFill>
+                <a:latin typeface="Arial"/>
+              </a:defRPr>
+            </a:pPr>
+            <a:r>
+              <a:rPr sz="1200" b="1">
+                <a:solidFill>
+                  <a:srgbClr val="070A40"/>
+                </a:solidFill>
+                <a:latin typeface="Arial"/>
+              </a:rPr>
+              <a:t>INTERNAL DRAFT — NOT FOR EXTERNAL DISTRIBUTION</a:t>
             </a:r>
           </a:p>
         </p:txBody>
@@ -5358,7 +5441,7 @@
         <p:spPr>
           <a:xfrm>
             <a:off x="457200" y="365760"/>
-            <a:ext cx="8229600" cy="548640"/>
+            <a:ext cx="8229600" cy="640080"/>
           </a:xfrm>
           <a:prstGeom prst="rect">
             <a:avLst/>
@@ -5386,7 +5469,7 @@
                 </a:solidFill>
                 <a:latin typeface="Arial"/>
               </a:rPr>
-              <a:t>THE PROBLEM</a:t>
+              <a:t>OUR SOLUTION</a:t>
             </a:r>
           </a:p>
         </p:txBody>
@@ -5399,8 +5482,50 @@
         </p:nvSpPr>
         <p:spPr>
           <a:xfrm>
-            <a:off x="731520" y="1188720"/>
-            <a:ext cx="7772400" cy="3657600"/>
+            <a:off x="731520" y="1097280"/>
+            <a:ext cx="7772400" cy="685800"/>
+          </a:xfrm>
+          <a:prstGeom prst="rect">
+            <a:avLst/>
+          </a:prstGeom>
+          <a:noFill/>
+        </p:spPr>
+        <p:txBody>
+          <a:bodyPr wrap="square">
+            <a:spAutoFit/>
+          </a:bodyPr>
+          <a:lstStyle/>
+          <a:p>
+            <a:pPr algn="l">
+              <a:defRPr sz="1600" b="0">
+                <a:solidFill>
+                  <a:srgbClr val="070A40"/>
+                </a:solidFill>
+                <a:latin typeface="Arial"/>
+              </a:defRPr>
+            </a:pPr>
+            <a:r>
+              <a:rPr sz="1600" b="0">
+                <a:solidFill>
+                  <a:srgbClr val="070A40"/>
+                </a:solidFill>
+                <a:latin typeface="Arial"/>
+              </a:rPr>
+              <a:t>AI Company Builder — a CLI platform that generates, orchestrates and manages complete AI agent organizations.</a:t>
+            </a:r>
+          </a:p>
+        </p:txBody>
+      </p:sp>
+      <p:sp>
+        <p:nvSpPr>
+          <p:cNvPr id="5" name="TextBox 4"/>
+          <p:cNvSpPr txBox="1"/>
+          <p:nvPr/>
+        </p:nvSpPr>
+        <p:spPr>
+          <a:xfrm>
+            <a:off x="731520" y="2011680"/>
+            <a:ext cx="7772400" cy="1828800"/>
           </a:xfrm>
           <a:prstGeom prst="rect">
             <a:avLst/>
@@ -5417,21 +5542,21 @@
               <a:spcAft>
                 <a:spcPts val="600"/>
               </a:spcAft>
-              <a:defRPr sz="1400">
-                <a:solidFill>
-                  <a:srgbClr val="070A40"/>
-                </a:solidFill>
-                <a:latin typeface="Arial"/>
-              </a:defRPr>
-            </a:pPr>
-            <a:r>
-              <a:rPr sz="1400">
-                <a:solidFill>
-                  <a:srgbClr val="070A40"/>
-                </a:solidFill>
-                <a:latin typeface="Arial"/>
-              </a:rPr>
-              <a:t>•  Organizations struggle to deploy AI agents at scale — each requires custom integration, monitoring, and governance</a:t>
+              <a:defRPr sz="1300">
+                <a:solidFill>
+                  <a:srgbClr val="070A40"/>
+                </a:solidFill>
+                <a:latin typeface="Arial"/>
+              </a:defRPr>
+            </a:pPr>
+            <a:r>
+              <a:rPr sz="1300">
+                <a:solidFill>
+                  <a:srgbClr val="070A40"/>
+                </a:solidFill>
+                <a:latin typeface="Arial"/>
+              </a:rPr>
+              <a:t>✓  Registry-driven: define agents in YAML, generate OpenCode-compatible markdown</a:t>
             </a:r>
           </a:p>
           <a:p>
@@ -5439,21 +5564,21 @@
               <a:spcAft>
                 <a:spcPts val="600"/>
               </a:spcAft>
-              <a:defRPr sz="1400">
-                <a:solidFill>
-                  <a:srgbClr val="070A40"/>
-                </a:solidFill>
-                <a:latin typeface="Arial"/>
-              </a:defRPr>
-            </a:pPr>
-            <a:r>
-              <a:rPr sz="1400">
-                <a:solidFill>
-                  <a:srgbClr val="070A40"/>
-                </a:solidFill>
-                <a:latin typeface="Arial"/>
-              </a:rPr>
-              <a:t>•  Existing tools are either too simple (chatbots) or too complex (enterprise ML platforms)</a:t>
+              <a:defRPr sz="1300">
+                <a:solidFill>
+                  <a:srgbClr val="070A40"/>
+                </a:solidFill>
+                <a:latin typeface="Arial"/>
+              </a:defRPr>
+            </a:pPr>
+            <a:r>
+              <a:rPr sz="1300">
+                <a:solidFill>
+                  <a:srgbClr val="070A40"/>
+                </a:solidFill>
+                <a:latin typeface="Arial"/>
+              </a:rPr>
+              <a:t>✓  Multi-provider LLM routing — OpenAI, Anthropic, DeepSeek, Gemini — with fallback</a:t>
             </a:r>
           </a:p>
           <a:p>
@@ -5461,21 +5586,21 @@
               <a:spcAft>
                 <a:spcPts val="600"/>
               </a:spcAft>
-              <a:defRPr sz="1400">
-                <a:solidFill>
-                  <a:srgbClr val="070A40"/>
-                </a:solidFill>
-                <a:latin typeface="Arial"/>
-              </a:defRPr>
-            </a:pPr>
-            <a:r>
-              <a:rPr sz="1400">
-                <a:solidFill>
-                  <a:srgbClr val="070A40"/>
-                </a:solidFill>
-                <a:latin typeface="Arial"/>
-              </a:rPr>
-              <a:t>•  No turnkey solution exists for building an entire AI-powered organization</a:t>
+              <a:defRPr sz="1300">
+                <a:solidFill>
+                  <a:srgbClr val="070A40"/>
+                </a:solidFill>
+                <a:latin typeface="Arial"/>
+              </a:defRPr>
+            </a:pPr>
+            <a:r>
+              <a:rPr sz="1300">
+                <a:solidFill>
+                  <a:srgbClr val="070A40"/>
+                </a:solidFill>
+                <a:latin typeface="Arial"/>
+              </a:rPr>
+              <a:t>✓  Per-agent cost tracking and budget enforcement</a:t>
             </a:r>
           </a:p>
           <a:p>
@@ -5483,35 +5608,79 @@
               <a:spcAft>
                 <a:spcPts val="600"/>
               </a:spcAft>
-              <a:defRPr sz="1400">
-                <a:solidFill>
-                  <a:srgbClr val="070A40"/>
-                </a:solidFill>
-                <a:latin typeface="Arial"/>
-              </a:defRPr>
-            </a:pPr>
-            <a:r>
-              <a:rPr sz="1400">
-                <a:solidFill>
-                  <a:srgbClr val="070A40"/>
-                </a:solidFill>
-                <a:latin typeface="Arial"/>
-              </a:rPr>
-              <a:t>•  Cost tracking, human oversight, and multi-provider management are afterthoughts</a:t>
-            </a:r>
-          </a:p>
-        </p:txBody>
-      </p:sp>
-      <p:sp>
-        <p:nvSpPr>
-          <p:cNvPr id="5" name="Rounded Rectangle 4"/>
+              <a:defRPr sz="1300">
+                <a:solidFill>
+                  <a:srgbClr val="070A40"/>
+                </a:solidFill>
+                <a:latin typeface="Arial"/>
+              </a:defRPr>
+            </a:pPr>
+            <a:r>
+              <a:rPr sz="1300">
+                <a:solidFill>
+                  <a:srgbClr val="070A40"/>
+                </a:solidFill>
+                <a:latin typeface="Arial"/>
+              </a:rPr>
+              <a:t>✓  Human-in-the-loop approval gates for irreversible actions</a:t>
+            </a:r>
+          </a:p>
+          <a:p>
+            <a:pPr>
+              <a:spcAft>
+                <a:spcPts val="600"/>
+              </a:spcAft>
+              <a:defRPr sz="1300">
+                <a:solidFill>
+                  <a:srgbClr val="070A40"/>
+                </a:solidFill>
+                <a:latin typeface="Arial"/>
+              </a:defRPr>
+            </a:pPr>
+            <a:r>
+              <a:rPr sz="1300">
+                <a:solidFill>
+                  <a:srgbClr val="070A40"/>
+                </a:solidFill>
+                <a:latin typeface="Arial"/>
+              </a:rPr>
+              <a:t>✓  MessageBus task queue for cross-agent coordination</a:t>
+            </a:r>
+          </a:p>
+          <a:p>
+            <a:pPr>
+              <a:spcAft>
+                <a:spcPts val="600"/>
+              </a:spcAft>
+              <a:defRPr sz="1300">
+                <a:solidFill>
+                  <a:srgbClr val="070A40"/>
+                </a:solidFill>
+                <a:latin typeface="Arial"/>
+              </a:defRPr>
+            </a:pPr>
+            <a:r>
+              <a:rPr sz="1300">
+                <a:solidFill>
+                  <a:srgbClr val="070A40"/>
+                </a:solidFill>
+                <a:latin typeface="Arial"/>
+              </a:rPr>
+              <a:t>✓  Pre-built agent roles across every department</a:t>
+            </a:r>
+          </a:p>
+        </p:txBody>
+      </p:sp>
+      <p:sp>
+        <p:nvSpPr>
+          <p:cNvPr id="6" name="Rounded Rectangle 5"/>
           <p:cNvSpPr/>
           <p:nvPr/>
         </p:nvSpPr>
         <p:spPr>
           <a:xfrm>
-            <a:off x="914400" y="4754880"/>
-            <a:ext cx="7315200" cy="1097280"/>
+            <a:off x="731520" y="4069080"/>
+            <a:ext cx="2514600" cy="1691640"/>
           </a:xfrm>
           <a:prstGeom prst="roundRect">
             <a:avLst/>
@@ -5547,14 +5716,14 @@
       </p:sp>
       <p:sp>
         <p:nvSpPr>
-          <p:cNvPr id="6" name="TextBox 5"/>
+          <p:cNvPr id="7" name="TextBox 6"/>
           <p:cNvSpPr txBox="1"/>
           <p:nvPr/>
         </p:nvSpPr>
         <p:spPr>
           <a:xfrm>
-            <a:off x="1188720" y="4937760"/>
-            <a:ext cx="6766560" cy="822960"/>
+            <a:off x="914400" y="4206240"/>
+            <a:ext cx="2148840" cy="320040"/>
           </a:xfrm>
           <a:prstGeom prst="rect">
             <a:avLst/>
@@ -5567,7 +5736,7 @@
           </a:bodyPr>
           <a:lstStyle/>
           <a:p>
-            <a:pPr algn="ctr">
+            <a:pPr algn="l">
               <a:defRPr sz="1400" b="1">
                 <a:solidFill>
                   <a:srgbClr val="070A40"/>
@@ -5582,7 +5751,345 @@
                 </a:solidFill>
                 <a:latin typeface="Arial"/>
               </a:rPr>
-              <a:t>"Building an AI-native company shouldn't require a team of ML engineers."</a:t>
+              <a:t>1.  Define</a:t>
+            </a:r>
+          </a:p>
+        </p:txBody>
+      </p:sp>
+      <p:sp>
+        <p:nvSpPr>
+          <p:cNvPr id="8" name="TextBox 7"/>
+          <p:cNvSpPr txBox="1"/>
+          <p:nvPr/>
+        </p:nvSpPr>
+        <p:spPr>
+          <a:xfrm>
+            <a:off x="914400" y="4526280"/>
+            <a:ext cx="2148840" cy="1143000"/>
+          </a:xfrm>
+          <a:prstGeom prst="rect">
+            <a:avLst/>
+          </a:prstGeom>
+          <a:noFill/>
+        </p:spPr>
+        <p:txBody>
+          <a:bodyPr wrap="square">
+            <a:spAutoFit/>
+          </a:bodyPr>
+          <a:lstStyle/>
+          <a:p>
+            <a:pPr algn="l">
+              <a:defRPr sz="1200" b="0">
+                <a:solidFill>
+                  <a:srgbClr val="070A40"/>
+                </a:solidFill>
+                <a:latin typeface="Arial"/>
+              </a:defRPr>
+            </a:pPr>
+            <a:r>
+              <a:rPr sz="1200" b="0">
+                <a:solidFill>
+                  <a:srgbClr val="070A40"/>
+                </a:solidFill>
+                <a:latin typeface="Arial"/>
+              </a:rPr>
+              <a:t>One YAML registry lists every role, tool and permission the organization is allowed to use.</a:t>
+            </a:r>
+          </a:p>
+        </p:txBody>
+      </p:sp>
+      <p:sp>
+        <p:nvSpPr>
+          <p:cNvPr id="9" name="Rounded Rectangle 8"/>
+          <p:cNvSpPr/>
+          <p:nvPr/>
+        </p:nvSpPr>
+        <p:spPr>
+          <a:xfrm>
+            <a:off x="3429000" y="4069080"/>
+            <a:ext cx="2514600" cy="1691640"/>
+          </a:xfrm>
+          <a:prstGeom prst="roundRect">
+            <a:avLst/>
+          </a:prstGeom>
+          <a:solidFill>
+            <a:srgbClr val="F2F2F2"/>
+          </a:solidFill>
+          <a:ln>
+            <a:noFill/>
+          </a:ln>
+        </p:spPr>
+        <p:style>
+          <a:lnRef idx="1">
+            <a:schemeClr val="accent1"/>
+          </a:lnRef>
+          <a:fillRef idx="3">
+            <a:schemeClr val="accent1"/>
+          </a:fillRef>
+          <a:effectRef idx="2">
+            <a:schemeClr val="accent1"/>
+          </a:effectRef>
+          <a:fontRef idx="minor">
+            <a:schemeClr val="lt1"/>
+          </a:fontRef>
+        </p:style>
+        <p:txBody>
+          <a:bodyPr rtlCol="0" anchor="ctr"/>
+          <a:lstStyle/>
+          <a:p>
+            <a:pPr algn="ctr"/>
+          </a:p>
+        </p:txBody>
+      </p:sp>
+      <p:sp>
+        <p:nvSpPr>
+          <p:cNvPr id="10" name="TextBox 9"/>
+          <p:cNvSpPr txBox="1"/>
+          <p:nvPr/>
+        </p:nvSpPr>
+        <p:spPr>
+          <a:xfrm>
+            <a:off x="3611880" y="4206240"/>
+            <a:ext cx="2148840" cy="320040"/>
+          </a:xfrm>
+          <a:prstGeom prst="rect">
+            <a:avLst/>
+          </a:prstGeom>
+          <a:noFill/>
+        </p:spPr>
+        <p:txBody>
+          <a:bodyPr wrap="square">
+            <a:spAutoFit/>
+          </a:bodyPr>
+          <a:lstStyle/>
+          <a:p>
+            <a:pPr algn="l">
+              <a:defRPr sz="1400" b="1">
+                <a:solidFill>
+                  <a:srgbClr val="070A40"/>
+                </a:solidFill>
+                <a:latin typeface="Arial"/>
+              </a:defRPr>
+            </a:pPr>
+            <a:r>
+              <a:rPr sz="1400" b="1">
+                <a:solidFill>
+                  <a:srgbClr val="070A40"/>
+                </a:solidFill>
+                <a:latin typeface="Arial"/>
+              </a:rPr>
+              <a:t>2.  Generate</a:t>
+            </a:r>
+          </a:p>
+        </p:txBody>
+      </p:sp>
+      <p:sp>
+        <p:nvSpPr>
+          <p:cNvPr id="11" name="TextBox 10"/>
+          <p:cNvSpPr txBox="1"/>
+          <p:nvPr/>
+        </p:nvSpPr>
+        <p:spPr>
+          <a:xfrm>
+            <a:off x="3611880" y="4526280"/>
+            <a:ext cx="2148840" cy="1143000"/>
+          </a:xfrm>
+          <a:prstGeom prst="rect">
+            <a:avLst/>
+          </a:prstGeom>
+          <a:noFill/>
+        </p:spPr>
+        <p:txBody>
+          <a:bodyPr wrap="square">
+            <a:spAutoFit/>
+          </a:bodyPr>
+          <a:lstStyle/>
+          <a:p>
+            <a:pPr algn="l">
+              <a:defRPr sz="1200" b="0">
+                <a:solidFill>
+                  <a:srgbClr val="070A40"/>
+                </a:solidFill>
+                <a:latin typeface="Arial"/>
+              </a:defRPr>
+            </a:pPr>
+            <a:r>
+              <a:rPr sz="1200" b="0">
+                <a:solidFill>
+                  <a:srgbClr val="070A40"/>
+                </a:solidFill>
+                <a:latin typeface="Arial"/>
+              </a:rPr>
+              <a:t>The CLI renders agent cards, permissions and prompts, so the organization is version-controlled like code.</a:t>
+            </a:r>
+          </a:p>
+        </p:txBody>
+      </p:sp>
+      <p:sp>
+        <p:nvSpPr>
+          <p:cNvPr id="12" name="Rounded Rectangle 11"/>
+          <p:cNvSpPr/>
+          <p:nvPr/>
+        </p:nvSpPr>
+        <p:spPr>
+          <a:xfrm>
+            <a:off x="6126480" y="4069080"/>
+            <a:ext cx="2514600" cy="1691640"/>
+          </a:xfrm>
+          <a:prstGeom prst="roundRect">
+            <a:avLst/>
+          </a:prstGeom>
+          <a:solidFill>
+            <a:srgbClr val="F2F2F2"/>
+          </a:solidFill>
+          <a:ln>
+            <a:noFill/>
+          </a:ln>
+        </p:spPr>
+        <p:style>
+          <a:lnRef idx="1">
+            <a:schemeClr val="accent1"/>
+          </a:lnRef>
+          <a:fillRef idx="3">
+            <a:schemeClr val="accent1"/>
+          </a:fillRef>
+          <a:effectRef idx="2">
+            <a:schemeClr val="accent1"/>
+          </a:effectRef>
+          <a:fontRef idx="minor">
+            <a:schemeClr val="lt1"/>
+          </a:fontRef>
+        </p:style>
+        <p:txBody>
+          <a:bodyPr rtlCol="0" anchor="ctr"/>
+          <a:lstStyle/>
+          <a:p>
+            <a:pPr algn="ctr"/>
+          </a:p>
+        </p:txBody>
+      </p:sp>
+      <p:sp>
+        <p:nvSpPr>
+          <p:cNvPr id="13" name="TextBox 12"/>
+          <p:cNvSpPr txBox="1"/>
+          <p:nvPr/>
+        </p:nvSpPr>
+        <p:spPr>
+          <a:xfrm>
+            <a:off x="6309360" y="4206240"/>
+            <a:ext cx="2148840" cy="320040"/>
+          </a:xfrm>
+          <a:prstGeom prst="rect">
+            <a:avLst/>
+          </a:prstGeom>
+          <a:noFill/>
+        </p:spPr>
+        <p:txBody>
+          <a:bodyPr wrap="square">
+            <a:spAutoFit/>
+          </a:bodyPr>
+          <a:lstStyle/>
+          <a:p>
+            <a:pPr algn="l">
+              <a:defRPr sz="1400" b="1">
+                <a:solidFill>
+                  <a:srgbClr val="070A40"/>
+                </a:solidFill>
+                <a:latin typeface="Arial"/>
+              </a:defRPr>
+            </a:pPr>
+            <a:r>
+              <a:rPr sz="1400" b="1">
+                <a:solidFill>
+                  <a:srgbClr val="070A40"/>
+                </a:solidFill>
+                <a:latin typeface="Arial"/>
+              </a:rPr>
+              <a:t>3.  Run</a:t>
+            </a:r>
+          </a:p>
+        </p:txBody>
+      </p:sp>
+      <p:sp>
+        <p:nvSpPr>
+          <p:cNvPr id="14" name="TextBox 13"/>
+          <p:cNvSpPr txBox="1"/>
+          <p:nvPr/>
+        </p:nvSpPr>
+        <p:spPr>
+          <a:xfrm>
+            <a:off x="6309360" y="4526280"/>
+            <a:ext cx="2148840" cy="1143000"/>
+          </a:xfrm>
+          <a:prstGeom prst="rect">
+            <a:avLst/>
+          </a:prstGeom>
+          <a:noFill/>
+        </p:spPr>
+        <p:txBody>
+          <a:bodyPr wrap="square">
+            <a:spAutoFit/>
+          </a:bodyPr>
+          <a:lstStyle/>
+          <a:p>
+            <a:pPr algn="l">
+              <a:defRPr sz="1200" b="0">
+                <a:solidFill>
+                  <a:srgbClr val="070A40"/>
+                </a:solidFill>
+                <a:latin typeface="Arial"/>
+              </a:defRPr>
+            </a:pPr>
+            <a:r>
+              <a:rPr sz="1200" b="0">
+                <a:solidFill>
+                  <a:srgbClr val="070A40"/>
+                </a:solidFill>
+                <a:latin typeface="Arial"/>
+              </a:rPr>
+              <a:t>Work moves through a task queue under approval gates, with per-agent budgets and a full audit trail.</a:t>
+            </a:r>
+          </a:p>
+        </p:txBody>
+      </p:sp>
+      <p:sp>
+        <p:nvSpPr>
+          <p:cNvPr id="15" name="TextBox 14"/>
+          <p:cNvSpPr txBox="1"/>
+          <p:nvPr/>
+        </p:nvSpPr>
+        <p:spPr>
+          <a:xfrm>
+            <a:off x="457200" y="6510528"/>
+            <a:ext cx="8229600" cy="274320"/>
+          </a:xfrm>
+          <a:prstGeom prst="rect">
+            <a:avLst/>
+          </a:prstGeom>
+          <a:noFill/>
+        </p:spPr>
+        <p:txBody>
+          <a:bodyPr wrap="square">
+            <a:spAutoFit/>
+          </a:bodyPr>
+          <a:lstStyle/>
+          <a:p>
+            <a:pPr algn="r">
+              <a:defRPr sz="1200" b="1">
+                <a:solidFill>
+                  <a:srgbClr val="070A40"/>
+                </a:solidFill>
+                <a:latin typeface="Arial"/>
+              </a:defRPr>
+            </a:pPr>
+            <a:r>
+              <a:rPr sz="1200" b="1">
+                <a:solidFill>
+                  <a:srgbClr val="070A40"/>
+                </a:solidFill>
+                <a:latin typeface="Arial"/>
+              </a:rPr>
+              <a:t>INTERNAL DRAFT — NOT FOR EXTERNAL DISTRIBUTION</a:t>
             </a:r>
           </a:p>
         </p:txBody>
@@ -5665,7 +6172,7 @@
         <p:spPr>
           <a:xfrm>
             <a:off x="457200" y="365760"/>
-            <a:ext cx="8229600" cy="548640"/>
+            <a:ext cx="8229600" cy="640080"/>
           </a:xfrm>
           <a:prstGeom prst="rect">
             <a:avLst/>
@@ -5693,7 +6200,7 @@
                 </a:solidFill>
                 <a:latin typeface="Arial"/>
               </a:rPr>
-              <a:t>OUR SOLUTION</a:t>
+              <a:t>WHY NOW</a:t>
             </a:r>
           </a:p>
         </p:txBody>
@@ -5706,8 +6213,8 @@
         </p:nvSpPr>
         <p:spPr>
           <a:xfrm>
-            <a:off x="731520" y="1097280"/>
-            <a:ext cx="7772400" cy="731520"/>
+            <a:off x="731520" y="1051560"/>
+            <a:ext cx="7772400" cy="502920"/>
           </a:xfrm>
           <a:prstGeom prst="rect">
             <a:avLst/>
@@ -5721,35 +6228,78 @@
           <a:lstStyle/>
           <a:p>
             <a:pPr algn="l">
-              <a:defRPr sz="1600" b="0">
-                <a:solidFill>
-                  <a:srgbClr val="070A40"/>
-                </a:solidFill>
-                <a:latin typeface="Arial"/>
-              </a:defRPr>
-            </a:pPr>
-            <a:r>
-              <a:rPr sz="1600" b="0">
-                <a:solidFill>
-                  <a:srgbClr val="070A40"/>
-                </a:solidFill>
-                <a:latin typeface="Arial"/>
-              </a:rPr>
-              <a:t>AI Company Builder — a CLI platform that generates, orchestrates, and manages complete AI agent organizations.</a:t>
-            </a:r>
-          </a:p>
-        </p:txBody>
-      </p:sp>
-      <p:sp>
-        <p:nvSpPr>
-          <p:cNvPr id="5" name="TextBox 4"/>
+              <a:defRPr sz="1400" b="0">
+                <a:solidFill>
+                  <a:srgbClr val="070A40"/>
+                </a:solidFill>
+                <a:latin typeface="Arial"/>
+              </a:defRPr>
+            </a:pPr>
+            <a:r>
+              <a:rPr sz="1400" b="0">
+                <a:solidFill>
+                  <a:srgbClr val="070A40"/>
+                </a:solidFill>
+                <a:latin typeface="Arial"/>
+              </a:rPr>
+              <a:t>Three shifts make an AI-native organization buildable today but not two years ago:</a:t>
+            </a:r>
+          </a:p>
+        </p:txBody>
+      </p:sp>
+      <p:sp>
+        <p:nvSpPr>
+          <p:cNvPr id="5" name="Rounded Rectangle 4"/>
+          <p:cNvSpPr/>
+          <p:nvPr/>
+        </p:nvSpPr>
+        <p:spPr>
+          <a:xfrm>
+            <a:off x="731520" y="1783080"/>
+            <a:ext cx="2514600" cy="1828800"/>
+          </a:xfrm>
+          <a:prstGeom prst="roundRect">
+            <a:avLst/>
+          </a:prstGeom>
+          <a:solidFill>
+            <a:srgbClr val="F2F2F2"/>
+          </a:solidFill>
+          <a:ln>
+            <a:noFill/>
+          </a:ln>
+        </p:spPr>
+        <p:style>
+          <a:lnRef idx="1">
+            <a:schemeClr val="accent1"/>
+          </a:lnRef>
+          <a:fillRef idx="3">
+            <a:schemeClr val="accent1"/>
+          </a:fillRef>
+          <a:effectRef idx="2">
+            <a:schemeClr val="accent1"/>
+          </a:effectRef>
+          <a:fontRef idx="minor">
+            <a:schemeClr val="lt1"/>
+          </a:fontRef>
+        </p:style>
+        <p:txBody>
+          <a:bodyPr rtlCol="0" anchor="ctr"/>
+          <a:lstStyle/>
+          <a:p>
+            <a:pPr algn="ctr"/>
+          </a:p>
+        </p:txBody>
+      </p:sp>
+      <p:sp>
+        <p:nvSpPr>
+          <p:cNvPr id="6" name="TextBox 5"/>
           <p:cNvSpPr txBox="1"/>
           <p:nvPr/>
         </p:nvSpPr>
         <p:spPr>
           <a:xfrm>
-            <a:off x="731520" y="2011680"/>
-            <a:ext cx="7772400" cy="4114800"/>
+            <a:off x="914400" y="1920240"/>
+            <a:ext cx="2148840" cy="320040"/>
           </a:xfrm>
           <a:prstGeom prst="rect">
             <a:avLst/>
@@ -5762,135 +6312,445 @@
           </a:bodyPr>
           <a:lstStyle/>
           <a:p>
-            <a:pPr>
-              <a:spcAft>
-                <a:spcPts val="600"/>
-              </a:spcAft>
-              <a:defRPr sz="1300">
-                <a:solidFill>
-                  <a:srgbClr val="070A40"/>
-                </a:solidFill>
-                <a:latin typeface="Arial"/>
-              </a:defRPr>
-            </a:pPr>
-            <a:r>
-              <a:rPr sz="1300">
-                <a:solidFill>
-                  <a:srgbClr val="070A40"/>
-                </a:solidFill>
-                <a:latin typeface="Arial"/>
-              </a:rPr>
-              <a:t>✓  Registry-driven: Define agents in YAML, generate OpenCode-compatible markdown files</a:t>
-            </a:r>
-          </a:p>
-          <a:p>
-            <a:pPr>
-              <a:spcAft>
-                <a:spcPts val="600"/>
-              </a:spcAft>
-              <a:defRPr sz="1300">
-                <a:solidFill>
-                  <a:srgbClr val="070A40"/>
-                </a:solidFill>
-                <a:latin typeface="Arial"/>
-              </a:defRPr>
-            </a:pPr>
-            <a:r>
-              <a:rPr sz="1300">
-                <a:solidFill>
-                  <a:srgbClr val="070A40"/>
-                </a:solidFill>
-                <a:latin typeface="Arial"/>
-              </a:rPr>
-              <a:t>✓  Multi-provider LLM routing: OpenAI, Anthropic, DeepSeek, Gemini with automatic fallback</a:t>
-            </a:r>
-          </a:p>
-          <a:p>
-            <a:pPr>
-              <a:spcAft>
-                <a:spcPts val="600"/>
-              </a:spcAft>
-              <a:defRPr sz="1300">
-                <a:solidFill>
-                  <a:srgbClr val="070A40"/>
-                </a:solidFill>
-                <a:latin typeface="Arial"/>
-              </a:defRPr>
-            </a:pPr>
-            <a:r>
-              <a:rPr sz="1300">
-                <a:solidFill>
-                  <a:srgbClr val="070A40"/>
-                </a:solidFill>
-                <a:latin typeface="Arial"/>
-              </a:rPr>
-              <a:t>✓  Built-in cost tracking &amp; budget enforcement per agent</a:t>
-            </a:r>
-          </a:p>
-          <a:p>
-            <a:pPr>
-              <a:spcAft>
-                <a:spcPts val="600"/>
-              </a:spcAft>
-              <a:defRPr sz="1300">
-                <a:solidFill>
-                  <a:srgbClr val="070A40"/>
-                </a:solidFill>
-                <a:latin typeface="Arial"/>
-              </a:defRPr>
-            </a:pPr>
-            <a:r>
-              <a:rPr sz="1300">
-                <a:solidFill>
-                  <a:srgbClr val="070A40"/>
-                </a:solidFill>
-                <a:latin typeface="Arial"/>
-              </a:rPr>
-              <a:t>✓  Human-in-the-loop approval gates for dangerous operations</a:t>
-            </a:r>
-          </a:p>
-          <a:p>
-            <a:pPr>
-              <a:spcAft>
-                <a:spcPts val="600"/>
-              </a:spcAft>
-              <a:defRPr sz="1300">
-                <a:solidFill>
-                  <a:srgbClr val="070A40"/>
-                </a:solidFill>
-                <a:latin typeface="Arial"/>
-              </a:defRPr>
-            </a:pPr>
-            <a:r>
-              <a:rPr sz="1300">
-                <a:solidFill>
-                  <a:srgbClr val="070A40"/>
-                </a:solidFill>
-                <a:latin typeface="Arial"/>
-              </a:rPr>
-              <a:t>✓  MessageBus task queue for cross-agent coordination</a:t>
-            </a:r>
-          </a:p>
-          <a:p>
-            <a:pPr>
-              <a:spcAft>
-                <a:spcPts val="600"/>
-              </a:spcAft>
-              <a:defRPr sz="1300">
-                <a:solidFill>
-                  <a:srgbClr val="070A40"/>
-                </a:solidFill>
-                <a:latin typeface="Arial"/>
-              </a:defRPr>
-            </a:pPr>
-            <a:r>
-              <a:rPr sz="1300">
-                <a:solidFill>
-                  <a:srgbClr val="070A40"/>
-                </a:solidFill>
-                <a:latin typeface="Arial"/>
-              </a:rPr>
-              <a:t>✓  Pre-built agent roles across multiple departments</a:t>
+            <a:pPr algn="l">
+              <a:defRPr sz="1400" b="1">
+                <a:solidFill>
+                  <a:srgbClr val="070A40"/>
+                </a:solidFill>
+                <a:latin typeface="Arial"/>
+              </a:defRPr>
+            </a:pPr>
+            <a:r>
+              <a:rPr sz="1400" b="1">
+                <a:solidFill>
+                  <a:srgbClr val="070A40"/>
+                </a:solidFill>
+                <a:latin typeface="Arial"/>
+              </a:rPr>
+              <a:t>Capability</a:t>
+            </a:r>
+          </a:p>
+        </p:txBody>
+      </p:sp>
+      <p:sp>
+        <p:nvSpPr>
+          <p:cNvPr id="7" name="TextBox 6"/>
+          <p:cNvSpPr txBox="1"/>
+          <p:nvPr/>
+        </p:nvSpPr>
+        <p:spPr>
+          <a:xfrm>
+            <a:off x="914400" y="2240280"/>
+            <a:ext cx="2148840" cy="1280160"/>
+          </a:xfrm>
+          <a:prstGeom prst="rect">
+            <a:avLst/>
+          </a:prstGeom>
+          <a:noFill/>
+        </p:spPr>
+        <p:txBody>
+          <a:bodyPr wrap="square">
+            <a:spAutoFit/>
+          </a:bodyPr>
+          <a:lstStyle/>
+          <a:p>
+            <a:pPr algn="l">
+              <a:defRPr sz="1200" b="0">
+                <a:solidFill>
+                  <a:srgbClr val="070A40"/>
+                </a:solidFill>
+                <a:latin typeface="Arial"/>
+              </a:defRPr>
+            </a:pPr>
+            <a:r>
+              <a:rPr sz="1200" b="0">
+                <a:solidFill>
+                  <a:srgbClr val="070A40"/>
+                </a:solidFill>
+                <a:latin typeface="Arial"/>
+              </a:rPr>
+              <a:t>Long-horizon tool use is now reliable enough to run multi-step work, not just answer questions.</a:t>
+            </a:r>
+          </a:p>
+        </p:txBody>
+      </p:sp>
+      <p:sp>
+        <p:nvSpPr>
+          <p:cNvPr id="8" name="Rounded Rectangle 7"/>
+          <p:cNvSpPr/>
+          <p:nvPr/>
+        </p:nvSpPr>
+        <p:spPr>
+          <a:xfrm>
+            <a:off x="3429000" y="1783080"/>
+            <a:ext cx="2514600" cy="1828800"/>
+          </a:xfrm>
+          <a:prstGeom prst="roundRect">
+            <a:avLst/>
+          </a:prstGeom>
+          <a:solidFill>
+            <a:srgbClr val="F2F2F2"/>
+          </a:solidFill>
+          <a:ln>
+            <a:noFill/>
+          </a:ln>
+        </p:spPr>
+        <p:style>
+          <a:lnRef idx="1">
+            <a:schemeClr val="accent1"/>
+          </a:lnRef>
+          <a:fillRef idx="3">
+            <a:schemeClr val="accent1"/>
+          </a:fillRef>
+          <a:effectRef idx="2">
+            <a:schemeClr val="accent1"/>
+          </a:effectRef>
+          <a:fontRef idx="minor">
+            <a:schemeClr val="lt1"/>
+          </a:fontRef>
+        </p:style>
+        <p:txBody>
+          <a:bodyPr rtlCol="0" anchor="ctr"/>
+          <a:lstStyle/>
+          <a:p>
+            <a:pPr algn="ctr"/>
+          </a:p>
+        </p:txBody>
+      </p:sp>
+      <p:sp>
+        <p:nvSpPr>
+          <p:cNvPr id="9" name="TextBox 8"/>
+          <p:cNvSpPr txBox="1"/>
+          <p:nvPr/>
+        </p:nvSpPr>
+        <p:spPr>
+          <a:xfrm>
+            <a:off x="3611880" y="1920240"/>
+            <a:ext cx="2148840" cy="320040"/>
+          </a:xfrm>
+          <a:prstGeom prst="rect">
+            <a:avLst/>
+          </a:prstGeom>
+          <a:noFill/>
+        </p:spPr>
+        <p:txBody>
+          <a:bodyPr wrap="square">
+            <a:spAutoFit/>
+          </a:bodyPr>
+          <a:lstStyle/>
+          <a:p>
+            <a:pPr algn="l">
+              <a:defRPr sz="1400" b="1">
+                <a:solidFill>
+                  <a:srgbClr val="070A40"/>
+                </a:solidFill>
+                <a:latin typeface="Arial"/>
+              </a:defRPr>
+            </a:pPr>
+            <a:r>
+              <a:rPr sz="1400" b="1">
+                <a:solidFill>
+                  <a:srgbClr val="070A40"/>
+                </a:solidFill>
+                <a:latin typeface="Arial"/>
+              </a:rPr>
+              <a:t>Cost</a:t>
+            </a:r>
+          </a:p>
+        </p:txBody>
+      </p:sp>
+      <p:sp>
+        <p:nvSpPr>
+          <p:cNvPr id="10" name="TextBox 9"/>
+          <p:cNvSpPr txBox="1"/>
+          <p:nvPr/>
+        </p:nvSpPr>
+        <p:spPr>
+          <a:xfrm>
+            <a:off x="3611880" y="2240280"/>
+            <a:ext cx="2148840" cy="1280160"/>
+          </a:xfrm>
+          <a:prstGeom prst="rect">
+            <a:avLst/>
+          </a:prstGeom>
+          <a:noFill/>
+        </p:spPr>
+        <p:txBody>
+          <a:bodyPr wrap="square">
+            <a:spAutoFit/>
+          </a:bodyPr>
+          <a:lstStyle/>
+          <a:p>
+            <a:pPr algn="l">
+              <a:defRPr sz="1200" b="0">
+                <a:solidFill>
+                  <a:srgbClr val="070A40"/>
+                </a:solidFill>
+                <a:latin typeface="Arial"/>
+              </a:defRPr>
+            </a:pPr>
+            <a:r>
+              <a:rPr sz="1200" b="0">
+                <a:solidFill>
+                  <a:srgbClr val="070A40"/>
+                </a:solidFill>
+                <a:latin typeface="Arial"/>
+              </a:rPr>
+              <a:t>Inference has fallen far enough that per-agent budgets are a control problem, not a blocker.</a:t>
+            </a:r>
+          </a:p>
+        </p:txBody>
+      </p:sp>
+      <p:sp>
+        <p:nvSpPr>
+          <p:cNvPr id="11" name="Rounded Rectangle 10"/>
+          <p:cNvSpPr/>
+          <p:nvPr/>
+        </p:nvSpPr>
+        <p:spPr>
+          <a:xfrm>
+            <a:off x="6126480" y="1783080"/>
+            <a:ext cx="2514600" cy="1828800"/>
+          </a:xfrm>
+          <a:prstGeom prst="roundRect">
+            <a:avLst/>
+          </a:prstGeom>
+          <a:solidFill>
+            <a:srgbClr val="F2F2F2"/>
+          </a:solidFill>
+          <a:ln>
+            <a:noFill/>
+          </a:ln>
+        </p:spPr>
+        <p:style>
+          <a:lnRef idx="1">
+            <a:schemeClr val="accent1"/>
+          </a:lnRef>
+          <a:fillRef idx="3">
+            <a:schemeClr val="accent1"/>
+          </a:fillRef>
+          <a:effectRef idx="2">
+            <a:schemeClr val="accent1"/>
+          </a:effectRef>
+          <a:fontRef idx="minor">
+            <a:schemeClr val="lt1"/>
+          </a:fontRef>
+        </p:style>
+        <p:txBody>
+          <a:bodyPr rtlCol="0" anchor="ctr"/>
+          <a:lstStyle/>
+          <a:p>
+            <a:pPr algn="ctr"/>
+          </a:p>
+        </p:txBody>
+      </p:sp>
+      <p:sp>
+        <p:nvSpPr>
+          <p:cNvPr id="12" name="TextBox 11"/>
+          <p:cNvSpPr txBox="1"/>
+          <p:nvPr/>
+        </p:nvSpPr>
+        <p:spPr>
+          <a:xfrm>
+            <a:off x="6309360" y="1920240"/>
+            <a:ext cx="2148840" cy="320040"/>
+          </a:xfrm>
+          <a:prstGeom prst="rect">
+            <a:avLst/>
+          </a:prstGeom>
+          <a:noFill/>
+        </p:spPr>
+        <p:txBody>
+          <a:bodyPr wrap="square">
+            <a:spAutoFit/>
+          </a:bodyPr>
+          <a:lstStyle/>
+          <a:p>
+            <a:pPr algn="l">
+              <a:defRPr sz="1400" b="1">
+                <a:solidFill>
+                  <a:srgbClr val="070A40"/>
+                </a:solidFill>
+                <a:latin typeface="Arial"/>
+              </a:defRPr>
+            </a:pPr>
+            <a:r>
+              <a:rPr sz="1400" b="1">
+                <a:solidFill>
+                  <a:srgbClr val="070A40"/>
+                </a:solidFill>
+                <a:latin typeface="Arial"/>
+              </a:rPr>
+              <a:t>Expectation</a:t>
+            </a:r>
+          </a:p>
+        </p:txBody>
+      </p:sp>
+      <p:sp>
+        <p:nvSpPr>
+          <p:cNvPr id="13" name="TextBox 12"/>
+          <p:cNvSpPr txBox="1"/>
+          <p:nvPr/>
+        </p:nvSpPr>
+        <p:spPr>
+          <a:xfrm>
+            <a:off x="6309360" y="2240280"/>
+            <a:ext cx="2148840" cy="1280160"/>
+          </a:xfrm>
+          <a:prstGeom prst="rect">
+            <a:avLst/>
+          </a:prstGeom>
+          <a:noFill/>
+        </p:spPr>
+        <p:txBody>
+          <a:bodyPr wrap="square">
+            <a:spAutoFit/>
+          </a:bodyPr>
+          <a:lstStyle/>
+          <a:p>
+            <a:pPr algn="l">
+              <a:defRPr sz="1200" b="0">
+                <a:solidFill>
+                  <a:srgbClr val="070A40"/>
+                </a:solidFill>
+                <a:latin typeface="Arial"/>
+              </a:defRPr>
+            </a:pPr>
+            <a:r>
+              <a:rPr sz="1200" b="0">
+                <a:solidFill>
+                  <a:srgbClr val="070A40"/>
+                </a:solidFill>
+                <a:latin typeface="Arial"/>
+              </a:rPr>
+              <a:t>Clients now ask how AI changes how they operate, not whether it will.</a:t>
+            </a:r>
+          </a:p>
+        </p:txBody>
+      </p:sp>
+      <p:sp>
+        <p:nvSpPr>
+          <p:cNvPr id="14" name="Rounded Rectangle 13"/>
+          <p:cNvSpPr/>
+          <p:nvPr/>
+        </p:nvSpPr>
+        <p:spPr>
+          <a:xfrm>
+            <a:off x="502920" y="4114800"/>
+            <a:ext cx="8138160" cy="1280160"/>
+          </a:xfrm>
+          <a:prstGeom prst="roundRect">
+            <a:avLst/>
+          </a:prstGeom>
+          <a:solidFill>
+            <a:srgbClr val="F2F2F2"/>
+          </a:solidFill>
+          <a:ln>
+            <a:noFill/>
+          </a:ln>
+        </p:spPr>
+        <p:style>
+          <a:lnRef idx="1">
+            <a:schemeClr val="accent1"/>
+          </a:lnRef>
+          <a:fillRef idx="3">
+            <a:schemeClr val="accent1"/>
+          </a:fillRef>
+          <a:effectRef idx="2">
+            <a:schemeClr val="accent1"/>
+          </a:effectRef>
+          <a:fontRef idx="minor">
+            <a:schemeClr val="lt1"/>
+          </a:fontRef>
+        </p:style>
+        <p:txBody>
+          <a:bodyPr rtlCol="0" anchor="ctr"/>
+          <a:lstStyle/>
+          <a:p>
+            <a:pPr algn="ctr"/>
+          </a:p>
+        </p:txBody>
+      </p:sp>
+      <p:sp>
+        <p:nvSpPr>
+          <p:cNvPr id="15" name="TextBox 14"/>
+          <p:cNvSpPr txBox="1"/>
+          <p:nvPr/>
+        </p:nvSpPr>
+        <p:spPr>
+          <a:xfrm>
+            <a:off x="731520" y="4279392"/>
+            <a:ext cx="7680960" cy="1005839"/>
+          </a:xfrm>
+          <a:prstGeom prst="rect">
+            <a:avLst/>
+          </a:prstGeom>
+          <a:noFill/>
+        </p:spPr>
+        <p:txBody>
+          <a:bodyPr wrap="square">
+            <a:spAutoFit/>
+          </a:bodyPr>
+          <a:lstStyle/>
+          <a:p>
+            <a:pPr algn="l">
+              <a:defRPr sz="1200" b="0">
+                <a:solidFill>
+                  <a:srgbClr val="070A40"/>
+                </a:solidFill>
+                <a:latin typeface="Arial"/>
+              </a:defRPr>
+            </a:pPr>
+            <a:r>
+              <a:rPr sz="1200" b="0">
+                <a:solidFill>
+                  <a:srgbClr val="070A40"/>
+                </a:solidFill>
+                <a:latin typeface="Arial"/>
+              </a:rPr>
+              <a:t>Why us: we run this ourselves. The company operates on the same registry, governance gates and cost controls we sell — built for low-bandwidth, offline-capable deployment in Malawi and the wider SADC region.</a:t>
+            </a:r>
+          </a:p>
+        </p:txBody>
+      </p:sp>
+      <p:sp>
+        <p:nvSpPr>
+          <p:cNvPr id="16" name="TextBox 15"/>
+          <p:cNvSpPr txBox="1"/>
+          <p:nvPr/>
+        </p:nvSpPr>
+        <p:spPr>
+          <a:xfrm>
+            <a:off x="457200" y="6510528"/>
+            <a:ext cx="8229600" cy="274320"/>
+          </a:xfrm>
+          <a:prstGeom prst="rect">
+            <a:avLst/>
+          </a:prstGeom>
+          <a:noFill/>
+        </p:spPr>
+        <p:txBody>
+          <a:bodyPr wrap="square">
+            <a:spAutoFit/>
+          </a:bodyPr>
+          <a:lstStyle/>
+          <a:p>
+            <a:pPr algn="r">
+              <a:defRPr sz="1200" b="1">
+                <a:solidFill>
+                  <a:srgbClr val="070A40"/>
+                </a:solidFill>
+                <a:latin typeface="Arial"/>
+              </a:defRPr>
+            </a:pPr>
+            <a:r>
+              <a:rPr sz="1200" b="1">
+                <a:solidFill>
+                  <a:srgbClr val="070A40"/>
+                </a:solidFill>
+                <a:latin typeface="Arial"/>
+              </a:rPr>
+              <a:t>INTERNAL DRAFT — NOT FOR EXTERNAL DISTRIBUTION</a:t>
             </a:r>
           </a:p>
         </p:txBody>
@@ -5973,7 +6833,7 @@
         <p:spPr>
           <a:xfrm>
             <a:off x="457200" y="365760"/>
-            <a:ext cx="8229600" cy="548640"/>
+            <a:ext cx="8229600" cy="640080"/>
           </a:xfrm>
           <a:prstGeom prst="rect">
             <a:avLst/>
@@ -6014,8 +6874,8 @@
         </p:nvSpPr>
         <p:spPr>
           <a:xfrm>
-            <a:off x="731520" y="1097280"/>
-            <a:ext cx="7772400" cy="548640"/>
+            <a:off x="731520" y="1051560"/>
+            <a:ext cx="7772400" cy="640080"/>
           </a:xfrm>
           <a:prstGeom prst="rect">
             <a:avLst/>
@@ -6029,21 +6889,21 @@
           <a:lstStyle/>
           <a:p>
             <a:pPr algn="l">
-              <a:defRPr sz="1600" b="0">
-                <a:solidFill>
-                  <a:srgbClr val="070A40"/>
-                </a:solidFill>
-                <a:latin typeface="Arial"/>
-              </a:defRPr>
-            </a:pPr>
-            <a:r>
-              <a:rPr sz="1600" b="0">
-                <a:solidFill>
-                  <a:srgbClr val="070A40"/>
-                </a:solidFill>
-                <a:latin typeface="Arial"/>
-              </a:rPr>
-              <a:t>The AI agent infrastructure market is projected to reach significant scale by 2028.</a:t>
+              <a:defRPr sz="1400" b="0">
+                <a:solidFill>
+                  <a:srgbClr val="070A40"/>
+                </a:solidFill>
+                <a:latin typeface="Arial"/>
+              </a:defRPr>
+            </a:pPr>
+            <a:r>
+              <a:rPr sz="1400" b="0">
+                <a:solidFill>
+                  <a:srgbClr val="070A40"/>
+                </a:solidFill>
+                <a:latin typeface="Arial"/>
+              </a:rPr>
+              <a:t>Bottom-up sizing: accounts we can actually reach with each offer, priced from our own rate card. Market totals are pending a cited report.</a:t>
             </a:r>
           </a:p>
         </p:txBody>
@@ -6056,8 +6916,8 @@
         </p:nvSpPr>
         <p:spPr>
           <a:xfrm>
-            <a:off x="731520" y="1828800"/>
-            <a:ext cx="7772400" cy="2286000"/>
+            <a:off x="731520" y="1874519"/>
+            <a:ext cx="7772400" cy="1371600"/>
           </a:xfrm>
           <a:prstGeom prst="rect">
             <a:avLst/>
@@ -6088,7 +6948,7 @@
                 </a:solidFill>
                 <a:latin typeface="Arial"/>
               </a:rPr>
-              <a:t>TAM:  Enterprise AI agent platforms &amp; orchestration</a:t>
+              <a:t>TAM:  Enterprises and consultancies adopting agentic AI operations</a:t>
             </a:r>
           </a:p>
           <a:p>
@@ -6110,7 +6970,7 @@
                 </a:solidFill>
                 <a:latin typeface="Arial"/>
               </a:rPr>
-              <a:t>SAM:  Mid-market companies deploying AI agents</a:t>
+              <a:t>SAM:  Mid-market firms in Malawi and SADC reachable from Lilongwe</a:t>
             </a:r>
           </a:p>
           <a:p>
@@ -6132,7 +6992,7 @@
                 </a:solidFill>
                 <a:latin typeface="Arial"/>
               </a:rPr>
-              <a:t>SOM:  Developer-led, self-serve AI company builder</a:t>
+              <a:t>SOM:  Clients we can serve in the next four quarters</a:t>
             </a:r>
           </a:p>
         </p:txBody>
@@ -6145,8 +7005,8 @@
         </p:nvSpPr>
         <p:spPr>
           <a:xfrm>
-            <a:off x="731520" y="3657600"/>
-            <a:ext cx="7772400" cy="457200"/>
+            <a:off x="731520" y="3108960"/>
+            <a:ext cx="7772400" cy="365760"/>
           </a:xfrm>
           <a:prstGeom prst="rect">
             <a:avLst/>
@@ -6187,8 +7047,8 @@
         </p:nvSpPr>
         <p:spPr>
           <a:xfrm>
-            <a:off x="731520" y="4114800"/>
-            <a:ext cx="7772400" cy="2286000"/>
+            <a:off x="731520" y="3520440"/>
+            <a:ext cx="7772400" cy="1737360"/>
           </a:xfrm>
           <a:prstGeom prst="rect">
             <a:avLst/>
@@ -6201,7 +7061,7 @@
           </a:bodyPr>
           <a:lstStyle/>
           <a:p>
-            <a:pPr>
+            <a:pPr marL="219456" indent="-219456">
               <a:spcAft>
                 <a:spcPts val="600"/>
               </a:spcAft>
@@ -6219,11 +7079,11 @@
                 </a:solidFill>
                 <a:latin typeface="Arial"/>
               </a:rPr>
-              <a:t>•  Startups building AI-native products</a:t>
-            </a:r>
-          </a:p>
-          <a:p>
-            <a:pPr>
+              <a:t>•  Enterprises deploying internal AI agent fleets</a:t>
+            </a:r>
+          </a:p>
+          <a:p>
+            <a:pPr marL="219456" indent="-219456">
               <a:spcAft>
                 <a:spcPts val="600"/>
               </a:spcAft>
@@ -6241,11 +7101,11 @@
                 </a:solidFill>
                 <a:latin typeface="Arial"/>
               </a:rPr>
-              <a:t>•  SMBs automating operations with AI agents</a:t>
-            </a:r>
-          </a:p>
-          <a:p>
-            <a:pPr>
+              <a:t>•  SMBs automating operations</a:t>
+            </a:r>
+          </a:p>
+          <a:p>
+            <a:pPr marL="219456" indent="-219456">
               <a:spcAft>
                 <a:spcPts val="600"/>
               </a:spcAft>
@@ -6263,11 +7123,11 @@
                 </a:solidFill>
                 <a:latin typeface="Arial"/>
               </a:rPr>
-              <a:t>•  Enterprises deploying internal AI agent fleets</a:t>
-            </a:r>
-          </a:p>
-          <a:p>
-            <a:pPr>
+              <a:t>•  AI consultancies building client agent systems</a:t>
+            </a:r>
+          </a:p>
+          <a:p>
+            <a:pPr marL="219456" indent="-219456">
               <a:spcAft>
                 <a:spcPts val="600"/>
               </a:spcAft>
@@ -6285,7 +7145,134 @@
                 </a:solidFill>
                 <a:latin typeface="Arial"/>
               </a:rPr>
-              <a:t>•  AI consultancies building client agent systems</a:t>
+              <a:t>•  NGOs and development programs needing offline-capable tooling</a:t>
+            </a:r>
+          </a:p>
+        </p:txBody>
+      </p:sp>
+      <p:sp>
+        <p:nvSpPr>
+          <p:cNvPr id="8" name="Rounded Rectangle 7"/>
+          <p:cNvSpPr/>
+          <p:nvPr/>
+        </p:nvSpPr>
+        <p:spPr>
+          <a:xfrm>
+            <a:off x="502920" y="4937760"/>
+            <a:ext cx="8138160" cy="960120"/>
+          </a:xfrm>
+          <a:prstGeom prst="roundRect">
+            <a:avLst/>
+          </a:prstGeom>
+          <a:solidFill>
+            <a:srgbClr val="F2F2F2"/>
+          </a:solidFill>
+          <a:ln>
+            <a:noFill/>
+          </a:ln>
+        </p:spPr>
+        <p:style>
+          <a:lnRef idx="1">
+            <a:schemeClr val="accent1"/>
+          </a:lnRef>
+          <a:fillRef idx="3">
+            <a:schemeClr val="accent1"/>
+          </a:fillRef>
+          <a:effectRef idx="2">
+            <a:schemeClr val="accent1"/>
+          </a:effectRef>
+          <a:fontRef idx="minor">
+            <a:schemeClr val="lt1"/>
+          </a:fontRef>
+        </p:style>
+        <p:txBody>
+          <a:bodyPr rtlCol="0" anchor="ctr"/>
+          <a:lstStyle/>
+          <a:p>
+            <a:pPr algn="ctr"/>
+          </a:p>
+        </p:txBody>
+      </p:sp>
+      <p:sp>
+        <p:nvSpPr>
+          <p:cNvPr id="9" name="TextBox 8"/>
+          <p:cNvSpPr txBox="1"/>
+          <p:nvPr/>
+        </p:nvSpPr>
+        <p:spPr>
+          <a:xfrm>
+            <a:off x="731520" y="5102352"/>
+            <a:ext cx="7680960" cy="685800"/>
+          </a:xfrm>
+          <a:prstGeom prst="rect">
+            <a:avLst/>
+          </a:prstGeom>
+          <a:noFill/>
+        </p:spPr>
+        <p:txBody>
+          <a:bodyPr wrap="square">
+            <a:spAutoFit/>
+          </a:bodyPr>
+          <a:lstStyle/>
+          <a:p>
+            <a:pPr algn="l">
+              <a:defRPr sz="1200" b="0">
+                <a:solidFill>
+                  <a:srgbClr val="070A40"/>
+                </a:solidFill>
+                <a:latin typeface="Arial"/>
+              </a:defRPr>
+            </a:pPr>
+            <a:r>
+              <a:rPr sz="1200" b="0">
+                <a:solidFill>
+                  <a:srgbClr val="070A40"/>
+                </a:solidFill>
+                <a:latin typeface="Arial"/>
+              </a:rPr>
+              <a:t>We do not need the whole market. Paid delivery work from clients reachable from Lilongwe funds the platform, and the platform is what makes that delivery repeatable rather than bespoke.</a:t>
+            </a:r>
+          </a:p>
+        </p:txBody>
+      </p:sp>
+      <p:sp>
+        <p:nvSpPr>
+          <p:cNvPr id="10" name="TextBox 9"/>
+          <p:cNvSpPr txBox="1"/>
+          <p:nvPr/>
+        </p:nvSpPr>
+        <p:spPr>
+          <a:xfrm>
+            <a:off x="457200" y="6510528"/>
+            <a:ext cx="8229600" cy="274320"/>
+          </a:xfrm>
+          <a:prstGeom prst="rect">
+            <a:avLst/>
+          </a:prstGeom>
+          <a:noFill/>
+        </p:spPr>
+        <p:txBody>
+          <a:bodyPr wrap="square">
+            <a:spAutoFit/>
+          </a:bodyPr>
+          <a:lstStyle/>
+          <a:p>
+            <a:pPr algn="r">
+              <a:defRPr sz="1200" b="1">
+                <a:solidFill>
+                  <a:srgbClr val="070A40"/>
+                </a:solidFill>
+                <a:latin typeface="Arial"/>
+              </a:defRPr>
+            </a:pPr>
+            <a:r>
+              <a:rPr sz="1200" b="1">
+                <a:solidFill>
+                  <a:srgbClr val="070A40"/>
+                </a:solidFill>
+                <a:latin typeface="Arial"/>
+              </a:rPr>
+              <a:t>INTERNAL DRAFT — NOT FOR EXTERNAL DISTRIBUTION</a:t>
             </a:r>
           </a:p>
         </p:txBody>
@@ -6368,7 +7355,7 @@
         <p:spPr>
           <a:xfrm>
             <a:off x="457200" y="365760"/>
-            <a:ext cx="8229600" cy="548640"/>
+            <a:ext cx="8229600" cy="640080"/>
           </a:xfrm>
           <a:prstGeom prst="rect">
             <a:avLst/>
@@ -6396,7 +7383,7 @@
                 </a:solidFill>
                 <a:latin typeface="Arial"/>
               </a:rPr>
-              <a:t>PRODUCT &amp; TECHNOLOGY</a:t>
+              <a:t>PRODUCT &amp; BUSINESS MODEL</a:t>
             </a:r>
           </a:p>
         </p:txBody>
@@ -6409,8 +7396,50 @@
         </p:nvSpPr>
         <p:spPr>
           <a:xfrm>
-            <a:off x="731520" y="1097280"/>
-            <a:ext cx="7772400" cy="5029200"/>
+            <a:off x="502920" y="1051560"/>
+            <a:ext cx="3931920" cy="365760"/>
+          </a:xfrm>
+          <a:prstGeom prst="rect">
+            <a:avLst/>
+          </a:prstGeom>
+          <a:noFill/>
+        </p:spPr>
+        <p:txBody>
+          <a:bodyPr wrap="square">
+            <a:spAutoFit/>
+          </a:bodyPr>
+          <a:lstStyle/>
+          <a:p>
+            <a:pPr algn="l">
+              <a:defRPr sz="1600" b="1">
+                <a:solidFill>
+                  <a:srgbClr val="070A40"/>
+                </a:solidFill>
+                <a:latin typeface="Arial"/>
+              </a:defRPr>
+            </a:pPr>
+            <a:r>
+              <a:rPr sz="1600" b="1">
+                <a:solidFill>
+                  <a:srgbClr val="070A40"/>
+                </a:solidFill>
+                <a:latin typeface="Arial"/>
+              </a:rPr>
+              <a:t>What it does</a:t>
+            </a:r>
+          </a:p>
+        </p:txBody>
+      </p:sp>
+      <p:sp>
+        <p:nvSpPr>
+          <p:cNvPr id="5" name="TextBox 4"/>
+          <p:cNvSpPr txBox="1"/>
+          <p:nvPr/>
+        </p:nvSpPr>
+        <p:spPr>
+          <a:xfrm>
+            <a:off x="502920" y="1508760"/>
+            <a:ext cx="3977639" cy="4206240"/>
           </a:xfrm>
           <a:prstGeom prst="rect">
             <a:avLst/>
@@ -6441,7 +7470,7 @@
                 </a:solidFill>
                 <a:latin typeface="Arial"/>
               </a:rPr>
-              <a:t>Architecture:</a:t>
+              <a:t>Python CLI — no web server required</a:t>
             </a:r>
           </a:p>
           <a:p>
@@ -6463,7 +7492,7 @@
                 </a:solidFill>
                 <a:latin typeface="Arial"/>
               </a:rPr>
-              <a:t>  •  Python CLI (Typer) — no web server required</a:t>
+              <a:t>Registry YAML → template → agent files</a:t>
             </a:r>
           </a:p>
           <a:p>
@@ -6485,7 +7514,7 @@
                 </a:solidFill>
                 <a:latin typeface="Arial"/>
               </a:rPr>
-              <a:t>  •  Registry YAML → Jinja2 template → OpenCode agent files</a:t>
+              <a:t>ReAct loop with tool routing</a:t>
             </a:r>
           </a:p>
           <a:p>
@@ -6507,7 +7536,7 @@
                 </a:solidFill>
                 <a:latin typeface="Arial"/>
               </a:rPr>
-              <a:t>  •  ReAct agentic loop with tool routing</a:t>
+              <a:t>AgentLoop, CostTracker, HITLGate</a:t>
             </a:r>
           </a:p>
           <a:p>
@@ -6522,6 +7551,15 @@
                 <a:latin typeface="Arial"/>
               </a:defRPr>
             </a:pPr>
+            <a:r>
+              <a:rPr sz="1200">
+                <a:solidFill>
+                  <a:srgbClr val="070A40"/>
+                </a:solidFill>
+                <a:latin typeface="Arial"/>
+              </a:rPr>
+              <a:t>MessageBus task queue</a:t>
+            </a:r>
           </a:p>
           <a:p>
             <a:pPr>
@@ -6542,7 +7580,7 @@
                 </a:solidFill>
                 <a:latin typeface="Arial"/>
               </a:rPr>
-              <a:t>Core Components:</a:t>
+              <a:t>ModelRouter with provider fallback</a:t>
             </a:r>
           </a:p>
           <a:p>
@@ -6564,7 +7602,7 @@
                 </a:solidFill>
                 <a:latin typeface="Arial"/>
               </a:rPr>
-              <a:t>  •  AgentLoop — Multi-turn reasoning with tool execution</a:t>
+              <a:t>Least-privilege agent permissions</a:t>
             </a:r>
           </a:p>
           <a:p>
@@ -6586,9 +7624,74 @@
                 </a:solidFill>
                 <a:latin typeface="Arial"/>
               </a:rPr>
-              <a:t>  •  CostTracker — Real-time LLM spend monitoring</a:t>
-            </a:r>
-          </a:p>
+              <a:t>Bandit static analysis, pre-commit hooks</a:t>
+            </a:r>
+          </a:p>
+        </p:txBody>
+      </p:sp>
+      <p:sp>
+        <p:nvSpPr>
+          <p:cNvPr id="6" name="TextBox 5"/>
+          <p:cNvSpPr txBox="1"/>
+          <p:nvPr/>
+        </p:nvSpPr>
+        <p:spPr>
+          <a:xfrm>
+            <a:off x="4754880" y="1051560"/>
+            <a:ext cx="3931920" cy="365760"/>
+          </a:xfrm>
+          <a:prstGeom prst="rect">
+            <a:avLst/>
+          </a:prstGeom>
+          <a:noFill/>
+        </p:spPr>
+        <p:txBody>
+          <a:bodyPr wrap="square">
+            <a:spAutoFit/>
+          </a:bodyPr>
+          <a:lstStyle/>
+          <a:p>
+            <a:pPr algn="l">
+              <a:defRPr sz="1600" b="1">
+                <a:solidFill>
+                  <a:srgbClr val="070A40"/>
+                </a:solidFill>
+                <a:latin typeface="Arial"/>
+              </a:defRPr>
+            </a:pPr>
+            <a:r>
+              <a:rPr sz="1600" b="1">
+                <a:solidFill>
+                  <a:srgbClr val="070A40"/>
+                </a:solidFill>
+                <a:latin typeface="Arial"/>
+              </a:rPr>
+              <a:t>How it earns</a:t>
+            </a:r>
+          </a:p>
+        </p:txBody>
+      </p:sp>
+      <p:sp>
+        <p:nvSpPr>
+          <p:cNvPr id="7" name="TextBox 6"/>
+          <p:cNvSpPr txBox="1"/>
+          <p:nvPr/>
+        </p:nvSpPr>
+        <p:spPr>
+          <a:xfrm>
+            <a:off x="4754880" y="1508760"/>
+            <a:ext cx="3977639" cy="4206240"/>
+          </a:xfrm>
+          <a:prstGeom prst="rect">
+            <a:avLst/>
+          </a:prstGeom>
+          <a:noFill/>
+        </p:spPr>
+        <p:txBody>
+          <a:bodyPr wrap="square">
+            <a:spAutoFit/>
+          </a:bodyPr>
+          <a:lstStyle/>
           <a:p>
             <a:pPr>
               <a:spcAft>
@@ -6608,7 +7711,7 @@
                 </a:solidFill>
                 <a:latin typeface="Arial"/>
               </a:rPr>
-              <a:t>  •  HITLGate — Human approval for irreversible actions</a:t>
+              <a:t>SaaS subscription — platform access</a:t>
             </a:r>
           </a:p>
           <a:p>
@@ -6630,7 +7733,7 @@
                 </a:solidFill>
                 <a:latin typeface="Arial"/>
               </a:rPr>
-              <a:t>  •  MessageBus — JSON task queue for agent coordination</a:t>
+              <a:t>Usage — LLM pass-through plus margin</a:t>
             </a:r>
           </a:p>
           <a:p>
@@ -6652,7 +7755,7 @@
                 </a:solidFill>
                 <a:latin typeface="Arial"/>
               </a:rPr>
-              <a:t>  •  ModelRouter — Provider fallback chain (OpenAI → Anthropic → DeepSeek → Gemini)</a:t>
+              <a:t>Enterprise — deployment, SLA, support</a:t>
             </a:r>
           </a:p>
           <a:p>
@@ -6667,6 +7770,15 @@
                 <a:latin typeface="Arial"/>
               </a:defRPr>
             </a:pPr>
+            <a:r>
+              <a:rPr sz="1200">
+                <a:solidFill>
+                  <a:srgbClr val="070A40"/>
+                </a:solidFill>
+                <a:latin typeface="Arial"/>
+              </a:rPr>
+              <a:t>Services — implementation engagements</a:t>
+            </a:r>
           </a:p>
           <a:p>
             <a:pPr>
@@ -6680,15 +7792,6 @@
                 <a:latin typeface="Arial"/>
               </a:defRPr>
             </a:pPr>
-            <a:r>
-              <a:rPr sz="1200">
-                <a:solidFill>
-                  <a:srgbClr val="070A40"/>
-                </a:solidFill>
-                <a:latin typeface="Arial"/>
-              </a:rPr>
-              <a:t>Security:</a:t>
-            </a:r>
           </a:p>
           <a:p>
             <a:pPr>
@@ -6709,11 +7812,11 @@
                 </a:solidFill>
                 <a:latin typeface="Arial"/>
               </a:rPr>
-              <a:t>  •  Bandit static analysis, pre-commit hooks</a:t>
-            </a:r>
-          </a:p>
-          <a:p>
-            <a:pPr>
+              <a:t>Unit economics targets:</a:t>
+            </a:r>
+          </a:p>
+          <a:p>
+            <a:pPr marL="219456" indent="-219456">
               <a:spcAft>
                 <a:spcPts val="600"/>
               </a:spcAft>
@@ -6731,11 +7834,11 @@
                 </a:solidFill>
                 <a:latin typeface="Arial"/>
               </a:rPr>
-              <a:t>  •  Principle-of-least-privilege agent permissions</a:t>
-            </a:r>
-          </a:p>
-          <a:p>
-            <a:pPr>
+              <a:t>  •  Gross margin — pending CFO model</a:t>
+            </a:r>
+          </a:p>
+          <a:p>
+            <a:pPr marL="219456" indent="-219456">
               <a:spcAft>
                 <a:spcPts val="600"/>
               </a:spcAft>
@@ -6753,7 +7856,156 @@
                 </a:solidFill>
                 <a:latin typeface="Arial"/>
               </a:rPr>
-              <a:t>  •  Encrypted credential storage</a:t>
+              <a:t>  •  LLM cost — pending CFO model</a:t>
+            </a:r>
+          </a:p>
+          <a:p>
+            <a:pPr marL="219456" indent="-219456">
+              <a:spcAft>
+                <a:spcPts val="600"/>
+              </a:spcAft>
+              <a:defRPr sz="1200">
+                <a:solidFill>
+                  <a:srgbClr val="070A40"/>
+                </a:solidFill>
+                <a:latin typeface="Arial"/>
+              </a:defRPr>
+            </a:pPr>
+            <a:r>
+              <a:rPr sz="1200">
+                <a:solidFill>
+                  <a:srgbClr val="070A40"/>
+                </a:solidFill>
+                <a:latin typeface="Arial"/>
+              </a:rPr>
+              <a:t>  •  CAC payback — pending CFO model</a:t>
+            </a:r>
+          </a:p>
+        </p:txBody>
+      </p:sp>
+      <p:sp>
+        <p:nvSpPr>
+          <p:cNvPr id="8" name="Rounded Rectangle 7"/>
+          <p:cNvSpPr/>
+          <p:nvPr/>
+        </p:nvSpPr>
+        <p:spPr>
+          <a:xfrm>
+            <a:off x="502920" y="4343400"/>
+            <a:ext cx="8138160" cy="960120"/>
+          </a:xfrm>
+          <a:prstGeom prst="roundRect">
+            <a:avLst/>
+          </a:prstGeom>
+          <a:solidFill>
+            <a:srgbClr val="F2F2F2"/>
+          </a:solidFill>
+          <a:ln>
+            <a:noFill/>
+          </a:ln>
+        </p:spPr>
+        <p:style>
+          <a:lnRef idx="1">
+            <a:schemeClr val="accent1"/>
+          </a:lnRef>
+          <a:fillRef idx="3">
+            <a:schemeClr val="accent1"/>
+          </a:fillRef>
+          <a:effectRef idx="2">
+            <a:schemeClr val="accent1"/>
+          </a:effectRef>
+          <a:fontRef idx="minor">
+            <a:schemeClr val="lt1"/>
+          </a:fontRef>
+        </p:style>
+        <p:txBody>
+          <a:bodyPr rtlCol="0" anchor="ctr"/>
+          <a:lstStyle/>
+          <a:p>
+            <a:pPr algn="ctr"/>
+          </a:p>
+        </p:txBody>
+      </p:sp>
+      <p:sp>
+        <p:nvSpPr>
+          <p:cNvPr id="9" name="TextBox 8"/>
+          <p:cNvSpPr txBox="1"/>
+          <p:nvPr/>
+        </p:nvSpPr>
+        <p:spPr>
+          <a:xfrm>
+            <a:off x="731520" y="4507992"/>
+            <a:ext cx="7680960" cy="685800"/>
+          </a:xfrm>
+          <a:prstGeom prst="rect">
+            <a:avLst/>
+          </a:prstGeom>
+          <a:noFill/>
+        </p:spPr>
+        <p:txBody>
+          <a:bodyPr wrap="square">
+            <a:spAutoFit/>
+          </a:bodyPr>
+          <a:lstStyle/>
+          <a:p>
+            <a:pPr algn="l">
+              <a:defRPr sz="1200" b="0">
+                <a:solidFill>
+                  <a:srgbClr val="070A40"/>
+                </a:solidFill>
+                <a:latin typeface="Arial"/>
+              </a:defRPr>
+            </a:pPr>
+            <a:r>
+              <a:rPr sz="1200" b="0">
+                <a:solidFill>
+                  <a:srgbClr val="070A40"/>
+                </a:solidFill>
+                <a:latin typeface="Arial"/>
+              </a:rPr>
+              <a:t>One product, three ways to buy it: a subscription for platform access, usage billed on top, and an implementation engagement where the client wants delivery as well as software. The same system runs this company.</a:t>
+            </a:r>
+          </a:p>
+        </p:txBody>
+      </p:sp>
+      <p:sp>
+        <p:nvSpPr>
+          <p:cNvPr id="10" name="TextBox 9"/>
+          <p:cNvSpPr txBox="1"/>
+          <p:nvPr/>
+        </p:nvSpPr>
+        <p:spPr>
+          <a:xfrm>
+            <a:off x="457200" y="6510528"/>
+            <a:ext cx="8229600" cy="274320"/>
+          </a:xfrm>
+          <a:prstGeom prst="rect">
+            <a:avLst/>
+          </a:prstGeom>
+          <a:noFill/>
+        </p:spPr>
+        <p:txBody>
+          <a:bodyPr wrap="square">
+            <a:spAutoFit/>
+          </a:bodyPr>
+          <a:lstStyle/>
+          <a:p>
+            <a:pPr algn="r">
+              <a:defRPr sz="1200" b="1">
+                <a:solidFill>
+                  <a:srgbClr val="070A40"/>
+                </a:solidFill>
+                <a:latin typeface="Arial"/>
+              </a:defRPr>
+            </a:pPr>
+            <a:r>
+              <a:rPr sz="1200" b="1">
+                <a:solidFill>
+                  <a:srgbClr val="070A40"/>
+                </a:solidFill>
+                <a:latin typeface="Arial"/>
+              </a:rPr>
+              <a:t>INTERNAL DRAFT — NOT FOR EXTERNAL DISTRIBUTION</a:t>
             </a:r>
           </a:p>
         </p:txBody>
@@ -6836,7 +8088,7 @@
         <p:spPr>
           <a:xfrm>
             <a:off x="457200" y="365760"/>
-            <a:ext cx="8229600" cy="548640"/>
+            <a:ext cx="8229600" cy="640080"/>
           </a:xfrm>
           <a:prstGeom prst="rect">
             <a:avLst/>
@@ -6864,7 +8116,7 @@
                 </a:solidFill>
                 <a:latin typeface="Arial"/>
               </a:rPr>
-              <a:t>BUSINESS MODEL</a:t>
+              <a:t>TRACTION &amp; STATUS</a:t>
             </a:r>
           </a:p>
         </p:txBody>
@@ -6877,8 +8129,8 @@
         </p:nvSpPr>
         <p:spPr>
           <a:xfrm>
-            <a:off x="731520" y="1097280"/>
-            <a:ext cx="7772400" cy="5029200"/>
+            <a:off x="502920" y="1051560"/>
+            <a:ext cx="3931920" cy="365760"/>
           </a:xfrm>
           <a:prstGeom prst="rect">
             <a:avLst/>
@@ -6891,7 +8143,49 @@
           </a:bodyPr>
           <a:lstStyle/>
           <a:p>
-            <a:pPr>
+            <a:pPr algn="l">
+              <a:defRPr sz="1600" b="1">
+                <a:solidFill>
+                  <a:srgbClr val="070A40"/>
+                </a:solidFill>
+                <a:latin typeface="Arial"/>
+              </a:defRPr>
+            </a:pPr>
+            <a:r>
+              <a:rPr sz="1600" b="1">
+                <a:solidFill>
+                  <a:srgbClr val="070A40"/>
+                </a:solidFill>
+                <a:latin typeface="Arial"/>
+              </a:rPr>
+              <a:t>Built and working</a:t>
+            </a:r>
+          </a:p>
+        </p:txBody>
+      </p:sp>
+      <p:sp>
+        <p:nvSpPr>
+          <p:cNvPr id="5" name="TextBox 4"/>
+          <p:cNvSpPr txBox="1"/>
+          <p:nvPr/>
+        </p:nvSpPr>
+        <p:spPr>
+          <a:xfrm>
+            <a:off x="502920" y="1508760"/>
+            <a:ext cx="3931920" cy="2926080"/>
+          </a:xfrm>
+          <a:prstGeom prst="rect">
+            <a:avLst/>
+          </a:prstGeom>
+          <a:noFill/>
+        </p:spPr>
+        <p:txBody>
+          <a:bodyPr wrap="square">
+            <a:spAutoFit/>
+          </a:bodyPr>
+          <a:lstStyle/>
+          <a:p>
+            <a:pPr marL="219456" indent="-219456">
               <a:spcAft>
                 <a:spcPts val="600"/>
               </a:spcAft>
@@ -6909,11 +8203,11 @@
                 </a:solidFill>
                 <a:latin typeface="Arial"/>
               </a:rPr>
-              <a:t>Revenue Streams:</a:t>
-            </a:r>
-          </a:p>
-          <a:p>
-            <a:pPr>
+              <a:t>•  Platform built, running this company internally</a:t>
+            </a:r>
+          </a:p>
+          <a:p>
+            <a:pPr marL="219456" indent="-219456">
               <a:spcAft>
                 <a:spcPts val="600"/>
               </a:spcAft>
@@ -6931,11 +8225,11 @@
                 </a:solidFill>
                 <a:latin typeface="Arial"/>
               </a:rPr>
-              <a:t>  1.  SaaS Subscription — Monthly/annual plans for platform access</a:t>
-            </a:r>
-          </a:p>
-          <a:p>
-            <a:pPr>
+              <a:t>•  Multi-provider routing with cost enforcement</a:t>
+            </a:r>
+          </a:p>
+          <a:p>
+            <a:pPr marL="219456" indent="-219456">
               <a:spcAft>
                 <a:spcPts val="600"/>
               </a:spcAft>
@@ -6953,11 +8247,11 @@
                 </a:solidFill>
                 <a:latin typeface="Arial"/>
               </a:rPr>
-              <a:t>  2.  Usage-Based — LLM token pass-through + margin</a:t>
-            </a:r>
-          </a:p>
-          <a:p>
-            <a:pPr>
+              <a:t>•  Human approval gates enforced in code</a:t>
+            </a:r>
+          </a:p>
+          <a:p>
+            <a:pPr marL="219456" indent="-219456">
               <a:spcAft>
                 <a:spcPts val="600"/>
               </a:spcAft>
@@ -6975,11 +8269,11 @@
                 </a:solidFill>
                 <a:latin typeface="Arial"/>
               </a:rPr>
-              <a:t>  3.  Enterprise — Custom deployment, SLAs, dedicated support</a:t>
-            </a:r>
-          </a:p>
-          <a:p>
-            <a:pPr>
+              <a:t>•  Audit trail and test suite in place</a:t>
+            </a:r>
+          </a:p>
+          <a:p>
+            <a:pPr marL="219456" indent="-219456">
               <a:spcAft>
                 <a:spcPts val="600"/>
               </a:spcAft>
@@ -6997,11 +8291,76 @@
                 </a:solidFill>
                 <a:latin typeface="Arial"/>
               </a:rPr>
-              <a:t>  4.  Services — Implementation consulting for large deployments</a:t>
-            </a:r>
-          </a:p>
-          <a:p>
-            <a:pPr>
+              <a:t>•  Corporate Blueprint adopted</a:t>
+            </a:r>
+          </a:p>
+        </p:txBody>
+      </p:sp>
+      <p:sp>
+        <p:nvSpPr>
+          <p:cNvPr id="6" name="TextBox 5"/>
+          <p:cNvSpPr txBox="1"/>
+          <p:nvPr/>
+        </p:nvSpPr>
+        <p:spPr>
+          <a:xfrm>
+            <a:off x="4754880" y="1051560"/>
+            <a:ext cx="3931920" cy="365760"/>
+          </a:xfrm>
+          <a:prstGeom prst="rect">
+            <a:avLst/>
+          </a:prstGeom>
+          <a:noFill/>
+        </p:spPr>
+        <p:txBody>
+          <a:bodyPr wrap="square">
+            <a:spAutoFit/>
+          </a:bodyPr>
+          <a:lstStyle/>
+          <a:p>
+            <a:pPr algn="l">
+              <a:defRPr sz="1600" b="1">
+                <a:solidFill>
+                  <a:srgbClr val="E63946"/>
+                </a:solidFill>
+                <a:latin typeface="Arial"/>
+              </a:defRPr>
+            </a:pPr>
+            <a:r>
+              <a:rPr sz="1600" b="1">
+                <a:solidFill>
+                  <a:srgbClr val="E63946"/>
+                </a:solidFill>
+                <a:latin typeface="Arial"/>
+              </a:rPr>
+              <a:t>Not yet</a:t>
+            </a:r>
+          </a:p>
+        </p:txBody>
+      </p:sp>
+      <p:sp>
+        <p:nvSpPr>
+          <p:cNvPr id="7" name="TextBox 6"/>
+          <p:cNvSpPr txBox="1"/>
+          <p:nvPr/>
+        </p:nvSpPr>
+        <p:spPr>
+          <a:xfrm>
+            <a:off x="4754880" y="1508760"/>
+            <a:ext cx="3931920" cy="2194560"/>
+          </a:xfrm>
+          <a:prstGeom prst="rect">
+            <a:avLst/>
+          </a:prstGeom>
+          <a:noFill/>
+        </p:spPr>
+        <p:txBody>
+          <a:bodyPr wrap="square">
+            <a:spAutoFit/>
+          </a:bodyPr>
+          <a:lstStyle/>
+          <a:p>
+            <a:pPr marL="219456" indent="-219456">
               <a:spcAft>
                 <a:spcPts val="600"/>
               </a:spcAft>
@@ -7012,9 +8371,18 @@
                 <a:latin typeface="Arial"/>
               </a:defRPr>
             </a:pPr>
-          </a:p>
-          <a:p>
-            <a:pPr>
+            <a:r>
+              <a:rPr sz="1200">
+                <a:solidFill>
+                  <a:srgbClr val="070A40"/>
+                </a:solidFill>
+                <a:latin typeface="Arial"/>
+              </a:rPr>
+              <a:t>•  No paying clients</a:t>
+            </a:r>
+          </a:p>
+          <a:p>
+            <a:pPr marL="219456" indent="-219456">
               <a:spcAft>
                 <a:spcPts val="600"/>
               </a:spcAft>
@@ -7032,11 +8400,11 @@
                 </a:solidFill>
                 <a:latin typeface="Arial"/>
               </a:rPr>
-              <a:t>Pricing Tiers:</a:t>
-            </a:r>
-          </a:p>
-          <a:p>
-            <a:pPr>
+              <a:t>•  No signed pilots</a:t>
+            </a:r>
+          </a:p>
+          <a:p>
+            <a:pPr marL="219456" indent="-219456">
               <a:spcAft>
                 <a:spcPts val="600"/>
               </a:spcAft>
@@ -7054,11 +8422,11 @@
                 </a:solidFill>
                 <a:latin typeface="Arial"/>
               </a:rPr>
-              <a:t>  •  AI Company Builder SaaS — Starter, Pro, Enterprise tiers</a:t>
-            </a:r>
-          </a:p>
-          <a:p>
-            <a:pPr>
+              <a:t>•  No revenue</a:t>
+            </a:r>
+          </a:p>
+          <a:p>
+            <a:pPr marL="219456" indent="-219456">
               <a:spcAft>
                 <a:spcPts val="600"/>
               </a:spcAft>
@@ -7076,108 +8444,134 @@
                 </a:solidFill>
                 <a:latin typeface="Arial"/>
               </a:rPr>
-              <a:t>  •  Managed AI Workforce — Recurring service revenue</a:t>
-            </a:r>
-          </a:p>
-          <a:p>
-            <a:pPr>
-              <a:spcAft>
-                <a:spcPts val="600"/>
-              </a:spcAft>
-              <a:defRPr sz="1200">
-                <a:solidFill>
-                  <a:srgbClr val="070A40"/>
-                </a:solidFill>
-                <a:latin typeface="Arial"/>
-              </a:defRPr>
-            </a:pPr>
-          </a:p>
-          <a:p>
-            <a:pPr>
-              <a:spcAft>
-                <a:spcPts val="600"/>
-              </a:spcAft>
-              <a:defRPr sz="1200">
-                <a:solidFill>
-                  <a:srgbClr val="070A40"/>
-                </a:solidFill>
-                <a:latin typeface="Arial"/>
-              </a:defRPr>
-            </a:pPr>
-            <a:r>
-              <a:rPr sz="1200">
-                <a:solidFill>
-                  <a:srgbClr val="070A40"/>
-                </a:solidFill>
-                <a:latin typeface="Arial"/>
-              </a:rPr>
-              <a:t>Unit Economics:</a:t>
-            </a:r>
-          </a:p>
-          <a:p>
-            <a:pPr>
-              <a:spcAft>
-                <a:spcPts val="600"/>
-              </a:spcAft>
-              <a:defRPr sz="1200">
-                <a:solidFill>
-                  <a:srgbClr val="070A40"/>
-                </a:solidFill>
-                <a:latin typeface="Arial"/>
-              </a:defRPr>
-            </a:pPr>
-            <a:r>
-              <a:rPr sz="1200">
-                <a:solidFill>
-                  <a:srgbClr val="070A40"/>
-                </a:solidFill>
-                <a:latin typeface="Arial"/>
-              </a:rPr>
-              <a:t>  •  Target gross margin: Strong</a:t>
-            </a:r>
-          </a:p>
-          <a:p>
-            <a:pPr>
-              <a:spcAft>
-                <a:spcPts val="600"/>
-              </a:spcAft>
-              <a:defRPr sz="1200">
-                <a:solidFill>
-                  <a:srgbClr val="070A40"/>
-                </a:solidFill>
-                <a:latin typeface="Arial"/>
-              </a:defRPr>
-            </a:pPr>
-            <a:r>
-              <a:rPr sz="1200">
-                <a:solidFill>
-                  <a:srgbClr val="070A40"/>
-                </a:solidFill>
-                <a:latin typeface="Arial"/>
-              </a:rPr>
-              <a:t>  •  LLM cost: Controlled percentage of revenue at scale</a:t>
-            </a:r>
-          </a:p>
-          <a:p>
-            <a:pPr>
-              <a:spcAft>
-                <a:spcPts val="600"/>
-              </a:spcAft>
-              <a:defRPr sz="1200">
-                <a:solidFill>
-                  <a:srgbClr val="070A40"/>
-                </a:solidFill>
-                <a:latin typeface="Arial"/>
-              </a:defRPr>
-            </a:pPr>
-            <a:r>
-              <a:rPr sz="1200">
-                <a:solidFill>
-                  <a:srgbClr val="070A40"/>
-                </a:solidFill>
-                <a:latin typeface="Arial"/>
-              </a:rPr>
-              <a:t>  •  Target CAC payback: Favorable</a:t>
+              <a:t>•  No external validation of the model</a:t>
+            </a:r>
+          </a:p>
+        </p:txBody>
+      </p:sp>
+      <p:sp>
+        <p:nvSpPr>
+          <p:cNvPr id="8" name="Rounded Rectangle 7"/>
+          <p:cNvSpPr/>
+          <p:nvPr/>
+        </p:nvSpPr>
+        <p:spPr>
+          <a:xfrm>
+            <a:off x="502920" y="4206240"/>
+            <a:ext cx="8138160" cy="960120"/>
+          </a:xfrm>
+          <a:prstGeom prst="roundRect">
+            <a:avLst/>
+          </a:prstGeom>
+          <a:solidFill>
+            <a:srgbClr val="F2F2F2"/>
+          </a:solidFill>
+          <a:ln>
+            <a:noFill/>
+          </a:ln>
+        </p:spPr>
+        <p:style>
+          <a:lnRef idx="1">
+            <a:schemeClr val="accent1"/>
+          </a:lnRef>
+          <a:fillRef idx="3">
+            <a:schemeClr val="accent1"/>
+          </a:fillRef>
+          <a:effectRef idx="2">
+            <a:schemeClr val="accent1"/>
+          </a:effectRef>
+          <a:fontRef idx="minor">
+            <a:schemeClr val="lt1"/>
+          </a:fontRef>
+        </p:style>
+        <p:txBody>
+          <a:bodyPr rtlCol="0" anchor="ctr"/>
+          <a:lstStyle/>
+          <a:p>
+            <a:pPr algn="ctr"/>
+          </a:p>
+        </p:txBody>
+      </p:sp>
+      <p:sp>
+        <p:nvSpPr>
+          <p:cNvPr id="9" name="TextBox 8"/>
+          <p:cNvSpPr txBox="1"/>
+          <p:nvPr/>
+        </p:nvSpPr>
+        <p:spPr>
+          <a:xfrm>
+            <a:off x="731520" y="4370831"/>
+            <a:ext cx="7680960" cy="685800"/>
+          </a:xfrm>
+          <a:prstGeom prst="rect">
+            <a:avLst/>
+          </a:prstGeom>
+          <a:noFill/>
+        </p:spPr>
+        <p:txBody>
+          <a:bodyPr wrap="square">
+            <a:spAutoFit/>
+          </a:bodyPr>
+          <a:lstStyle/>
+          <a:p>
+            <a:pPr algn="l">
+              <a:defRPr sz="1200" b="0">
+                <a:solidFill>
+                  <a:srgbClr val="070A40"/>
+                </a:solidFill>
+                <a:latin typeface="Arial"/>
+              </a:defRPr>
+            </a:pPr>
+            <a:r>
+              <a:rPr sz="1200" b="0">
+                <a:solidFill>
+                  <a:srgbClr val="070A40"/>
+                </a:solidFill>
+                <a:latin typeface="Arial"/>
+              </a:rPr>
+              <a:t>This raise funds the first paid pilots. Progress is measured by signed pilots, not by features shipped — so the next version of this slide should be a list of clients, not a list of capabilities.</a:t>
+            </a:r>
+          </a:p>
+        </p:txBody>
+      </p:sp>
+      <p:sp>
+        <p:nvSpPr>
+          <p:cNvPr id="10" name="TextBox 9"/>
+          <p:cNvSpPr txBox="1"/>
+          <p:nvPr/>
+        </p:nvSpPr>
+        <p:spPr>
+          <a:xfrm>
+            <a:off x="457200" y="6510528"/>
+            <a:ext cx="8229600" cy="274320"/>
+          </a:xfrm>
+          <a:prstGeom prst="rect">
+            <a:avLst/>
+          </a:prstGeom>
+          <a:noFill/>
+        </p:spPr>
+        <p:txBody>
+          <a:bodyPr wrap="square">
+            <a:spAutoFit/>
+          </a:bodyPr>
+          <a:lstStyle/>
+          <a:p>
+            <a:pPr algn="r">
+              <a:defRPr sz="1200" b="1">
+                <a:solidFill>
+                  <a:srgbClr val="070A40"/>
+                </a:solidFill>
+                <a:latin typeface="Arial"/>
+              </a:defRPr>
+            </a:pPr>
+            <a:r>
+              <a:rPr sz="1200" b="1">
+                <a:solidFill>
+                  <a:srgbClr val="070A40"/>
+                </a:solidFill>
+                <a:latin typeface="Arial"/>
+              </a:rPr>
+              <a:t>INTERNAL DRAFT — NOT FOR EXTERNAL DISTRIBUTION</a:t>
             </a:r>
           </a:p>
         </p:txBody>
@@ -7260,7 +8654,7 @@
         <p:spPr>
           <a:xfrm>
             <a:off x="457200" y="365760"/>
-            <a:ext cx="8229600" cy="548640"/>
+            <a:ext cx="8229600" cy="640080"/>
           </a:xfrm>
           <a:prstGeom prst="rect">
             <a:avLst/>
@@ -7288,21 +8682,371 @@
                 </a:solidFill>
                 <a:latin typeface="Arial"/>
               </a:rPr>
-              <a:t>TRACTION &amp; METRICS</a:t>
-            </a:r>
-          </a:p>
-        </p:txBody>
-      </p:sp>
-      <p:sp>
-        <p:nvSpPr>
-          <p:cNvPr id="4" name="Rounded Rectangle 3"/>
+              <a:t>COMPETITIVE LANDSCAPE</a:t>
+            </a:r>
+          </a:p>
+        </p:txBody>
+      </p:sp>
+      <p:sp>
+        <p:nvSpPr>
+          <p:cNvPr id="4" name="TextBox 3"/>
+          <p:cNvSpPr txBox="1"/>
+          <p:nvPr/>
+        </p:nvSpPr>
+        <p:spPr>
+          <a:xfrm>
+            <a:off x="502920" y="1051560"/>
+            <a:ext cx="3931920" cy="365760"/>
+          </a:xfrm>
+          <a:prstGeom prst="rect">
+            <a:avLst/>
+          </a:prstGeom>
+          <a:noFill/>
+        </p:spPr>
+        <p:txBody>
+          <a:bodyPr wrap="square">
+            <a:spAutoFit/>
+          </a:bodyPr>
+          <a:lstStyle/>
+          <a:p>
+            <a:pPr algn="l">
+              <a:defRPr sz="1600" b="1">
+                <a:solidFill>
+                  <a:srgbClr val="070A40"/>
+                </a:solidFill>
+                <a:latin typeface="Arial"/>
+              </a:defRPr>
+            </a:pPr>
+            <a:r>
+              <a:rPr sz="1600" b="1">
+                <a:solidFill>
+                  <a:srgbClr val="070A40"/>
+                </a:solidFill>
+                <a:latin typeface="Arial"/>
+              </a:rPr>
+              <a:t>Who else is in the space</a:t>
+            </a:r>
+          </a:p>
+        </p:txBody>
+      </p:sp>
+      <p:sp>
+        <p:nvSpPr>
+          <p:cNvPr id="5" name="TextBox 4"/>
+          <p:cNvSpPr txBox="1"/>
+          <p:nvPr/>
+        </p:nvSpPr>
+        <p:spPr>
+          <a:xfrm>
+            <a:off x="502920" y="1508760"/>
+            <a:ext cx="3977639" cy="4023360"/>
+          </a:xfrm>
+          <a:prstGeom prst="rect">
+            <a:avLst/>
+          </a:prstGeom>
+          <a:noFill/>
+        </p:spPr>
+        <p:txBody>
+          <a:bodyPr wrap="square">
+            <a:spAutoFit/>
+          </a:bodyPr>
+          <a:lstStyle/>
+          <a:p>
+            <a:pPr>
+              <a:spcAft>
+                <a:spcPts val="600"/>
+              </a:spcAft>
+              <a:defRPr sz="1200">
+                <a:solidFill>
+                  <a:srgbClr val="070A40"/>
+                </a:solidFill>
+                <a:latin typeface="Arial"/>
+              </a:defRPr>
+            </a:pPr>
+            <a:r>
+              <a:rPr sz="1200">
+                <a:solidFill>
+                  <a:srgbClr val="070A40"/>
+                </a:solidFill>
+                <a:latin typeface="Arial"/>
+              </a:rPr>
+              <a:t>Agent frameworks (LangGraph, CrewAI) — developer tools, no organization layer or governance</a:t>
+            </a:r>
+          </a:p>
+          <a:p>
+            <a:pPr>
+              <a:spcAft>
+                <a:spcPts val="600"/>
+              </a:spcAft>
+              <a:defRPr sz="1200">
+                <a:solidFill>
+                  <a:srgbClr val="070A40"/>
+                </a:solidFill>
+                <a:latin typeface="Arial"/>
+              </a:defRPr>
+            </a:pPr>
+            <a:r>
+              <a:rPr sz="1200">
+                <a:solidFill>
+                  <a:srgbClr val="070A40"/>
+                </a:solidFill>
+                <a:latin typeface="Arial"/>
+              </a:rPr>
+              <a:t>Workflow automation (n8n, Zapier) — task pipelines, not agent organizations</a:t>
+            </a:r>
+          </a:p>
+          <a:p>
+            <a:pPr>
+              <a:spcAft>
+                <a:spcPts val="600"/>
+              </a:spcAft>
+              <a:defRPr sz="1200">
+                <a:solidFill>
+                  <a:srgbClr val="070A40"/>
+                </a:solidFill>
+                <a:latin typeface="Arial"/>
+              </a:defRPr>
+            </a:pPr>
+            <a:r>
+              <a:rPr sz="1200">
+                <a:solidFill>
+                  <a:srgbClr val="070A40"/>
+                </a:solidFill>
+                <a:latin typeface="Arial"/>
+              </a:rPr>
+              <a:t>Assistant SaaS (ChatGPT Business, Copilot) — single assistant, no role hierarchy or cost control</a:t>
+            </a:r>
+          </a:p>
+          <a:p>
+            <a:pPr>
+              <a:spcAft>
+                <a:spcPts val="600"/>
+              </a:spcAft>
+              <a:defRPr sz="1200">
+                <a:solidFill>
+                  <a:srgbClr val="070A40"/>
+                </a:solidFill>
+                <a:latin typeface="Arial"/>
+              </a:defRPr>
+            </a:pPr>
+            <a:r>
+              <a:rPr sz="1200">
+                <a:solidFill>
+                  <a:srgbClr val="070A40"/>
+                </a:solidFill>
+                <a:latin typeface="Arial"/>
+              </a:rPr>
+              <a:t>Custom builds — high engineering cost, no reusable control plane</a:t>
+            </a:r>
+          </a:p>
+        </p:txBody>
+      </p:sp>
+      <p:sp>
+        <p:nvSpPr>
+          <p:cNvPr id="6" name="TextBox 5"/>
+          <p:cNvSpPr txBox="1"/>
+          <p:nvPr/>
+        </p:nvSpPr>
+        <p:spPr>
+          <a:xfrm>
+            <a:off x="4754880" y="1051560"/>
+            <a:ext cx="3931920" cy="365760"/>
+          </a:xfrm>
+          <a:prstGeom prst="rect">
+            <a:avLst/>
+          </a:prstGeom>
+          <a:noFill/>
+        </p:spPr>
+        <p:txBody>
+          <a:bodyPr wrap="square">
+            <a:spAutoFit/>
+          </a:bodyPr>
+          <a:lstStyle/>
+          <a:p>
+            <a:pPr algn="l">
+              <a:defRPr sz="1600" b="1">
+                <a:solidFill>
+                  <a:srgbClr val="E63946"/>
+                </a:solidFill>
+                <a:latin typeface="Arial"/>
+              </a:defRPr>
+            </a:pPr>
+            <a:r>
+              <a:rPr sz="1600" b="1">
+                <a:solidFill>
+                  <a:srgbClr val="E63946"/>
+                </a:solidFill>
+                <a:latin typeface="Arial"/>
+              </a:rPr>
+              <a:t>What we do differently</a:t>
+            </a:r>
+          </a:p>
+        </p:txBody>
+      </p:sp>
+      <p:sp>
+        <p:nvSpPr>
+          <p:cNvPr id="7" name="TextBox 6"/>
+          <p:cNvSpPr txBox="1"/>
+          <p:nvPr/>
+        </p:nvSpPr>
+        <p:spPr>
+          <a:xfrm>
+            <a:off x="4754880" y="1508760"/>
+            <a:ext cx="3977639" cy="4023360"/>
+          </a:xfrm>
+          <a:prstGeom prst="rect">
+            <a:avLst/>
+          </a:prstGeom>
+          <a:noFill/>
+        </p:spPr>
+        <p:txBody>
+          <a:bodyPr wrap="square">
+            <a:spAutoFit/>
+          </a:bodyPr>
+          <a:lstStyle/>
+          <a:p>
+            <a:pPr>
+              <a:spcAft>
+                <a:spcPts val="600"/>
+              </a:spcAft>
+              <a:defRPr sz="1200">
+                <a:solidFill>
+                  <a:srgbClr val="070A40"/>
+                </a:solidFill>
+                <a:latin typeface="Arial"/>
+              </a:defRPr>
+            </a:pPr>
+            <a:r>
+              <a:rPr sz="1200">
+                <a:solidFill>
+                  <a:srgbClr val="070A40"/>
+                </a:solidFill>
+                <a:latin typeface="Arial"/>
+              </a:rPr>
+              <a:t>✓  Organization structure, not a single agent</a:t>
+            </a:r>
+          </a:p>
+          <a:p>
+            <a:pPr>
+              <a:spcAft>
+                <a:spcPts val="600"/>
+              </a:spcAft>
+              <a:defRPr sz="1200">
+                <a:solidFill>
+                  <a:srgbClr val="070A40"/>
+                </a:solidFill>
+                <a:latin typeface="Arial"/>
+              </a:defRPr>
+            </a:pPr>
+            <a:r>
+              <a:rPr sz="1200">
+                <a:solidFill>
+                  <a:srgbClr val="070A40"/>
+                </a:solidFill>
+                <a:latin typeface="Arial"/>
+              </a:rPr>
+              <a:t>✓  Cost transparency and budget enforcement built in</a:t>
+            </a:r>
+          </a:p>
+          <a:p>
+            <a:pPr>
+              <a:spcAft>
+                <a:spcPts val="600"/>
+              </a:spcAft>
+              <a:defRPr sz="1200">
+                <a:solidFill>
+                  <a:srgbClr val="070A40"/>
+                </a:solidFill>
+                <a:latin typeface="Arial"/>
+              </a:defRPr>
+            </a:pPr>
+            <a:r>
+              <a:rPr sz="1200">
+                <a:solidFill>
+                  <a:srgbClr val="070A40"/>
+                </a:solidFill>
+                <a:latin typeface="Arial"/>
+              </a:rPr>
+              <a:t>✓  Human approval gates as a first-class feature</a:t>
+            </a:r>
+          </a:p>
+          <a:p>
+            <a:pPr>
+              <a:spcAft>
+                <a:spcPts val="600"/>
+              </a:spcAft>
+              <a:defRPr sz="1200">
+                <a:solidFill>
+                  <a:srgbClr val="070A40"/>
+                </a:solidFill>
+                <a:latin typeface="Arial"/>
+              </a:defRPr>
+            </a:pPr>
+            <a:r>
+              <a:rPr sz="1200">
+                <a:solidFill>
+                  <a:srgbClr val="070A40"/>
+                </a:solidFill>
+                <a:latin typeface="Arial"/>
+              </a:rPr>
+              <a:t>✓  Multi-provider, with automatic fallback</a:t>
+            </a:r>
+          </a:p>
+          <a:p>
+            <a:pPr>
+              <a:spcAft>
+                <a:spcPts val="600"/>
+              </a:spcAft>
+              <a:defRPr sz="1200">
+                <a:solidFill>
+                  <a:srgbClr val="070A40"/>
+                </a:solidFill>
+                <a:latin typeface="Arial"/>
+              </a:defRPr>
+            </a:pPr>
+            <a:r>
+              <a:rPr sz="1200">
+                <a:solidFill>
+                  <a:srgbClr val="070A40"/>
+                </a:solidFill>
+                <a:latin typeface="Arial"/>
+              </a:rPr>
+              <a:t>✓  Local-first inference for low-connectivity settings</a:t>
+            </a:r>
+          </a:p>
+          <a:p>
+            <a:pPr>
+              <a:spcAft>
+                <a:spcPts val="600"/>
+              </a:spcAft>
+              <a:defRPr sz="1200">
+                <a:solidFill>
+                  <a:srgbClr val="070A40"/>
+                </a:solidFill>
+                <a:latin typeface="Arial"/>
+              </a:defRPr>
+            </a:pPr>
+            <a:r>
+              <a:rPr sz="1200">
+                <a:solidFill>
+                  <a:srgbClr val="070A40"/>
+                </a:solidFill>
+                <a:latin typeface="Arial"/>
+              </a:rPr>
+              <a:t>✓  Governance and escalation rules shipped as code</a:t>
+            </a:r>
+          </a:p>
+        </p:txBody>
+      </p:sp>
+      <p:sp>
+        <p:nvSpPr>
+          <p:cNvPr id="8" name="Rounded Rectangle 7"/>
           <p:cNvSpPr/>
           <p:nvPr/>
         </p:nvSpPr>
         <p:spPr>
           <a:xfrm>
-            <a:off x="914400" y="1188720"/>
-            <a:ext cx="3200400" cy="1280160"/>
+            <a:off x="502920" y="4434840"/>
+            <a:ext cx="8138160" cy="960120"/>
           </a:xfrm>
           <a:prstGeom prst="roundRect">
             <a:avLst/>
@@ -7338,14 +9082,14 @@
       </p:sp>
       <p:sp>
         <p:nvSpPr>
-          <p:cNvPr id="5" name="TextBox 4"/>
+          <p:cNvPr id="9" name="TextBox 8"/>
           <p:cNvSpPr txBox="1"/>
           <p:nvPr/>
         </p:nvSpPr>
         <p:spPr>
           <a:xfrm>
-            <a:off x="1097280" y="1371600"/>
-            <a:ext cx="2834640" cy="548640"/>
+            <a:off x="731520" y="4599431"/>
+            <a:ext cx="7680960" cy="685800"/>
           </a:xfrm>
           <a:prstGeom prst="rect">
             <a:avLst/>
@@ -7358,36 +9102,36 @@
           </a:bodyPr>
           <a:lstStyle/>
           <a:p>
-            <a:pPr algn="ctr">
-              <a:defRPr sz="2800" b="1">
-                <a:solidFill>
-                  <a:srgbClr val="070A40"/>
-                </a:solidFill>
-                <a:latin typeface="Arial"/>
-              </a:defRPr>
-            </a:pPr>
-            <a:r>
-              <a:rPr sz="2800" b="1">
-                <a:solidFill>
-                  <a:srgbClr val="070A40"/>
-                </a:solidFill>
-                <a:latin typeface="Arial"/>
-              </a:rPr>
-              <a:t>Agents</a:t>
-            </a:r>
-          </a:p>
-        </p:txBody>
-      </p:sp>
-      <p:sp>
-        <p:nvSpPr>
-          <p:cNvPr id="6" name="TextBox 5"/>
+            <a:pPr algn="l">
+              <a:defRPr sz="1200" b="0">
+                <a:solidFill>
+                  <a:srgbClr val="070A40"/>
+                </a:solidFill>
+                <a:latin typeface="Arial"/>
+              </a:defRPr>
+            </a:pPr>
+            <a:r>
+              <a:rPr sz="1200" b="0">
+                <a:solidFill>
+                  <a:srgbClr val="070A40"/>
+                </a:solidFill>
+                <a:latin typeface="Arial"/>
+              </a:rPr>
+              <a:t>We are not competing on model access — the models are commodities and anyone can call them. We compete on the control plane around them: who may act, what it costs, and who signs off.</a:t>
+            </a:r>
+          </a:p>
+        </p:txBody>
+      </p:sp>
+      <p:sp>
+        <p:nvSpPr>
+          <p:cNvPr id="10" name="TextBox 9"/>
           <p:cNvSpPr txBox="1"/>
           <p:nvPr/>
         </p:nvSpPr>
         <p:spPr>
           <a:xfrm>
-            <a:off x="1097280" y="1920240"/>
-            <a:ext cx="2834640" cy="365760"/>
+            <a:off x="457200" y="6510528"/>
+            <a:ext cx="8229600" cy="274320"/>
           </a:xfrm>
           <a:prstGeom prst="rect">
             <a:avLst/>
@@ -7400,536 +9144,22 @@
           </a:bodyPr>
           <a:lstStyle/>
           <a:p>
-            <a:pPr algn="ctr">
-              <a:defRPr sz="1200" b="0">
-                <a:solidFill>
-                  <a:srgbClr val="070A40"/>
-                </a:solidFill>
-                <a:latin typeface="Arial"/>
-              </a:defRPr>
-            </a:pPr>
-            <a:r>
-              <a:rPr sz="1200" b="0">
-                <a:solidFill>
-                  <a:srgbClr val="070A40"/>
-                </a:solidFill>
-                <a:latin typeface="Arial"/>
-              </a:rPr>
-              <a:t>Deployed</a:t>
-            </a:r>
-          </a:p>
-        </p:txBody>
-      </p:sp>
-      <p:sp>
-        <p:nvSpPr>
-          <p:cNvPr id="7" name="Rounded Rectangle 6"/>
-          <p:cNvSpPr/>
-          <p:nvPr/>
-        </p:nvSpPr>
-        <p:spPr>
-          <a:xfrm>
-            <a:off x="4572000" y="1188720"/>
-            <a:ext cx="3200400" cy="1280160"/>
-          </a:xfrm>
-          <a:prstGeom prst="roundRect">
-            <a:avLst/>
-          </a:prstGeom>
-          <a:solidFill>
-            <a:srgbClr val="F2F2F2"/>
-          </a:solidFill>
-          <a:ln>
-            <a:noFill/>
-          </a:ln>
-        </p:spPr>
-        <p:style>
-          <a:lnRef idx="1">
-            <a:schemeClr val="accent1"/>
-          </a:lnRef>
-          <a:fillRef idx="3">
-            <a:schemeClr val="accent1"/>
-          </a:fillRef>
-          <a:effectRef idx="2">
-            <a:schemeClr val="accent1"/>
-          </a:effectRef>
-          <a:fontRef idx="minor">
-            <a:schemeClr val="lt1"/>
-          </a:fontRef>
-        </p:style>
-        <p:txBody>
-          <a:bodyPr rtlCol="0" anchor="ctr"/>
-          <a:lstStyle/>
-          <a:p>
-            <a:pPr algn="ctr"/>
-          </a:p>
-        </p:txBody>
-      </p:sp>
-      <p:sp>
-        <p:nvSpPr>
-          <p:cNvPr id="8" name="TextBox 7"/>
-          <p:cNvSpPr txBox="1"/>
-          <p:nvPr/>
-        </p:nvSpPr>
-        <p:spPr>
-          <a:xfrm>
-            <a:off x="4754880" y="1371600"/>
-            <a:ext cx="2834640" cy="548640"/>
-          </a:xfrm>
-          <a:prstGeom prst="rect">
-            <a:avLst/>
-          </a:prstGeom>
-          <a:noFill/>
-        </p:spPr>
-        <p:txBody>
-          <a:bodyPr wrap="square">
-            <a:spAutoFit/>
-          </a:bodyPr>
-          <a:lstStyle/>
-          <a:p>
-            <a:pPr algn="ctr">
-              <a:defRPr sz="2800" b="1">
-                <a:solidFill>
-                  <a:srgbClr val="070A40"/>
-                </a:solidFill>
-                <a:latin typeface="Arial"/>
-              </a:defRPr>
-            </a:pPr>
-            <a:r>
-              <a:rPr sz="2800" b="1">
-                <a:solidFill>
-                  <a:srgbClr val="070A40"/>
-                </a:solidFill>
-                <a:latin typeface="Arial"/>
-              </a:rPr>
-              <a:t>Departments</a:t>
-            </a:r>
-          </a:p>
-        </p:txBody>
-      </p:sp>
-      <p:sp>
-        <p:nvSpPr>
-          <p:cNvPr id="9" name="TextBox 8"/>
-          <p:cNvSpPr txBox="1"/>
-          <p:nvPr/>
-        </p:nvSpPr>
-        <p:spPr>
-          <a:xfrm>
-            <a:off x="4754880" y="1920240"/>
-            <a:ext cx="2834640" cy="365760"/>
-          </a:xfrm>
-          <a:prstGeom prst="rect">
-            <a:avLst/>
-          </a:prstGeom>
-          <a:noFill/>
-        </p:spPr>
-        <p:txBody>
-          <a:bodyPr wrap="square">
-            <a:spAutoFit/>
-          </a:bodyPr>
-          <a:lstStyle/>
-          <a:p>
-            <a:pPr algn="ctr">
-              <a:defRPr sz="1200" b="0">
-                <a:solidFill>
-                  <a:srgbClr val="070A40"/>
-                </a:solidFill>
-                <a:latin typeface="Arial"/>
-              </a:defRPr>
-            </a:pPr>
-            <a:r>
-              <a:rPr sz="1200" b="0">
-                <a:solidFill>
-                  <a:srgbClr val="070A40"/>
-                </a:solidFill>
-                <a:latin typeface="Arial"/>
-              </a:rPr>
-              <a:t>Live</a:t>
-            </a:r>
-          </a:p>
-        </p:txBody>
-      </p:sp>
-      <p:sp>
-        <p:nvSpPr>
-          <p:cNvPr id="10" name="Rounded Rectangle 9"/>
-          <p:cNvSpPr/>
-          <p:nvPr/>
-        </p:nvSpPr>
-        <p:spPr>
-          <a:xfrm>
-            <a:off x="914400" y="2834640"/>
-            <a:ext cx="3200400" cy="1280160"/>
-          </a:xfrm>
-          <a:prstGeom prst="roundRect">
-            <a:avLst/>
-          </a:prstGeom>
-          <a:solidFill>
-            <a:srgbClr val="F2F2F2"/>
-          </a:solidFill>
-          <a:ln>
-            <a:noFill/>
-          </a:ln>
-        </p:spPr>
-        <p:style>
-          <a:lnRef idx="1">
-            <a:schemeClr val="accent1"/>
-          </a:lnRef>
-          <a:fillRef idx="3">
-            <a:schemeClr val="accent1"/>
-          </a:fillRef>
-          <a:effectRef idx="2">
-            <a:schemeClr val="accent1"/>
-          </a:effectRef>
-          <a:fontRef idx="minor">
-            <a:schemeClr val="lt1"/>
-          </a:fontRef>
-        </p:style>
-        <p:txBody>
-          <a:bodyPr rtlCol="0" anchor="ctr"/>
-          <a:lstStyle/>
-          <a:p>
-            <a:pPr algn="ctr"/>
-          </a:p>
-        </p:txBody>
-      </p:sp>
-      <p:sp>
-        <p:nvSpPr>
-          <p:cNvPr id="11" name="TextBox 10"/>
-          <p:cNvSpPr txBox="1"/>
-          <p:nvPr/>
-        </p:nvSpPr>
-        <p:spPr>
-          <a:xfrm>
-            <a:off x="1097280" y="3017520"/>
-            <a:ext cx="2834640" cy="548640"/>
-          </a:xfrm>
-          <a:prstGeom prst="rect">
-            <a:avLst/>
-          </a:prstGeom>
-          <a:noFill/>
-        </p:spPr>
-        <p:txBody>
-          <a:bodyPr wrap="square">
-            <a:spAutoFit/>
-          </a:bodyPr>
-          <a:lstStyle/>
-          <a:p>
-            <a:pPr algn="ctr">
-              <a:defRPr sz="2800" b="1">
-                <a:solidFill>
-                  <a:srgbClr val="070A40"/>
-                </a:solidFill>
-                <a:latin typeface="Arial"/>
-              </a:defRPr>
-            </a:pPr>
-            <a:r>
-              <a:rPr sz="2800" b="1">
-                <a:solidFill>
-                  <a:srgbClr val="070A40"/>
-                </a:solidFill>
-                <a:latin typeface="Arial"/>
-              </a:rPr>
-              <a:t>Flagship</a:t>
-            </a:r>
-          </a:p>
-        </p:txBody>
-      </p:sp>
-      <p:sp>
-        <p:nvSpPr>
-          <p:cNvPr id="12" name="TextBox 11"/>
-          <p:cNvSpPr txBox="1"/>
-          <p:nvPr/>
-        </p:nvSpPr>
-        <p:spPr>
-          <a:xfrm>
-            <a:off x="1097280" y="3566160"/>
-            <a:ext cx="2834640" cy="365760"/>
-          </a:xfrm>
-          <a:prstGeom prst="rect">
-            <a:avLst/>
-          </a:prstGeom>
-          <a:noFill/>
-        </p:spPr>
-        <p:txBody>
-          <a:bodyPr wrap="square">
-            <a:spAutoFit/>
-          </a:bodyPr>
-          <a:lstStyle/>
-          <a:p>
-            <a:pPr algn="ctr">
-              <a:defRPr sz="1200" b="0">
-                <a:solidFill>
-                  <a:srgbClr val="070A40"/>
-                </a:solidFill>
-                <a:latin typeface="Arial"/>
-              </a:defRPr>
-            </a:pPr>
-            <a:r>
-              <a:rPr sz="1200" b="0">
-                <a:solidFill>
-                  <a:srgbClr val="070A40"/>
-                </a:solidFill>
-                <a:latin typeface="Arial"/>
-              </a:rPr>
-              <a:t>Offers</a:t>
-            </a:r>
-          </a:p>
-        </p:txBody>
-      </p:sp>
-      <p:sp>
-        <p:nvSpPr>
-          <p:cNvPr id="13" name="Rounded Rectangle 12"/>
-          <p:cNvSpPr/>
-          <p:nvPr/>
-        </p:nvSpPr>
-        <p:spPr>
-          <a:xfrm>
-            <a:off x="4572000" y="2834640"/>
-            <a:ext cx="3200400" cy="1280160"/>
-          </a:xfrm>
-          <a:prstGeom prst="roundRect">
-            <a:avLst/>
-          </a:prstGeom>
-          <a:solidFill>
-            <a:srgbClr val="F2F2F2"/>
-          </a:solidFill>
-          <a:ln>
-            <a:noFill/>
-          </a:ln>
-        </p:spPr>
-        <p:style>
-          <a:lnRef idx="1">
-            <a:schemeClr val="accent1"/>
-          </a:lnRef>
-          <a:fillRef idx="3">
-            <a:schemeClr val="accent1"/>
-          </a:fillRef>
-          <a:effectRef idx="2">
-            <a:schemeClr val="accent1"/>
-          </a:effectRef>
-          <a:fontRef idx="minor">
-            <a:schemeClr val="lt1"/>
-          </a:fontRef>
-        </p:style>
-        <p:txBody>
-          <a:bodyPr rtlCol="0" anchor="ctr"/>
-          <a:lstStyle/>
-          <a:p>
-            <a:pPr algn="ctr"/>
-          </a:p>
-        </p:txBody>
-      </p:sp>
-      <p:sp>
-        <p:nvSpPr>
-          <p:cNvPr id="14" name="TextBox 13"/>
-          <p:cNvSpPr txBox="1"/>
-          <p:nvPr/>
-        </p:nvSpPr>
-        <p:spPr>
-          <a:xfrm>
-            <a:off x="4754880" y="3017520"/>
-            <a:ext cx="2834640" cy="548640"/>
-          </a:xfrm>
-          <a:prstGeom prst="rect">
-            <a:avLst/>
-          </a:prstGeom>
-          <a:noFill/>
-        </p:spPr>
-        <p:txBody>
-          <a:bodyPr wrap="square">
-            <a:spAutoFit/>
-          </a:bodyPr>
-          <a:lstStyle/>
-          <a:p>
-            <a:pPr algn="ctr">
-              <a:defRPr sz="2800" b="1">
-                <a:solidFill>
-                  <a:srgbClr val="070A40"/>
-                </a:solidFill>
-                <a:latin typeface="Arial"/>
-              </a:defRPr>
-            </a:pPr>
-            <a:r>
-              <a:rPr sz="2800" b="1">
-                <a:solidFill>
-                  <a:srgbClr val="070A40"/>
-                </a:solidFill>
-                <a:latin typeface="Arial"/>
-              </a:rPr>
-              <a:t>Products</a:t>
-            </a:r>
-          </a:p>
-        </p:txBody>
-      </p:sp>
-      <p:sp>
-        <p:nvSpPr>
-          <p:cNvPr id="15" name="TextBox 14"/>
-          <p:cNvSpPr txBox="1"/>
-          <p:nvPr/>
-        </p:nvSpPr>
-        <p:spPr>
-          <a:xfrm>
-            <a:off x="4754880" y="3566160"/>
-            <a:ext cx="2834640" cy="365760"/>
-          </a:xfrm>
-          <a:prstGeom prst="rect">
-            <a:avLst/>
-          </a:prstGeom>
-          <a:noFill/>
-        </p:spPr>
-        <p:txBody>
-          <a:bodyPr wrap="square">
-            <a:spAutoFit/>
-          </a:bodyPr>
-          <a:lstStyle/>
-          <a:p>
-            <a:pPr algn="ctr">
-              <a:defRPr sz="1200" b="0">
-                <a:solidFill>
-                  <a:srgbClr val="070A40"/>
-                </a:solidFill>
-                <a:latin typeface="Arial"/>
-              </a:defRPr>
-            </a:pPr>
-            <a:r>
-              <a:rPr sz="1200" b="0">
-                <a:solidFill>
-                  <a:srgbClr val="070A40"/>
-                </a:solidFill>
-                <a:latin typeface="Arial"/>
-              </a:rPr>
-              <a:t>Priced</a:t>
-            </a:r>
-          </a:p>
-        </p:txBody>
-      </p:sp>
-      <p:sp>
-        <p:nvSpPr>
-          <p:cNvPr id="16" name="TextBox 15"/>
-          <p:cNvSpPr txBox="1"/>
-          <p:nvPr/>
-        </p:nvSpPr>
-        <p:spPr>
-          <a:xfrm>
-            <a:off x="731520" y="4572000"/>
-            <a:ext cx="7772400" cy="1828800"/>
-          </a:xfrm>
-          <a:prstGeom prst="rect">
-            <a:avLst/>
-          </a:prstGeom>
-          <a:noFill/>
-        </p:spPr>
-        <p:txBody>
-          <a:bodyPr wrap="square">
-            <a:spAutoFit/>
-          </a:bodyPr>
-          <a:lstStyle/>
-          <a:p>
-            <a:pPr>
-              <a:spcAft>
-                <a:spcPts val="600"/>
-              </a:spcAft>
-              <a:defRPr sz="1200">
-                <a:solidFill>
-                  <a:srgbClr val="070A40"/>
-                </a:solidFill>
-                <a:latin typeface="Arial"/>
-              </a:defRPr>
-            </a:pPr>
-            <a:r>
-              <a:rPr sz="1200">
-                <a:solidFill>
-                  <a:srgbClr val="070A40"/>
-                </a:solidFill>
-                <a:latin typeface="Arial"/>
-              </a:rPr>
-              <a:t>Key Milestones:</a:t>
-            </a:r>
-          </a:p>
-          <a:p>
-            <a:pPr>
-              <a:spcAft>
-                <a:spcPts val="600"/>
-              </a:spcAft>
-              <a:defRPr sz="1200">
-                <a:solidFill>
-                  <a:srgbClr val="070A40"/>
-                </a:solidFill>
-                <a:latin typeface="Arial"/>
-              </a:defRPr>
-            </a:pPr>
-            <a:r>
-              <a:rPr sz="1200">
-                <a:solidFill>
-                  <a:srgbClr val="070A40"/>
-                </a:solidFill>
-                <a:latin typeface="Arial"/>
-              </a:rPr>
-              <a:t>  •  Platform bootstrapped; core architecture shipped</a:t>
-            </a:r>
-          </a:p>
-          <a:p>
-            <a:pPr>
-              <a:spcAft>
-                <a:spcPts val="600"/>
-              </a:spcAft>
-              <a:defRPr sz="1200">
-                <a:solidFill>
-                  <a:srgbClr val="070A40"/>
-                </a:solidFill>
-                <a:latin typeface="Arial"/>
-              </a:defRPr>
-            </a:pPr>
-            <a:r>
-              <a:rPr sz="1200">
-                <a:solidFill>
-                  <a:srgbClr val="070A40"/>
-                </a:solidFill>
-                <a:latin typeface="Arial"/>
-              </a:rPr>
-              <a:t>  •  Flagship offers priced &amp; governance gates ratified</a:t>
-            </a:r>
-          </a:p>
-          <a:p>
-            <a:pPr>
-              <a:spcAft>
-                <a:spcPts val="600"/>
-              </a:spcAft>
-              <a:defRPr sz="1200">
-                <a:solidFill>
-                  <a:srgbClr val="070A40"/>
-                </a:solidFill>
-                <a:latin typeface="Arial"/>
-              </a:defRPr>
-            </a:pPr>
-            <a:r>
-              <a:rPr sz="1200">
-                <a:solidFill>
-                  <a:srgbClr val="070A40"/>
-                </a:solidFill>
-                <a:latin typeface="Arial"/>
-              </a:rPr>
-              <a:t>  •  Corporate Blueprint adopted; capital guidance signed</a:t>
-            </a:r>
-          </a:p>
-          <a:p>
-            <a:pPr>
-              <a:spcAft>
-                <a:spcPts val="600"/>
-              </a:spcAft>
-              <a:defRPr sz="1200">
-                <a:solidFill>
-                  <a:srgbClr val="070A40"/>
-                </a:solidFill>
-                <a:latin typeface="Arial"/>
-              </a:defRPr>
-            </a:pPr>
-            <a:r>
-              <a:rPr sz="1200">
-                <a:solidFill>
-                  <a:srgbClr val="070A40"/>
-                </a:solidFill>
-                <a:latin typeface="Arial"/>
-              </a:rPr>
-              <a:t>  •  Automated tests passing; linting clean</a:t>
+            <a:pPr algn="r">
+              <a:defRPr sz="1200" b="1">
+                <a:solidFill>
+                  <a:srgbClr val="070A40"/>
+                </a:solidFill>
+                <a:latin typeface="Arial"/>
+              </a:defRPr>
+            </a:pPr>
+            <a:r>
+              <a:rPr sz="1200" b="1">
+                <a:solidFill>
+                  <a:srgbClr val="070A40"/>
+                </a:solidFill>
+                <a:latin typeface="Arial"/>
+              </a:rPr>
+              <a:t>INTERNAL DRAFT — NOT FOR EXTERNAL DISTRIBUTION</a:t>
             </a:r>
           </a:p>
         </p:txBody>
@@ -8012,7 +9242,7 @@
         <p:spPr>
           <a:xfrm>
             <a:off x="457200" y="365760"/>
-            <a:ext cx="8229600" cy="548640"/>
+            <a:ext cx="8229600" cy="640080"/>
           </a:xfrm>
           <a:prstGeom prst="rect">
             <a:avLst/>
@@ -8040,7 +9270,7 @@
                 </a:solidFill>
                 <a:latin typeface="Arial"/>
               </a:rPr>
-              <a:t>COMPETITIVE LANDSCAPE</a:t>
+              <a:t>TEAM</a:t>
             </a:r>
           </a:p>
         </p:txBody>
@@ -8053,8 +9283,50 @@
         </p:nvSpPr>
         <p:spPr>
           <a:xfrm>
-            <a:off x="731520" y="1097280"/>
-            <a:ext cx="7772400" cy="5029200"/>
+            <a:off x="502920" y="1051560"/>
+            <a:ext cx="3931920" cy="365760"/>
+          </a:xfrm>
+          <a:prstGeom prst="rect">
+            <a:avLst/>
+          </a:prstGeom>
+          <a:noFill/>
+        </p:spPr>
+        <p:txBody>
+          <a:bodyPr wrap="square">
+            <a:spAutoFit/>
+          </a:bodyPr>
+          <a:lstStyle/>
+          <a:p>
+            <a:pPr algn="l">
+              <a:defRPr sz="1600" b="1">
+                <a:solidFill>
+                  <a:srgbClr val="070A40"/>
+                </a:solidFill>
+                <a:latin typeface="Arial"/>
+              </a:defRPr>
+            </a:pPr>
+            <a:r>
+              <a:rPr sz="1600" b="1">
+                <a:solidFill>
+                  <a:srgbClr val="070A40"/>
+                </a:solidFill>
+                <a:latin typeface="Arial"/>
+              </a:rPr>
+              <a:t>Leadership</a:t>
+            </a:r>
+          </a:p>
+        </p:txBody>
+      </p:sp>
+      <p:sp>
+        <p:nvSpPr>
+          <p:cNvPr id="5" name="TextBox 4"/>
+          <p:cNvSpPr txBox="1"/>
+          <p:nvPr/>
+        </p:nvSpPr>
+        <p:spPr>
+          <a:xfrm>
+            <a:off x="502920" y="1508760"/>
+            <a:ext cx="3977639" cy="4023360"/>
           </a:xfrm>
           <a:prstGeom prst="rect">
             <a:avLst/>
@@ -8085,7 +9357,29 @@
                 </a:solidFill>
                 <a:latin typeface="Arial"/>
               </a:rPr>
-              <a:t>Direct Competitors:</a:t>
+              <a:t>Jack Mlusu — Founder &amp; CEO</a:t>
+            </a:r>
+          </a:p>
+          <a:p>
+            <a:pPr marL="402336" indent="-201168">
+              <a:spcAft>
+                <a:spcPts val="600"/>
+              </a:spcAft>
+              <a:defRPr sz="1200">
+                <a:solidFill>
+                  <a:srgbClr val="070A40"/>
+                </a:solidFill>
+                <a:latin typeface="Arial"/>
+              </a:defRPr>
+            </a:pPr>
+            <a:r>
+              <a:rPr sz="1200">
+                <a:solidFill>
+                  <a:srgbClr val="070A40"/>
+                </a:solidFill>
+                <a:latin typeface="Arial"/>
+              </a:rPr>
+              <a:t>  Builder-operator; runs the company on the platform it sells</a:t>
             </a:r>
           </a:p>
           <a:p>
@@ -8100,15 +9394,6 @@
                 <a:latin typeface="Arial"/>
               </a:defRPr>
             </a:pPr>
-            <a:r>
-              <a:rPr sz="1200">
-                <a:solidFill>
-                  <a:srgbClr val="070A40"/>
-                </a:solidFill>
-                <a:latin typeface="Arial"/>
-              </a:rPr>
-              <a:t>  •  Agent frameworks (LangGraph, CrewAI) — dev tools, no org layer or governance</a:t>
-            </a:r>
           </a:p>
           <a:p>
             <a:pPr>
@@ -8129,7 +9414,29 @@
                 </a:solidFill>
                 <a:latin typeface="Arial"/>
               </a:rPr>
-              <a:t>  •  Workflow automation (n8n, Zapier) — task pipelines, not multi-agent organizations</a:t>
+              <a:t>AI Executive Cabinet</a:t>
+            </a:r>
+          </a:p>
+          <a:p>
+            <a:pPr marL="402336" indent="-201168">
+              <a:spcAft>
+                <a:spcPts val="600"/>
+              </a:spcAft>
+              <a:defRPr sz="1200">
+                <a:solidFill>
+                  <a:srgbClr val="070A40"/>
+                </a:solidFill>
+                <a:latin typeface="Arial"/>
+              </a:defRPr>
+            </a:pPr>
+            <a:r>
+              <a:rPr sz="1200">
+                <a:solidFill>
+                  <a:srgbClr val="070A40"/>
+                </a:solidFill>
+                <a:latin typeface="Arial"/>
+              </a:rPr>
+              <a:t>  CTO, CFO, CMO, CLO, CSO, COO, CAIO — operating agents under human approval gates</a:t>
             </a:r>
           </a:p>
           <a:p>
@@ -8144,15 +9451,6 @@
                 <a:latin typeface="Arial"/>
               </a:defRPr>
             </a:pPr>
-            <a:r>
-              <a:rPr sz="1200">
-                <a:solidFill>
-                  <a:srgbClr val="070A40"/>
-                </a:solidFill>
-                <a:latin typeface="Arial"/>
-              </a:rPr>
-              <a:t>  •  Single-assistant SaaS (ChatGPT Business, Copilot) — no role hierarchy or cost control</a:t>
-            </a:r>
           </a:p>
           <a:p>
             <a:pPr>
@@ -8166,6 +9464,190 @@
                 <a:latin typeface="Arial"/>
               </a:defRPr>
             </a:pPr>
+            <a:r>
+              <a:rPr sz="1200">
+                <a:solidFill>
+                  <a:srgbClr val="070A40"/>
+                </a:solidFill>
+                <a:latin typeface="Arial"/>
+              </a:rPr>
+              <a:t>Board of Directors</a:t>
+            </a:r>
+          </a:p>
+          <a:p>
+            <a:pPr marL="402336" indent="-201168">
+              <a:spcAft>
+                <a:spcPts val="600"/>
+              </a:spcAft>
+              <a:defRPr sz="1200">
+                <a:solidFill>
+                  <a:srgbClr val="070A40"/>
+                </a:solidFill>
+                <a:latin typeface="Arial"/>
+              </a:defRPr>
+            </a:pPr>
+            <a:r>
+              <a:rPr sz="1200">
+                <a:solidFill>
+                  <a:srgbClr val="070A40"/>
+                </a:solidFill>
+                <a:latin typeface="Arial"/>
+              </a:rPr>
+              <a:t>  Standing committees: Strategy, Finance, Risk, Technology, Product, Customer, Governance</a:t>
+            </a:r>
+          </a:p>
+        </p:txBody>
+      </p:sp>
+      <p:sp>
+        <p:nvSpPr>
+          <p:cNvPr id="6" name="TextBox 5"/>
+          <p:cNvSpPr txBox="1"/>
+          <p:nvPr/>
+        </p:nvSpPr>
+        <p:spPr>
+          <a:xfrm>
+            <a:off x="4754880" y="1051560"/>
+            <a:ext cx="3931920" cy="365760"/>
+          </a:xfrm>
+          <a:prstGeom prst="rect">
+            <a:avLst/>
+          </a:prstGeom>
+          <a:noFill/>
+        </p:spPr>
+        <p:txBody>
+          <a:bodyPr wrap="square">
+            <a:spAutoFit/>
+          </a:bodyPr>
+          <a:lstStyle/>
+          <a:p>
+            <a:pPr algn="l">
+              <a:defRPr sz="1600" b="1">
+                <a:solidFill>
+                  <a:srgbClr val="E63946"/>
+                </a:solidFill>
+                <a:latin typeface="Arial"/>
+              </a:defRPr>
+            </a:pPr>
+            <a:r>
+              <a:rPr sz="1600" b="1">
+                <a:solidFill>
+                  <a:srgbClr val="E63946"/>
+                </a:solidFill>
+                <a:latin typeface="Arial"/>
+              </a:rPr>
+              <a:t>Hiring with this raise</a:t>
+            </a:r>
+          </a:p>
+        </p:txBody>
+      </p:sp>
+      <p:sp>
+        <p:nvSpPr>
+          <p:cNvPr id="7" name="TextBox 6"/>
+          <p:cNvSpPr txBox="1"/>
+          <p:nvPr/>
+        </p:nvSpPr>
+        <p:spPr>
+          <a:xfrm>
+            <a:off x="4754880" y="1508760"/>
+            <a:ext cx="3977639" cy="3657600"/>
+          </a:xfrm>
+          <a:prstGeom prst="rect">
+            <a:avLst/>
+          </a:prstGeom>
+          <a:noFill/>
+        </p:spPr>
+        <p:txBody>
+          <a:bodyPr wrap="square">
+            <a:spAutoFit/>
+          </a:bodyPr>
+          <a:lstStyle/>
+          <a:p>
+            <a:pPr marL="219456" indent="-219456">
+              <a:spcAft>
+                <a:spcPts val="600"/>
+              </a:spcAft>
+              <a:defRPr sz="1200">
+                <a:solidFill>
+                  <a:srgbClr val="070A40"/>
+                </a:solidFill>
+                <a:latin typeface="Arial"/>
+              </a:defRPr>
+            </a:pPr>
+            <a:r>
+              <a:rPr sz="1200">
+                <a:solidFill>
+                  <a:srgbClr val="070A40"/>
+                </a:solidFill>
+                <a:latin typeface="Arial"/>
+              </a:rPr>
+              <a:t>•  Platform Licensing Sales Lead — priority one</a:t>
+            </a:r>
+          </a:p>
+          <a:p>
+            <a:pPr marL="219456" indent="-219456">
+              <a:spcAft>
+                <a:spcPts val="600"/>
+              </a:spcAft>
+              <a:defRPr sz="1200">
+                <a:solidFill>
+                  <a:srgbClr val="070A40"/>
+                </a:solidFill>
+                <a:latin typeface="Arial"/>
+              </a:defRPr>
+            </a:pPr>
+            <a:r>
+              <a:rPr sz="1200">
+                <a:solidFill>
+                  <a:srgbClr val="070A40"/>
+                </a:solidFill>
+                <a:latin typeface="Arial"/>
+              </a:rPr>
+              <a:t>•  Delivery Lead for chatbot and compliance offers</a:t>
+            </a:r>
+          </a:p>
+          <a:p>
+            <a:pPr marL="219456" indent="-219456">
+              <a:spcAft>
+                <a:spcPts val="600"/>
+              </a:spcAft>
+              <a:defRPr sz="1200">
+                <a:solidFill>
+                  <a:srgbClr val="070A40"/>
+                </a:solidFill>
+                <a:latin typeface="Arial"/>
+              </a:defRPr>
+            </a:pPr>
+            <a:r>
+              <a:rPr sz="1200">
+                <a:solidFill>
+                  <a:srgbClr val="070A40"/>
+                </a:solidFill>
+                <a:latin typeface="Arial"/>
+              </a:rPr>
+              <a:t>•  Compliance Officer</a:t>
+            </a:r>
+          </a:p>
+          <a:p>
+            <a:pPr marL="219456" indent="-219456">
+              <a:spcAft>
+                <a:spcPts val="600"/>
+              </a:spcAft>
+              <a:defRPr sz="1200">
+                <a:solidFill>
+                  <a:srgbClr val="070A40"/>
+                </a:solidFill>
+                <a:latin typeface="Arial"/>
+              </a:defRPr>
+            </a:pPr>
+            <a:r>
+              <a:rPr sz="1200">
+                <a:solidFill>
+                  <a:srgbClr val="070A40"/>
+                </a:solidFill>
+                <a:latin typeface="Arial"/>
+              </a:rPr>
+              <a:t>•  Developer Relations Engineer</a:t>
+            </a:r>
           </a:p>
           <a:p>
             <a:pPr>
@@ -8179,15 +9661,6 @@
                 <a:latin typeface="Arial"/>
               </a:defRPr>
             </a:pPr>
-            <a:r>
-              <a:rPr sz="1200">
-                <a:solidFill>
-                  <a:srgbClr val="070A40"/>
-                </a:solidFill>
-                <a:latin typeface="Arial"/>
-              </a:rPr>
-              <a:t>Indirect Alternatives:</a:t>
-            </a:r>
           </a:p>
           <a:p>
             <a:pPr>
@@ -8208,196 +9681,134 @@
                 </a:solidFill>
                 <a:latin typeface="Arial"/>
               </a:rPr>
-              <a:t>  •  Custom-built agent frameworks (high engineering cost)</a:t>
-            </a:r>
-          </a:p>
-          <a:p>
-            <a:pPr>
-              <a:spcAft>
-                <a:spcPts val="600"/>
-              </a:spcAft>
-              <a:defRPr sz="1200">
-                <a:solidFill>
-                  <a:srgbClr val="070A40"/>
-                </a:solidFill>
-                <a:latin typeface="Arial"/>
-              </a:defRPr>
-            </a:pPr>
-            <a:r>
-              <a:rPr sz="1200">
-                <a:solidFill>
-                  <a:srgbClr val="070A40"/>
-                </a:solidFill>
-                <a:latin typeface="Arial"/>
-              </a:rPr>
-              <a:t>  •  ChatGPT/Claude for single tasks (no orchestration)</a:t>
-            </a:r>
-          </a:p>
-          <a:p>
-            <a:pPr>
-              <a:spcAft>
-                <a:spcPts val="600"/>
-              </a:spcAft>
-              <a:defRPr sz="1200">
-                <a:solidFill>
-                  <a:srgbClr val="070A40"/>
-                </a:solidFill>
-                <a:latin typeface="Arial"/>
-              </a:defRPr>
-            </a:pPr>
-            <a:r>
-              <a:rPr sz="1200">
-                <a:solidFill>
-                  <a:srgbClr val="070A40"/>
-                </a:solidFill>
-                <a:latin typeface="Arial"/>
-              </a:rPr>
-              <a:t>  •  Enterprise ML platforms (overkill for most orgs)</a:t>
-            </a:r>
-          </a:p>
-          <a:p>
-            <a:pPr>
-              <a:spcAft>
-                <a:spcPts val="600"/>
-              </a:spcAft>
-              <a:defRPr sz="1200">
-                <a:solidFill>
-                  <a:srgbClr val="070A40"/>
-                </a:solidFill>
-                <a:latin typeface="Arial"/>
-              </a:defRPr>
-            </a:pPr>
-          </a:p>
-          <a:p>
-            <a:pPr>
-              <a:spcAft>
-                <a:spcPts val="600"/>
-              </a:spcAft>
-              <a:defRPr sz="1200">
-                <a:solidFill>
-                  <a:srgbClr val="070A40"/>
-                </a:solidFill>
-                <a:latin typeface="Arial"/>
-              </a:defRPr>
-            </a:pPr>
-            <a:r>
-              <a:rPr sz="1200">
-                <a:solidFill>
-                  <a:srgbClr val="070A40"/>
-                </a:solidFill>
-                <a:latin typeface="Arial"/>
-              </a:rPr>
-              <a:t>Our Differentiation:</a:t>
-            </a:r>
-          </a:p>
-          <a:p>
-            <a:pPr>
-              <a:spcAft>
-                <a:spcPts val="600"/>
-              </a:spcAft>
-              <a:defRPr sz="1200">
-                <a:solidFill>
-                  <a:srgbClr val="070A40"/>
-                </a:solidFill>
-                <a:latin typeface="Arial"/>
-              </a:defRPr>
-            </a:pPr>
-            <a:r>
-              <a:rPr sz="1200">
-                <a:solidFill>
-                  <a:srgbClr val="070A40"/>
-                </a:solidFill>
-                <a:latin typeface="Arial"/>
-              </a:rPr>
-              <a:t>  ✓  AI-native company structure (not just a tool)</a:t>
-            </a:r>
-          </a:p>
-          <a:p>
-            <a:pPr>
-              <a:spcAft>
-                <a:spcPts val="600"/>
-              </a:spcAft>
-              <a:defRPr sz="1200">
-                <a:solidFill>
-                  <a:srgbClr val="070A40"/>
-                </a:solidFill>
-                <a:latin typeface="Arial"/>
-              </a:defRPr>
-            </a:pPr>
-            <a:r>
-              <a:rPr sz="1200">
-                <a:solidFill>
-                  <a:srgbClr val="070A40"/>
-                </a:solidFill>
-                <a:latin typeface="Arial"/>
-              </a:rPr>
-              <a:t>  ✓  Built-in cost transparency &amp; budget enforcement</a:t>
-            </a:r>
-          </a:p>
-          <a:p>
-            <a:pPr>
-              <a:spcAft>
-                <a:spcPts val="600"/>
-              </a:spcAft>
-              <a:defRPr sz="1200">
-                <a:solidFill>
-                  <a:srgbClr val="070A40"/>
-                </a:solidFill>
-                <a:latin typeface="Arial"/>
-              </a:defRPr>
-            </a:pPr>
-            <a:r>
-              <a:rPr sz="1200">
-                <a:solidFill>
-                  <a:srgbClr val="070A40"/>
-                </a:solidFill>
-                <a:latin typeface="Arial"/>
-              </a:rPr>
-              <a:t>  ✓  Human-in-the-loop safety gates</a:t>
-            </a:r>
-          </a:p>
-          <a:p>
-            <a:pPr>
-              <a:spcAft>
-                <a:spcPts val="600"/>
-              </a:spcAft>
-              <a:defRPr sz="1200">
-                <a:solidFill>
-                  <a:srgbClr val="070A40"/>
-                </a:solidFill>
-                <a:latin typeface="Arial"/>
-              </a:defRPr>
-            </a:pPr>
-            <a:r>
-              <a:rPr sz="1200">
-                <a:solidFill>
-                  <a:srgbClr val="070A40"/>
-                </a:solidFill>
-                <a:latin typeface="Arial"/>
-              </a:rPr>
-              <a:t>  ✓  Multi-provider with automatic fallback</a:t>
-            </a:r>
-          </a:p>
-          <a:p>
-            <a:pPr>
-              <a:spcAft>
-                <a:spcPts val="600"/>
-              </a:spcAft>
-              <a:defRPr sz="1200">
-                <a:solidFill>
-                  <a:srgbClr val="070A40"/>
-                </a:solidFill>
-                <a:latin typeface="Arial"/>
-              </a:defRPr>
-            </a:pPr>
-            <a:r>
-              <a:rPr sz="1200">
-                <a:solidFill>
-                  <a:srgbClr val="070A40"/>
-                </a:solidFill>
-                <a:latin typeface="Arial"/>
-              </a:rPr>
-              <a:t>  ✓  Local-first option (Ollama) for zero-cost inference</a:t>
+              <a:t>Human hires, not agent seats: clients buy from people.</a:t>
+            </a:r>
+          </a:p>
+        </p:txBody>
+      </p:sp>
+      <p:sp>
+        <p:nvSpPr>
+          <p:cNvPr id="8" name="Rounded Rectangle 7"/>
+          <p:cNvSpPr/>
+          <p:nvPr/>
+        </p:nvSpPr>
+        <p:spPr>
+          <a:xfrm>
+            <a:off x="502920" y="4709160"/>
+            <a:ext cx="8138160" cy="960120"/>
+          </a:xfrm>
+          <a:prstGeom prst="roundRect">
+            <a:avLst/>
+          </a:prstGeom>
+          <a:solidFill>
+            <a:srgbClr val="F2F2F2"/>
+          </a:solidFill>
+          <a:ln>
+            <a:noFill/>
+          </a:ln>
+        </p:spPr>
+        <p:style>
+          <a:lnRef idx="1">
+            <a:schemeClr val="accent1"/>
+          </a:lnRef>
+          <a:fillRef idx="3">
+            <a:schemeClr val="accent1"/>
+          </a:fillRef>
+          <a:effectRef idx="2">
+            <a:schemeClr val="accent1"/>
+          </a:effectRef>
+          <a:fontRef idx="minor">
+            <a:schemeClr val="lt1"/>
+          </a:fontRef>
+        </p:style>
+        <p:txBody>
+          <a:bodyPr rtlCol="0" anchor="ctr"/>
+          <a:lstStyle/>
+          <a:p>
+            <a:pPr algn="ctr"/>
+          </a:p>
+        </p:txBody>
+      </p:sp>
+      <p:sp>
+        <p:nvSpPr>
+          <p:cNvPr id="9" name="TextBox 8"/>
+          <p:cNvSpPr txBox="1"/>
+          <p:nvPr/>
+        </p:nvSpPr>
+        <p:spPr>
+          <a:xfrm>
+            <a:off x="731520" y="4873752"/>
+            <a:ext cx="7680960" cy="685800"/>
+          </a:xfrm>
+          <a:prstGeom prst="rect">
+            <a:avLst/>
+          </a:prstGeom>
+          <a:noFill/>
+        </p:spPr>
+        <p:txBody>
+          <a:bodyPr wrap="square">
+            <a:spAutoFit/>
+          </a:bodyPr>
+          <a:lstStyle/>
+          <a:p>
+            <a:pPr algn="l">
+              <a:defRPr sz="1200" b="0">
+                <a:solidFill>
+                  <a:srgbClr val="070A40"/>
+                </a:solidFill>
+                <a:latin typeface="Arial"/>
+              </a:defRPr>
+            </a:pPr>
+            <a:r>
+              <a:rPr sz="1200" b="0">
+                <a:solidFill>
+                  <a:srgbClr val="070A40"/>
+                </a:solidFill>
+                <a:latin typeface="Arial"/>
+              </a:rPr>
+              <a:t>The operating model already exists: a five-tier approval matrix, named escalation routes and an audit trail, applied to agents as well as people. The hiring plan adds the human roles that sell and deliver.</a:t>
+            </a:r>
+          </a:p>
+        </p:txBody>
+      </p:sp>
+      <p:sp>
+        <p:nvSpPr>
+          <p:cNvPr id="10" name="TextBox 9"/>
+          <p:cNvSpPr txBox="1"/>
+          <p:nvPr/>
+        </p:nvSpPr>
+        <p:spPr>
+          <a:xfrm>
+            <a:off x="457200" y="6510528"/>
+            <a:ext cx="8229600" cy="274320"/>
+          </a:xfrm>
+          <a:prstGeom prst="rect">
+            <a:avLst/>
+          </a:prstGeom>
+          <a:noFill/>
+        </p:spPr>
+        <p:txBody>
+          <a:bodyPr wrap="square">
+            <a:spAutoFit/>
+          </a:bodyPr>
+          <a:lstStyle/>
+          <a:p>
+            <a:pPr algn="r">
+              <a:defRPr sz="1200" b="1">
+                <a:solidFill>
+                  <a:srgbClr val="070A40"/>
+                </a:solidFill>
+                <a:latin typeface="Arial"/>
+              </a:defRPr>
+            </a:pPr>
+            <a:r>
+              <a:rPr sz="1200" b="1">
+                <a:solidFill>
+                  <a:srgbClr val="070A40"/>
+                </a:solidFill>
+                <a:latin typeface="Arial"/>
+              </a:rPr>
+              <a:t>INTERNAL DRAFT — NOT FOR EXTERNAL DISTRIBUTION</a:t>
             </a:r>
           </a:p>
         </p:txBody>

--- a/static/brand/templates/pitch-deck.pptx
+++ b/static/brand/templates/pitch-deck.pptx
@@ -3546,8 +3546,8 @@
         </p:nvSpPr>
         <p:spPr>
           <a:xfrm>
-            <a:off x="914400" y="1417320"/>
-            <a:ext cx="7315200" cy="502920"/>
+            <a:off x="914400" y="1371600"/>
+            <a:ext cx="7315200" cy="731520"/>
           </a:xfrm>
           <a:prstGeom prst="rect">
             <a:avLst/>
@@ -3561,7 +3561,7 @@
           <a:lstStyle/>
           <a:p>
             <a:pPr algn="ctr">
-              <a:defRPr sz="2400" b="0">
+              <a:defRPr sz="3600" b="1">
                 <a:solidFill>
                   <a:srgbClr val="00BFFF"/>
                 </a:solidFill>
@@ -3569,13 +3569,13 @@
               </a:defRPr>
             </a:pPr>
             <a:r>
-              <a:rPr sz="2400" b="0">
+              <a:rPr sz="3600" b="1">
                 <a:solidFill>
                   <a:srgbClr val="00BFFF"/>
                 </a:solidFill>
                 <a:latin typeface="Arial"/>
               </a:rPr>
-              <a:t>Raising seed capital</a:t>
+              <a:t>$650K</a:t>
             </a:r>
           </a:p>
         </p:txBody>
@@ -3588,8 +3588,8 @@
         </p:nvSpPr>
         <p:spPr>
           <a:xfrm>
-            <a:off x="914400" y="1965960"/>
-            <a:ext cx="7315200" cy="411480"/>
+            <a:off x="914400" y="2103120"/>
+            <a:ext cx="7315200" cy="365760"/>
           </a:xfrm>
           <a:prstGeom prst="rect">
             <a:avLst/>
@@ -3617,7 +3617,7 @@
                 </a:solidFill>
                 <a:latin typeface="Arial"/>
               </a:rPr>
-              <a:t>Amount, instrument and runway: pending board decision — not stated in this draft.</a:t>
+              <a:t>Seed round — instrument and runway not yet set.</a:t>
             </a:r>
           </a:p>
         </p:txBody>
@@ -3952,13 +3952,55 @@
       </p:sp>
       <p:sp>
         <p:nvSpPr>
-          <p:cNvPr id="11" name="Rectangle 10"/>
+          <p:cNvPr id="11" name="TextBox 10"/>
+          <p:cNvSpPr txBox="1"/>
+          <p:nvPr/>
+        </p:nvSpPr>
+        <p:spPr>
+          <a:xfrm>
+            <a:off x="914400" y="4572000"/>
+            <a:ext cx="7315200" cy="411480"/>
+          </a:xfrm>
+          <a:prstGeom prst="rect">
+            <a:avLst/>
+          </a:prstGeom>
+          <a:noFill/>
+        </p:spPr>
+        <p:txBody>
+          <a:bodyPr wrap="square">
+            <a:spAutoFit/>
+          </a:bodyPr>
+          <a:lstStyle/>
+          <a:p>
+            <a:pPr algn="ctr">
+              <a:defRPr sz="1200" b="1">
+                <a:solidFill>
+                  <a:srgbClr val="00BFFF"/>
+                </a:solidFill>
+                <a:latin typeface="Arial"/>
+              </a:defRPr>
+            </a:pPr>
+            <a:r>
+              <a:rPr sz="1200" b="1">
+                <a:solidFill>
+                  <a:srgbClr val="00BFFF"/>
+                </a:solidFill>
+                <a:latin typeface="Arial"/>
+              </a:rPr>
+              <a:t>Year-one target: $50-85K gross revenue. Exit ARR run-rate: $120K — not revenue.</a:t>
+            </a:r>
+          </a:p>
+        </p:txBody>
+      </p:sp>
+      <p:sp>
+        <p:nvSpPr>
+          <p:cNvPr id="12" name="Rectangle 11"/>
           <p:cNvSpPr/>
           <p:nvPr/>
         </p:nvSpPr>
         <p:spPr>
           <a:xfrm>
-            <a:off x="2286000" y="5074920"/>
+            <a:off x="2286000" y="5120640"/>
             <a:ext cx="4572000" cy="27432"/>
           </a:xfrm>
           <a:prstGeom prst="rect">
@@ -3995,7 +4037,7 @@
       </p:sp>
       <p:sp>
         <p:nvSpPr>
-          <p:cNvPr id="12" name="TextBox 11"/>
+          <p:cNvPr id="13" name="TextBox 12"/>
           <p:cNvSpPr txBox="1"/>
           <p:nvPr/>
         </p:nvSpPr>
@@ -4030,14 +4072,14 @@
                 </a:solidFill>
                 <a:latin typeface="Arial"/>
               </a:rPr>
-              <a:t>We are asking for a first institutional round to fund paying pilots across Offers A, B and C, and to make the four hires above.</a:t>
-            </a:r>
-          </a:p>
-        </p:txBody>
-      </p:sp>
-      <p:sp>
-        <p:nvSpPr>
-          <p:cNvPr id="13" name="TextBox 12"/>
+              <a:t>We are asking for $650K to fund paying pilots across Offers A, B and C, and to make the four hires above.</a:t>
+            </a:r>
+          </a:p>
+        </p:txBody>
+      </p:sp>
+      <p:sp>
+        <p:nvSpPr>
+          <p:cNvPr id="14" name="TextBox 13"/>
           <p:cNvSpPr txBox="1"/>
           <p:nvPr/>
         </p:nvSpPr>
@@ -6903,7 +6945,7 @@
                 </a:solidFill>
                 <a:latin typeface="Arial"/>
               </a:rPr>
-              <a:t>Bottom-up sizing: accounts we can actually reach with each offer, priced from our own rate card. Market totals are pending a cited report.</a:t>
+              <a:t>Bottom-up sizing from our own rate card. TAM and SAM are shown as open questions: we will not print a market total we cannot cite to a report.</a:t>
             </a:r>
           </a:p>
         </p:txBody>
@@ -6948,7 +6990,7 @@
                 </a:solidFill>
                 <a:latin typeface="Arial"/>
               </a:rPr>
-              <a:t>TAM:  Enterprises and consultancies adopting agentic AI operations</a:t>
+              <a:t>TAM / SAM:  Pending a cited report — not guessed</a:t>
             </a:r>
           </a:p>
           <a:p>
@@ -6970,29 +7012,7 @@
                 </a:solidFill>
                 <a:latin typeface="Arial"/>
               </a:rPr>
-              <a:t>SAM:  Mid-market firms in Malawi and SADC reachable from Lilongwe</a:t>
-            </a:r>
-          </a:p>
-          <a:p>
-            <a:pPr>
-              <a:spcAft>
-                <a:spcPts val="600"/>
-              </a:spcAft>
-              <a:defRPr sz="1400">
-                <a:solidFill>
-                  <a:srgbClr val="070A40"/>
-                </a:solidFill>
-                <a:latin typeface="Arial"/>
-              </a:defRPr>
-            </a:pPr>
-            <a:r>
-              <a:rPr sz="1400">
-                <a:solidFill>
-                  <a:srgbClr val="070A40"/>
-                </a:solidFill>
-                <a:latin typeface="Arial"/>
-              </a:rPr>
-              <a:t>SOM:  Clients we can serve in the next four quarters</a:t>
+              <a:t>SOM:  $44-85K — paid delivery we can staff in the next four quarters</a:t>
             </a:r>
           </a:p>
         </p:txBody>
@@ -7711,7 +7731,7 @@
                 </a:solidFill>
                 <a:latin typeface="Arial"/>
               </a:rPr>
-              <a:t>SaaS subscription — platform access</a:t>
+              <a:t>Platform licence — $2,000 setup + $200/mo support</a:t>
             </a:r>
           </a:p>
           <a:p>
@@ -7733,7 +7753,7 @@
                 </a:solidFill>
                 <a:latin typeface="Arial"/>
               </a:rPr>
-              <a:t>Usage — LLM pass-through plus margin</a:t>
+              <a:t>Firm licence — $15K/yr + $250/mo for consulting firms</a:t>
             </a:r>
           </a:p>
           <a:p>
@@ -7755,7 +7775,7 @@
                 </a:solidFill>
                 <a:latin typeface="Arial"/>
               </a:rPr>
-              <a:t>Enterprise — deployment, SLA, support</a:t>
+              <a:t>Delivery — implementation engagements, priced per engagement</a:t>
             </a:r>
           </a:p>
           <a:p>
@@ -7770,15 +7790,6 @@
                 <a:latin typeface="Arial"/>
               </a:defRPr>
             </a:pPr>
-            <a:r>
-              <a:rPr sz="1200">
-                <a:solidFill>
-                  <a:srgbClr val="070A40"/>
-                </a:solidFill>
-                <a:latin typeface="Arial"/>
-              </a:rPr>
-              <a:t>Services — implementation engagements</a:t>
-            </a:r>
           </a:p>
           <a:p>
             <a:pPr>
@@ -7792,19 +7803,6 @@
                 <a:latin typeface="Arial"/>
               </a:defRPr>
             </a:pPr>
-          </a:p>
-          <a:p>
-            <a:pPr>
-              <a:spcAft>
-                <a:spcPts val="600"/>
-              </a:spcAft>
-              <a:defRPr sz="1200">
-                <a:solidFill>
-                  <a:srgbClr val="070A40"/>
-                </a:solidFill>
-                <a:latin typeface="Arial"/>
-              </a:defRPr>
-            </a:pPr>
             <a:r>
               <a:rPr sz="1200">
                 <a:solidFill>
@@ -7834,7 +7832,7 @@
                 </a:solidFill>
                 <a:latin typeface="Arial"/>
               </a:rPr>
-              <a:t>  •  Gross margin — pending CFO model</a:t>
+              <a:t>  •  Gross margin — 70%+ platform, 55-60% services</a:t>
             </a:r>
           </a:p>
           <a:p>
@@ -7856,7 +7854,7 @@
                 </a:solidFill>
                 <a:latin typeface="Arial"/>
               </a:rPr>
-              <a:t>  •  LLM cost — pending CFO model</a:t>
+              <a:t>  •  LLM and infrastructure — ≤10% of revenue</a:t>
             </a:r>
           </a:p>
           <a:p>
@@ -7963,7 +7961,7 @@
                 </a:solidFill>
                 <a:latin typeface="Arial"/>
               </a:rPr>
-              <a:t>One product, three ways to buy it: a subscription for platform access, usage billed on top, and an implementation engagement where the client wants delivery as well as software. The same system runs this company.</a:t>
+              <a:t>Two licences and one service: a platform licence the client runs itself, a firm licence for agencies serving their own clients, and implementation work scoped per engagement. The same system runs this company — 20 departments, 89 AI agents, one Human CEO.</a:t>
             </a:r>
           </a:p>
         </p:txBody>
@@ -9414,7 +9412,7 @@
                 </a:solidFill>
                 <a:latin typeface="Arial"/>
               </a:rPr>
-              <a:t>AI Executive Cabinet</a:t>
+              <a:t>The org chart is generated, not hired.</a:t>
             </a:r>
           </a:p>
           <a:p>
@@ -9436,7 +9434,7 @@
                 </a:solidFill>
                 <a:latin typeface="Arial"/>
               </a:rPr>
-              <a:t>  CTO, CFO, CMO, CLO, CSO, COO, CAIO — operating agents under human approval gates</a:t>
+              <a:t>  Twenty departments exist as registry entries, staffed by agents under human approval gates — shown on the product slide, not claimed as a leadership team.</a:t>
             </a:r>
           </a:p>
           <a:p>
@@ -9471,29 +9469,7 @@
                 </a:solidFill>
                 <a:latin typeface="Arial"/>
               </a:rPr>
-              <a:t>Board of Directors</a:t>
-            </a:r>
-          </a:p>
-          <a:p>
-            <a:pPr marL="402336" indent="-201168">
-              <a:spcAft>
-                <a:spcPts val="600"/>
-              </a:spcAft>
-              <a:defRPr sz="1200">
-                <a:solidFill>
-                  <a:srgbClr val="070A40"/>
-                </a:solidFill>
-                <a:latin typeface="Arial"/>
-              </a:defRPr>
-            </a:pPr>
-            <a:r>
-              <a:rPr sz="1200">
-                <a:solidFill>
-                  <a:srgbClr val="070A40"/>
-                </a:solidFill>
-                <a:latin typeface="Arial"/>
-              </a:rPr>
-              <a:t>  Standing committees: Strategy, Finance, Risk, Technology, Product, Customer, Governance</a:t>
+              <a:t>No advisor, contractor or director is named without their written consent.</a:t>
             </a:r>
           </a:p>
         </p:txBody>

--- a/static/brand/templates/pitch-deck.pptx
+++ b/static/brand/templates/pitch-deck.pptx
@@ -3337,49 +3337,7 @@
                 </a:solidFill>
                 <a:latin typeface="Arial"/>
               </a:rPr>
-              <a:t>INTERNAL DRAFT — October 2026</a:t>
-            </a:r>
-          </a:p>
-        </p:txBody>
-      </p:sp>
-      <p:sp>
-        <p:nvSpPr>
-          <p:cNvPr id="8" name="TextBox 7"/>
-          <p:cNvSpPr txBox="1"/>
-          <p:nvPr/>
-        </p:nvSpPr>
-        <p:spPr>
-          <a:xfrm>
-            <a:off x="457200" y="6510528"/>
-            <a:ext cx="8229600" cy="274320"/>
-          </a:xfrm>
-          <a:prstGeom prst="rect">
-            <a:avLst/>
-          </a:prstGeom>
-          <a:noFill/>
-        </p:spPr>
-        <p:txBody>
-          <a:bodyPr wrap="square">
-            <a:spAutoFit/>
-          </a:bodyPr>
-          <a:lstStyle/>
-          <a:p>
-            <a:pPr algn="r">
-              <a:defRPr sz="1200" b="1">
-                <a:solidFill>
-                  <a:srgbClr val="00BFFF"/>
-                </a:solidFill>
-                <a:latin typeface="Arial"/>
-              </a:defRPr>
-            </a:pPr>
-            <a:r>
-              <a:rPr sz="1200" b="1">
-                <a:solidFill>
-                  <a:srgbClr val="00BFFF"/>
-                </a:solidFill>
-                <a:latin typeface="Arial"/>
-              </a:rPr>
-              <a:t>INTERNAL DRAFT — NOT FOR EXTERNAL DISTRIBUTION</a:t>
+              <a:t>INVESTOR PRESENTATION — October 2026</a:t>
             </a:r>
           </a:p>
         </p:txBody>
@@ -4077,48 +4035,6 @@
           </a:p>
         </p:txBody>
       </p:sp>
-      <p:sp>
-        <p:nvSpPr>
-          <p:cNvPr id="14" name="TextBox 13"/>
-          <p:cNvSpPr txBox="1"/>
-          <p:nvPr/>
-        </p:nvSpPr>
-        <p:spPr>
-          <a:xfrm>
-            <a:off x="457200" y="6510528"/>
-            <a:ext cx="8229600" cy="274320"/>
-          </a:xfrm>
-          <a:prstGeom prst="rect">
-            <a:avLst/>
-          </a:prstGeom>
-          <a:noFill/>
-        </p:spPr>
-        <p:txBody>
-          <a:bodyPr wrap="square">
-            <a:spAutoFit/>
-          </a:bodyPr>
-          <a:lstStyle/>
-          <a:p>
-            <a:pPr algn="r">
-              <a:defRPr sz="1200" b="1">
-                <a:solidFill>
-                  <a:srgbClr val="00BFFF"/>
-                </a:solidFill>
-                <a:latin typeface="Arial"/>
-              </a:defRPr>
-            </a:pPr>
-            <a:r>
-              <a:rPr sz="1200" b="1">
-                <a:solidFill>
-                  <a:srgbClr val="00BFFF"/>
-                </a:solidFill>
-                <a:latin typeface="Arial"/>
-              </a:rPr>
-              <a:t>INTERNAL DRAFT — NOT FOR EXTERNAL DISTRIBUTION</a:t>
-            </a:r>
-          </a:p>
-        </p:txBody>
-      </p:sp>
     </p:spTree>
   </p:cSld>
   <p:clrMapOvr>
@@ -4992,48 +4908,6 @@
           </a:p>
         </p:txBody>
       </p:sp>
-      <p:sp>
-        <p:nvSpPr>
-          <p:cNvPr id="22" name="TextBox 21"/>
-          <p:cNvSpPr txBox="1"/>
-          <p:nvPr/>
-        </p:nvSpPr>
-        <p:spPr>
-          <a:xfrm>
-            <a:off x="457200" y="6510528"/>
-            <a:ext cx="8229600" cy="274320"/>
-          </a:xfrm>
-          <a:prstGeom prst="rect">
-            <a:avLst/>
-          </a:prstGeom>
-          <a:noFill/>
-        </p:spPr>
-        <p:txBody>
-          <a:bodyPr wrap="square">
-            <a:spAutoFit/>
-          </a:bodyPr>
-          <a:lstStyle/>
-          <a:p>
-            <a:pPr algn="r">
-              <a:defRPr sz="1200" b="1">
-                <a:solidFill>
-                  <a:srgbClr val="070A40"/>
-                </a:solidFill>
-                <a:latin typeface="Arial"/>
-              </a:defRPr>
-            </a:pPr>
-            <a:r>
-              <a:rPr sz="1200" b="1">
-                <a:solidFill>
-                  <a:srgbClr val="070A40"/>
-                </a:solidFill>
-                <a:latin typeface="Arial"/>
-              </a:rPr>
-              <a:t>INTERNAL DRAFT — NOT FOR EXTERNAL DISTRIBUTION</a:t>
-            </a:r>
-          </a:p>
-        </p:txBody>
-      </p:sp>
     </p:spTree>
   </p:cSld>
   <p:clrMapOvr>
@@ -5363,48 +5237,6 @@
           </a:p>
         </p:txBody>
       </p:sp>
-      <p:sp>
-        <p:nvSpPr>
-          <p:cNvPr id="7" name="TextBox 6"/>
-          <p:cNvSpPr txBox="1"/>
-          <p:nvPr/>
-        </p:nvSpPr>
-        <p:spPr>
-          <a:xfrm>
-            <a:off x="457200" y="6510528"/>
-            <a:ext cx="8229600" cy="274320"/>
-          </a:xfrm>
-          <a:prstGeom prst="rect">
-            <a:avLst/>
-          </a:prstGeom>
-          <a:noFill/>
-        </p:spPr>
-        <p:txBody>
-          <a:bodyPr wrap="square">
-            <a:spAutoFit/>
-          </a:bodyPr>
-          <a:lstStyle/>
-          <a:p>
-            <a:pPr algn="r">
-              <a:defRPr sz="1200" b="1">
-                <a:solidFill>
-                  <a:srgbClr val="070A40"/>
-                </a:solidFill>
-                <a:latin typeface="Arial"/>
-              </a:defRPr>
-            </a:pPr>
-            <a:r>
-              <a:rPr sz="1200" b="1">
-                <a:solidFill>
-                  <a:srgbClr val="070A40"/>
-                </a:solidFill>
-                <a:latin typeface="Arial"/>
-              </a:rPr>
-              <a:t>INTERNAL DRAFT — NOT FOR EXTERNAL DISTRIBUTION</a:t>
-            </a:r>
-          </a:p>
-        </p:txBody>
-      </p:sp>
     </p:spTree>
   </p:cSld>
   <p:clrMapOvr>
@@ -6094,48 +5926,6 @@
           </a:p>
         </p:txBody>
       </p:sp>
-      <p:sp>
-        <p:nvSpPr>
-          <p:cNvPr id="15" name="TextBox 14"/>
-          <p:cNvSpPr txBox="1"/>
-          <p:nvPr/>
-        </p:nvSpPr>
-        <p:spPr>
-          <a:xfrm>
-            <a:off x="457200" y="6510528"/>
-            <a:ext cx="8229600" cy="274320"/>
-          </a:xfrm>
-          <a:prstGeom prst="rect">
-            <a:avLst/>
-          </a:prstGeom>
-          <a:noFill/>
-        </p:spPr>
-        <p:txBody>
-          <a:bodyPr wrap="square">
-            <a:spAutoFit/>
-          </a:bodyPr>
-          <a:lstStyle/>
-          <a:p>
-            <a:pPr algn="r">
-              <a:defRPr sz="1200" b="1">
-                <a:solidFill>
-                  <a:srgbClr val="070A40"/>
-                </a:solidFill>
-                <a:latin typeface="Arial"/>
-              </a:defRPr>
-            </a:pPr>
-            <a:r>
-              <a:rPr sz="1200" b="1">
-                <a:solidFill>
-                  <a:srgbClr val="070A40"/>
-                </a:solidFill>
-                <a:latin typeface="Arial"/>
-              </a:rPr>
-              <a:t>INTERNAL DRAFT — NOT FOR EXTERNAL DISTRIBUTION</a:t>
-            </a:r>
-          </a:p>
-        </p:txBody>
-      </p:sp>
     </p:spTree>
   </p:cSld>
   <p:clrMapOvr>
@@ -6755,48 +6545,6 @@
           </a:p>
         </p:txBody>
       </p:sp>
-      <p:sp>
-        <p:nvSpPr>
-          <p:cNvPr id="16" name="TextBox 15"/>
-          <p:cNvSpPr txBox="1"/>
-          <p:nvPr/>
-        </p:nvSpPr>
-        <p:spPr>
-          <a:xfrm>
-            <a:off x="457200" y="6510528"/>
-            <a:ext cx="8229600" cy="274320"/>
-          </a:xfrm>
-          <a:prstGeom prst="rect">
-            <a:avLst/>
-          </a:prstGeom>
-          <a:noFill/>
-        </p:spPr>
-        <p:txBody>
-          <a:bodyPr wrap="square">
-            <a:spAutoFit/>
-          </a:bodyPr>
-          <a:lstStyle/>
-          <a:p>
-            <a:pPr algn="r">
-              <a:defRPr sz="1200" b="1">
-                <a:solidFill>
-                  <a:srgbClr val="070A40"/>
-                </a:solidFill>
-                <a:latin typeface="Arial"/>
-              </a:defRPr>
-            </a:pPr>
-            <a:r>
-              <a:rPr sz="1200" b="1">
-                <a:solidFill>
-                  <a:srgbClr val="070A40"/>
-                </a:solidFill>
-                <a:latin typeface="Arial"/>
-              </a:rPr>
-              <a:t>INTERNAL DRAFT — NOT FOR EXTERNAL DISTRIBUTION</a:t>
-            </a:r>
-          </a:p>
-        </p:txBody>
-      </p:sp>
     </p:spTree>
   </p:cSld>
   <p:clrMapOvr>
@@ -7255,48 +7003,6 @@
           </a:p>
         </p:txBody>
       </p:sp>
-      <p:sp>
-        <p:nvSpPr>
-          <p:cNvPr id="10" name="TextBox 9"/>
-          <p:cNvSpPr txBox="1"/>
-          <p:nvPr/>
-        </p:nvSpPr>
-        <p:spPr>
-          <a:xfrm>
-            <a:off x="457200" y="6510528"/>
-            <a:ext cx="8229600" cy="274320"/>
-          </a:xfrm>
-          <a:prstGeom prst="rect">
-            <a:avLst/>
-          </a:prstGeom>
-          <a:noFill/>
-        </p:spPr>
-        <p:txBody>
-          <a:bodyPr wrap="square">
-            <a:spAutoFit/>
-          </a:bodyPr>
-          <a:lstStyle/>
-          <a:p>
-            <a:pPr algn="r">
-              <a:defRPr sz="1200" b="1">
-                <a:solidFill>
-                  <a:srgbClr val="070A40"/>
-                </a:solidFill>
-                <a:latin typeface="Arial"/>
-              </a:defRPr>
-            </a:pPr>
-            <a:r>
-              <a:rPr sz="1200" b="1">
-                <a:solidFill>
-                  <a:srgbClr val="070A40"/>
-                </a:solidFill>
-                <a:latin typeface="Arial"/>
-              </a:rPr>
-              <a:t>INTERNAL DRAFT — NOT FOR EXTERNAL DISTRIBUTION</a:t>
-            </a:r>
-          </a:p>
-        </p:txBody>
-      </p:sp>
     </p:spTree>
   </p:cSld>
   <p:clrMapOvr>
@@ -7966,48 +7672,6 @@
           </a:p>
         </p:txBody>
       </p:sp>
-      <p:sp>
-        <p:nvSpPr>
-          <p:cNvPr id="10" name="TextBox 9"/>
-          <p:cNvSpPr txBox="1"/>
-          <p:nvPr/>
-        </p:nvSpPr>
-        <p:spPr>
-          <a:xfrm>
-            <a:off x="457200" y="6510528"/>
-            <a:ext cx="8229600" cy="274320"/>
-          </a:xfrm>
-          <a:prstGeom prst="rect">
-            <a:avLst/>
-          </a:prstGeom>
-          <a:noFill/>
-        </p:spPr>
-        <p:txBody>
-          <a:bodyPr wrap="square">
-            <a:spAutoFit/>
-          </a:bodyPr>
-          <a:lstStyle/>
-          <a:p>
-            <a:pPr algn="r">
-              <a:defRPr sz="1200" b="1">
-                <a:solidFill>
-                  <a:srgbClr val="070A40"/>
-                </a:solidFill>
-                <a:latin typeface="Arial"/>
-              </a:defRPr>
-            </a:pPr>
-            <a:r>
-              <a:rPr sz="1200" b="1">
-                <a:solidFill>
-                  <a:srgbClr val="070A40"/>
-                </a:solidFill>
-                <a:latin typeface="Arial"/>
-              </a:rPr>
-              <a:t>INTERNAL DRAFT — NOT FOR EXTERNAL DISTRIBUTION</a:t>
-            </a:r>
-          </a:p>
-        </p:txBody>
-      </p:sp>
     </p:spTree>
   </p:cSld>
   <p:clrMapOvr>
@@ -8532,48 +8196,6 @@
           </a:p>
         </p:txBody>
       </p:sp>
-      <p:sp>
-        <p:nvSpPr>
-          <p:cNvPr id="10" name="TextBox 9"/>
-          <p:cNvSpPr txBox="1"/>
-          <p:nvPr/>
-        </p:nvSpPr>
-        <p:spPr>
-          <a:xfrm>
-            <a:off x="457200" y="6510528"/>
-            <a:ext cx="8229600" cy="274320"/>
-          </a:xfrm>
-          <a:prstGeom prst="rect">
-            <a:avLst/>
-          </a:prstGeom>
-          <a:noFill/>
-        </p:spPr>
-        <p:txBody>
-          <a:bodyPr wrap="square">
-            <a:spAutoFit/>
-          </a:bodyPr>
-          <a:lstStyle/>
-          <a:p>
-            <a:pPr algn="r">
-              <a:defRPr sz="1200" b="1">
-                <a:solidFill>
-                  <a:srgbClr val="070A40"/>
-                </a:solidFill>
-                <a:latin typeface="Arial"/>
-              </a:defRPr>
-            </a:pPr>
-            <a:r>
-              <a:rPr sz="1200" b="1">
-                <a:solidFill>
-                  <a:srgbClr val="070A40"/>
-                </a:solidFill>
-                <a:latin typeface="Arial"/>
-              </a:rPr>
-              <a:t>INTERNAL DRAFT — NOT FOR EXTERNAL DISTRIBUTION</a:t>
-            </a:r>
-          </a:p>
-        </p:txBody>
-      </p:sp>
     </p:spTree>
   </p:cSld>
   <p:clrMapOvr>
@@ -9120,48 +8742,6 @@
           </a:p>
         </p:txBody>
       </p:sp>
-      <p:sp>
-        <p:nvSpPr>
-          <p:cNvPr id="10" name="TextBox 9"/>
-          <p:cNvSpPr txBox="1"/>
-          <p:nvPr/>
-        </p:nvSpPr>
-        <p:spPr>
-          <a:xfrm>
-            <a:off x="457200" y="6510528"/>
-            <a:ext cx="8229600" cy="274320"/>
-          </a:xfrm>
-          <a:prstGeom prst="rect">
-            <a:avLst/>
-          </a:prstGeom>
-          <a:noFill/>
-        </p:spPr>
-        <p:txBody>
-          <a:bodyPr wrap="square">
-            <a:spAutoFit/>
-          </a:bodyPr>
-          <a:lstStyle/>
-          <a:p>
-            <a:pPr algn="r">
-              <a:defRPr sz="1200" b="1">
-                <a:solidFill>
-                  <a:srgbClr val="070A40"/>
-                </a:solidFill>
-                <a:latin typeface="Arial"/>
-              </a:defRPr>
-            </a:pPr>
-            <a:r>
-              <a:rPr sz="1200" b="1">
-                <a:solidFill>
-                  <a:srgbClr val="070A40"/>
-                </a:solidFill>
-                <a:latin typeface="Arial"/>
-              </a:rPr>
-              <a:t>INTERNAL DRAFT — NOT FOR EXTERNAL DISTRIBUTION</a:t>
-            </a:r>
-          </a:p>
-        </p:txBody>
-      </p:sp>
     </p:spTree>
   </p:cSld>
   <p:clrMapOvr>
@@ -9743,48 +9323,6 @@
                 <a:latin typeface="Arial"/>
               </a:rPr>
               <a:t>The operating model already exists: a five-tier approval matrix, named escalation routes and an audit trail, applied to agents as well as people. The hiring plan adds the human roles that sell and deliver.</a:t>
-            </a:r>
-          </a:p>
-        </p:txBody>
-      </p:sp>
-      <p:sp>
-        <p:nvSpPr>
-          <p:cNvPr id="10" name="TextBox 9"/>
-          <p:cNvSpPr txBox="1"/>
-          <p:nvPr/>
-        </p:nvSpPr>
-        <p:spPr>
-          <a:xfrm>
-            <a:off x="457200" y="6510528"/>
-            <a:ext cx="8229600" cy="274320"/>
-          </a:xfrm>
-          <a:prstGeom prst="rect">
-            <a:avLst/>
-          </a:prstGeom>
-          <a:noFill/>
-        </p:spPr>
-        <p:txBody>
-          <a:bodyPr wrap="square">
-            <a:spAutoFit/>
-          </a:bodyPr>
-          <a:lstStyle/>
-          <a:p>
-            <a:pPr algn="r">
-              <a:defRPr sz="1200" b="1">
-                <a:solidFill>
-                  <a:srgbClr val="070A40"/>
-                </a:solidFill>
-                <a:latin typeface="Arial"/>
-              </a:defRPr>
-            </a:pPr>
-            <a:r>
-              <a:rPr sz="1200" b="1">
-                <a:solidFill>
-                  <a:srgbClr val="070A40"/>
-                </a:solidFill>
-                <a:latin typeface="Arial"/>
-              </a:rPr>
-              <a:t>INTERNAL DRAFT — NOT FOR EXTERNAL DISTRIBUTION</a:t>
             </a:r>
           </a:p>
         </p:txBody>
